--- a/presentation/FCFS Presentation.pptx
+++ b/presentation/FCFS Presentation.pptx
@@ -5,15 +5,15 @@
     <p:sldMasterId id="2147483826" r:id="rId1"/>
   </p:sldMasterIdLst>
   <p:notesMasterIdLst>
-    <p:notesMasterId r:id="rId15"/>
+    <p:notesMasterId r:id="rId20"/>
   </p:notesMasterIdLst>
   <p:sldIdLst>
     <p:sldId id="256" r:id="rId2"/>
     <p:sldId id="265" r:id="rId3"/>
     <p:sldId id="269" r:id="rId4"/>
     <p:sldId id="257" r:id="rId5"/>
-    <p:sldId id="270" r:id="rId6"/>
-    <p:sldId id="271" r:id="rId7"/>
+    <p:sldId id="271" r:id="rId6"/>
+    <p:sldId id="270" r:id="rId7"/>
     <p:sldId id="268" r:id="rId8"/>
     <p:sldId id="260" r:id="rId9"/>
     <p:sldId id="261" r:id="rId10"/>
@@ -21,6 +21,11 @@
     <p:sldId id="266" r:id="rId12"/>
     <p:sldId id="267" r:id="rId13"/>
     <p:sldId id="272" r:id="rId14"/>
+    <p:sldId id="273" r:id="rId15"/>
+    <p:sldId id="274" r:id="rId16"/>
+    <p:sldId id="275" r:id="rId17"/>
+    <p:sldId id="277" r:id="rId18"/>
+    <p:sldId id="276" r:id="rId19"/>
   </p:sldIdLst>
   <p:sldSz cx="12192000" cy="6858000"/>
   <p:notesSz cx="6858000" cy="9144000"/>
@@ -209,7 +214,7 @@
           <a:p>
             <a:fld id="{A3F00E0A-26B8-438F-8C49-C4126C0B2F07}" type="datetimeFigureOut">
               <a:rPr lang="en-CA" smtClean="0"/>
-              <a:t>2026-09-07</a:t>
+              <a:t>2026-09-13</a:t>
             </a:fld>
             <a:endParaRPr lang="en-CA"/>
           </a:p>
@@ -561,6 +566,93 @@
 </p:notes>
 </file>
 
+<file path=ppt/notesSlides/notesSlide10.xml><?xml version="1.0" encoding="utf-8"?>
+<p:notes xmlns:a="http://schemas.openxmlformats.org/drawingml/2006/main" xmlns:r="http://schemas.openxmlformats.org/officeDocument/2006/relationships" xmlns:p="http://schemas.openxmlformats.org/presentationml/2006/main">
+  <p:cSld>
+    <p:spTree>
+      <p:nvGrpSpPr>
+        <p:cNvPr id="1" name=""/>
+        <p:cNvGrpSpPr/>
+        <p:nvPr/>
+      </p:nvGrpSpPr>
+      <p:grpSpPr>
+        <a:xfrm>
+          <a:off x="0" y="0"/>
+          <a:ext cx="0" cy="0"/>
+          <a:chOff x="0" y="0"/>
+          <a:chExt cx="0" cy="0"/>
+        </a:xfrm>
+      </p:grpSpPr>
+      <p:sp>
+        <p:nvSpPr>
+          <p:cNvPr id="2" name="Slide Image Placeholder 1"/>
+          <p:cNvSpPr>
+            <a:spLocks noGrp="1" noRot="1" noChangeAspect="1"/>
+          </p:cNvSpPr>
+          <p:nvPr>
+            <p:ph type="sldImg"/>
+          </p:nvPr>
+        </p:nvSpPr>
+        <p:spPr/>
+      </p:sp>
+      <p:sp>
+        <p:nvSpPr>
+          <p:cNvPr id="3" name="Notes Placeholder 2"/>
+          <p:cNvSpPr>
+            <a:spLocks noGrp="1"/>
+          </p:cNvSpPr>
+          <p:nvPr>
+            <p:ph type="body" idx="1"/>
+          </p:nvPr>
+        </p:nvSpPr>
+        <p:spPr/>
+        <p:txBody>
+          <a:bodyPr/>
+          <a:lstStyle/>
+          <a:p>
+            <a:r>
+              <a:rPr lang="en-CA" dirty="0"/>
+              <a:t>Take out specific values</a:t>
+            </a:r>
+          </a:p>
+        </p:txBody>
+      </p:sp>
+      <p:sp>
+        <p:nvSpPr>
+          <p:cNvPr id="4" name="Slide Number Placeholder 3"/>
+          <p:cNvSpPr>
+            <a:spLocks noGrp="1"/>
+          </p:cNvSpPr>
+          <p:nvPr>
+            <p:ph type="sldNum" sz="quarter" idx="5"/>
+          </p:nvPr>
+        </p:nvSpPr>
+        <p:spPr/>
+        <p:txBody>
+          <a:bodyPr/>
+          <a:lstStyle/>
+          <a:p>
+            <a:fld id="{6C0CC533-38F2-4480-88E0-3DE04AB45AF2}" type="slidenum">
+              <a:rPr lang="en-CA" smtClean="0"/>
+              <a:t>16</a:t>
+            </a:fld>
+            <a:endParaRPr lang="en-CA"/>
+          </a:p>
+        </p:txBody>
+      </p:sp>
+    </p:spTree>
+    <p:extLst>
+      <p:ext uri="{BB962C8B-B14F-4D97-AF65-F5344CB8AC3E}">
+        <p14:creationId xmlns:p14="http://schemas.microsoft.com/office/powerpoint/2010/main" val="1479815181"/>
+      </p:ext>
+    </p:extLst>
+  </p:cSld>
+  <p:clrMapOvr>
+    <a:masterClrMapping/>
+  </p:clrMapOvr>
+</p:notes>
+</file>
+
 <file path=ppt/notesSlides/notesSlide2.xml><?xml version="1.0" encoding="utf-8"?>
 <p:notes xmlns:a="http://schemas.openxmlformats.org/drawingml/2006/main" xmlns:r="http://schemas.openxmlformats.org/officeDocument/2006/relationships" xmlns:p="http://schemas.openxmlformats.org/presentationml/2006/main">
   <p:cSld>
@@ -710,7 +802,7 @@
           <a:p>
             <a:fld id="{6C0CC533-38F2-4480-88E0-3DE04AB45AF2}" type="slidenum">
               <a:rPr lang="en-CA" smtClean="0"/>
-              <a:t>5</a:t>
+              <a:t>6</a:t>
             </a:fld>
             <a:endParaRPr lang="en-CA"/>
           </a:p>
@@ -858,9 +950,10 @@
           <a:lstStyle/>
           <a:p>
             <a:r>
-              <a:rPr lang="en-CA" dirty="0"/>
-              <a:t>Class 1 is the delay sensitive class, difference in served rate between class 1 and class 2 – on y axis</a:t>
-            </a:r>
+              <a:rPr lang="en-CA"/>
+              <a:t>6 figures, served rate on y, class 1 and class 2 served rates on the figures</a:t>
+            </a:r>
+            <a:endParaRPr lang="en-CA" dirty="0"/>
           </a:p>
         </p:txBody>
       </p:sp>
@@ -1059,6 +1152,180 @@
     <p:extLst>
       <p:ext uri="{BB962C8B-B14F-4D97-AF65-F5344CB8AC3E}">
         <p14:creationId xmlns:p14="http://schemas.microsoft.com/office/powerpoint/2010/main" val="2102681076"/>
+      </p:ext>
+    </p:extLst>
+  </p:cSld>
+  <p:clrMapOvr>
+    <a:masterClrMapping/>
+  </p:clrMapOvr>
+</p:notes>
+</file>
+
+<file path=ppt/notesSlides/notesSlide8.xml><?xml version="1.0" encoding="utf-8"?>
+<p:notes xmlns:a="http://schemas.openxmlformats.org/drawingml/2006/main" xmlns:r="http://schemas.openxmlformats.org/officeDocument/2006/relationships" xmlns:p="http://schemas.openxmlformats.org/presentationml/2006/main">
+  <p:cSld>
+    <p:spTree>
+      <p:nvGrpSpPr>
+        <p:cNvPr id="1" name=""/>
+        <p:cNvGrpSpPr/>
+        <p:nvPr/>
+      </p:nvGrpSpPr>
+      <p:grpSpPr>
+        <a:xfrm>
+          <a:off x="0" y="0"/>
+          <a:ext cx="0" cy="0"/>
+          <a:chOff x="0" y="0"/>
+          <a:chExt cx="0" cy="0"/>
+        </a:xfrm>
+      </p:grpSpPr>
+      <p:sp>
+        <p:nvSpPr>
+          <p:cNvPr id="2" name="Slide Image Placeholder 1"/>
+          <p:cNvSpPr>
+            <a:spLocks noGrp="1" noRot="1" noChangeAspect="1"/>
+          </p:cNvSpPr>
+          <p:nvPr>
+            <p:ph type="sldImg"/>
+          </p:nvPr>
+        </p:nvSpPr>
+        <p:spPr/>
+      </p:sp>
+      <p:sp>
+        <p:nvSpPr>
+          <p:cNvPr id="3" name="Notes Placeholder 2"/>
+          <p:cNvSpPr>
+            <a:spLocks noGrp="1"/>
+          </p:cNvSpPr>
+          <p:nvPr>
+            <p:ph type="body" idx="1"/>
+          </p:nvPr>
+        </p:nvSpPr>
+        <p:spPr/>
+        <p:txBody>
+          <a:bodyPr/>
+          <a:lstStyle/>
+          <a:p>
+            <a:r>
+              <a:rPr lang="en-CA" dirty="0"/>
+              <a:t>Switch 1 and 2</a:t>
+            </a:r>
+          </a:p>
+        </p:txBody>
+      </p:sp>
+      <p:sp>
+        <p:nvSpPr>
+          <p:cNvPr id="4" name="Slide Number Placeholder 3"/>
+          <p:cNvSpPr>
+            <a:spLocks noGrp="1"/>
+          </p:cNvSpPr>
+          <p:nvPr>
+            <p:ph type="sldNum" sz="quarter" idx="5"/>
+          </p:nvPr>
+        </p:nvSpPr>
+        <p:spPr/>
+        <p:txBody>
+          <a:bodyPr/>
+          <a:lstStyle/>
+          <a:p>
+            <a:fld id="{6C0CC533-38F2-4480-88E0-3DE04AB45AF2}" type="slidenum">
+              <a:rPr lang="en-CA" smtClean="0"/>
+              <a:t>13</a:t>
+            </a:fld>
+            <a:endParaRPr lang="en-CA"/>
+          </a:p>
+        </p:txBody>
+      </p:sp>
+    </p:spTree>
+    <p:extLst>
+      <p:ext uri="{BB962C8B-B14F-4D97-AF65-F5344CB8AC3E}">
+        <p14:creationId xmlns:p14="http://schemas.microsoft.com/office/powerpoint/2010/main" val="92277621"/>
+      </p:ext>
+    </p:extLst>
+  </p:cSld>
+  <p:clrMapOvr>
+    <a:masterClrMapping/>
+  </p:clrMapOvr>
+</p:notes>
+</file>
+
+<file path=ppt/notesSlides/notesSlide9.xml><?xml version="1.0" encoding="utf-8"?>
+<p:notes xmlns:a="http://schemas.openxmlformats.org/drawingml/2006/main" xmlns:r="http://schemas.openxmlformats.org/officeDocument/2006/relationships" xmlns:p="http://schemas.openxmlformats.org/presentationml/2006/main">
+  <p:cSld>
+    <p:spTree>
+      <p:nvGrpSpPr>
+        <p:cNvPr id="1" name=""/>
+        <p:cNvGrpSpPr/>
+        <p:nvPr/>
+      </p:nvGrpSpPr>
+      <p:grpSpPr>
+        <a:xfrm>
+          <a:off x="0" y="0"/>
+          <a:ext cx="0" cy="0"/>
+          <a:chOff x="0" y="0"/>
+          <a:chExt cx="0" cy="0"/>
+        </a:xfrm>
+      </p:grpSpPr>
+      <p:sp>
+        <p:nvSpPr>
+          <p:cNvPr id="2" name="Slide Image Placeholder 1"/>
+          <p:cNvSpPr>
+            <a:spLocks noGrp="1" noRot="1" noChangeAspect="1"/>
+          </p:cNvSpPr>
+          <p:nvPr>
+            <p:ph type="sldImg"/>
+          </p:nvPr>
+        </p:nvSpPr>
+        <p:spPr/>
+      </p:sp>
+      <p:sp>
+        <p:nvSpPr>
+          <p:cNvPr id="3" name="Notes Placeholder 2"/>
+          <p:cNvSpPr>
+            <a:spLocks noGrp="1"/>
+          </p:cNvSpPr>
+          <p:nvPr>
+            <p:ph type="body" idx="1"/>
+          </p:nvPr>
+        </p:nvSpPr>
+        <p:spPr/>
+        <p:txBody>
+          <a:bodyPr/>
+          <a:lstStyle/>
+          <a:p>
+            <a:r>
+              <a:rPr lang="en-CA" dirty="0"/>
+              <a:t>Served rate optimization?, change to magnitude for x axis</a:t>
+            </a:r>
+          </a:p>
+        </p:txBody>
+      </p:sp>
+      <p:sp>
+        <p:nvSpPr>
+          <p:cNvPr id="4" name="Slide Number Placeholder 3"/>
+          <p:cNvSpPr>
+            <a:spLocks noGrp="1"/>
+          </p:cNvSpPr>
+          <p:nvPr>
+            <p:ph type="sldNum" sz="quarter" idx="5"/>
+          </p:nvPr>
+        </p:nvSpPr>
+        <p:spPr/>
+        <p:txBody>
+          <a:bodyPr/>
+          <a:lstStyle/>
+          <a:p>
+            <a:fld id="{6C0CC533-38F2-4480-88E0-3DE04AB45AF2}" type="slidenum">
+              <a:rPr lang="en-CA" smtClean="0"/>
+              <a:t>15</a:t>
+            </a:fld>
+            <a:endParaRPr lang="en-CA"/>
+          </a:p>
+        </p:txBody>
+      </p:sp>
+    </p:spTree>
+    <p:extLst>
+      <p:ext uri="{BB962C8B-B14F-4D97-AF65-F5344CB8AC3E}">
+        <p14:creationId xmlns:p14="http://schemas.microsoft.com/office/powerpoint/2010/main" val="986733767"/>
       </p:ext>
     </p:extLst>
   </p:cSld>
@@ -1199,7 +1466,7 @@
           <a:p>
             <a:fld id="{7559F276-CA16-4B7F-AC4C-2EDD18BC89A1}" type="datetimeFigureOut">
               <a:rPr lang="en-CA" smtClean="0"/>
-              <a:t>2026-09-07</a:t>
+              <a:t>2026-09-13</a:t>
             </a:fld>
             <a:endParaRPr lang="en-CA"/>
           </a:p>
@@ -1369,7 +1636,7 @@
           <a:p>
             <a:fld id="{7559F276-CA16-4B7F-AC4C-2EDD18BC89A1}" type="datetimeFigureOut">
               <a:rPr lang="en-CA" smtClean="0"/>
-              <a:t>2026-09-07</a:t>
+              <a:t>2026-09-13</a:t>
             </a:fld>
             <a:endParaRPr lang="en-CA"/>
           </a:p>
@@ -1549,7 +1816,7 @@
           <a:p>
             <a:fld id="{7559F276-CA16-4B7F-AC4C-2EDD18BC89A1}" type="datetimeFigureOut">
               <a:rPr lang="en-CA" smtClean="0"/>
-              <a:t>2026-09-07</a:t>
+              <a:t>2026-09-13</a:t>
             </a:fld>
             <a:endParaRPr lang="en-CA"/>
           </a:p>
@@ -1719,7 +1986,7 @@
           <a:p>
             <a:fld id="{7559F276-CA16-4B7F-AC4C-2EDD18BC89A1}" type="datetimeFigureOut">
               <a:rPr lang="en-CA" smtClean="0"/>
-              <a:t>2026-09-07</a:t>
+              <a:t>2026-09-13</a:t>
             </a:fld>
             <a:endParaRPr lang="en-CA"/>
           </a:p>
@@ -1965,7 +2232,7 @@
           <a:p>
             <a:fld id="{7559F276-CA16-4B7F-AC4C-2EDD18BC89A1}" type="datetimeFigureOut">
               <a:rPr lang="en-CA" smtClean="0"/>
-              <a:t>2026-09-07</a:t>
+              <a:t>2026-09-13</a:t>
             </a:fld>
             <a:endParaRPr lang="en-CA"/>
           </a:p>
@@ -2197,7 +2464,7 @@
           <a:p>
             <a:fld id="{7559F276-CA16-4B7F-AC4C-2EDD18BC89A1}" type="datetimeFigureOut">
               <a:rPr lang="en-CA" smtClean="0"/>
-              <a:t>2026-09-07</a:t>
+              <a:t>2026-09-13</a:t>
             </a:fld>
             <a:endParaRPr lang="en-CA"/>
           </a:p>
@@ -2564,7 +2831,7 @@
           <a:p>
             <a:fld id="{7559F276-CA16-4B7F-AC4C-2EDD18BC89A1}" type="datetimeFigureOut">
               <a:rPr lang="en-CA" smtClean="0"/>
-              <a:t>2026-09-07</a:t>
+              <a:t>2026-09-13</a:t>
             </a:fld>
             <a:endParaRPr lang="en-CA"/>
           </a:p>
@@ -2682,7 +2949,7 @@
           <a:p>
             <a:fld id="{7559F276-CA16-4B7F-AC4C-2EDD18BC89A1}" type="datetimeFigureOut">
               <a:rPr lang="en-CA" smtClean="0"/>
-              <a:t>2026-09-07</a:t>
+              <a:t>2026-09-13</a:t>
             </a:fld>
             <a:endParaRPr lang="en-CA"/>
           </a:p>
@@ -2777,7 +3044,7 @@
           <a:p>
             <a:fld id="{7559F276-CA16-4B7F-AC4C-2EDD18BC89A1}" type="datetimeFigureOut">
               <a:rPr lang="en-CA" smtClean="0"/>
-              <a:t>2026-09-07</a:t>
+              <a:t>2026-09-13</a:t>
             </a:fld>
             <a:endParaRPr lang="en-CA"/>
           </a:p>
@@ -3054,7 +3321,7 @@
           <a:p>
             <a:fld id="{7559F276-CA16-4B7F-AC4C-2EDD18BC89A1}" type="datetimeFigureOut">
               <a:rPr lang="en-CA" smtClean="0"/>
-              <a:t>2026-09-07</a:t>
+              <a:t>2026-09-13</a:t>
             </a:fld>
             <a:endParaRPr lang="en-CA"/>
           </a:p>
@@ -3311,7 +3578,7 @@
           <a:p>
             <a:fld id="{7559F276-CA16-4B7F-AC4C-2EDD18BC89A1}" type="datetimeFigureOut">
               <a:rPr lang="en-CA" smtClean="0"/>
-              <a:t>2026-09-07</a:t>
+              <a:t>2026-09-13</a:t>
             </a:fld>
             <a:endParaRPr lang="en-CA"/>
           </a:p>
@@ -3524,7 +3791,7 @@
           <a:p>
             <a:fld id="{7559F276-CA16-4B7F-AC4C-2EDD18BC89A1}" type="datetimeFigureOut">
               <a:rPr lang="en-CA" smtClean="0"/>
-              <a:t>2026-09-07</a:t>
+              <a:t>2026-09-13</a:t>
             </a:fld>
             <a:endParaRPr lang="en-CA"/>
           </a:p>
@@ -4095,34 +4362,6 @@
           </a:p>
         </p:txBody>
       </p:sp>
-      <p:pic>
-        <p:nvPicPr>
-          <p:cNvPr id="4" name="Content Placeholder 8">
-            <a:extLst>
-              <a:ext uri="{FF2B5EF4-FFF2-40B4-BE49-F238E27FC236}">
-                <a16:creationId xmlns:a16="http://schemas.microsoft.com/office/drawing/2014/main" id="{A6C18586-3ECC-41E4-925E-079E425422DA}"/>
-              </a:ext>
-            </a:extLst>
-          </p:cNvPr>
-          <p:cNvPicPr>
-            <a:picLocks noGrp="1" noChangeAspect="1"/>
-          </p:cNvPicPr>
-          <p:nvPr>
-            <p:ph idx="1"/>
-          </p:nvPr>
-        </p:nvPicPr>
-        <p:blipFill rotWithShape="1">
-          <a:blip r:embed="rId3"/>
-          <a:srcRect l="894"/>
-          <a:stretch/>
-        </p:blipFill>
-        <p:spPr>
-          <a:xfrm>
-            <a:off x="439400" y="1600200"/>
-            <a:ext cx="5562009" cy="3532504"/>
-          </a:xfrm>
-        </p:spPr>
-      </p:pic>
       <p:sp>
         <p:nvSpPr>
           <p:cNvPr id="5" name="Content Placeholder 11">
@@ -4330,10 +4569,45 @@
       </p:sp>
       <p:pic>
         <p:nvPicPr>
-          <p:cNvPr id="6" name="Content Placeholder 4">
+          <p:cNvPr id="9" name="Content Placeholder 8">
             <a:extLst>
               <a:ext uri="{FF2B5EF4-FFF2-40B4-BE49-F238E27FC236}">
-                <a16:creationId xmlns:a16="http://schemas.microsoft.com/office/drawing/2014/main" id="{40932703-1B5B-4BE8-BB30-66B2474230B0}"/>
+                <a16:creationId xmlns:a16="http://schemas.microsoft.com/office/drawing/2014/main" id="{7F751082-0A6E-4A93-89BF-226CD1AFA881}"/>
+              </a:ext>
+            </a:extLst>
+          </p:cNvPr>
+          <p:cNvPicPr>
+            <a:picLocks noGrp="1" noChangeAspect="1"/>
+          </p:cNvPicPr>
+          <p:nvPr>
+            <p:ph idx="1"/>
+          </p:nvPr>
+        </p:nvPicPr>
+        <p:blipFill>
+          <a:blip r:embed="rId3">
+            <a:extLst>
+              <a:ext uri="{28A0092B-C50C-407E-A947-70E740481C1C}">
+                <a14:useLocalDpi xmlns:a14="http://schemas.microsoft.com/office/drawing/2010/main" val="0"/>
+              </a:ext>
+            </a:extLst>
+          </a:blip>
+          <a:stretch>
+            <a:fillRect/>
+          </a:stretch>
+        </p:blipFill>
+        <p:spPr>
+          <a:xfrm>
+            <a:off x="354815" y="1611044"/>
+            <a:ext cx="5741185" cy="3618315"/>
+          </a:xfrm>
+        </p:spPr>
+      </p:pic>
+      <p:pic>
+        <p:nvPicPr>
+          <p:cNvPr id="11" name="Picture 10">
+            <a:extLst>
+              <a:ext uri="{FF2B5EF4-FFF2-40B4-BE49-F238E27FC236}">
+                <a16:creationId xmlns:a16="http://schemas.microsoft.com/office/drawing/2014/main" id="{C3AB64E3-04CF-4B8C-98CD-B346944CF797}"/>
               </a:ext>
             </a:extLst>
           </p:cNvPr>
@@ -4343,15 +4617,21 @@
           <p:nvPr/>
         </p:nvPicPr>
         <p:blipFill>
-          <a:blip r:embed="rId4"/>
+          <a:blip r:embed="rId4">
+            <a:extLst>
+              <a:ext uri="{28A0092B-C50C-407E-A947-70E740481C1C}">
+                <a14:useLocalDpi xmlns:a14="http://schemas.microsoft.com/office/drawing/2010/main" val="0"/>
+              </a:ext>
+            </a:extLst>
+          </a:blip>
           <a:stretch>
             <a:fillRect/>
           </a:stretch>
         </p:blipFill>
         <p:spPr>
           <a:xfrm>
-            <a:off x="6133180" y="1600200"/>
-            <a:ext cx="5567408" cy="3532504"/>
+            <a:off x="6187887" y="1602246"/>
+            <a:ext cx="5741186" cy="3618316"/>
           </a:xfrm>
           <a:prstGeom prst="rect">
             <a:avLst/>
@@ -4813,51 +5093,72 @@
         </p:nvSpPr>
         <p:spPr/>
         <p:txBody>
-          <a:bodyPr/>
+          <a:bodyPr>
+            <a:normAutofit/>
+          </a:bodyPr>
           <a:lstStyle/>
           <a:p>
             <a:pPr marL="514350" indent="-514350">
               <a:buAutoNum type="arabicPeriod"/>
             </a:pPr>
             <a:r>
-              <a:rPr lang="en-CA" dirty="0"/>
+              <a:rPr lang="en-CA" sz="3200" dirty="0"/>
               <a:t>Reservation</a:t>
             </a:r>
           </a:p>
           <a:p>
             <a:pPr lvl="1"/>
             <a:r>
-              <a:rPr lang="en-CA" dirty="0"/>
+              <a:rPr lang="en-CA" sz="2800" dirty="0"/>
               <a:t>Allowing one class to have priority for certain appointments.</a:t>
             </a:r>
           </a:p>
           <a:p>
             <a:pPr lvl="1"/>
             <a:r>
-              <a:rPr lang="en-CA" dirty="0"/>
-              <a:t>This policy chooses both reserved slots per day and reservation horizon.</a:t>
-            </a:r>
-          </a:p>
-          <a:p>
-            <a:pPr marL="514350" indent="-514350">
+              <a:rPr lang="en-CA" sz="2800" dirty="0"/>
+              <a:t>This policy chooses both reserved slots per day and overall number of days that slots are reserved.</a:t>
+            </a:r>
+          </a:p>
+          <a:p>
+            <a:pPr marL="342900" indent="-342900">
+              <a:buFont typeface="+mj-lt"/>
               <a:buAutoNum type="arabicPeriod"/>
             </a:pPr>
-            <a:endParaRPr lang="en-CA" dirty="0"/>
-          </a:p>
-          <a:p>
-            <a:pPr marL="0" indent="0">
-              <a:buNone/>
+            <a:endParaRPr lang="en-CA" sz="1600" dirty="0"/>
+          </a:p>
+          <a:p>
+            <a:pPr marL="514350" indent="-514350">
+              <a:buFont typeface="+mj-lt"/>
+              <a:buAutoNum type="arabicPeriod"/>
             </a:pPr>
             <a:r>
-              <a:rPr lang="en-CA" dirty="0"/>
-              <a:t>2. Booking horizon</a:t>
+              <a:rPr lang="en-CA" sz="3200" dirty="0"/>
+              <a:t>Booking horizon   </a:t>
             </a:r>
           </a:p>
           <a:p>
             <a:pPr lvl="1"/>
             <a:r>
-              <a:rPr lang="en-CA" dirty="0"/>
-              <a:t>Adjusting how early an appointment booking is allowed.</a:t>
+              <a:rPr lang="en-CA" sz="2800" dirty="0"/>
+              <a:t>The horizon which bookings are restricted to</a:t>
+            </a:r>
+          </a:p>
+          <a:p>
+            <a:pPr marL="971550" lvl="1" indent="-514350">
+              <a:buFont typeface="+mj-lt"/>
+              <a:buAutoNum type="arabicPeriod"/>
+            </a:pPr>
+            <a:endParaRPr lang="en-CA" sz="2800" dirty="0"/>
+          </a:p>
+          <a:p>
+            <a:pPr marL="514350" indent="-514350">
+              <a:buFont typeface="+mj-lt"/>
+              <a:buAutoNum type="arabicPeriod"/>
+            </a:pPr>
+            <a:r>
+              <a:rPr lang="en-CA" sz="3200" dirty="0"/>
+              <a:t>Combination of reservation and booking horizon</a:t>
             </a:r>
           </a:p>
         </p:txBody>
@@ -4909,6 +5210,467 @@
     <p:extLst>
       <p:ext uri="{BB962C8B-B14F-4D97-AF65-F5344CB8AC3E}">
         <p14:creationId xmlns:p14="http://schemas.microsoft.com/office/powerpoint/2010/main" val="4244925151"/>
+      </p:ext>
+    </p:extLst>
+  </p:cSld>
+  <p:clrMapOvr>
+    <a:masterClrMapping/>
+  </p:clrMapOvr>
+</p:sld>
+</file>
+
+<file path=ppt/slides/slide14.xml><?xml version="1.0" encoding="utf-8"?>
+<p:sld xmlns:a="http://schemas.openxmlformats.org/drawingml/2006/main" xmlns:r="http://schemas.openxmlformats.org/officeDocument/2006/relationships" xmlns:p="http://schemas.openxmlformats.org/presentationml/2006/main">
+  <p:cSld>
+    <p:spTree>
+      <p:nvGrpSpPr>
+        <p:cNvPr id="1" name=""/>
+        <p:cNvGrpSpPr/>
+        <p:nvPr/>
+      </p:nvGrpSpPr>
+      <p:grpSpPr>
+        <a:xfrm>
+          <a:off x="0" y="0"/>
+          <a:ext cx="0" cy="0"/>
+          <a:chOff x="0" y="0"/>
+          <a:chExt cx="0" cy="0"/>
+        </a:xfrm>
+      </p:grpSpPr>
+      <p:sp>
+        <p:nvSpPr>
+          <p:cNvPr id="2" name="Title 1">
+            <a:extLst>
+              <a:ext uri="{FF2B5EF4-FFF2-40B4-BE49-F238E27FC236}">
+                <a16:creationId xmlns:a16="http://schemas.microsoft.com/office/drawing/2014/main" id="{67F5C4C4-80CF-4F67-9AFC-77396B476FB2}"/>
+              </a:ext>
+            </a:extLst>
+          </p:cNvPr>
+          <p:cNvSpPr>
+            <a:spLocks noGrp="1"/>
+          </p:cNvSpPr>
+          <p:nvPr>
+            <p:ph type="title"/>
+          </p:nvPr>
+        </p:nvSpPr>
+        <p:spPr/>
+        <p:txBody>
+          <a:bodyPr/>
+          <a:lstStyle/>
+          <a:p>
+            <a:r>
+              <a:rPr lang="en-CA" dirty="0"/>
+              <a:t>Explaining the 3x3 design</a:t>
+            </a:r>
+          </a:p>
+        </p:txBody>
+      </p:sp>
+      <p:pic>
+        <p:nvPicPr>
+          <p:cNvPr id="5" name="Picture 4">
+            <a:extLst>
+              <a:ext uri="{FF2B5EF4-FFF2-40B4-BE49-F238E27FC236}">
+                <a16:creationId xmlns:a16="http://schemas.microsoft.com/office/drawing/2014/main" id="{A9D7B691-E95A-45B5-AF53-DC56DE6D79C3}"/>
+              </a:ext>
+            </a:extLst>
+          </p:cNvPr>
+          <p:cNvPicPr>
+            <a:picLocks noChangeAspect="1"/>
+          </p:cNvPicPr>
+          <p:nvPr/>
+        </p:nvPicPr>
+        <p:blipFill>
+          <a:blip r:embed="rId2"/>
+          <a:stretch>
+            <a:fillRect/>
+          </a:stretch>
+        </p:blipFill>
+        <p:spPr>
+          <a:xfrm>
+            <a:off x="2601117" y="1690688"/>
+            <a:ext cx="6687262" cy="4267980"/>
+          </a:xfrm>
+          <a:prstGeom prst="rect">
+            <a:avLst/>
+          </a:prstGeom>
+        </p:spPr>
+      </p:pic>
+    </p:spTree>
+    <p:extLst>
+      <p:ext uri="{BB962C8B-B14F-4D97-AF65-F5344CB8AC3E}">
+        <p14:creationId xmlns:p14="http://schemas.microsoft.com/office/powerpoint/2010/main" val="2858968893"/>
+      </p:ext>
+    </p:extLst>
+  </p:cSld>
+  <p:clrMapOvr>
+    <a:masterClrMapping/>
+  </p:clrMapOvr>
+</p:sld>
+</file>
+
+<file path=ppt/slides/slide15.xml><?xml version="1.0" encoding="utf-8"?>
+<p:sld xmlns:a="http://schemas.openxmlformats.org/drawingml/2006/main" xmlns:r="http://schemas.openxmlformats.org/officeDocument/2006/relationships" xmlns:p="http://schemas.openxmlformats.org/presentationml/2006/main">
+  <p:cSld>
+    <p:spTree>
+      <p:nvGrpSpPr>
+        <p:cNvPr id="1" name=""/>
+        <p:cNvGrpSpPr/>
+        <p:nvPr/>
+      </p:nvGrpSpPr>
+      <p:grpSpPr>
+        <a:xfrm>
+          <a:off x="0" y="0"/>
+          <a:ext cx="0" cy="0"/>
+          <a:chOff x="0" y="0"/>
+          <a:chExt cx="0" cy="0"/>
+        </a:xfrm>
+      </p:grpSpPr>
+      <p:sp>
+        <p:nvSpPr>
+          <p:cNvPr id="2" name="Title 1">
+            <a:extLst>
+              <a:ext uri="{FF2B5EF4-FFF2-40B4-BE49-F238E27FC236}">
+                <a16:creationId xmlns:a16="http://schemas.microsoft.com/office/drawing/2014/main" id="{EE19DA39-0AD6-4C52-825B-8541719E5064}"/>
+              </a:ext>
+            </a:extLst>
+          </p:cNvPr>
+          <p:cNvSpPr>
+            <a:spLocks noGrp="1"/>
+          </p:cNvSpPr>
+          <p:nvPr>
+            <p:ph type="title"/>
+          </p:nvPr>
+        </p:nvSpPr>
+        <p:spPr>
+          <a:xfrm>
+            <a:off x="419100" y="500062"/>
+            <a:ext cx="11353800" cy="1325563"/>
+          </a:xfrm>
+        </p:spPr>
+        <p:txBody>
+          <a:bodyPr/>
+          <a:lstStyle/>
+          <a:p>
+            <a:r>
+              <a:rPr lang="en-CA" dirty="0"/>
+              <a:t>No-show magnitude determines the effectiveness of policies on utilization</a:t>
+            </a:r>
+          </a:p>
+        </p:txBody>
+      </p:sp>
+      <p:pic>
+        <p:nvPicPr>
+          <p:cNvPr id="5" name="Picture 4">
+            <a:extLst>
+              <a:ext uri="{FF2B5EF4-FFF2-40B4-BE49-F238E27FC236}">
+                <a16:creationId xmlns:a16="http://schemas.microsoft.com/office/drawing/2014/main" id="{9A667C87-7E73-4639-A614-B8EC62549C5D}"/>
+              </a:ext>
+            </a:extLst>
+          </p:cNvPr>
+          <p:cNvPicPr>
+            <a:picLocks noChangeAspect="1"/>
+          </p:cNvPicPr>
+          <p:nvPr/>
+        </p:nvPicPr>
+        <p:blipFill rotWithShape="1">
+          <a:blip r:embed="rId3"/>
+          <a:srcRect t="1035"/>
+          <a:stretch/>
+        </p:blipFill>
+        <p:spPr>
+          <a:xfrm>
+            <a:off x="2374231" y="2122268"/>
+            <a:ext cx="6833937" cy="4235670"/>
+          </a:xfrm>
+          <a:prstGeom prst="rect">
+            <a:avLst/>
+          </a:prstGeom>
+        </p:spPr>
+      </p:pic>
+    </p:spTree>
+    <p:extLst>
+      <p:ext uri="{BB962C8B-B14F-4D97-AF65-F5344CB8AC3E}">
+        <p14:creationId xmlns:p14="http://schemas.microsoft.com/office/powerpoint/2010/main" val="3873336915"/>
+      </p:ext>
+    </p:extLst>
+  </p:cSld>
+  <p:clrMapOvr>
+    <a:masterClrMapping/>
+  </p:clrMapOvr>
+</p:sld>
+</file>
+
+<file path=ppt/slides/slide16.xml><?xml version="1.0" encoding="utf-8"?>
+<p:sld xmlns:a="http://schemas.openxmlformats.org/drawingml/2006/main" xmlns:r="http://schemas.openxmlformats.org/officeDocument/2006/relationships" xmlns:p="http://schemas.openxmlformats.org/presentationml/2006/main">
+  <p:cSld>
+    <p:spTree>
+      <p:nvGrpSpPr>
+        <p:cNvPr id="1" name=""/>
+        <p:cNvGrpSpPr/>
+        <p:nvPr/>
+      </p:nvGrpSpPr>
+      <p:grpSpPr>
+        <a:xfrm>
+          <a:off x="0" y="0"/>
+          <a:ext cx="0" cy="0"/>
+          <a:chOff x="0" y="0"/>
+          <a:chExt cx="0" cy="0"/>
+        </a:xfrm>
+      </p:grpSpPr>
+      <p:sp>
+        <p:nvSpPr>
+          <p:cNvPr id="2" name="Title 1">
+            <a:extLst>
+              <a:ext uri="{FF2B5EF4-FFF2-40B4-BE49-F238E27FC236}">
+                <a16:creationId xmlns:a16="http://schemas.microsoft.com/office/drawing/2014/main" id="{F416DC7E-97AD-43A4-A8F4-9BE488FA1053}"/>
+              </a:ext>
+            </a:extLst>
+          </p:cNvPr>
+          <p:cNvSpPr>
+            <a:spLocks noGrp="1"/>
+          </p:cNvSpPr>
+          <p:nvPr>
+            <p:ph type="title"/>
+          </p:nvPr>
+        </p:nvSpPr>
+        <p:spPr/>
+        <p:txBody>
+          <a:bodyPr/>
+          <a:lstStyle/>
+          <a:p>
+            <a:r>
+              <a:rPr lang="en-CA" dirty="0"/>
+              <a:t>Demand activates the no-show effect on utilization</a:t>
+            </a:r>
+          </a:p>
+        </p:txBody>
+      </p:sp>
+      <p:pic>
+        <p:nvPicPr>
+          <p:cNvPr id="5" name="Picture 4">
+            <a:extLst>
+              <a:ext uri="{FF2B5EF4-FFF2-40B4-BE49-F238E27FC236}">
+                <a16:creationId xmlns:a16="http://schemas.microsoft.com/office/drawing/2014/main" id="{059C0EAC-019C-4963-85BB-2E314EB0E167}"/>
+              </a:ext>
+            </a:extLst>
+          </p:cNvPr>
+          <p:cNvPicPr>
+            <a:picLocks noChangeAspect="1"/>
+          </p:cNvPicPr>
+          <p:nvPr/>
+        </p:nvPicPr>
+        <p:blipFill>
+          <a:blip r:embed="rId3"/>
+          <a:stretch>
+            <a:fillRect/>
+          </a:stretch>
+        </p:blipFill>
+        <p:spPr>
+          <a:xfrm>
+            <a:off x="2128530" y="1690688"/>
+            <a:ext cx="7304227" cy="4629795"/>
+          </a:xfrm>
+          <a:prstGeom prst="rect">
+            <a:avLst/>
+          </a:prstGeom>
+        </p:spPr>
+      </p:pic>
+    </p:spTree>
+    <p:extLst>
+      <p:ext uri="{BB962C8B-B14F-4D97-AF65-F5344CB8AC3E}">
+        <p14:creationId xmlns:p14="http://schemas.microsoft.com/office/powerpoint/2010/main" val="1479030415"/>
+      </p:ext>
+    </p:extLst>
+  </p:cSld>
+  <p:clrMapOvr>
+    <a:masterClrMapping/>
+  </p:clrMapOvr>
+</p:sld>
+</file>
+
+<file path=ppt/slides/slide17.xml><?xml version="1.0" encoding="utf-8"?>
+<p:sld xmlns:a="http://schemas.openxmlformats.org/drawingml/2006/main" xmlns:r="http://schemas.openxmlformats.org/officeDocument/2006/relationships" xmlns:p="http://schemas.openxmlformats.org/presentationml/2006/main">
+  <p:cSld>
+    <p:spTree>
+      <p:nvGrpSpPr>
+        <p:cNvPr id="1" name=""/>
+        <p:cNvGrpSpPr/>
+        <p:nvPr/>
+      </p:nvGrpSpPr>
+      <p:grpSpPr>
+        <a:xfrm>
+          <a:off x="0" y="0"/>
+          <a:ext cx="0" cy="0"/>
+          <a:chOff x="0" y="0"/>
+          <a:chExt cx="0" cy="0"/>
+        </a:xfrm>
+      </p:grpSpPr>
+      <p:sp>
+        <p:nvSpPr>
+          <p:cNvPr id="2" name="Title 1">
+            <a:extLst>
+              <a:ext uri="{FF2B5EF4-FFF2-40B4-BE49-F238E27FC236}">
+                <a16:creationId xmlns:a16="http://schemas.microsoft.com/office/drawing/2014/main" id="{0D045B51-3913-420F-8417-28692C8ED825}"/>
+              </a:ext>
+            </a:extLst>
+          </p:cNvPr>
+          <p:cNvSpPr>
+            <a:spLocks noGrp="1"/>
+          </p:cNvSpPr>
+          <p:nvPr>
+            <p:ph type="title"/>
+          </p:nvPr>
+        </p:nvSpPr>
+        <p:spPr/>
+        <p:txBody>
+          <a:bodyPr/>
+          <a:lstStyle/>
+          <a:p>
+            <a:r>
+              <a:rPr lang="en-CA" dirty="0"/>
+              <a:t>When optimizing utilization, horizon is usually cut short to prevent no-shows</a:t>
+            </a:r>
+          </a:p>
+        </p:txBody>
+      </p:sp>
+      <p:sp>
+        <p:nvSpPr>
+          <p:cNvPr id="3" name="Content Placeholder 2">
+            <a:extLst>
+              <a:ext uri="{FF2B5EF4-FFF2-40B4-BE49-F238E27FC236}">
+                <a16:creationId xmlns:a16="http://schemas.microsoft.com/office/drawing/2014/main" id="{E2DC23E4-8017-42D1-A28D-879146B6160B}"/>
+              </a:ext>
+            </a:extLst>
+          </p:cNvPr>
+          <p:cNvSpPr>
+            <a:spLocks noGrp="1"/>
+          </p:cNvSpPr>
+          <p:nvPr>
+            <p:ph idx="1"/>
+          </p:nvPr>
+        </p:nvSpPr>
+        <p:spPr/>
+        <p:txBody>
+          <a:bodyPr/>
+          <a:lstStyle/>
+          <a:p>
+            <a:endParaRPr lang="en-CA"/>
+          </a:p>
+        </p:txBody>
+      </p:sp>
+    </p:spTree>
+    <p:extLst>
+      <p:ext uri="{BB962C8B-B14F-4D97-AF65-F5344CB8AC3E}">
+        <p14:creationId xmlns:p14="http://schemas.microsoft.com/office/powerpoint/2010/main" val="2328307014"/>
+      </p:ext>
+    </p:extLst>
+  </p:cSld>
+  <p:clrMapOvr>
+    <a:masterClrMapping/>
+  </p:clrMapOvr>
+</p:sld>
+</file>
+
+<file path=ppt/slides/slide18.xml><?xml version="1.0" encoding="utf-8"?>
+<p:sld xmlns:a="http://schemas.openxmlformats.org/drawingml/2006/main" xmlns:r="http://schemas.openxmlformats.org/officeDocument/2006/relationships" xmlns:p="http://schemas.openxmlformats.org/presentationml/2006/main">
+  <p:cSld>
+    <p:spTree>
+      <p:nvGrpSpPr>
+        <p:cNvPr id="1" name=""/>
+        <p:cNvGrpSpPr/>
+        <p:nvPr/>
+      </p:nvGrpSpPr>
+      <p:grpSpPr>
+        <a:xfrm>
+          <a:off x="0" y="0"/>
+          <a:ext cx="0" cy="0"/>
+          <a:chOff x="0" y="0"/>
+          <a:chExt cx="0" cy="0"/>
+        </a:xfrm>
+      </p:grpSpPr>
+      <p:sp>
+        <p:nvSpPr>
+          <p:cNvPr id="2" name="Title 1">
+            <a:extLst>
+              <a:ext uri="{FF2B5EF4-FFF2-40B4-BE49-F238E27FC236}">
+                <a16:creationId xmlns:a16="http://schemas.microsoft.com/office/drawing/2014/main" id="{1C8EFFAE-FAAC-489E-940F-4BACE00C4D30}"/>
+              </a:ext>
+            </a:extLst>
+          </p:cNvPr>
+          <p:cNvSpPr>
+            <a:spLocks noGrp="1"/>
+          </p:cNvSpPr>
+          <p:nvPr>
+            <p:ph type="title"/>
+          </p:nvPr>
+        </p:nvSpPr>
+        <p:spPr/>
+        <p:txBody>
+          <a:bodyPr/>
+          <a:lstStyle/>
+          <a:p>
+            <a:r>
+              <a:rPr lang="en-CA" dirty="0"/>
+              <a:t>When does reservation policy not hurt the other class?</a:t>
+            </a:r>
+          </a:p>
+        </p:txBody>
+      </p:sp>
+      <p:sp>
+        <p:nvSpPr>
+          <p:cNvPr id="3" name="Content Placeholder 2">
+            <a:extLst>
+              <a:ext uri="{FF2B5EF4-FFF2-40B4-BE49-F238E27FC236}">
+                <a16:creationId xmlns:a16="http://schemas.microsoft.com/office/drawing/2014/main" id="{F9C6B679-2893-47B0-B1C7-B701E0D57F4E}"/>
+              </a:ext>
+            </a:extLst>
+          </p:cNvPr>
+          <p:cNvSpPr>
+            <a:spLocks noGrp="1"/>
+          </p:cNvSpPr>
+          <p:nvPr>
+            <p:ph idx="1"/>
+          </p:nvPr>
+        </p:nvSpPr>
+        <p:spPr/>
+        <p:txBody>
+          <a:bodyPr/>
+          <a:lstStyle/>
+          <a:p>
+            <a:pPr marL="0" indent="0">
+              <a:buNone/>
+            </a:pPr>
+            <a:r>
+              <a:rPr lang="en-CA" dirty="0"/>
+              <a:t>Let Class 1 be the reservation class</a:t>
+            </a:r>
+          </a:p>
+          <a:p>
+            <a:endParaRPr lang="en-CA" dirty="0"/>
+          </a:p>
+          <a:p>
+            <a:r>
+              <a:rPr lang="en-CA" dirty="0"/>
+              <a:t>When Class 1 is a smaller portion of the queueing population</a:t>
+            </a:r>
+          </a:p>
+          <a:p>
+            <a:r>
+              <a:rPr lang="en-CA" dirty="0"/>
+              <a:t>When demand is lower</a:t>
+            </a:r>
+          </a:p>
+          <a:p>
+            <a:r>
+              <a:rPr lang="en-CA" dirty="0"/>
+              <a:t>When no-show magnitude is not too high</a:t>
+            </a:r>
+          </a:p>
+        </p:txBody>
+      </p:sp>
+    </p:spTree>
+    <p:extLst>
+      <p:ext uri="{BB962C8B-B14F-4D97-AF65-F5344CB8AC3E}">
+        <p14:creationId xmlns:p14="http://schemas.microsoft.com/office/powerpoint/2010/main" val="543504394"/>
       </p:ext>
     </p:extLst>
   </p:cSld>
@@ -6197,7 +6959,7 @@
           <p:cNvPr id="2" name="Title 1">
             <a:extLst>
               <a:ext uri="{FF2B5EF4-FFF2-40B4-BE49-F238E27FC236}">
-                <a16:creationId xmlns:a16="http://schemas.microsoft.com/office/drawing/2014/main" id="{8123D558-104E-46B9-A53B-CC248BF90AEC}"/>
+                <a16:creationId xmlns:a16="http://schemas.microsoft.com/office/drawing/2014/main" id="{A21633CC-5640-40DD-82F7-8C55D31A5E8D}"/>
               </a:ext>
             </a:extLst>
           </p:cNvPr>
@@ -6210,41 +6972,70 @@
         </p:nvSpPr>
         <p:spPr>
           <a:xfrm>
-            <a:off x="927719" y="321438"/>
-            <a:ext cx="11024364" cy="1325563"/>
+            <a:off x="551442" y="124493"/>
+            <a:ext cx="10515600" cy="1325563"/>
           </a:xfrm>
         </p:spPr>
         <p:txBody>
-          <a:bodyPr>
-            <a:normAutofit/>
-          </a:bodyPr>
-          <a:lstStyle/>
-          <a:p>
-            <a:r>
-              <a:rPr lang="en-CA" sz="4000" dirty="0"/>
-              <a:t>Demand is a big driver of served rate compounded by no-show</a:t>
+          <a:bodyPr/>
+          <a:lstStyle/>
+          <a:p>
+            <a:r>
+              <a:rPr lang="en-CA" dirty="0"/>
+              <a:t>Threshold mechanisms: magnitude and delay </a:t>
+            </a:r>
+          </a:p>
+        </p:txBody>
+      </p:sp>
+      <p:sp>
+        <p:nvSpPr>
+          <p:cNvPr id="3" name="Content Placeholder 2">
+            <a:extLst>
+              <a:ext uri="{FF2B5EF4-FFF2-40B4-BE49-F238E27FC236}">
+                <a16:creationId xmlns:a16="http://schemas.microsoft.com/office/drawing/2014/main" id="{F4D00A5A-4B37-44F0-B338-F679E868F683}"/>
+              </a:ext>
+            </a:extLst>
+          </p:cNvPr>
+          <p:cNvSpPr>
+            <a:spLocks noGrp="1"/>
+          </p:cNvSpPr>
+          <p:nvPr>
+            <p:ph idx="1"/>
+          </p:nvPr>
+        </p:nvSpPr>
+        <p:spPr>
+          <a:xfrm>
+            <a:off x="1124958" y="1258552"/>
+            <a:ext cx="10515600" cy="683544"/>
+          </a:xfrm>
+        </p:spPr>
+        <p:txBody>
+          <a:bodyPr/>
+          <a:lstStyle/>
+          <a:p>
+            <a:r>
+              <a:rPr lang="en-CA" dirty="0"/>
+              <a:t>For both no-show and balking behavior of both classes</a:t>
             </a:r>
           </a:p>
         </p:txBody>
       </p:sp>
       <p:pic>
         <p:nvPicPr>
-          <p:cNvPr id="5" name="Content Placeholder 4">
+          <p:cNvPr id="5" name="Picture 4">
             <a:extLst>
               <a:ext uri="{FF2B5EF4-FFF2-40B4-BE49-F238E27FC236}">
-                <a16:creationId xmlns:a16="http://schemas.microsoft.com/office/drawing/2014/main" id="{E6106BE1-806D-4B56-8473-297C61BC03B6}"/>
+                <a16:creationId xmlns:a16="http://schemas.microsoft.com/office/drawing/2014/main" id="{BD12449E-5E0B-4C76-AA28-4C90FDDE410E}"/>
               </a:ext>
             </a:extLst>
           </p:cNvPr>
           <p:cNvPicPr>
-            <a:picLocks noGrp="1" noChangeAspect="1"/>
+            <a:picLocks noChangeAspect="1"/>
           </p:cNvPicPr>
-          <p:nvPr>
-            <p:ph idx="1"/>
-          </p:nvPr>
+          <p:nvPr/>
         </p:nvPicPr>
         <p:blipFill>
-          <a:blip r:embed="rId3">
+          <a:blip r:embed="rId2">
             <a:extLst>
               <a:ext uri="{28A0092B-C50C-407E-A947-70E740481C1C}">
                 <a14:useLocalDpi xmlns:a14="http://schemas.microsoft.com/office/drawing/2010/main" val="0"/>
@@ -6257,47 +7048,79 @@
         </p:blipFill>
         <p:spPr>
           <a:xfrm>
-            <a:off x="121025" y="1742639"/>
-            <a:ext cx="5856083" cy="3773920"/>
-          </a:xfrm>
-        </p:spPr>
-      </p:pic>
-      <p:pic>
-        <p:nvPicPr>
-          <p:cNvPr id="7" name="Picture 6">
-            <a:extLst>
-              <a:ext uri="{FF2B5EF4-FFF2-40B4-BE49-F238E27FC236}">
-                <a16:creationId xmlns:a16="http://schemas.microsoft.com/office/drawing/2014/main" id="{01C42C6A-656B-42A0-86A9-43C62713C453}"/>
-              </a:ext>
-            </a:extLst>
-          </p:cNvPr>
-          <p:cNvPicPr>
-            <a:picLocks noChangeAspect="1"/>
-          </p:cNvPicPr>
-          <p:nvPr/>
-        </p:nvPicPr>
-        <p:blipFill>
-          <a:blip r:embed="rId4">
-            <a:extLst>
-              <a:ext uri="{28A0092B-C50C-407E-A947-70E740481C1C}">
-                <a14:useLocalDpi xmlns:a14="http://schemas.microsoft.com/office/drawing/2010/main" val="0"/>
-              </a:ext>
-            </a:extLst>
-          </a:blip>
-          <a:stretch>
-            <a:fillRect/>
-          </a:stretch>
-        </p:blipFill>
-        <p:spPr>
-          <a:xfrm>
-            <a:off x="6096000" y="1742638"/>
-            <a:ext cx="5856083" cy="3773921"/>
+            <a:off x="1552064" y="1942096"/>
+            <a:ext cx="8514356" cy="4490203"/>
           </a:xfrm>
           <a:prstGeom prst="rect">
             <a:avLst/>
           </a:prstGeom>
         </p:spPr>
       </p:pic>
+    </p:spTree>
+    <p:extLst>
+      <p:ext uri="{BB962C8B-B14F-4D97-AF65-F5344CB8AC3E}">
+        <p14:creationId xmlns:p14="http://schemas.microsoft.com/office/powerpoint/2010/main" val="2806244447"/>
+      </p:ext>
+    </p:extLst>
+  </p:cSld>
+  <p:clrMapOvr>
+    <a:masterClrMapping/>
+  </p:clrMapOvr>
+</p:sld>
+</file>
+
+<file path=ppt/slides/slide6.xml><?xml version="1.0" encoding="utf-8"?>
+<p:sld xmlns:a="http://schemas.openxmlformats.org/drawingml/2006/main" xmlns:r="http://schemas.openxmlformats.org/officeDocument/2006/relationships" xmlns:p="http://schemas.openxmlformats.org/presentationml/2006/main">
+  <p:cSld>
+    <p:spTree>
+      <p:nvGrpSpPr>
+        <p:cNvPr id="1" name=""/>
+        <p:cNvGrpSpPr/>
+        <p:nvPr/>
+      </p:nvGrpSpPr>
+      <p:grpSpPr>
+        <a:xfrm>
+          <a:off x="0" y="0"/>
+          <a:ext cx="0" cy="0"/>
+          <a:chOff x="0" y="0"/>
+          <a:chExt cx="0" cy="0"/>
+        </a:xfrm>
+      </p:grpSpPr>
+      <p:sp>
+        <p:nvSpPr>
+          <p:cNvPr id="2" name="Title 1">
+            <a:extLst>
+              <a:ext uri="{FF2B5EF4-FFF2-40B4-BE49-F238E27FC236}">
+                <a16:creationId xmlns:a16="http://schemas.microsoft.com/office/drawing/2014/main" id="{8123D558-104E-46B9-A53B-CC248BF90AEC}"/>
+              </a:ext>
+            </a:extLst>
+          </p:cNvPr>
+          <p:cNvSpPr>
+            <a:spLocks noGrp="1"/>
+          </p:cNvSpPr>
+          <p:nvPr>
+            <p:ph type="title"/>
+          </p:nvPr>
+        </p:nvSpPr>
+        <p:spPr>
+          <a:xfrm>
+            <a:off x="927719" y="321438"/>
+            <a:ext cx="11024364" cy="1325563"/>
+          </a:xfrm>
+        </p:spPr>
+        <p:txBody>
+          <a:bodyPr>
+            <a:normAutofit/>
+          </a:bodyPr>
+          <a:lstStyle/>
+          <a:p>
+            <a:r>
+              <a:rPr lang="en-CA" sz="4000" dirty="0"/>
+              <a:t>Demand is a big driver of served rate compounded by no-show</a:t>
+            </a:r>
+          </a:p>
+        </p:txBody>
+      </p:sp>
       <p:sp>
         <p:nvSpPr>
           <p:cNvPr id="6" name="Content Placeholder 2">
@@ -6314,7 +7137,7 @@
         </p:nvSpPr>
         <p:spPr>
           <a:xfrm>
-            <a:off x="687802" y="5612196"/>
+            <a:off x="463859" y="5584764"/>
             <a:ext cx="11264281" cy="1136061"/>
           </a:xfrm>
           <a:prstGeom prst="rect">
@@ -6323,7 +7146,7 @@
         </p:spPr>
         <p:txBody>
           <a:bodyPr vert="horz" lIns="91440" tIns="45720" rIns="91440" bIns="45720" rtlCol="0">
-            <a:normAutofit fontScale="92500"/>
+            <a:normAutofit fontScale="92500" lnSpcReduction="20000"/>
           </a:bodyPr>
           <a:lstStyle>
             <a:lvl1pPr marL="228600" indent="-228600" algn="l" defTabSz="914400" rtl="0" eaLnBrk="1" latinLnBrk="0" hangingPunct="1">
@@ -6498,107 +7321,86 @@
           <a:p>
             <a:r>
               <a:rPr lang="en-CA" dirty="0"/>
-              <a:t>Balking rate has minimal effects while no-show further drives down served rate.</a:t>
-            </a:r>
-          </a:p>
-        </p:txBody>
-      </p:sp>
+              <a:t>Balking rate has minimal effect while an increase in no-show magnitude further drives down served rate.</a:t>
+            </a:r>
+          </a:p>
+        </p:txBody>
+      </p:sp>
+      <p:pic>
+        <p:nvPicPr>
+          <p:cNvPr id="9" name="Content Placeholder 8">
+            <a:extLst>
+              <a:ext uri="{FF2B5EF4-FFF2-40B4-BE49-F238E27FC236}">
+                <a16:creationId xmlns:a16="http://schemas.microsoft.com/office/drawing/2014/main" id="{EA07281E-6E5D-46F7-ADDC-8584EE6A46F7}"/>
+              </a:ext>
+            </a:extLst>
+          </p:cNvPr>
+          <p:cNvPicPr>
+            <a:picLocks noGrp="1" noChangeAspect="1"/>
+          </p:cNvPicPr>
+          <p:nvPr>
+            <p:ph idx="1"/>
+          </p:nvPr>
+        </p:nvPicPr>
+        <p:blipFill>
+          <a:blip r:embed="rId3">
+            <a:extLst>
+              <a:ext uri="{28A0092B-C50C-407E-A947-70E740481C1C}">
+                <a14:useLocalDpi xmlns:a14="http://schemas.microsoft.com/office/drawing/2010/main" val="0"/>
+              </a:ext>
+            </a:extLst>
+          </a:blip>
+          <a:stretch>
+            <a:fillRect/>
+          </a:stretch>
+        </p:blipFill>
+        <p:spPr>
+          <a:xfrm>
+            <a:off x="416703" y="1812702"/>
+            <a:ext cx="5400261" cy="3403452"/>
+          </a:xfrm>
+        </p:spPr>
+      </p:pic>
+      <p:pic>
+        <p:nvPicPr>
+          <p:cNvPr id="13" name="Picture 12">
+            <a:extLst>
+              <a:ext uri="{FF2B5EF4-FFF2-40B4-BE49-F238E27FC236}">
+                <a16:creationId xmlns:a16="http://schemas.microsoft.com/office/drawing/2014/main" id="{6A325E58-3055-4045-B165-07194A78D8E9}"/>
+              </a:ext>
+            </a:extLst>
+          </p:cNvPr>
+          <p:cNvPicPr>
+            <a:picLocks noChangeAspect="1"/>
+          </p:cNvPicPr>
+          <p:nvPr/>
+        </p:nvPicPr>
+        <p:blipFill>
+          <a:blip r:embed="rId4">
+            <a:extLst>
+              <a:ext uri="{28A0092B-C50C-407E-A947-70E740481C1C}">
+                <a14:useLocalDpi xmlns:a14="http://schemas.microsoft.com/office/drawing/2010/main" val="0"/>
+              </a:ext>
+            </a:extLst>
+          </a:blip>
+          <a:stretch>
+            <a:fillRect/>
+          </a:stretch>
+        </p:blipFill>
+        <p:spPr>
+          <a:xfrm>
+            <a:off x="5990700" y="1641844"/>
+            <a:ext cx="5671360" cy="3574309"/>
+          </a:xfrm>
+          <a:prstGeom prst="rect">
+            <a:avLst/>
+          </a:prstGeom>
+        </p:spPr>
+      </p:pic>
     </p:spTree>
     <p:extLst>
       <p:ext uri="{BB962C8B-B14F-4D97-AF65-F5344CB8AC3E}">
         <p14:creationId xmlns:p14="http://schemas.microsoft.com/office/powerpoint/2010/main" val="3359586173"/>
-      </p:ext>
-    </p:extLst>
-  </p:cSld>
-  <p:clrMapOvr>
-    <a:masterClrMapping/>
-  </p:clrMapOvr>
-</p:sld>
-</file>
-
-<file path=ppt/slides/slide6.xml><?xml version="1.0" encoding="utf-8"?>
-<p:sld xmlns:a="http://schemas.openxmlformats.org/drawingml/2006/main" xmlns:r="http://schemas.openxmlformats.org/officeDocument/2006/relationships" xmlns:p="http://schemas.openxmlformats.org/presentationml/2006/main">
-  <p:cSld>
-    <p:spTree>
-      <p:nvGrpSpPr>
-        <p:cNvPr id="1" name=""/>
-        <p:cNvGrpSpPr/>
-        <p:nvPr/>
-      </p:nvGrpSpPr>
-      <p:grpSpPr>
-        <a:xfrm>
-          <a:off x="0" y="0"/>
-          <a:ext cx="0" cy="0"/>
-          <a:chOff x="0" y="0"/>
-          <a:chExt cx="0" cy="0"/>
-        </a:xfrm>
-      </p:grpSpPr>
-      <p:sp>
-        <p:nvSpPr>
-          <p:cNvPr id="2" name="Title 1">
-            <a:extLst>
-              <a:ext uri="{FF2B5EF4-FFF2-40B4-BE49-F238E27FC236}">
-                <a16:creationId xmlns:a16="http://schemas.microsoft.com/office/drawing/2014/main" id="{A21633CC-5640-40DD-82F7-8C55D31A5E8D}"/>
-              </a:ext>
-            </a:extLst>
-          </p:cNvPr>
-          <p:cNvSpPr>
-            <a:spLocks noGrp="1"/>
-          </p:cNvSpPr>
-          <p:nvPr>
-            <p:ph type="title"/>
-          </p:nvPr>
-        </p:nvSpPr>
-        <p:spPr/>
-        <p:txBody>
-          <a:bodyPr/>
-          <a:lstStyle/>
-          <a:p>
-            <a:r>
-              <a:rPr lang="en-CA" dirty="0"/>
-              <a:t>Threshold mechanisms: magnitude and delay </a:t>
-            </a:r>
-          </a:p>
-        </p:txBody>
-      </p:sp>
-      <p:sp>
-        <p:nvSpPr>
-          <p:cNvPr id="3" name="Content Placeholder 2">
-            <a:extLst>
-              <a:ext uri="{FF2B5EF4-FFF2-40B4-BE49-F238E27FC236}">
-                <a16:creationId xmlns:a16="http://schemas.microsoft.com/office/drawing/2014/main" id="{F4D00A5A-4B37-44F0-B338-F679E868F683}"/>
-              </a:ext>
-            </a:extLst>
-          </p:cNvPr>
-          <p:cNvSpPr>
-            <a:spLocks noGrp="1"/>
-          </p:cNvSpPr>
-          <p:nvPr>
-            <p:ph idx="1"/>
-          </p:nvPr>
-        </p:nvSpPr>
-        <p:spPr/>
-        <p:txBody>
-          <a:bodyPr/>
-          <a:lstStyle/>
-          <a:p>
-            <a:r>
-              <a:rPr lang="en-CA" dirty="0"/>
-              <a:t>For both no-show and balking behavior of both classes</a:t>
-            </a:r>
-          </a:p>
-          <a:p>
-            <a:r>
-              <a:rPr lang="en-CA" dirty="0"/>
-              <a:t>Magnitude and delay for probability and threshold</a:t>
-            </a:r>
-          </a:p>
-        </p:txBody>
-      </p:sp>
-    </p:spTree>
-    <p:extLst>
-      <p:ext uri="{BB962C8B-B14F-4D97-AF65-F5344CB8AC3E}">
-        <p14:creationId xmlns:p14="http://schemas.microsoft.com/office/powerpoint/2010/main" val="2806244447"/>
       </p:ext>
     </p:extLst>
   </p:cSld>
@@ -6867,10 +7669,10 @@
       </p:sp>
       <p:pic>
         <p:nvPicPr>
-          <p:cNvPr id="9" name="Content Placeholder 8">
+          <p:cNvPr id="13" name="Content Placeholder 12">
             <a:extLst>
               <a:ext uri="{FF2B5EF4-FFF2-40B4-BE49-F238E27FC236}">
-                <a16:creationId xmlns:a16="http://schemas.microsoft.com/office/drawing/2014/main" id="{CEDCDF1F-1F72-4580-9C83-11BF5DD5BF62}"/>
+                <a16:creationId xmlns:a16="http://schemas.microsoft.com/office/drawing/2014/main" id="{8BBDB6B9-A299-4D1A-8014-E1BF9DAF6F7D}"/>
               </a:ext>
             </a:extLst>
           </p:cNvPr>
@@ -6895,17 +7697,17 @@
         </p:blipFill>
         <p:spPr>
           <a:xfrm>
-            <a:off x="249309" y="1742073"/>
-            <a:ext cx="6142491" cy="3541945"/>
+            <a:off x="371977" y="1703951"/>
+            <a:ext cx="5724023" cy="3607499"/>
           </a:xfrm>
         </p:spPr>
       </p:pic>
       <p:pic>
         <p:nvPicPr>
-          <p:cNvPr id="11" name="Picture 10">
+          <p:cNvPr id="15" name="Picture 14">
             <a:extLst>
               <a:ext uri="{FF2B5EF4-FFF2-40B4-BE49-F238E27FC236}">
-                <a16:creationId xmlns:a16="http://schemas.microsoft.com/office/drawing/2014/main" id="{519762D0-E7D8-4F88-AA38-383BD0469110}"/>
+                <a16:creationId xmlns:a16="http://schemas.microsoft.com/office/drawing/2014/main" id="{E81811C4-4438-442A-AC72-A8CED8D9BD11}"/>
               </a:ext>
             </a:extLst>
           </p:cNvPr>
@@ -6914,7 +7716,7 @@
           </p:cNvPicPr>
           <p:nvPr/>
         </p:nvPicPr>
-        <p:blipFill rotWithShape="1">
+        <p:blipFill>
           <a:blip r:embed="rId4">
             <a:extLst>
               <a:ext uri="{28A0092B-C50C-407E-A947-70E740481C1C}">
@@ -6922,13 +7724,14 @@
               </a:ext>
             </a:extLst>
           </a:blip>
-          <a:srcRect r="11396"/>
-          <a:stretch/>
+          <a:stretch>
+            <a:fillRect/>
+          </a:stretch>
         </p:blipFill>
         <p:spPr>
           <a:xfrm>
-            <a:off x="6455952" y="1742073"/>
-            <a:ext cx="5442493" cy="3541945"/>
+            <a:off x="6096000" y="1703951"/>
+            <a:ext cx="5724024" cy="3607499"/>
           </a:xfrm>
           <a:prstGeom prst="rect">
             <a:avLst/>
@@ -7068,10 +7871,10 @@
       </p:sp>
       <p:pic>
         <p:nvPicPr>
-          <p:cNvPr id="5" name="Picture 4">
+          <p:cNvPr id="9" name="Picture 8">
             <a:extLst>
               <a:ext uri="{FF2B5EF4-FFF2-40B4-BE49-F238E27FC236}">
-                <a16:creationId xmlns:a16="http://schemas.microsoft.com/office/drawing/2014/main" id="{6C2A9535-274A-454B-9DAA-7E08D3CD105A}"/>
+                <a16:creationId xmlns:a16="http://schemas.microsoft.com/office/drawing/2014/main" id="{ECA8BDFE-1BF3-4206-B4F7-C70774685188}"/>
               </a:ext>
             </a:extLst>
           </p:cNvPr>
@@ -7080,15 +7883,22 @@
           </p:cNvPicPr>
           <p:nvPr/>
         </p:nvPicPr>
-        <p:blipFill rotWithShape="1">
-          <a:blip r:embed="rId2"/>
-          <a:srcRect t="6612"/>
-          <a:stretch/>
+        <p:blipFill>
+          <a:blip r:embed="rId2">
+            <a:extLst>
+              <a:ext uri="{28A0092B-C50C-407E-A947-70E740481C1C}">
+                <a14:useLocalDpi xmlns:a14="http://schemas.microsoft.com/office/drawing/2010/main" val="0"/>
+              </a:ext>
+            </a:extLst>
+          </a:blip>
+          <a:stretch>
+            <a:fillRect/>
+          </a:stretch>
         </p:blipFill>
         <p:spPr>
           <a:xfrm>
-            <a:off x="485496" y="2094534"/>
-            <a:ext cx="5380594" cy="3223470"/>
+            <a:off x="244522" y="1828805"/>
+            <a:ext cx="5673194" cy="3575465"/>
           </a:xfrm>
           <a:prstGeom prst="rect">
             <a:avLst/>
@@ -7097,10 +7907,10 @@
       </p:pic>
       <p:pic>
         <p:nvPicPr>
-          <p:cNvPr id="7" name="Picture 6">
+          <p:cNvPr id="11" name="Picture 10">
             <a:extLst>
               <a:ext uri="{FF2B5EF4-FFF2-40B4-BE49-F238E27FC236}">
-                <a16:creationId xmlns:a16="http://schemas.microsoft.com/office/drawing/2014/main" id="{7629A7A0-8C4A-4DBC-97BB-2AF62F9E42DE}"/>
+                <a16:creationId xmlns:a16="http://schemas.microsoft.com/office/drawing/2014/main" id="{0983DFAC-3F4A-46F9-97E5-0E86633BCF41}"/>
               </a:ext>
             </a:extLst>
           </p:cNvPr>
@@ -7109,425 +7919,28 @@
           </p:cNvPicPr>
           <p:nvPr/>
         </p:nvPicPr>
-        <p:blipFill rotWithShape="1">
-          <a:blip r:embed="rId3"/>
-          <a:srcRect t="6997"/>
-          <a:stretch/>
+        <p:blipFill>
+          <a:blip r:embed="rId3">
+            <a:extLst>
+              <a:ext uri="{28A0092B-C50C-407E-A947-70E740481C1C}">
+                <a14:useLocalDpi xmlns:a14="http://schemas.microsoft.com/office/drawing/2010/main" val="0"/>
+              </a:ext>
+            </a:extLst>
+          </a:blip>
+          <a:stretch>
+            <a:fillRect/>
+          </a:stretch>
         </p:blipFill>
         <p:spPr>
           <a:xfrm>
-            <a:off x="6096000" y="2058056"/>
-            <a:ext cx="5380594" cy="3289927"/>
+            <a:off x="5917716" y="1716444"/>
+            <a:ext cx="5851478" cy="3687826"/>
           </a:xfrm>
           <a:prstGeom prst="rect">
             <a:avLst/>
           </a:prstGeom>
         </p:spPr>
       </p:pic>
-      <p:sp>
-        <p:nvSpPr>
-          <p:cNvPr id="6" name="Content Placeholder 2">
-            <a:extLst>
-              <a:ext uri="{FF2B5EF4-FFF2-40B4-BE49-F238E27FC236}">
-                <a16:creationId xmlns:a16="http://schemas.microsoft.com/office/drawing/2014/main" id="{21956235-D240-493B-B123-002E69B01EB2}"/>
-              </a:ext>
-            </a:extLst>
-          </p:cNvPr>
-          <p:cNvSpPr txBox="1">
-            <a:spLocks/>
-          </p:cNvSpPr>
-          <p:nvPr/>
-        </p:nvSpPr>
-        <p:spPr>
-          <a:xfrm>
-            <a:off x="7814813" y="1660707"/>
-            <a:ext cx="2618342" cy="662742"/>
-          </a:xfrm>
-          <a:prstGeom prst="rect">
-            <a:avLst/>
-          </a:prstGeom>
-        </p:spPr>
-        <p:txBody>
-          <a:bodyPr vert="horz" lIns="91440" tIns="45720" rIns="91440" bIns="45720" rtlCol="0">
-            <a:normAutofit/>
-          </a:bodyPr>
-          <a:lstStyle>
-            <a:lvl1pPr marL="228600" indent="-228600" algn="l" defTabSz="914400" rtl="0" eaLnBrk="1" latinLnBrk="0" hangingPunct="1">
-              <a:lnSpc>
-                <a:spcPct val="90000"/>
-              </a:lnSpc>
-              <a:spcBef>
-                <a:spcPts val="1000"/>
-              </a:spcBef>
-              <a:buFont typeface="Arial" panose="020B0604020202020204" pitchFamily="34" charset="0"/>
-              <a:buChar char="•"/>
-              <a:defRPr sz="2800" kern="1200">
-                <a:solidFill>
-                  <a:schemeClr val="tx1"/>
-                </a:solidFill>
-                <a:latin typeface="+mn-lt"/>
-                <a:ea typeface="+mn-ea"/>
-                <a:cs typeface="+mn-cs"/>
-              </a:defRPr>
-            </a:lvl1pPr>
-            <a:lvl2pPr marL="685800" indent="-228600" algn="l" defTabSz="914400" rtl="0" eaLnBrk="1" latinLnBrk="0" hangingPunct="1">
-              <a:lnSpc>
-                <a:spcPct val="90000"/>
-              </a:lnSpc>
-              <a:spcBef>
-                <a:spcPts val="500"/>
-              </a:spcBef>
-              <a:buFont typeface="Arial" panose="020B0604020202020204" pitchFamily="34" charset="0"/>
-              <a:buChar char="•"/>
-              <a:defRPr sz="2400" kern="1200">
-                <a:solidFill>
-                  <a:schemeClr val="tx1"/>
-                </a:solidFill>
-                <a:latin typeface="+mn-lt"/>
-                <a:ea typeface="+mn-ea"/>
-                <a:cs typeface="+mn-cs"/>
-              </a:defRPr>
-            </a:lvl2pPr>
-            <a:lvl3pPr marL="1143000" indent="-228600" algn="l" defTabSz="914400" rtl="0" eaLnBrk="1" latinLnBrk="0" hangingPunct="1">
-              <a:lnSpc>
-                <a:spcPct val="90000"/>
-              </a:lnSpc>
-              <a:spcBef>
-                <a:spcPts val="500"/>
-              </a:spcBef>
-              <a:buFont typeface="Arial" panose="020B0604020202020204" pitchFamily="34" charset="0"/>
-              <a:buChar char="•"/>
-              <a:defRPr sz="2000" kern="1200">
-                <a:solidFill>
-                  <a:schemeClr val="tx1"/>
-                </a:solidFill>
-                <a:latin typeface="+mn-lt"/>
-                <a:ea typeface="+mn-ea"/>
-                <a:cs typeface="+mn-cs"/>
-              </a:defRPr>
-            </a:lvl3pPr>
-            <a:lvl4pPr marL="1600200" indent="-228600" algn="l" defTabSz="914400" rtl="0" eaLnBrk="1" latinLnBrk="0" hangingPunct="1">
-              <a:lnSpc>
-                <a:spcPct val="90000"/>
-              </a:lnSpc>
-              <a:spcBef>
-                <a:spcPts val="500"/>
-              </a:spcBef>
-              <a:buFont typeface="Arial" panose="020B0604020202020204" pitchFamily="34" charset="0"/>
-              <a:buChar char="•"/>
-              <a:defRPr sz="1800" kern="1200">
-                <a:solidFill>
-                  <a:schemeClr val="tx1"/>
-                </a:solidFill>
-                <a:latin typeface="+mn-lt"/>
-                <a:ea typeface="+mn-ea"/>
-                <a:cs typeface="+mn-cs"/>
-              </a:defRPr>
-            </a:lvl4pPr>
-            <a:lvl5pPr marL="2057400" indent="-228600" algn="l" defTabSz="914400" rtl="0" eaLnBrk="1" latinLnBrk="0" hangingPunct="1">
-              <a:lnSpc>
-                <a:spcPct val="90000"/>
-              </a:lnSpc>
-              <a:spcBef>
-                <a:spcPts val="500"/>
-              </a:spcBef>
-              <a:buFont typeface="Arial" panose="020B0604020202020204" pitchFamily="34" charset="0"/>
-              <a:buChar char="•"/>
-              <a:defRPr sz="1800" kern="1200">
-                <a:solidFill>
-                  <a:schemeClr val="tx1"/>
-                </a:solidFill>
-                <a:latin typeface="+mn-lt"/>
-                <a:ea typeface="+mn-ea"/>
-                <a:cs typeface="+mn-cs"/>
-              </a:defRPr>
-            </a:lvl5pPr>
-            <a:lvl6pPr marL="2514600" indent="-228600" algn="l" defTabSz="914400" rtl="0" eaLnBrk="1" latinLnBrk="0" hangingPunct="1">
-              <a:lnSpc>
-                <a:spcPct val="90000"/>
-              </a:lnSpc>
-              <a:spcBef>
-                <a:spcPts val="500"/>
-              </a:spcBef>
-              <a:buFont typeface="Arial" panose="020B0604020202020204" pitchFamily="34" charset="0"/>
-              <a:buChar char="•"/>
-              <a:defRPr sz="1800" kern="1200">
-                <a:solidFill>
-                  <a:schemeClr val="tx1"/>
-                </a:solidFill>
-                <a:latin typeface="+mn-lt"/>
-                <a:ea typeface="+mn-ea"/>
-                <a:cs typeface="+mn-cs"/>
-              </a:defRPr>
-            </a:lvl6pPr>
-            <a:lvl7pPr marL="2971800" indent="-228600" algn="l" defTabSz="914400" rtl="0" eaLnBrk="1" latinLnBrk="0" hangingPunct="1">
-              <a:lnSpc>
-                <a:spcPct val="90000"/>
-              </a:lnSpc>
-              <a:spcBef>
-                <a:spcPts val="500"/>
-              </a:spcBef>
-              <a:buFont typeface="Arial" panose="020B0604020202020204" pitchFamily="34" charset="0"/>
-              <a:buChar char="•"/>
-              <a:defRPr sz="1800" kern="1200">
-                <a:solidFill>
-                  <a:schemeClr val="tx1"/>
-                </a:solidFill>
-                <a:latin typeface="+mn-lt"/>
-                <a:ea typeface="+mn-ea"/>
-                <a:cs typeface="+mn-cs"/>
-              </a:defRPr>
-            </a:lvl7pPr>
-            <a:lvl8pPr marL="3429000" indent="-228600" algn="l" defTabSz="914400" rtl="0" eaLnBrk="1" latinLnBrk="0" hangingPunct="1">
-              <a:lnSpc>
-                <a:spcPct val="90000"/>
-              </a:lnSpc>
-              <a:spcBef>
-                <a:spcPts val="500"/>
-              </a:spcBef>
-              <a:buFont typeface="Arial" panose="020B0604020202020204" pitchFamily="34" charset="0"/>
-              <a:buChar char="•"/>
-              <a:defRPr sz="1800" kern="1200">
-                <a:solidFill>
-                  <a:schemeClr val="tx1"/>
-                </a:solidFill>
-                <a:latin typeface="+mn-lt"/>
-                <a:ea typeface="+mn-ea"/>
-                <a:cs typeface="+mn-cs"/>
-              </a:defRPr>
-            </a:lvl8pPr>
-            <a:lvl9pPr marL="3886200" indent="-228600" algn="l" defTabSz="914400" rtl="0" eaLnBrk="1" latinLnBrk="0" hangingPunct="1">
-              <a:lnSpc>
-                <a:spcPct val="90000"/>
-              </a:lnSpc>
-              <a:spcBef>
-                <a:spcPts val="500"/>
-              </a:spcBef>
-              <a:buFont typeface="Arial" panose="020B0604020202020204" pitchFamily="34" charset="0"/>
-              <a:buChar char="•"/>
-              <a:defRPr sz="1800" kern="1200">
-                <a:solidFill>
-                  <a:schemeClr val="tx1"/>
-                </a:solidFill>
-                <a:latin typeface="+mn-lt"/>
-                <a:ea typeface="+mn-ea"/>
-                <a:cs typeface="+mn-cs"/>
-              </a:defRPr>
-            </a:lvl9pPr>
-          </a:lstStyle>
-          <a:p>
-            <a:pPr marL="0" indent="0">
-              <a:buNone/>
-            </a:pPr>
-            <a:r>
-              <a:rPr lang="en-CA" sz="1800" dirty="0"/>
-              <a:t>Delay – threshold</a:t>
-            </a:r>
-          </a:p>
-        </p:txBody>
-      </p:sp>
-      <p:sp>
-        <p:nvSpPr>
-          <p:cNvPr id="8" name="Content Placeholder 2">
-            <a:extLst>
-              <a:ext uri="{FF2B5EF4-FFF2-40B4-BE49-F238E27FC236}">
-                <a16:creationId xmlns:a16="http://schemas.microsoft.com/office/drawing/2014/main" id="{BB61C4F8-76CE-4AAA-9256-D4F8DD4F59FA}"/>
-              </a:ext>
-            </a:extLst>
-          </p:cNvPr>
-          <p:cNvSpPr txBox="1">
-            <a:spLocks/>
-          </p:cNvSpPr>
-          <p:nvPr/>
-        </p:nvSpPr>
-        <p:spPr>
-          <a:xfrm>
-            <a:off x="1284158" y="1726685"/>
-            <a:ext cx="3891197" cy="662742"/>
-          </a:xfrm>
-          <a:prstGeom prst="rect">
-            <a:avLst/>
-          </a:prstGeom>
-        </p:spPr>
-        <p:txBody>
-          <a:bodyPr vert="horz" lIns="91440" tIns="45720" rIns="91440" bIns="45720" rtlCol="0">
-            <a:normAutofit/>
-          </a:bodyPr>
-          <a:lstStyle>
-            <a:lvl1pPr marL="228600" indent="-228600" algn="l" defTabSz="914400" rtl="0" eaLnBrk="1" latinLnBrk="0" hangingPunct="1">
-              <a:lnSpc>
-                <a:spcPct val="90000"/>
-              </a:lnSpc>
-              <a:spcBef>
-                <a:spcPts val="1000"/>
-              </a:spcBef>
-              <a:buFont typeface="Arial" panose="020B0604020202020204" pitchFamily="34" charset="0"/>
-              <a:buChar char="•"/>
-              <a:defRPr sz="2800" kern="1200">
-                <a:solidFill>
-                  <a:schemeClr val="tx1"/>
-                </a:solidFill>
-                <a:latin typeface="+mn-lt"/>
-                <a:ea typeface="+mn-ea"/>
-                <a:cs typeface="+mn-cs"/>
-              </a:defRPr>
-            </a:lvl1pPr>
-            <a:lvl2pPr marL="685800" indent="-228600" algn="l" defTabSz="914400" rtl="0" eaLnBrk="1" latinLnBrk="0" hangingPunct="1">
-              <a:lnSpc>
-                <a:spcPct val="90000"/>
-              </a:lnSpc>
-              <a:spcBef>
-                <a:spcPts val="500"/>
-              </a:spcBef>
-              <a:buFont typeface="Arial" panose="020B0604020202020204" pitchFamily="34" charset="0"/>
-              <a:buChar char="•"/>
-              <a:defRPr sz="2400" kern="1200">
-                <a:solidFill>
-                  <a:schemeClr val="tx1"/>
-                </a:solidFill>
-                <a:latin typeface="+mn-lt"/>
-                <a:ea typeface="+mn-ea"/>
-                <a:cs typeface="+mn-cs"/>
-              </a:defRPr>
-            </a:lvl2pPr>
-            <a:lvl3pPr marL="1143000" indent="-228600" algn="l" defTabSz="914400" rtl="0" eaLnBrk="1" latinLnBrk="0" hangingPunct="1">
-              <a:lnSpc>
-                <a:spcPct val="90000"/>
-              </a:lnSpc>
-              <a:spcBef>
-                <a:spcPts val="500"/>
-              </a:spcBef>
-              <a:buFont typeface="Arial" panose="020B0604020202020204" pitchFamily="34" charset="0"/>
-              <a:buChar char="•"/>
-              <a:defRPr sz="2000" kern="1200">
-                <a:solidFill>
-                  <a:schemeClr val="tx1"/>
-                </a:solidFill>
-                <a:latin typeface="+mn-lt"/>
-                <a:ea typeface="+mn-ea"/>
-                <a:cs typeface="+mn-cs"/>
-              </a:defRPr>
-            </a:lvl3pPr>
-            <a:lvl4pPr marL="1600200" indent="-228600" algn="l" defTabSz="914400" rtl="0" eaLnBrk="1" latinLnBrk="0" hangingPunct="1">
-              <a:lnSpc>
-                <a:spcPct val="90000"/>
-              </a:lnSpc>
-              <a:spcBef>
-                <a:spcPts val="500"/>
-              </a:spcBef>
-              <a:buFont typeface="Arial" panose="020B0604020202020204" pitchFamily="34" charset="0"/>
-              <a:buChar char="•"/>
-              <a:defRPr sz="1800" kern="1200">
-                <a:solidFill>
-                  <a:schemeClr val="tx1"/>
-                </a:solidFill>
-                <a:latin typeface="+mn-lt"/>
-                <a:ea typeface="+mn-ea"/>
-                <a:cs typeface="+mn-cs"/>
-              </a:defRPr>
-            </a:lvl4pPr>
-            <a:lvl5pPr marL="2057400" indent="-228600" algn="l" defTabSz="914400" rtl="0" eaLnBrk="1" latinLnBrk="0" hangingPunct="1">
-              <a:lnSpc>
-                <a:spcPct val="90000"/>
-              </a:lnSpc>
-              <a:spcBef>
-                <a:spcPts val="500"/>
-              </a:spcBef>
-              <a:buFont typeface="Arial" panose="020B0604020202020204" pitchFamily="34" charset="0"/>
-              <a:buChar char="•"/>
-              <a:defRPr sz="1800" kern="1200">
-                <a:solidFill>
-                  <a:schemeClr val="tx1"/>
-                </a:solidFill>
-                <a:latin typeface="+mn-lt"/>
-                <a:ea typeface="+mn-ea"/>
-                <a:cs typeface="+mn-cs"/>
-              </a:defRPr>
-            </a:lvl5pPr>
-            <a:lvl6pPr marL="2514600" indent="-228600" algn="l" defTabSz="914400" rtl="0" eaLnBrk="1" latinLnBrk="0" hangingPunct="1">
-              <a:lnSpc>
-                <a:spcPct val="90000"/>
-              </a:lnSpc>
-              <a:spcBef>
-                <a:spcPts val="500"/>
-              </a:spcBef>
-              <a:buFont typeface="Arial" panose="020B0604020202020204" pitchFamily="34" charset="0"/>
-              <a:buChar char="•"/>
-              <a:defRPr sz="1800" kern="1200">
-                <a:solidFill>
-                  <a:schemeClr val="tx1"/>
-                </a:solidFill>
-                <a:latin typeface="+mn-lt"/>
-                <a:ea typeface="+mn-ea"/>
-                <a:cs typeface="+mn-cs"/>
-              </a:defRPr>
-            </a:lvl6pPr>
-            <a:lvl7pPr marL="2971800" indent="-228600" algn="l" defTabSz="914400" rtl="0" eaLnBrk="1" latinLnBrk="0" hangingPunct="1">
-              <a:lnSpc>
-                <a:spcPct val="90000"/>
-              </a:lnSpc>
-              <a:spcBef>
-                <a:spcPts val="500"/>
-              </a:spcBef>
-              <a:buFont typeface="Arial" panose="020B0604020202020204" pitchFamily="34" charset="0"/>
-              <a:buChar char="•"/>
-              <a:defRPr sz="1800" kern="1200">
-                <a:solidFill>
-                  <a:schemeClr val="tx1"/>
-                </a:solidFill>
-                <a:latin typeface="+mn-lt"/>
-                <a:ea typeface="+mn-ea"/>
-                <a:cs typeface="+mn-cs"/>
-              </a:defRPr>
-            </a:lvl7pPr>
-            <a:lvl8pPr marL="3429000" indent="-228600" algn="l" defTabSz="914400" rtl="0" eaLnBrk="1" latinLnBrk="0" hangingPunct="1">
-              <a:lnSpc>
-                <a:spcPct val="90000"/>
-              </a:lnSpc>
-              <a:spcBef>
-                <a:spcPts val="500"/>
-              </a:spcBef>
-              <a:buFont typeface="Arial" panose="020B0604020202020204" pitchFamily="34" charset="0"/>
-              <a:buChar char="•"/>
-              <a:defRPr sz="1800" kern="1200">
-                <a:solidFill>
-                  <a:schemeClr val="tx1"/>
-                </a:solidFill>
-                <a:latin typeface="+mn-lt"/>
-                <a:ea typeface="+mn-ea"/>
-                <a:cs typeface="+mn-cs"/>
-              </a:defRPr>
-            </a:lvl8pPr>
-            <a:lvl9pPr marL="3886200" indent="-228600" algn="l" defTabSz="914400" rtl="0" eaLnBrk="1" latinLnBrk="0" hangingPunct="1">
-              <a:lnSpc>
-                <a:spcPct val="90000"/>
-              </a:lnSpc>
-              <a:spcBef>
-                <a:spcPts val="500"/>
-              </a:spcBef>
-              <a:buFont typeface="Arial" panose="020B0604020202020204" pitchFamily="34" charset="0"/>
-              <a:buChar char="•"/>
-              <a:defRPr sz="1800" kern="1200">
-                <a:solidFill>
-                  <a:schemeClr val="tx1"/>
-                </a:solidFill>
-                <a:latin typeface="+mn-lt"/>
-                <a:ea typeface="+mn-ea"/>
-                <a:cs typeface="+mn-cs"/>
-              </a:defRPr>
-            </a:lvl9pPr>
-          </a:lstStyle>
-          <a:p>
-            <a:pPr marL="0" indent="0">
-              <a:buNone/>
-            </a:pPr>
-            <a:r>
-              <a:rPr lang="en-CA" sz="1800" dirty="0"/>
-              <a:t>Magnitude – post threshold probability</a:t>
-            </a:r>
-          </a:p>
-        </p:txBody>
-      </p:sp>
     </p:spTree>
     <p:extLst>
       <p:ext uri="{BB962C8B-B14F-4D97-AF65-F5344CB8AC3E}">
@@ -7612,7 +8025,7 @@
         <p:spPr>
           <a:xfrm>
             <a:off x="8650705" y="2079523"/>
-            <a:ext cx="3130216" cy="3967316"/>
+            <a:ext cx="3130216" cy="4303094"/>
           </a:xfrm>
         </p:spPr>
         <p:txBody>
@@ -7626,7 +8039,7 @@
             </a:pPr>
             <a:r>
               <a:rPr lang="en-US" sz="2600" dirty="0"/>
-              <a:t>The served rate gap difference from making Class 1 more delay-sensitive shows opposing trends over demand.</a:t>
+              <a:t>The served rate gap difference from making Class 1 more delay-sensitive shows opposing trends between balking and no-show over demand.</a:t>
             </a:r>
           </a:p>
           <a:p>
@@ -7649,10 +8062,10 @@
       </p:sp>
       <p:pic>
         <p:nvPicPr>
-          <p:cNvPr id="7" name="Content Placeholder 4">
+          <p:cNvPr id="5" name="Picture 4">
             <a:extLst>
               <a:ext uri="{FF2B5EF4-FFF2-40B4-BE49-F238E27FC236}">
-                <a16:creationId xmlns:a16="http://schemas.microsoft.com/office/drawing/2014/main" id="{773CE6E8-CBA3-482B-93E3-F2E9069B1BEC}"/>
+                <a16:creationId xmlns:a16="http://schemas.microsoft.com/office/drawing/2014/main" id="{E0142A85-F7AE-41CA-B119-7E94A6200579}"/>
               </a:ext>
             </a:extLst>
           </p:cNvPr>
@@ -7675,8 +8088,8 @@
         </p:blipFill>
         <p:spPr>
           <a:xfrm>
-            <a:off x="498439" y="1727128"/>
-            <a:ext cx="7839957" cy="4613514"/>
+            <a:off x="246748" y="1743745"/>
+            <a:ext cx="8275620" cy="4638872"/>
           </a:xfrm>
           <a:prstGeom prst="rect">
             <a:avLst/>

--- a/presentation/FCFS Presentation.pptx
+++ b/presentation/FCFS Presentation.pptx
@@ -5,7 +5,7 @@
     <p:sldMasterId id="2147483826" r:id="rId1"/>
   </p:sldMasterIdLst>
   <p:notesMasterIdLst>
-    <p:notesMasterId r:id="rId20"/>
+    <p:notesMasterId r:id="rId24"/>
   </p:notesMasterIdLst>
   <p:sldIdLst>
     <p:sldId id="256" r:id="rId2"/>
@@ -16,16 +16,20 @@
     <p:sldId id="270" r:id="rId7"/>
     <p:sldId id="268" r:id="rId8"/>
     <p:sldId id="260" r:id="rId9"/>
-    <p:sldId id="261" r:id="rId10"/>
-    <p:sldId id="263" r:id="rId11"/>
-    <p:sldId id="266" r:id="rId12"/>
-    <p:sldId id="267" r:id="rId13"/>
-    <p:sldId id="272" r:id="rId14"/>
-    <p:sldId id="273" r:id="rId15"/>
-    <p:sldId id="274" r:id="rId16"/>
-    <p:sldId id="275" r:id="rId17"/>
-    <p:sldId id="277" r:id="rId18"/>
-    <p:sldId id="276" r:id="rId19"/>
+    <p:sldId id="280" r:id="rId10"/>
+    <p:sldId id="279" r:id="rId11"/>
+    <p:sldId id="261" r:id="rId12"/>
+    <p:sldId id="278" r:id="rId13"/>
+    <p:sldId id="263" r:id="rId14"/>
+    <p:sldId id="266" r:id="rId15"/>
+    <p:sldId id="267" r:id="rId16"/>
+    <p:sldId id="272" r:id="rId17"/>
+    <p:sldId id="273" r:id="rId18"/>
+    <p:sldId id="274" r:id="rId19"/>
+    <p:sldId id="275" r:id="rId20"/>
+    <p:sldId id="277" r:id="rId21"/>
+    <p:sldId id="281" r:id="rId22"/>
+    <p:sldId id="276" r:id="rId23"/>
   </p:sldIdLst>
   <p:sldSz cx="12192000" cy="6858000"/>
   <p:notesSz cx="6858000" cy="9144000"/>
@@ -214,7 +218,7 @@
           <a:p>
             <a:fld id="{A3F00E0A-26B8-438F-8C49-C4126C0B2F07}" type="datetimeFigureOut">
               <a:rPr lang="en-CA" smtClean="0"/>
-              <a:t>2026-09-13</a:t>
+              <a:t>2026-09-23</a:t>
             </a:fld>
             <a:endParaRPr lang="en-CA"/>
           </a:p>
@@ -610,10 +614,91 @@
           <a:bodyPr/>
           <a:lstStyle/>
           <a:p>
-            <a:r>
-              <a:rPr lang="en-CA" dirty="0"/>
-              <a:t>Take out specific values</a:t>
-            </a:r>
+            <a:endParaRPr lang="en-CA" dirty="0"/>
+          </a:p>
+        </p:txBody>
+      </p:sp>
+      <p:sp>
+        <p:nvSpPr>
+          <p:cNvPr id="4" name="Slide Number Placeholder 3"/>
+          <p:cNvSpPr>
+            <a:spLocks noGrp="1"/>
+          </p:cNvSpPr>
+          <p:nvPr>
+            <p:ph type="sldNum" sz="quarter" idx="5"/>
+          </p:nvPr>
+        </p:nvSpPr>
+        <p:spPr/>
+        <p:txBody>
+          <a:bodyPr/>
+          <a:lstStyle/>
+          <a:p>
+            <a:fld id="{6C0CC533-38F2-4480-88E0-3DE04AB45AF2}" type="slidenum">
+              <a:rPr lang="en-CA" smtClean="0"/>
+              <a:t>14</a:t>
+            </a:fld>
+            <a:endParaRPr lang="en-CA"/>
+          </a:p>
+        </p:txBody>
+      </p:sp>
+    </p:spTree>
+    <p:extLst>
+      <p:ext uri="{BB962C8B-B14F-4D97-AF65-F5344CB8AC3E}">
+        <p14:creationId xmlns:p14="http://schemas.microsoft.com/office/powerpoint/2010/main" val="2102681076"/>
+      </p:ext>
+    </p:extLst>
+  </p:cSld>
+  <p:clrMapOvr>
+    <a:masterClrMapping/>
+  </p:clrMapOvr>
+</p:notes>
+</file>
+
+<file path=ppt/notesSlides/notesSlide11.xml><?xml version="1.0" encoding="utf-8"?>
+<p:notes xmlns:a="http://schemas.openxmlformats.org/drawingml/2006/main" xmlns:r="http://schemas.openxmlformats.org/officeDocument/2006/relationships" xmlns:p="http://schemas.openxmlformats.org/presentationml/2006/main">
+  <p:cSld>
+    <p:spTree>
+      <p:nvGrpSpPr>
+        <p:cNvPr id="1" name=""/>
+        <p:cNvGrpSpPr/>
+        <p:nvPr/>
+      </p:nvGrpSpPr>
+      <p:grpSpPr>
+        <a:xfrm>
+          <a:off x="0" y="0"/>
+          <a:ext cx="0" cy="0"/>
+          <a:chOff x="0" y="0"/>
+          <a:chExt cx="0" cy="0"/>
+        </a:xfrm>
+      </p:grpSpPr>
+      <p:sp>
+        <p:nvSpPr>
+          <p:cNvPr id="2" name="Slide Image Placeholder 1"/>
+          <p:cNvSpPr>
+            <a:spLocks noGrp="1" noRot="1" noChangeAspect="1"/>
+          </p:cNvSpPr>
+          <p:nvPr>
+            <p:ph type="sldImg"/>
+          </p:nvPr>
+        </p:nvSpPr>
+        <p:spPr/>
+      </p:sp>
+      <p:sp>
+        <p:nvSpPr>
+          <p:cNvPr id="3" name="Notes Placeholder 2"/>
+          <p:cNvSpPr>
+            <a:spLocks noGrp="1"/>
+          </p:cNvSpPr>
+          <p:nvPr>
+            <p:ph type="body" idx="1"/>
+          </p:nvPr>
+        </p:nvSpPr>
+        <p:spPr/>
+        <p:txBody>
+          <a:bodyPr/>
+          <a:lstStyle/>
+          <a:p>
+            <a:endParaRPr lang="en-CA" dirty="0"/>
           </a:p>
         </p:txBody>
       </p:sp>
@@ -643,7 +728,420 @@
     </p:spTree>
     <p:extLst>
       <p:ext uri="{BB962C8B-B14F-4D97-AF65-F5344CB8AC3E}">
+        <p14:creationId xmlns:p14="http://schemas.microsoft.com/office/powerpoint/2010/main" val="92277621"/>
+      </p:ext>
+    </p:extLst>
+  </p:cSld>
+  <p:clrMapOvr>
+    <a:masterClrMapping/>
+  </p:clrMapOvr>
+</p:notes>
+</file>
+
+<file path=ppt/notesSlides/notesSlide12.xml><?xml version="1.0" encoding="utf-8"?>
+<p:notes xmlns:a="http://schemas.openxmlformats.org/drawingml/2006/main" xmlns:r="http://schemas.openxmlformats.org/officeDocument/2006/relationships" xmlns:p="http://schemas.openxmlformats.org/presentationml/2006/main">
+  <p:cSld>
+    <p:spTree>
+      <p:nvGrpSpPr>
+        <p:cNvPr id="1" name=""/>
+        <p:cNvGrpSpPr/>
+        <p:nvPr/>
+      </p:nvGrpSpPr>
+      <p:grpSpPr>
+        <a:xfrm>
+          <a:off x="0" y="0"/>
+          <a:ext cx="0" cy="0"/>
+          <a:chOff x="0" y="0"/>
+          <a:chExt cx="0" cy="0"/>
+        </a:xfrm>
+      </p:grpSpPr>
+      <p:sp>
+        <p:nvSpPr>
+          <p:cNvPr id="2" name="Slide Image Placeholder 1"/>
+          <p:cNvSpPr>
+            <a:spLocks noGrp="1" noRot="1" noChangeAspect="1"/>
+          </p:cNvSpPr>
+          <p:nvPr>
+            <p:ph type="sldImg"/>
+          </p:nvPr>
+        </p:nvSpPr>
+        <p:spPr/>
+      </p:sp>
+      <p:sp>
+        <p:nvSpPr>
+          <p:cNvPr id="3" name="Notes Placeholder 2"/>
+          <p:cNvSpPr>
+            <a:spLocks noGrp="1"/>
+          </p:cNvSpPr>
+          <p:nvPr>
+            <p:ph type="body" idx="1"/>
+          </p:nvPr>
+        </p:nvSpPr>
+        <p:spPr/>
+        <p:txBody>
+          <a:bodyPr/>
+          <a:lstStyle/>
+          <a:p>
+            <a:r>
+              <a:rPr lang="en-CA" dirty="0"/>
+              <a:t>blurry</a:t>
+            </a:r>
+          </a:p>
+        </p:txBody>
+      </p:sp>
+      <p:sp>
+        <p:nvSpPr>
+          <p:cNvPr id="4" name="Slide Number Placeholder 3"/>
+          <p:cNvSpPr>
+            <a:spLocks noGrp="1"/>
+          </p:cNvSpPr>
+          <p:nvPr>
+            <p:ph type="sldNum" sz="quarter" idx="5"/>
+          </p:nvPr>
+        </p:nvSpPr>
+        <p:spPr/>
+        <p:txBody>
+          <a:bodyPr/>
+          <a:lstStyle/>
+          <a:p>
+            <a:fld id="{6C0CC533-38F2-4480-88E0-3DE04AB45AF2}" type="slidenum">
+              <a:rPr lang="en-CA" smtClean="0"/>
+              <a:t>18</a:t>
+            </a:fld>
+            <a:endParaRPr lang="en-CA"/>
+          </a:p>
+        </p:txBody>
+      </p:sp>
+    </p:spTree>
+    <p:extLst>
+      <p:ext uri="{BB962C8B-B14F-4D97-AF65-F5344CB8AC3E}">
+        <p14:creationId xmlns:p14="http://schemas.microsoft.com/office/powerpoint/2010/main" val="986733767"/>
+      </p:ext>
+    </p:extLst>
+  </p:cSld>
+  <p:clrMapOvr>
+    <a:masterClrMapping/>
+  </p:clrMapOvr>
+</p:notes>
+</file>
+
+<file path=ppt/notesSlides/notesSlide13.xml><?xml version="1.0" encoding="utf-8"?>
+<p:notes xmlns:a="http://schemas.openxmlformats.org/drawingml/2006/main" xmlns:r="http://schemas.openxmlformats.org/officeDocument/2006/relationships" xmlns:p="http://schemas.openxmlformats.org/presentationml/2006/main">
+  <p:cSld>
+    <p:spTree>
+      <p:nvGrpSpPr>
+        <p:cNvPr id="1" name=""/>
+        <p:cNvGrpSpPr/>
+        <p:nvPr/>
+      </p:nvGrpSpPr>
+      <p:grpSpPr>
+        <a:xfrm>
+          <a:off x="0" y="0"/>
+          <a:ext cx="0" cy="0"/>
+          <a:chOff x="0" y="0"/>
+          <a:chExt cx="0" cy="0"/>
+        </a:xfrm>
+      </p:grpSpPr>
+      <p:sp>
+        <p:nvSpPr>
+          <p:cNvPr id="2" name="Slide Image Placeholder 1"/>
+          <p:cNvSpPr>
+            <a:spLocks noGrp="1" noRot="1" noChangeAspect="1"/>
+          </p:cNvSpPr>
+          <p:nvPr>
+            <p:ph type="sldImg"/>
+          </p:nvPr>
+        </p:nvSpPr>
+        <p:spPr/>
+      </p:sp>
+      <p:sp>
+        <p:nvSpPr>
+          <p:cNvPr id="3" name="Notes Placeholder 2"/>
+          <p:cNvSpPr>
+            <a:spLocks noGrp="1"/>
+          </p:cNvSpPr>
+          <p:nvPr>
+            <p:ph type="body" idx="1"/>
+          </p:nvPr>
+        </p:nvSpPr>
+        <p:spPr/>
+        <p:txBody>
+          <a:bodyPr/>
+          <a:lstStyle/>
+          <a:p>
+            <a:r>
+              <a:rPr lang="en-CA" dirty="0"/>
+              <a:t>Add that y-axis is median across balking, blurry</a:t>
+            </a:r>
+          </a:p>
+        </p:txBody>
+      </p:sp>
+      <p:sp>
+        <p:nvSpPr>
+          <p:cNvPr id="4" name="Slide Number Placeholder 3"/>
+          <p:cNvSpPr>
+            <a:spLocks noGrp="1"/>
+          </p:cNvSpPr>
+          <p:nvPr>
+            <p:ph type="sldNum" sz="quarter" idx="5"/>
+          </p:nvPr>
+        </p:nvSpPr>
+        <p:spPr/>
+        <p:txBody>
+          <a:bodyPr/>
+          <a:lstStyle/>
+          <a:p>
+            <a:fld id="{6C0CC533-38F2-4480-88E0-3DE04AB45AF2}" type="slidenum">
+              <a:rPr lang="en-CA" smtClean="0"/>
+              <a:t>19</a:t>
+            </a:fld>
+            <a:endParaRPr lang="en-CA"/>
+          </a:p>
+        </p:txBody>
+      </p:sp>
+    </p:spTree>
+    <p:extLst>
+      <p:ext uri="{BB962C8B-B14F-4D97-AF65-F5344CB8AC3E}">
         <p14:creationId xmlns:p14="http://schemas.microsoft.com/office/powerpoint/2010/main" val="1479815181"/>
+      </p:ext>
+    </p:extLst>
+  </p:cSld>
+  <p:clrMapOvr>
+    <a:masterClrMapping/>
+  </p:clrMapOvr>
+</p:notes>
+</file>
+
+<file path=ppt/notesSlides/notesSlide14.xml><?xml version="1.0" encoding="utf-8"?>
+<p:notes xmlns:a="http://schemas.openxmlformats.org/drawingml/2006/main" xmlns:r="http://schemas.openxmlformats.org/officeDocument/2006/relationships" xmlns:p="http://schemas.openxmlformats.org/presentationml/2006/main">
+  <p:cSld>
+    <p:spTree>
+      <p:nvGrpSpPr>
+        <p:cNvPr id="1" name=""/>
+        <p:cNvGrpSpPr/>
+        <p:nvPr/>
+      </p:nvGrpSpPr>
+      <p:grpSpPr>
+        <a:xfrm>
+          <a:off x="0" y="0"/>
+          <a:ext cx="0" cy="0"/>
+          <a:chOff x="0" y="0"/>
+          <a:chExt cx="0" cy="0"/>
+        </a:xfrm>
+      </p:grpSpPr>
+      <p:sp>
+        <p:nvSpPr>
+          <p:cNvPr id="2" name="Slide Image Placeholder 1"/>
+          <p:cNvSpPr>
+            <a:spLocks noGrp="1" noRot="1" noChangeAspect="1"/>
+          </p:cNvSpPr>
+          <p:nvPr>
+            <p:ph type="sldImg"/>
+          </p:nvPr>
+        </p:nvSpPr>
+        <p:spPr/>
+      </p:sp>
+      <p:sp>
+        <p:nvSpPr>
+          <p:cNvPr id="3" name="Notes Placeholder 2"/>
+          <p:cNvSpPr>
+            <a:spLocks noGrp="1"/>
+          </p:cNvSpPr>
+          <p:nvPr>
+            <p:ph type="body" idx="1"/>
+          </p:nvPr>
+        </p:nvSpPr>
+        <p:spPr/>
+        <p:txBody>
+          <a:bodyPr/>
+          <a:lstStyle/>
+          <a:p>
+            <a:r>
+              <a:rPr lang="en-CA" dirty="0"/>
+              <a:t>Y-axis?</a:t>
+            </a:r>
+          </a:p>
+          <a:p>
+            <a:endParaRPr lang="en-CA" dirty="0"/>
+          </a:p>
+          <a:p>
+            <a:r>
+              <a:rPr lang="en-CA" dirty="0"/>
+              <a:t>Add figure explaining tau or delay</a:t>
+            </a:r>
+          </a:p>
+          <a:p>
+            <a:endParaRPr lang="en-CA" dirty="0"/>
+          </a:p>
+          <a:p>
+            <a:r>
+              <a:rPr lang="en-CA" dirty="0"/>
+              <a:t>Add utilization performance, then compare – refer to picture</a:t>
+            </a:r>
+          </a:p>
+        </p:txBody>
+      </p:sp>
+      <p:sp>
+        <p:nvSpPr>
+          <p:cNvPr id="4" name="Slide Number Placeholder 3"/>
+          <p:cNvSpPr>
+            <a:spLocks noGrp="1"/>
+          </p:cNvSpPr>
+          <p:nvPr>
+            <p:ph type="sldNum" sz="quarter" idx="5"/>
+          </p:nvPr>
+        </p:nvSpPr>
+        <p:spPr/>
+        <p:txBody>
+          <a:bodyPr/>
+          <a:lstStyle/>
+          <a:p>
+            <a:fld id="{6C0CC533-38F2-4480-88E0-3DE04AB45AF2}" type="slidenum">
+              <a:rPr lang="en-CA" smtClean="0"/>
+              <a:t>20</a:t>
+            </a:fld>
+            <a:endParaRPr lang="en-CA"/>
+          </a:p>
+        </p:txBody>
+      </p:sp>
+    </p:spTree>
+    <p:extLst>
+      <p:ext uri="{BB962C8B-B14F-4D97-AF65-F5344CB8AC3E}">
+        <p14:creationId xmlns:p14="http://schemas.microsoft.com/office/powerpoint/2010/main" val="3503133459"/>
+      </p:ext>
+    </p:extLst>
+  </p:cSld>
+  <p:clrMapOvr>
+    <a:masterClrMapping/>
+  </p:clrMapOvr>
+</p:notes>
+</file>
+
+<file path=ppt/notesSlides/notesSlide15.xml><?xml version="1.0" encoding="utf-8"?>
+<p:notes xmlns:a="http://schemas.openxmlformats.org/drawingml/2006/main" xmlns:r="http://schemas.openxmlformats.org/officeDocument/2006/relationships" xmlns:p="http://schemas.openxmlformats.org/presentationml/2006/main">
+  <p:cSld>
+    <p:spTree>
+      <p:nvGrpSpPr>
+        <p:cNvPr id="1" name=""/>
+        <p:cNvGrpSpPr/>
+        <p:nvPr/>
+      </p:nvGrpSpPr>
+      <p:grpSpPr>
+        <a:xfrm>
+          <a:off x="0" y="0"/>
+          <a:ext cx="0" cy="0"/>
+          <a:chOff x="0" y="0"/>
+          <a:chExt cx="0" cy="0"/>
+        </a:xfrm>
+      </p:grpSpPr>
+      <p:sp>
+        <p:nvSpPr>
+          <p:cNvPr id="2" name="Slide Image Placeholder 1"/>
+          <p:cNvSpPr>
+            <a:spLocks noGrp="1" noRot="1" noChangeAspect="1"/>
+          </p:cNvSpPr>
+          <p:nvPr>
+            <p:ph type="sldImg"/>
+          </p:nvPr>
+        </p:nvSpPr>
+        <p:spPr/>
+      </p:sp>
+      <p:sp>
+        <p:nvSpPr>
+          <p:cNvPr id="3" name="Notes Placeholder 2"/>
+          <p:cNvSpPr>
+            <a:spLocks noGrp="1"/>
+          </p:cNvSpPr>
+          <p:nvPr>
+            <p:ph type="body" idx="1"/>
+          </p:nvPr>
+        </p:nvSpPr>
+        <p:spPr/>
+        <p:txBody>
+          <a:bodyPr/>
+          <a:lstStyle/>
+          <a:p>
+            <a:r>
+              <a:rPr lang="en-CA" dirty="0"/>
+              <a:t>Give one concrete example first, scenario of how both classes could win</a:t>
+            </a:r>
+          </a:p>
+          <a:p>
+            <a:endParaRPr lang="en-CA" dirty="0"/>
+          </a:p>
+          <a:p>
+            <a:r>
+              <a:rPr lang="en-CA" dirty="0"/>
+              <a:t>pareto improvement for served rate- win-wins</a:t>
+            </a:r>
+          </a:p>
+          <a:p>
+            <a:endParaRPr lang="en-CA" dirty="0"/>
+          </a:p>
+          <a:p>
+            <a:r>
+              <a:rPr lang="en-CA" dirty="0"/>
+              <a:t>Served rate optimization for horizon?, </a:t>
+            </a:r>
+          </a:p>
+          <a:p>
+            <a:endParaRPr lang="en-CA" dirty="0"/>
+          </a:p>
+          <a:p>
+            <a:pPr marL="0" marR="0" lvl="0" indent="0" algn="l" defTabSz="914400" rtl="0" eaLnBrk="1" fontAlgn="auto" latinLnBrk="0" hangingPunct="1">
+              <a:lnSpc>
+                <a:spcPct val="100000"/>
+              </a:lnSpc>
+              <a:spcBef>
+                <a:spcPts val="0"/>
+              </a:spcBef>
+              <a:spcAft>
+                <a:spcPts val="0"/>
+              </a:spcAft>
+              <a:buClrTx/>
+              <a:buSzTx/>
+              <a:buFontTx/>
+              <a:buNone/>
+              <a:tabLst/>
+              <a:defRPr/>
+            </a:pPr>
+            <a:r>
+              <a:rPr lang="en-CA" dirty="0"/>
+              <a:t>What about revenue findings?</a:t>
+            </a:r>
+          </a:p>
+          <a:p>
+            <a:endParaRPr lang="en-CA" dirty="0"/>
+          </a:p>
+        </p:txBody>
+      </p:sp>
+      <p:sp>
+        <p:nvSpPr>
+          <p:cNvPr id="4" name="Slide Number Placeholder 3"/>
+          <p:cNvSpPr>
+            <a:spLocks noGrp="1"/>
+          </p:cNvSpPr>
+          <p:nvPr>
+            <p:ph type="sldNum" sz="quarter" idx="5"/>
+          </p:nvPr>
+        </p:nvSpPr>
+        <p:spPr/>
+        <p:txBody>
+          <a:bodyPr/>
+          <a:lstStyle/>
+          <a:p>
+            <a:fld id="{6C0CC533-38F2-4480-88E0-3DE04AB45AF2}" type="slidenum">
+              <a:rPr lang="en-CA" smtClean="0"/>
+              <a:t>22</a:t>
+            </a:fld>
+            <a:endParaRPr lang="en-CA"/>
+          </a:p>
+        </p:txBody>
+      </p:sp>
+    </p:spTree>
+    <p:extLst>
+      <p:ext uri="{BB962C8B-B14F-4D97-AF65-F5344CB8AC3E}">
+        <p14:creationId xmlns:p14="http://schemas.microsoft.com/office/powerpoint/2010/main" val="443093012"/>
       </p:ext>
     </p:extLst>
   </p:cSld>
@@ -802,7 +1300,7 @@
           <a:p>
             <a:fld id="{6C0CC533-38F2-4480-88E0-3DE04AB45AF2}" type="slidenum">
               <a:rPr lang="en-CA" smtClean="0"/>
-              <a:t>6</a:t>
+              <a:t>5</a:t>
             </a:fld>
             <a:endParaRPr lang="en-CA"/>
           </a:p>
@@ -811,7 +1309,7 @@
     </p:spTree>
     <p:extLst>
       <p:ext uri="{BB962C8B-B14F-4D97-AF65-F5344CB8AC3E}">
-        <p14:creationId xmlns:p14="http://schemas.microsoft.com/office/powerpoint/2010/main" val="62005918"/>
+        <p14:creationId xmlns:p14="http://schemas.microsoft.com/office/powerpoint/2010/main" val="2180388719"/>
       </p:ext>
     </p:extLst>
   </p:cSld>
@@ -886,7 +1384,7 @@
           <a:p>
             <a:fld id="{6C0CC533-38F2-4480-88E0-3DE04AB45AF2}" type="slidenum">
               <a:rPr lang="en-CA" smtClean="0"/>
-              <a:t>7</a:t>
+              <a:t>6</a:t>
             </a:fld>
             <a:endParaRPr lang="en-CA"/>
           </a:p>
@@ -895,7 +1393,7 @@
     </p:spTree>
     <p:extLst>
       <p:ext uri="{BB962C8B-B14F-4D97-AF65-F5344CB8AC3E}">
-        <p14:creationId xmlns:p14="http://schemas.microsoft.com/office/powerpoint/2010/main" val="3577270864"/>
+        <p14:creationId xmlns:p14="http://schemas.microsoft.com/office/powerpoint/2010/main" val="62005918"/>
       </p:ext>
     </p:extLst>
   </p:cSld>
@@ -949,10 +1447,6 @@
           <a:bodyPr/>
           <a:lstStyle/>
           <a:p>
-            <a:r>
-              <a:rPr lang="en-CA"/>
-              <a:t>6 figures, served rate on y, class 1 and class 2 served rates on the figures</a:t>
-            </a:r>
             <a:endParaRPr lang="en-CA" dirty="0"/>
           </a:p>
         </p:txBody>
@@ -974,7 +1468,7 @@
           <a:p>
             <a:fld id="{6C0CC533-38F2-4480-88E0-3DE04AB45AF2}" type="slidenum">
               <a:rPr lang="en-CA" smtClean="0"/>
-              <a:t>9</a:t>
+              <a:t>7</a:t>
             </a:fld>
             <a:endParaRPr lang="en-CA"/>
           </a:p>
@@ -983,7 +1477,7 @@
     </p:spTree>
     <p:extLst>
       <p:ext uri="{BB962C8B-B14F-4D97-AF65-F5344CB8AC3E}">
-        <p14:creationId xmlns:p14="http://schemas.microsoft.com/office/powerpoint/2010/main" val="904085001"/>
+        <p14:creationId xmlns:p14="http://schemas.microsoft.com/office/powerpoint/2010/main" val="3577270864"/>
       </p:ext>
     </p:extLst>
   </p:cSld>
@@ -1037,7 +1531,10 @@
           <a:bodyPr/>
           <a:lstStyle/>
           <a:p>
-            <a:endParaRPr lang="en-CA" dirty="0"/>
+            <a:r>
+              <a:rPr lang="en-CA" dirty="0"/>
+              <a:t>Make sure formatting corresponds with the previous slide, put explanation top left</a:t>
+            </a:r>
           </a:p>
         </p:txBody>
       </p:sp>
@@ -1067,7 +1564,7 @@
     </p:spTree>
     <p:extLst>
       <p:ext uri="{BB962C8B-B14F-4D97-AF65-F5344CB8AC3E}">
-        <p14:creationId xmlns:p14="http://schemas.microsoft.com/office/powerpoint/2010/main" val="4286335202"/>
+        <p14:creationId xmlns:p14="http://schemas.microsoft.com/office/powerpoint/2010/main" val="2155782364"/>
       </p:ext>
     </p:extLst>
   </p:cSld>
@@ -1121,7 +1618,37 @@
           <a:bodyPr/>
           <a:lstStyle/>
           <a:p>
+            <a:r>
+              <a:rPr lang="en-CA" dirty="0"/>
+              <a:t>Slide 1 is three no-show figures</a:t>
+            </a:r>
+          </a:p>
+          <a:p>
             <a:endParaRPr lang="en-CA" dirty="0"/>
+          </a:p>
+          <a:p>
+            <a:r>
+              <a:rPr lang="en-CA" dirty="0"/>
+              <a:t>Can use red circles </a:t>
+            </a:r>
+          </a:p>
+          <a:p>
+            <a:endParaRPr lang="en-CA" dirty="0"/>
+          </a:p>
+          <a:p>
+            <a:r>
+              <a:rPr lang="en-CA" dirty="0"/>
+              <a:t>Change axis labels</a:t>
+            </a:r>
+          </a:p>
+          <a:p>
+            <a:endParaRPr lang="en-CA" dirty="0"/>
+          </a:p>
+          <a:p>
+            <a:r>
+              <a:rPr lang="en-CA" dirty="0"/>
+              <a:t>Take off specific numbers</a:t>
+            </a:r>
           </a:p>
         </p:txBody>
       </p:sp>
@@ -1151,7 +1678,7 @@
     </p:spTree>
     <p:extLst>
       <p:ext uri="{BB962C8B-B14F-4D97-AF65-F5344CB8AC3E}">
-        <p14:creationId xmlns:p14="http://schemas.microsoft.com/office/powerpoint/2010/main" val="2102681076"/>
+        <p14:creationId xmlns:p14="http://schemas.microsoft.com/office/powerpoint/2010/main" val="904085001"/>
       </p:ext>
     </p:extLst>
   </p:cSld>
@@ -1205,10 +1732,7 @@
           <a:bodyPr/>
           <a:lstStyle/>
           <a:p>
-            <a:r>
-              <a:rPr lang="en-CA" dirty="0"/>
-              <a:t>Switch 1 and 2</a:t>
-            </a:r>
+            <a:endParaRPr lang="en-CA" dirty="0"/>
           </a:p>
         </p:txBody>
       </p:sp>
@@ -1229,7 +1753,7 @@
           <a:p>
             <a:fld id="{6C0CC533-38F2-4480-88E0-3DE04AB45AF2}" type="slidenum">
               <a:rPr lang="en-CA" smtClean="0"/>
-              <a:t>13</a:t>
+              <a:t>12</a:t>
             </a:fld>
             <a:endParaRPr lang="en-CA"/>
           </a:p>
@@ -1238,7 +1762,7 @@
     </p:spTree>
     <p:extLst>
       <p:ext uri="{BB962C8B-B14F-4D97-AF65-F5344CB8AC3E}">
-        <p14:creationId xmlns:p14="http://schemas.microsoft.com/office/powerpoint/2010/main" val="92277621"/>
+        <p14:creationId xmlns:p14="http://schemas.microsoft.com/office/powerpoint/2010/main" val="1338042185"/>
       </p:ext>
     </p:extLst>
   </p:cSld>
@@ -1292,10 +1816,7 @@
           <a:bodyPr/>
           <a:lstStyle/>
           <a:p>
-            <a:r>
-              <a:rPr lang="en-CA" dirty="0"/>
-              <a:t>Served rate optimization?, change to magnitude for x axis</a:t>
-            </a:r>
+            <a:endParaRPr lang="en-CA" dirty="0"/>
           </a:p>
         </p:txBody>
       </p:sp>
@@ -1316,7 +1837,7 @@
           <a:p>
             <a:fld id="{6C0CC533-38F2-4480-88E0-3DE04AB45AF2}" type="slidenum">
               <a:rPr lang="en-CA" smtClean="0"/>
-              <a:t>15</a:t>
+              <a:t>13</a:t>
             </a:fld>
             <a:endParaRPr lang="en-CA"/>
           </a:p>
@@ -1325,7 +1846,7 @@
     </p:spTree>
     <p:extLst>
       <p:ext uri="{BB962C8B-B14F-4D97-AF65-F5344CB8AC3E}">
-        <p14:creationId xmlns:p14="http://schemas.microsoft.com/office/powerpoint/2010/main" val="986733767"/>
+        <p14:creationId xmlns:p14="http://schemas.microsoft.com/office/powerpoint/2010/main" val="4286335202"/>
       </p:ext>
     </p:extLst>
   </p:cSld>
@@ -1466,7 +1987,7 @@
           <a:p>
             <a:fld id="{7559F276-CA16-4B7F-AC4C-2EDD18BC89A1}" type="datetimeFigureOut">
               <a:rPr lang="en-CA" smtClean="0"/>
-              <a:t>2026-09-13</a:t>
+              <a:t>2026-09-23</a:t>
             </a:fld>
             <a:endParaRPr lang="en-CA"/>
           </a:p>
@@ -1636,7 +2157,7 @@
           <a:p>
             <a:fld id="{7559F276-CA16-4B7F-AC4C-2EDD18BC89A1}" type="datetimeFigureOut">
               <a:rPr lang="en-CA" smtClean="0"/>
-              <a:t>2026-09-13</a:t>
+              <a:t>2026-09-23</a:t>
             </a:fld>
             <a:endParaRPr lang="en-CA"/>
           </a:p>
@@ -1816,7 +2337,7 @@
           <a:p>
             <a:fld id="{7559F276-CA16-4B7F-AC4C-2EDD18BC89A1}" type="datetimeFigureOut">
               <a:rPr lang="en-CA" smtClean="0"/>
-              <a:t>2026-09-13</a:t>
+              <a:t>2026-09-23</a:t>
             </a:fld>
             <a:endParaRPr lang="en-CA"/>
           </a:p>
@@ -1986,7 +2507,7 @@
           <a:p>
             <a:fld id="{7559F276-CA16-4B7F-AC4C-2EDD18BC89A1}" type="datetimeFigureOut">
               <a:rPr lang="en-CA" smtClean="0"/>
-              <a:t>2026-09-13</a:t>
+              <a:t>2026-09-23</a:t>
             </a:fld>
             <a:endParaRPr lang="en-CA"/>
           </a:p>
@@ -2232,7 +2753,7 @@
           <a:p>
             <a:fld id="{7559F276-CA16-4B7F-AC4C-2EDD18BC89A1}" type="datetimeFigureOut">
               <a:rPr lang="en-CA" smtClean="0"/>
-              <a:t>2026-09-13</a:t>
+              <a:t>2026-09-23</a:t>
             </a:fld>
             <a:endParaRPr lang="en-CA"/>
           </a:p>
@@ -2464,7 +2985,7 @@
           <a:p>
             <a:fld id="{7559F276-CA16-4B7F-AC4C-2EDD18BC89A1}" type="datetimeFigureOut">
               <a:rPr lang="en-CA" smtClean="0"/>
-              <a:t>2026-09-13</a:t>
+              <a:t>2026-09-23</a:t>
             </a:fld>
             <a:endParaRPr lang="en-CA"/>
           </a:p>
@@ -2831,7 +3352,7 @@
           <a:p>
             <a:fld id="{7559F276-CA16-4B7F-AC4C-2EDD18BC89A1}" type="datetimeFigureOut">
               <a:rPr lang="en-CA" smtClean="0"/>
-              <a:t>2026-09-13</a:t>
+              <a:t>2026-09-23</a:t>
             </a:fld>
             <a:endParaRPr lang="en-CA"/>
           </a:p>
@@ -2949,7 +3470,7 @@
           <a:p>
             <a:fld id="{7559F276-CA16-4B7F-AC4C-2EDD18BC89A1}" type="datetimeFigureOut">
               <a:rPr lang="en-CA" smtClean="0"/>
-              <a:t>2026-09-13</a:t>
+              <a:t>2026-09-23</a:t>
             </a:fld>
             <a:endParaRPr lang="en-CA"/>
           </a:p>
@@ -3044,7 +3565,7 @@
           <a:p>
             <a:fld id="{7559F276-CA16-4B7F-AC4C-2EDD18BC89A1}" type="datetimeFigureOut">
               <a:rPr lang="en-CA" smtClean="0"/>
-              <a:t>2026-09-13</a:t>
+              <a:t>2026-09-23</a:t>
             </a:fld>
             <a:endParaRPr lang="en-CA"/>
           </a:p>
@@ -3321,7 +3842,7 @@
           <a:p>
             <a:fld id="{7559F276-CA16-4B7F-AC4C-2EDD18BC89A1}" type="datetimeFigureOut">
               <a:rPr lang="en-CA" smtClean="0"/>
-              <a:t>2026-09-13</a:t>
+              <a:t>2026-09-23</a:t>
             </a:fld>
             <a:endParaRPr lang="en-CA"/>
           </a:p>
@@ -3578,7 +4099,7 @@
           <a:p>
             <a:fld id="{7559F276-CA16-4B7F-AC4C-2EDD18BC89A1}" type="datetimeFigureOut">
               <a:rPr lang="en-CA" smtClean="0"/>
-              <a:t>2026-09-13</a:t>
+              <a:t>2026-09-23</a:t>
             </a:fld>
             <a:endParaRPr lang="en-CA"/>
           </a:p>
@@ -3791,7 +4312,7 @@
           <a:p>
             <a:fld id="{7559F276-CA16-4B7F-AC4C-2EDD18BC89A1}" type="datetimeFigureOut">
               <a:rPr lang="en-CA" smtClean="0"/>
-              <a:t>2026-09-13</a:t>
+              <a:t>2026-09-23</a:t>
             </a:fld>
             <a:endParaRPr lang="en-CA"/>
           </a:p>
@@ -4332,6 +4853,1138 @@
           <p:cNvPr id="2" name="Title 1">
             <a:extLst>
               <a:ext uri="{FF2B5EF4-FFF2-40B4-BE49-F238E27FC236}">
+                <a16:creationId xmlns:a16="http://schemas.microsoft.com/office/drawing/2014/main" id="{9C33FCA0-7281-4BE9-BD26-A09DD645F6D0}"/>
+              </a:ext>
+            </a:extLst>
+          </p:cNvPr>
+          <p:cNvSpPr>
+            <a:spLocks noGrp="1"/>
+          </p:cNvSpPr>
+          <p:nvPr>
+            <p:ph type="title"/>
+          </p:nvPr>
+        </p:nvSpPr>
+        <p:spPr>
+          <a:xfrm>
+            <a:off x="519651" y="21072"/>
+            <a:ext cx="10879554" cy="995271"/>
+          </a:xfrm>
+        </p:spPr>
+        <p:txBody>
+          <a:bodyPr>
+            <a:normAutofit fontScale="90000"/>
+          </a:bodyPr>
+          <a:lstStyle/>
+          <a:p>
+            <a:r>
+              <a:rPr lang="en-CA" dirty="0"/>
+              <a:t>No-show heavily impacts the class’s own served rate</a:t>
+            </a:r>
+          </a:p>
+        </p:txBody>
+      </p:sp>
+      <p:pic>
+        <p:nvPicPr>
+          <p:cNvPr id="13" name="Picture 12">
+            <a:extLst>
+              <a:ext uri="{FF2B5EF4-FFF2-40B4-BE49-F238E27FC236}">
+                <a16:creationId xmlns:a16="http://schemas.microsoft.com/office/drawing/2014/main" id="{8E6F38F5-161F-4F18-8269-4DCDFE3D9CBD}"/>
+              </a:ext>
+            </a:extLst>
+          </p:cNvPr>
+          <p:cNvPicPr>
+            <a:picLocks noChangeAspect="1"/>
+          </p:cNvPicPr>
+          <p:nvPr/>
+        </p:nvPicPr>
+        <p:blipFill>
+          <a:blip r:embed="rId3">
+            <a:extLst>
+              <a:ext uri="{28A0092B-C50C-407E-A947-70E740481C1C}">
+                <a14:useLocalDpi xmlns:a14="http://schemas.microsoft.com/office/drawing/2010/main" val="0"/>
+              </a:ext>
+            </a:extLst>
+          </a:blip>
+          <a:stretch>
+            <a:fillRect/>
+          </a:stretch>
+        </p:blipFill>
+        <p:spPr>
+          <a:xfrm>
+            <a:off x="519651" y="857751"/>
+            <a:ext cx="4735428" cy="2984448"/>
+          </a:xfrm>
+          <a:prstGeom prst="rect">
+            <a:avLst/>
+          </a:prstGeom>
+        </p:spPr>
+      </p:pic>
+      <p:pic>
+        <p:nvPicPr>
+          <p:cNvPr id="15" name="Picture 14">
+            <a:extLst>
+              <a:ext uri="{FF2B5EF4-FFF2-40B4-BE49-F238E27FC236}">
+                <a16:creationId xmlns:a16="http://schemas.microsoft.com/office/drawing/2014/main" id="{2C8A84CE-B2A0-4BD0-A858-F64E64014EC9}"/>
+              </a:ext>
+            </a:extLst>
+          </p:cNvPr>
+          <p:cNvPicPr>
+            <a:picLocks noChangeAspect="1"/>
+          </p:cNvPicPr>
+          <p:nvPr/>
+        </p:nvPicPr>
+        <p:blipFill>
+          <a:blip r:embed="rId4">
+            <a:extLst>
+              <a:ext uri="{28A0092B-C50C-407E-A947-70E740481C1C}">
+                <a14:useLocalDpi xmlns:a14="http://schemas.microsoft.com/office/drawing/2010/main" val="0"/>
+              </a:ext>
+            </a:extLst>
+          </a:blip>
+          <a:stretch>
+            <a:fillRect/>
+          </a:stretch>
+        </p:blipFill>
+        <p:spPr>
+          <a:xfrm>
+            <a:off x="519651" y="3778579"/>
+            <a:ext cx="4735429" cy="2984449"/>
+          </a:xfrm>
+          <a:prstGeom prst="rect">
+            <a:avLst/>
+          </a:prstGeom>
+        </p:spPr>
+      </p:pic>
+      <p:pic>
+        <p:nvPicPr>
+          <p:cNvPr id="19" name="Content Placeholder 18">
+            <a:extLst>
+              <a:ext uri="{FF2B5EF4-FFF2-40B4-BE49-F238E27FC236}">
+                <a16:creationId xmlns:a16="http://schemas.microsoft.com/office/drawing/2014/main" id="{BDF6EEBB-ED9C-4CA4-8619-C65E53317EFF}"/>
+              </a:ext>
+            </a:extLst>
+          </p:cNvPr>
+          <p:cNvPicPr>
+            <a:picLocks noGrp="1" noChangeAspect="1"/>
+          </p:cNvPicPr>
+          <p:nvPr>
+            <p:ph idx="1"/>
+          </p:nvPr>
+        </p:nvPicPr>
+        <p:blipFill>
+          <a:blip r:embed="rId5">
+            <a:extLst>
+              <a:ext uri="{28A0092B-C50C-407E-A947-70E740481C1C}">
+                <a14:useLocalDpi xmlns:a14="http://schemas.microsoft.com/office/drawing/2010/main" val="0"/>
+              </a:ext>
+            </a:extLst>
+          </a:blip>
+          <a:stretch>
+            <a:fillRect/>
+          </a:stretch>
+        </p:blipFill>
+        <p:spPr>
+          <a:xfrm>
+            <a:off x="5758787" y="952721"/>
+            <a:ext cx="4434049" cy="2794508"/>
+          </a:xfrm>
+        </p:spPr>
+      </p:pic>
+      <p:sp>
+        <p:nvSpPr>
+          <p:cNvPr id="20" name="Content Placeholder 11">
+            <a:extLst>
+              <a:ext uri="{FF2B5EF4-FFF2-40B4-BE49-F238E27FC236}">
+                <a16:creationId xmlns:a16="http://schemas.microsoft.com/office/drawing/2014/main" id="{8F0E5391-B710-4675-9FC0-8DA497457A3A}"/>
+              </a:ext>
+            </a:extLst>
+          </p:cNvPr>
+          <p:cNvSpPr txBox="1">
+            <a:spLocks/>
+          </p:cNvSpPr>
+          <p:nvPr/>
+        </p:nvSpPr>
+        <p:spPr>
+          <a:xfrm>
+            <a:off x="5758785" y="3968521"/>
+            <a:ext cx="6060524" cy="2794507"/>
+          </a:xfrm>
+          <a:prstGeom prst="rect">
+            <a:avLst/>
+          </a:prstGeom>
+        </p:spPr>
+        <p:txBody>
+          <a:bodyPr vert="horz" lIns="91440" tIns="45720" rIns="91440" bIns="45720" rtlCol="0">
+            <a:normAutofit lnSpcReduction="10000"/>
+          </a:bodyPr>
+          <a:lstStyle>
+            <a:lvl1pPr marL="228600" indent="-228600" algn="l" defTabSz="914400" rtl="0" eaLnBrk="1" latinLnBrk="0" hangingPunct="1">
+              <a:lnSpc>
+                <a:spcPct val="90000"/>
+              </a:lnSpc>
+              <a:spcBef>
+                <a:spcPts val="1000"/>
+              </a:spcBef>
+              <a:buFont typeface="Arial" panose="020B0604020202020204" pitchFamily="34" charset="0"/>
+              <a:buChar char="•"/>
+              <a:defRPr sz="2800" kern="1200">
+                <a:solidFill>
+                  <a:schemeClr val="tx1"/>
+                </a:solidFill>
+                <a:latin typeface="+mn-lt"/>
+                <a:ea typeface="+mn-ea"/>
+                <a:cs typeface="+mn-cs"/>
+              </a:defRPr>
+            </a:lvl1pPr>
+            <a:lvl2pPr marL="685800" indent="-228600" algn="l" defTabSz="914400" rtl="0" eaLnBrk="1" latinLnBrk="0" hangingPunct="1">
+              <a:lnSpc>
+                <a:spcPct val="90000"/>
+              </a:lnSpc>
+              <a:spcBef>
+                <a:spcPts val="500"/>
+              </a:spcBef>
+              <a:buFont typeface="Arial" panose="020B0604020202020204" pitchFamily="34" charset="0"/>
+              <a:buChar char="•"/>
+              <a:defRPr sz="2400" kern="1200">
+                <a:solidFill>
+                  <a:schemeClr val="tx1"/>
+                </a:solidFill>
+                <a:latin typeface="+mn-lt"/>
+                <a:ea typeface="+mn-ea"/>
+                <a:cs typeface="+mn-cs"/>
+              </a:defRPr>
+            </a:lvl2pPr>
+            <a:lvl3pPr marL="1143000" indent="-228600" algn="l" defTabSz="914400" rtl="0" eaLnBrk="1" latinLnBrk="0" hangingPunct="1">
+              <a:lnSpc>
+                <a:spcPct val="90000"/>
+              </a:lnSpc>
+              <a:spcBef>
+                <a:spcPts val="500"/>
+              </a:spcBef>
+              <a:buFont typeface="Arial" panose="020B0604020202020204" pitchFamily="34" charset="0"/>
+              <a:buChar char="•"/>
+              <a:defRPr sz="2000" kern="1200">
+                <a:solidFill>
+                  <a:schemeClr val="tx1"/>
+                </a:solidFill>
+                <a:latin typeface="+mn-lt"/>
+                <a:ea typeface="+mn-ea"/>
+                <a:cs typeface="+mn-cs"/>
+              </a:defRPr>
+            </a:lvl3pPr>
+            <a:lvl4pPr marL="1600200" indent="-228600" algn="l" defTabSz="914400" rtl="0" eaLnBrk="1" latinLnBrk="0" hangingPunct="1">
+              <a:lnSpc>
+                <a:spcPct val="90000"/>
+              </a:lnSpc>
+              <a:spcBef>
+                <a:spcPts val="500"/>
+              </a:spcBef>
+              <a:buFont typeface="Arial" panose="020B0604020202020204" pitchFamily="34" charset="0"/>
+              <a:buChar char="•"/>
+              <a:defRPr sz="1800" kern="1200">
+                <a:solidFill>
+                  <a:schemeClr val="tx1"/>
+                </a:solidFill>
+                <a:latin typeface="+mn-lt"/>
+                <a:ea typeface="+mn-ea"/>
+                <a:cs typeface="+mn-cs"/>
+              </a:defRPr>
+            </a:lvl4pPr>
+            <a:lvl5pPr marL="2057400" indent="-228600" algn="l" defTabSz="914400" rtl="0" eaLnBrk="1" latinLnBrk="0" hangingPunct="1">
+              <a:lnSpc>
+                <a:spcPct val="90000"/>
+              </a:lnSpc>
+              <a:spcBef>
+                <a:spcPts val="500"/>
+              </a:spcBef>
+              <a:buFont typeface="Arial" panose="020B0604020202020204" pitchFamily="34" charset="0"/>
+              <a:buChar char="•"/>
+              <a:defRPr sz="1800" kern="1200">
+                <a:solidFill>
+                  <a:schemeClr val="tx1"/>
+                </a:solidFill>
+                <a:latin typeface="+mn-lt"/>
+                <a:ea typeface="+mn-ea"/>
+                <a:cs typeface="+mn-cs"/>
+              </a:defRPr>
+            </a:lvl5pPr>
+            <a:lvl6pPr marL="2514600" indent="-228600" algn="l" defTabSz="914400" rtl="0" eaLnBrk="1" latinLnBrk="0" hangingPunct="1">
+              <a:lnSpc>
+                <a:spcPct val="90000"/>
+              </a:lnSpc>
+              <a:spcBef>
+                <a:spcPts val="500"/>
+              </a:spcBef>
+              <a:buFont typeface="Arial" panose="020B0604020202020204" pitchFamily="34" charset="0"/>
+              <a:buChar char="•"/>
+              <a:defRPr sz="1800" kern="1200">
+                <a:solidFill>
+                  <a:schemeClr val="tx1"/>
+                </a:solidFill>
+                <a:latin typeface="+mn-lt"/>
+                <a:ea typeface="+mn-ea"/>
+                <a:cs typeface="+mn-cs"/>
+              </a:defRPr>
+            </a:lvl6pPr>
+            <a:lvl7pPr marL="2971800" indent="-228600" algn="l" defTabSz="914400" rtl="0" eaLnBrk="1" latinLnBrk="0" hangingPunct="1">
+              <a:lnSpc>
+                <a:spcPct val="90000"/>
+              </a:lnSpc>
+              <a:spcBef>
+                <a:spcPts val="500"/>
+              </a:spcBef>
+              <a:buFont typeface="Arial" panose="020B0604020202020204" pitchFamily="34" charset="0"/>
+              <a:buChar char="•"/>
+              <a:defRPr sz="1800" kern="1200">
+                <a:solidFill>
+                  <a:schemeClr val="tx1"/>
+                </a:solidFill>
+                <a:latin typeface="+mn-lt"/>
+                <a:ea typeface="+mn-ea"/>
+                <a:cs typeface="+mn-cs"/>
+              </a:defRPr>
+            </a:lvl7pPr>
+            <a:lvl8pPr marL="3429000" indent="-228600" algn="l" defTabSz="914400" rtl="0" eaLnBrk="1" latinLnBrk="0" hangingPunct="1">
+              <a:lnSpc>
+                <a:spcPct val="90000"/>
+              </a:lnSpc>
+              <a:spcBef>
+                <a:spcPts val="500"/>
+              </a:spcBef>
+              <a:buFont typeface="Arial" panose="020B0604020202020204" pitchFamily="34" charset="0"/>
+              <a:buChar char="•"/>
+              <a:defRPr sz="1800" kern="1200">
+                <a:solidFill>
+                  <a:schemeClr val="tx1"/>
+                </a:solidFill>
+                <a:latin typeface="+mn-lt"/>
+                <a:ea typeface="+mn-ea"/>
+                <a:cs typeface="+mn-cs"/>
+              </a:defRPr>
+            </a:lvl8pPr>
+            <a:lvl9pPr marL="3886200" indent="-228600" algn="l" defTabSz="914400" rtl="0" eaLnBrk="1" latinLnBrk="0" hangingPunct="1">
+              <a:lnSpc>
+                <a:spcPct val="90000"/>
+              </a:lnSpc>
+              <a:spcBef>
+                <a:spcPts val="500"/>
+              </a:spcBef>
+              <a:buFont typeface="Arial" panose="020B0604020202020204" pitchFamily="34" charset="0"/>
+              <a:buChar char="•"/>
+              <a:defRPr sz="1800" kern="1200">
+                <a:solidFill>
+                  <a:schemeClr val="tx1"/>
+                </a:solidFill>
+                <a:latin typeface="+mn-lt"/>
+                <a:ea typeface="+mn-ea"/>
+                <a:cs typeface="+mn-cs"/>
+              </a:defRPr>
+            </a:lvl9pPr>
+          </a:lstStyle>
+          <a:p>
+            <a:r>
+              <a:rPr lang="en-CA" sz="2400" dirty="0"/>
+              <a:t>No-show’s served rate impacts come from the change in each class’s post probability. </a:t>
+            </a:r>
+          </a:p>
+          <a:p>
+            <a:endParaRPr lang="en-CA" sz="1100" dirty="0"/>
+          </a:p>
+          <a:p>
+            <a:r>
+              <a:rPr lang="en-CA" sz="2400" dirty="0"/>
+              <a:t>This impact is most severe from pre probability with low demand.</a:t>
+            </a:r>
+          </a:p>
+          <a:p>
+            <a:endParaRPr lang="en-CA" sz="1600" dirty="0"/>
+          </a:p>
+          <a:p>
+            <a:r>
+              <a:rPr lang="en-CA" sz="2400" dirty="0"/>
+              <a:t>No-shows do not impact the other class’s served rate.</a:t>
+            </a:r>
+          </a:p>
+        </p:txBody>
+      </p:sp>
+    </p:spTree>
+    <p:extLst>
+      <p:ext uri="{BB962C8B-B14F-4D97-AF65-F5344CB8AC3E}">
+        <p14:creationId xmlns:p14="http://schemas.microsoft.com/office/powerpoint/2010/main" val="3520689135"/>
+      </p:ext>
+    </p:extLst>
+  </p:cSld>
+  <p:clrMapOvr>
+    <a:masterClrMapping/>
+  </p:clrMapOvr>
+</p:sld>
+</file>
+
+<file path=ppt/slides/slide11.xml><?xml version="1.0" encoding="utf-8"?>
+<p:sld xmlns:a="http://schemas.openxmlformats.org/drawingml/2006/main" xmlns:r="http://schemas.openxmlformats.org/officeDocument/2006/relationships" xmlns:p="http://schemas.openxmlformats.org/presentationml/2006/main">
+  <p:cSld>
+    <p:spTree>
+      <p:nvGrpSpPr>
+        <p:cNvPr id="1" name=""/>
+        <p:cNvGrpSpPr/>
+        <p:nvPr/>
+      </p:nvGrpSpPr>
+      <p:grpSpPr>
+        <a:xfrm>
+          <a:off x="0" y="0"/>
+          <a:ext cx="0" cy="0"/>
+          <a:chOff x="0" y="0"/>
+          <a:chExt cx="0" cy="0"/>
+        </a:xfrm>
+      </p:grpSpPr>
+      <p:sp>
+        <p:nvSpPr>
+          <p:cNvPr id="2" name="Title 1">
+            <a:extLst>
+              <a:ext uri="{FF2B5EF4-FFF2-40B4-BE49-F238E27FC236}">
+                <a16:creationId xmlns:a16="http://schemas.microsoft.com/office/drawing/2014/main" id="{ED0526D7-4325-4EAD-83C4-EFAEFFC15851}"/>
+              </a:ext>
+            </a:extLst>
+          </p:cNvPr>
+          <p:cNvSpPr>
+            <a:spLocks noGrp="1"/>
+          </p:cNvSpPr>
+          <p:nvPr>
+            <p:ph type="title"/>
+          </p:nvPr>
+        </p:nvSpPr>
+        <p:spPr>
+          <a:xfrm>
+            <a:off x="672335" y="0"/>
+            <a:ext cx="11369843" cy="900538"/>
+          </a:xfrm>
+        </p:spPr>
+        <p:txBody>
+          <a:bodyPr>
+            <a:normAutofit/>
+          </a:bodyPr>
+          <a:lstStyle/>
+          <a:p>
+            <a:r>
+              <a:rPr lang="en-CA" sz="4000" dirty="0"/>
+              <a:t>Balking impacts both classes’ served rate</a:t>
+            </a:r>
+          </a:p>
+        </p:txBody>
+      </p:sp>
+      <p:sp>
+        <p:nvSpPr>
+          <p:cNvPr id="18" name="Content Placeholder 2">
+            <a:extLst>
+              <a:ext uri="{FF2B5EF4-FFF2-40B4-BE49-F238E27FC236}">
+                <a16:creationId xmlns:a16="http://schemas.microsoft.com/office/drawing/2014/main" id="{8446729B-0594-486B-9E45-8E755FCA0CAA}"/>
+              </a:ext>
+            </a:extLst>
+          </p:cNvPr>
+          <p:cNvSpPr txBox="1">
+            <a:spLocks/>
+          </p:cNvSpPr>
+          <p:nvPr/>
+        </p:nvSpPr>
+        <p:spPr>
+          <a:xfrm>
+            <a:off x="5997659" y="3993944"/>
+            <a:ext cx="5209057" cy="2567277"/>
+          </a:xfrm>
+          <a:prstGeom prst="rect">
+            <a:avLst/>
+          </a:prstGeom>
+        </p:spPr>
+        <p:txBody>
+          <a:bodyPr vert="horz" lIns="91440" tIns="45720" rIns="91440" bIns="45720" rtlCol="0">
+            <a:normAutofit lnSpcReduction="10000"/>
+          </a:bodyPr>
+          <a:lstStyle>
+            <a:lvl1pPr marL="228600" indent="-228600" algn="l" defTabSz="914400" rtl="0" eaLnBrk="1" latinLnBrk="0" hangingPunct="1">
+              <a:lnSpc>
+                <a:spcPct val="90000"/>
+              </a:lnSpc>
+              <a:spcBef>
+                <a:spcPts val="1000"/>
+              </a:spcBef>
+              <a:buFont typeface="Arial" panose="020B0604020202020204" pitchFamily="34" charset="0"/>
+              <a:buChar char="•"/>
+              <a:defRPr sz="2800" kern="1200">
+                <a:solidFill>
+                  <a:schemeClr val="tx1"/>
+                </a:solidFill>
+                <a:latin typeface="+mn-lt"/>
+                <a:ea typeface="+mn-ea"/>
+                <a:cs typeface="+mn-cs"/>
+              </a:defRPr>
+            </a:lvl1pPr>
+            <a:lvl2pPr marL="685800" indent="-228600" algn="l" defTabSz="914400" rtl="0" eaLnBrk="1" latinLnBrk="0" hangingPunct="1">
+              <a:lnSpc>
+                <a:spcPct val="90000"/>
+              </a:lnSpc>
+              <a:spcBef>
+                <a:spcPts val="500"/>
+              </a:spcBef>
+              <a:buFont typeface="Arial" panose="020B0604020202020204" pitchFamily="34" charset="0"/>
+              <a:buChar char="•"/>
+              <a:defRPr sz="2400" kern="1200">
+                <a:solidFill>
+                  <a:schemeClr val="tx1"/>
+                </a:solidFill>
+                <a:latin typeface="+mn-lt"/>
+                <a:ea typeface="+mn-ea"/>
+                <a:cs typeface="+mn-cs"/>
+              </a:defRPr>
+            </a:lvl2pPr>
+            <a:lvl3pPr marL="1143000" indent="-228600" algn="l" defTabSz="914400" rtl="0" eaLnBrk="1" latinLnBrk="0" hangingPunct="1">
+              <a:lnSpc>
+                <a:spcPct val="90000"/>
+              </a:lnSpc>
+              <a:spcBef>
+                <a:spcPts val="500"/>
+              </a:spcBef>
+              <a:buFont typeface="Arial" panose="020B0604020202020204" pitchFamily="34" charset="0"/>
+              <a:buChar char="•"/>
+              <a:defRPr sz="2000" kern="1200">
+                <a:solidFill>
+                  <a:schemeClr val="tx1"/>
+                </a:solidFill>
+                <a:latin typeface="+mn-lt"/>
+                <a:ea typeface="+mn-ea"/>
+                <a:cs typeface="+mn-cs"/>
+              </a:defRPr>
+            </a:lvl3pPr>
+            <a:lvl4pPr marL="1600200" indent="-228600" algn="l" defTabSz="914400" rtl="0" eaLnBrk="1" latinLnBrk="0" hangingPunct="1">
+              <a:lnSpc>
+                <a:spcPct val="90000"/>
+              </a:lnSpc>
+              <a:spcBef>
+                <a:spcPts val="500"/>
+              </a:spcBef>
+              <a:buFont typeface="Arial" panose="020B0604020202020204" pitchFamily="34" charset="0"/>
+              <a:buChar char="•"/>
+              <a:defRPr sz="1800" kern="1200">
+                <a:solidFill>
+                  <a:schemeClr val="tx1"/>
+                </a:solidFill>
+                <a:latin typeface="+mn-lt"/>
+                <a:ea typeface="+mn-ea"/>
+                <a:cs typeface="+mn-cs"/>
+              </a:defRPr>
+            </a:lvl4pPr>
+            <a:lvl5pPr marL="2057400" indent="-228600" algn="l" defTabSz="914400" rtl="0" eaLnBrk="1" latinLnBrk="0" hangingPunct="1">
+              <a:lnSpc>
+                <a:spcPct val="90000"/>
+              </a:lnSpc>
+              <a:spcBef>
+                <a:spcPts val="500"/>
+              </a:spcBef>
+              <a:buFont typeface="Arial" panose="020B0604020202020204" pitchFamily="34" charset="0"/>
+              <a:buChar char="•"/>
+              <a:defRPr sz="1800" kern="1200">
+                <a:solidFill>
+                  <a:schemeClr val="tx1"/>
+                </a:solidFill>
+                <a:latin typeface="+mn-lt"/>
+                <a:ea typeface="+mn-ea"/>
+                <a:cs typeface="+mn-cs"/>
+              </a:defRPr>
+            </a:lvl5pPr>
+            <a:lvl6pPr marL="2514600" indent="-228600" algn="l" defTabSz="914400" rtl="0" eaLnBrk="1" latinLnBrk="0" hangingPunct="1">
+              <a:lnSpc>
+                <a:spcPct val="90000"/>
+              </a:lnSpc>
+              <a:spcBef>
+                <a:spcPts val="500"/>
+              </a:spcBef>
+              <a:buFont typeface="Arial" panose="020B0604020202020204" pitchFamily="34" charset="0"/>
+              <a:buChar char="•"/>
+              <a:defRPr sz="1800" kern="1200">
+                <a:solidFill>
+                  <a:schemeClr val="tx1"/>
+                </a:solidFill>
+                <a:latin typeface="+mn-lt"/>
+                <a:ea typeface="+mn-ea"/>
+                <a:cs typeface="+mn-cs"/>
+              </a:defRPr>
+            </a:lvl6pPr>
+            <a:lvl7pPr marL="2971800" indent="-228600" algn="l" defTabSz="914400" rtl="0" eaLnBrk="1" latinLnBrk="0" hangingPunct="1">
+              <a:lnSpc>
+                <a:spcPct val="90000"/>
+              </a:lnSpc>
+              <a:spcBef>
+                <a:spcPts val="500"/>
+              </a:spcBef>
+              <a:buFont typeface="Arial" panose="020B0604020202020204" pitchFamily="34" charset="0"/>
+              <a:buChar char="•"/>
+              <a:defRPr sz="1800" kern="1200">
+                <a:solidFill>
+                  <a:schemeClr val="tx1"/>
+                </a:solidFill>
+                <a:latin typeface="+mn-lt"/>
+                <a:ea typeface="+mn-ea"/>
+                <a:cs typeface="+mn-cs"/>
+              </a:defRPr>
+            </a:lvl7pPr>
+            <a:lvl8pPr marL="3429000" indent="-228600" algn="l" defTabSz="914400" rtl="0" eaLnBrk="1" latinLnBrk="0" hangingPunct="1">
+              <a:lnSpc>
+                <a:spcPct val="90000"/>
+              </a:lnSpc>
+              <a:spcBef>
+                <a:spcPts val="500"/>
+              </a:spcBef>
+              <a:buFont typeface="Arial" panose="020B0604020202020204" pitchFamily="34" charset="0"/>
+              <a:buChar char="•"/>
+              <a:defRPr sz="1800" kern="1200">
+                <a:solidFill>
+                  <a:schemeClr val="tx1"/>
+                </a:solidFill>
+                <a:latin typeface="+mn-lt"/>
+                <a:ea typeface="+mn-ea"/>
+                <a:cs typeface="+mn-cs"/>
+              </a:defRPr>
+            </a:lvl8pPr>
+            <a:lvl9pPr marL="3886200" indent="-228600" algn="l" defTabSz="914400" rtl="0" eaLnBrk="1" latinLnBrk="0" hangingPunct="1">
+              <a:lnSpc>
+                <a:spcPct val="90000"/>
+              </a:lnSpc>
+              <a:spcBef>
+                <a:spcPts val="500"/>
+              </a:spcBef>
+              <a:buFont typeface="Arial" panose="020B0604020202020204" pitchFamily="34" charset="0"/>
+              <a:buChar char="•"/>
+              <a:defRPr sz="1800" kern="1200">
+                <a:solidFill>
+                  <a:schemeClr val="tx1"/>
+                </a:solidFill>
+                <a:latin typeface="+mn-lt"/>
+                <a:ea typeface="+mn-ea"/>
+                <a:cs typeface="+mn-cs"/>
+              </a:defRPr>
+            </a:lvl9pPr>
+          </a:lstStyle>
+          <a:p>
+            <a:r>
+              <a:rPr lang="en-CA" dirty="0"/>
+              <a:t>Class 1 balking </a:t>
+            </a:r>
+            <a:r>
+              <a:rPr lang="en-CA" dirty="0">
+                <a:solidFill>
+                  <a:srgbClr val="C00000"/>
+                </a:solidFill>
+              </a:rPr>
+              <a:t>positively impacts</a:t>
+            </a:r>
+            <a:r>
+              <a:rPr lang="en-CA" dirty="0"/>
+              <a:t> Class 2’s served rate.  </a:t>
+            </a:r>
+          </a:p>
+          <a:p>
+            <a:endParaRPr lang="en-CA" dirty="0"/>
+          </a:p>
+          <a:p>
+            <a:r>
+              <a:rPr lang="en-CA" dirty="0"/>
+              <a:t>This impact peaks with pre-threshold balking at low to moderate demand.</a:t>
+            </a:r>
+          </a:p>
+          <a:p>
+            <a:pPr marL="0" indent="0">
+              <a:buFont typeface="Arial" panose="020B0604020202020204" pitchFamily="34" charset="0"/>
+              <a:buNone/>
+            </a:pPr>
+            <a:endParaRPr lang="en-CA" sz="2400" dirty="0"/>
+          </a:p>
+          <a:p>
+            <a:pPr marL="0" indent="0">
+              <a:buFont typeface="Arial" panose="020B0604020202020204" pitchFamily="34" charset="0"/>
+              <a:buNone/>
+            </a:pPr>
+            <a:endParaRPr lang="en-CA" dirty="0"/>
+          </a:p>
+        </p:txBody>
+      </p:sp>
+      <p:pic>
+        <p:nvPicPr>
+          <p:cNvPr id="6" name="Picture 5">
+            <a:extLst>
+              <a:ext uri="{FF2B5EF4-FFF2-40B4-BE49-F238E27FC236}">
+                <a16:creationId xmlns:a16="http://schemas.microsoft.com/office/drawing/2014/main" id="{0BBFF403-5229-4AC7-8508-370FD4C427F6}"/>
+              </a:ext>
+            </a:extLst>
+          </p:cNvPr>
+          <p:cNvPicPr>
+            <a:picLocks noChangeAspect="1"/>
+          </p:cNvPicPr>
+          <p:nvPr/>
+        </p:nvPicPr>
+        <p:blipFill>
+          <a:blip r:embed="rId3">
+            <a:extLst>
+              <a:ext uri="{28A0092B-C50C-407E-A947-70E740481C1C}">
+                <a14:useLocalDpi xmlns:a14="http://schemas.microsoft.com/office/drawing/2010/main" val="0"/>
+              </a:ext>
+            </a:extLst>
+          </a:blip>
+          <a:stretch>
+            <a:fillRect/>
+          </a:stretch>
+        </p:blipFill>
+        <p:spPr>
+          <a:xfrm>
+            <a:off x="786635" y="3936793"/>
+            <a:ext cx="4544401" cy="2864056"/>
+          </a:xfrm>
+          <a:prstGeom prst="rect">
+            <a:avLst/>
+          </a:prstGeom>
+        </p:spPr>
+      </p:pic>
+      <p:pic>
+        <p:nvPicPr>
+          <p:cNvPr id="8" name="Picture 7">
+            <a:extLst>
+              <a:ext uri="{FF2B5EF4-FFF2-40B4-BE49-F238E27FC236}">
+                <a16:creationId xmlns:a16="http://schemas.microsoft.com/office/drawing/2014/main" id="{C6145B6E-EA69-4588-ADFF-7FFA886F5C8F}"/>
+              </a:ext>
+            </a:extLst>
+          </p:cNvPr>
+          <p:cNvPicPr>
+            <a:picLocks noChangeAspect="1"/>
+          </p:cNvPicPr>
+          <p:nvPr/>
+        </p:nvPicPr>
+        <p:blipFill>
+          <a:blip r:embed="rId4">
+            <a:extLst>
+              <a:ext uri="{28A0092B-C50C-407E-A947-70E740481C1C}">
+                <a14:useLocalDpi xmlns:a14="http://schemas.microsoft.com/office/drawing/2010/main" val="0"/>
+              </a:ext>
+            </a:extLst>
+          </a:blip>
+          <a:stretch>
+            <a:fillRect/>
+          </a:stretch>
+        </p:blipFill>
+        <p:spPr>
+          <a:xfrm>
+            <a:off x="5997660" y="900538"/>
+            <a:ext cx="4417839" cy="2784291"/>
+          </a:xfrm>
+          <a:prstGeom prst="rect">
+            <a:avLst/>
+          </a:prstGeom>
+        </p:spPr>
+      </p:pic>
+      <p:pic>
+        <p:nvPicPr>
+          <p:cNvPr id="10" name="Picture 9">
+            <a:extLst>
+              <a:ext uri="{FF2B5EF4-FFF2-40B4-BE49-F238E27FC236}">
+                <a16:creationId xmlns:a16="http://schemas.microsoft.com/office/drawing/2014/main" id="{A8017509-B648-40AF-9201-85694E1A34F3}"/>
+              </a:ext>
+            </a:extLst>
+          </p:cNvPr>
+          <p:cNvPicPr>
+            <a:picLocks noChangeAspect="1"/>
+          </p:cNvPicPr>
+          <p:nvPr/>
+        </p:nvPicPr>
+        <p:blipFill>
+          <a:blip r:embed="rId5">
+            <a:extLst>
+              <a:ext uri="{28A0092B-C50C-407E-A947-70E740481C1C}">
+                <a14:useLocalDpi xmlns:a14="http://schemas.microsoft.com/office/drawing/2010/main" val="0"/>
+              </a:ext>
+            </a:extLst>
+          </a:blip>
+          <a:stretch>
+            <a:fillRect/>
+          </a:stretch>
+        </p:blipFill>
+        <p:spPr>
+          <a:xfrm>
+            <a:off x="786635" y="860657"/>
+            <a:ext cx="4544401" cy="2864055"/>
+          </a:xfrm>
+          <a:prstGeom prst="rect">
+            <a:avLst/>
+          </a:prstGeom>
+        </p:spPr>
+      </p:pic>
+      <p:sp>
+        <p:nvSpPr>
+          <p:cNvPr id="19" name="Oval 18">
+            <a:extLst>
+              <a:ext uri="{FF2B5EF4-FFF2-40B4-BE49-F238E27FC236}">
+                <a16:creationId xmlns:a16="http://schemas.microsoft.com/office/drawing/2014/main" id="{8A3DE8B4-4215-4132-915E-7B45A1617088}"/>
+              </a:ext>
+            </a:extLst>
+          </p:cNvPr>
+          <p:cNvSpPr/>
+          <p:nvPr/>
+        </p:nvSpPr>
+        <p:spPr>
+          <a:xfrm>
+            <a:off x="1241832" y="944880"/>
+            <a:ext cx="1447002" cy="1466465"/>
+          </a:xfrm>
+          <a:prstGeom prst="ellipse">
+            <a:avLst/>
+          </a:prstGeom>
+          <a:noFill/>
+          <a:ln>
+            <a:solidFill>
+              <a:srgbClr val="C00000"/>
+            </a:solidFill>
+          </a:ln>
+        </p:spPr>
+        <p:style>
+          <a:lnRef idx="2">
+            <a:schemeClr val="accent1">
+              <a:shade val="50000"/>
+            </a:schemeClr>
+          </a:lnRef>
+          <a:fillRef idx="1">
+            <a:schemeClr val="accent1"/>
+          </a:fillRef>
+          <a:effectRef idx="0">
+            <a:schemeClr val="accent1"/>
+          </a:effectRef>
+          <a:fontRef idx="minor">
+            <a:schemeClr val="lt1"/>
+          </a:fontRef>
+        </p:style>
+        <p:txBody>
+          <a:bodyPr rtlCol="0" anchor="ctr"/>
+          <a:lstStyle/>
+          <a:p>
+            <a:pPr algn="ctr"/>
+            <a:endParaRPr lang="en-CA"/>
+          </a:p>
+        </p:txBody>
+      </p:sp>
+    </p:spTree>
+    <p:extLst>
+      <p:ext uri="{BB962C8B-B14F-4D97-AF65-F5344CB8AC3E}">
+        <p14:creationId xmlns:p14="http://schemas.microsoft.com/office/powerpoint/2010/main" val="103113034"/>
+      </p:ext>
+    </p:extLst>
+  </p:cSld>
+  <p:clrMapOvr>
+    <a:masterClrMapping/>
+  </p:clrMapOvr>
+</p:sld>
+</file>
+
+<file path=ppt/slides/slide12.xml><?xml version="1.0" encoding="utf-8"?>
+<p:sld xmlns:a="http://schemas.openxmlformats.org/drawingml/2006/main" xmlns:r="http://schemas.openxmlformats.org/officeDocument/2006/relationships" xmlns:p="http://schemas.openxmlformats.org/presentationml/2006/main">
+  <p:cSld>
+    <p:spTree>
+      <p:nvGrpSpPr>
+        <p:cNvPr id="1" name=""/>
+        <p:cNvGrpSpPr/>
+        <p:nvPr/>
+      </p:nvGrpSpPr>
+      <p:grpSpPr>
+        <a:xfrm>
+          <a:off x="0" y="0"/>
+          <a:ext cx="0" cy="0"/>
+          <a:chOff x="0" y="0"/>
+          <a:chExt cx="0" cy="0"/>
+        </a:xfrm>
+      </p:grpSpPr>
+      <p:sp>
+        <p:nvSpPr>
+          <p:cNvPr id="2" name="Title 1">
+            <a:extLst>
+              <a:ext uri="{FF2B5EF4-FFF2-40B4-BE49-F238E27FC236}">
+                <a16:creationId xmlns:a16="http://schemas.microsoft.com/office/drawing/2014/main" id="{E797E51E-BC9D-430C-BB22-43DF08B1218D}"/>
+              </a:ext>
+            </a:extLst>
+          </p:cNvPr>
+          <p:cNvSpPr>
+            <a:spLocks noGrp="1"/>
+          </p:cNvSpPr>
+          <p:nvPr>
+            <p:ph type="title"/>
+          </p:nvPr>
+        </p:nvSpPr>
+        <p:spPr>
+          <a:xfrm>
+            <a:off x="838200" y="178847"/>
+            <a:ext cx="10515600" cy="1088118"/>
+          </a:xfrm>
+        </p:spPr>
+        <p:txBody>
+          <a:bodyPr>
+            <a:normAutofit/>
+          </a:bodyPr>
+          <a:lstStyle/>
+          <a:p>
+            <a:r>
+              <a:rPr lang="en-CA" dirty="0"/>
+              <a:t>Summary on no-show vs. balking</a:t>
+            </a:r>
+          </a:p>
+        </p:txBody>
+      </p:sp>
+      <p:sp>
+        <p:nvSpPr>
+          <p:cNvPr id="14" name="Content Placeholder 11">
+            <a:extLst>
+              <a:ext uri="{FF2B5EF4-FFF2-40B4-BE49-F238E27FC236}">
+                <a16:creationId xmlns:a16="http://schemas.microsoft.com/office/drawing/2014/main" id="{E1F5C417-0443-41F8-A6E7-018DE4E0628A}"/>
+              </a:ext>
+            </a:extLst>
+          </p:cNvPr>
+          <p:cNvSpPr txBox="1">
+            <a:spLocks/>
+          </p:cNvSpPr>
+          <p:nvPr/>
+        </p:nvSpPr>
+        <p:spPr>
+          <a:xfrm>
+            <a:off x="550683" y="5056863"/>
+            <a:ext cx="11544357" cy="1727334"/>
+          </a:xfrm>
+          <a:prstGeom prst="rect">
+            <a:avLst/>
+          </a:prstGeom>
+        </p:spPr>
+        <p:txBody>
+          <a:bodyPr vert="horz" lIns="91440" tIns="45720" rIns="91440" bIns="45720" rtlCol="0">
+            <a:normAutofit/>
+          </a:bodyPr>
+          <a:lstStyle>
+            <a:lvl1pPr marL="228600" indent="-228600" algn="l" defTabSz="914400" rtl="0" eaLnBrk="1" latinLnBrk="0" hangingPunct="1">
+              <a:lnSpc>
+                <a:spcPct val="90000"/>
+              </a:lnSpc>
+              <a:spcBef>
+                <a:spcPts val="1000"/>
+              </a:spcBef>
+              <a:buFont typeface="Arial" panose="020B0604020202020204" pitchFamily="34" charset="0"/>
+              <a:buChar char="•"/>
+              <a:defRPr sz="2800" kern="1200">
+                <a:solidFill>
+                  <a:schemeClr val="tx1"/>
+                </a:solidFill>
+                <a:latin typeface="+mn-lt"/>
+                <a:ea typeface="+mn-ea"/>
+                <a:cs typeface="+mn-cs"/>
+              </a:defRPr>
+            </a:lvl1pPr>
+            <a:lvl2pPr marL="685800" indent="-228600" algn="l" defTabSz="914400" rtl="0" eaLnBrk="1" latinLnBrk="0" hangingPunct="1">
+              <a:lnSpc>
+                <a:spcPct val="90000"/>
+              </a:lnSpc>
+              <a:spcBef>
+                <a:spcPts val="500"/>
+              </a:spcBef>
+              <a:buFont typeface="Arial" panose="020B0604020202020204" pitchFamily="34" charset="0"/>
+              <a:buChar char="•"/>
+              <a:defRPr sz="2400" kern="1200">
+                <a:solidFill>
+                  <a:schemeClr val="tx1"/>
+                </a:solidFill>
+                <a:latin typeface="+mn-lt"/>
+                <a:ea typeface="+mn-ea"/>
+                <a:cs typeface="+mn-cs"/>
+              </a:defRPr>
+            </a:lvl2pPr>
+            <a:lvl3pPr marL="1143000" indent="-228600" algn="l" defTabSz="914400" rtl="0" eaLnBrk="1" latinLnBrk="0" hangingPunct="1">
+              <a:lnSpc>
+                <a:spcPct val="90000"/>
+              </a:lnSpc>
+              <a:spcBef>
+                <a:spcPts val="500"/>
+              </a:spcBef>
+              <a:buFont typeface="Arial" panose="020B0604020202020204" pitchFamily="34" charset="0"/>
+              <a:buChar char="•"/>
+              <a:defRPr sz="2000" kern="1200">
+                <a:solidFill>
+                  <a:schemeClr val="tx1"/>
+                </a:solidFill>
+                <a:latin typeface="+mn-lt"/>
+                <a:ea typeface="+mn-ea"/>
+                <a:cs typeface="+mn-cs"/>
+              </a:defRPr>
+            </a:lvl3pPr>
+            <a:lvl4pPr marL="1600200" indent="-228600" algn="l" defTabSz="914400" rtl="0" eaLnBrk="1" latinLnBrk="0" hangingPunct="1">
+              <a:lnSpc>
+                <a:spcPct val="90000"/>
+              </a:lnSpc>
+              <a:spcBef>
+                <a:spcPts val="500"/>
+              </a:spcBef>
+              <a:buFont typeface="Arial" panose="020B0604020202020204" pitchFamily="34" charset="0"/>
+              <a:buChar char="•"/>
+              <a:defRPr sz="1800" kern="1200">
+                <a:solidFill>
+                  <a:schemeClr val="tx1"/>
+                </a:solidFill>
+                <a:latin typeface="+mn-lt"/>
+                <a:ea typeface="+mn-ea"/>
+                <a:cs typeface="+mn-cs"/>
+              </a:defRPr>
+            </a:lvl4pPr>
+            <a:lvl5pPr marL="2057400" indent="-228600" algn="l" defTabSz="914400" rtl="0" eaLnBrk="1" latinLnBrk="0" hangingPunct="1">
+              <a:lnSpc>
+                <a:spcPct val="90000"/>
+              </a:lnSpc>
+              <a:spcBef>
+                <a:spcPts val="500"/>
+              </a:spcBef>
+              <a:buFont typeface="Arial" panose="020B0604020202020204" pitchFamily="34" charset="0"/>
+              <a:buChar char="•"/>
+              <a:defRPr sz="1800" kern="1200">
+                <a:solidFill>
+                  <a:schemeClr val="tx1"/>
+                </a:solidFill>
+                <a:latin typeface="+mn-lt"/>
+                <a:ea typeface="+mn-ea"/>
+                <a:cs typeface="+mn-cs"/>
+              </a:defRPr>
+            </a:lvl5pPr>
+            <a:lvl6pPr marL="2514600" indent="-228600" algn="l" defTabSz="914400" rtl="0" eaLnBrk="1" latinLnBrk="0" hangingPunct="1">
+              <a:lnSpc>
+                <a:spcPct val="90000"/>
+              </a:lnSpc>
+              <a:spcBef>
+                <a:spcPts val="500"/>
+              </a:spcBef>
+              <a:buFont typeface="Arial" panose="020B0604020202020204" pitchFamily="34" charset="0"/>
+              <a:buChar char="•"/>
+              <a:defRPr sz="1800" kern="1200">
+                <a:solidFill>
+                  <a:schemeClr val="tx1"/>
+                </a:solidFill>
+                <a:latin typeface="+mn-lt"/>
+                <a:ea typeface="+mn-ea"/>
+                <a:cs typeface="+mn-cs"/>
+              </a:defRPr>
+            </a:lvl6pPr>
+            <a:lvl7pPr marL="2971800" indent="-228600" algn="l" defTabSz="914400" rtl="0" eaLnBrk="1" latinLnBrk="0" hangingPunct="1">
+              <a:lnSpc>
+                <a:spcPct val="90000"/>
+              </a:lnSpc>
+              <a:spcBef>
+                <a:spcPts val="500"/>
+              </a:spcBef>
+              <a:buFont typeface="Arial" panose="020B0604020202020204" pitchFamily="34" charset="0"/>
+              <a:buChar char="•"/>
+              <a:defRPr sz="1800" kern="1200">
+                <a:solidFill>
+                  <a:schemeClr val="tx1"/>
+                </a:solidFill>
+                <a:latin typeface="+mn-lt"/>
+                <a:ea typeface="+mn-ea"/>
+                <a:cs typeface="+mn-cs"/>
+              </a:defRPr>
+            </a:lvl7pPr>
+            <a:lvl8pPr marL="3429000" indent="-228600" algn="l" defTabSz="914400" rtl="0" eaLnBrk="1" latinLnBrk="0" hangingPunct="1">
+              <a:lnSpc>
+                <a:spcPct val="90000"/>
+              </a:lnSpc>
+              <a:spcBef>
+                <a:spcPts val="500"/>
+              </a:spcBef>
+              <a:buFont typeface="Arial" panose="020B0604020202020204" pitchFamily="34" charset="0"/>
+              <a:buChar char="•"/>
+              <a:defRPr sz="1800" kern="1200">
+                <a:solidFill>
+                  <a:schemeClr val="tx1"/>
+                </a:solidFill>
+                <a:latin typeface="+mn-lt"/>
+                <a:ea typeface="+mn-ea"/>
+                <a:cs typeface="+mn-cs"/>
+              </a:defRPr>
+            </a:lvl8pPr>
+            <a:lvl9pPr marL="3886200" indent="-228600" algn="l" defTabSz="914400" rtl="0" eaLnBrk="1" latinLnBrk="0" hangingPunct="1">
+              <a:lnSpc>
+                <a:spcPct val="90000"/>
+              </a:lnSpc>
+              <a:spcBef>
+                <a:spcPts val="500"/>
+              </a:spcBef>
+              <a:buFont typeface="Arial" panose="020B0604020202020204" pitchFamily="34" charset="0"/>
+              <a:buChar char="•"/>
+              <a:defRPr sz="1800" kern="1200">
+                <a:solidFill>
+                  <a:schemeClr val="tx1"/>
+                </a:solidFill>
+                <a:latin typeface="+mn-lt"/>
+                <a:ea typeface="+mn-ea"/>
+                <a:cs typeface="+mn-cs"/>
+              </a:defRPr>
+            </a:lvl9pPr>
+          </a:lstStyle>
+          <a:p>
+            <a:r>
+              <a:rPr lang="en-CA" sz="2400" dirty="0"/>
+              <a:t>No-show’s served rate impacts come from the change in each class’s post-probability.</a:t>
+            </a:r>
+          </a:p>
+          <a:p>
+            <a:pPr lvl="1"/>
+            <a:r>
+              <a:rPr lang="en-CA" dirty="0"/>
+              <a:t>Minimally impacts the other class’s served rate.</a:t>
+            </a:r>
+          </a:p>
+          <a:p>
+            <a:r>
+              <a:rPr lang="en-CA" sz="2400" dirty="0"/>
+              <a:t>Served rates show consistent minimal changes from post probability balking changes.</a:t>
+            </a:r>
+          </a:p>
+          <a:p>
+            <a:pPr lvl="1"/>
+            <a:r>
+              <a:rPr lang="en-CA" dirty="0"/>
+              <a:t>Balking served rate effects impact the other class.</a:t>
+            </a:r>
+          </a:p>
+        </p:txBody>
+      </p:sp>
+    </p:spTree>
+    <p:extLst>
+      <p:ext uri="{BB962C8B-B14F-4D97-AF65-F5344CB8AC3E}">
+        <p14:creationId xmlns:p14="http://schemas.microsoft.com/office/powerpoint/2010/main" val="1405585825"/>
+      </p:ext>
+    </p:extLst>
+  </p:cSld>
+  <p:clrMapOvr>
+    <a:masterClrMapping/>
+  </p:clrMapOvr>
+</p:sld>
+</file>
+
+<file path=ppt/slides/slide13.xml><?xml version="1.0" encoding="utf-8"?>
+<p:sld xmlns:a="http://schemas.openxmlformats.org/drawingml/2006/main" xmlns:r="http://schemas.openxmlformats.org/officeDocument/2006/relationships" xmlns:p="http://schemas.openxmlformats.org/presentationml/2006/main">
+  <p:cSld>
+    <p:spTree>
+      <p:nvGrpSpPr>
+        <p:cNvPr id="1" name=""/>
+        <p:cNvGrpSpPr/>
+        <p:nvPr/>
+      </p:nvGrpSpPr>
+      <p:grpSpPr>
+        <a:xfrm>
+          <a:off x="0" y="0"/>
+          <a:ext cx="0" cy="0"/>
+          <a:chOff x="0" y="0"/>
+          <a:chExt cx="0" cy="0"/>
+        </a:xfrm>
+      </p:grpSpPr>
+      <p:sp>
+        <p:nvSpPr>
+          <p:cNvPr id="2" name="Title 1">
+            <a:extLst>
+              <a:ext uri="{FF2B5EF4-FFF2-40B4-BE49-F238E27FC236}">
                 <a16:creationId xmlns:a16="http://schemas.microsoft.com/office/drawing/2014/main" id="{7C41D3A9-0297-4B7C-9883-BD87C6C835BB}"/>
               </a:ext>
             </a:extLst>
@@ -4651,7 +6304,7 @@
 </p:sld>
 </file>
 
-<file path=ppt/slides/slide11.xml><?xml version="1.0" encoding="utf-8"?>
+<file path=ppt/slides/slide14.xml><?xml version="1.0" encoding="utf-8"?>
 <p:sld xmlns:a="http://schemas.openxmlformats.org/drawingml/2006/main" xmlns:r="http://schemas.openxmlformats.org/officeDocument/2006/relationships" xmlns:p="http://schemas.openxmlformats.org/presentationml/2006/main">
   <p:cSld>
     <p:spTree>
@@ -4712,9 +6365,16 @@
             <p:ph idx="1"/>
           </p:nvPr>
         </p:nvSpPr>
-        <p:spPr/>
-        <p:txBody>
-          <a:bodyPr/>
+        <p:spPr>
+          <a:xfrm>
+            <a:off x="838200" y="1610333"/>
+            <a:ext cx="10515600" cy="4583652"/>
+          </a:xfrm>
+        </p:spPr>
+        <p:txBody>
+          <a:bodyPr>
+            <a:normAutofit fontScale="92500" lnSpcReduction="10000"/>
+          </a:bodyPr>
           <a:lstStyle/>
           <a:p>
             <a:pPr marL="514350" indent="-514350">
@@ -4737,7 +6397,7 @@
             </a:pPr>
             <a:r>
               <a:rPr lang="en-CA" dirty="0"/>
-              <a:t>Balking magnitude mainly redistributes access away from the delay-sensitive group.</a:t>
+              <a:t>Balking post probability mainly redistributes access away from the delay-sensitive group.</a:t>
             </a:r>
           </a:p>
           <a:p>
@@ -4770,7 +6430,7 @@
             </a:pPr>
             <a:r>
               <a:rPr lang="en-CA" dirty="0"/>
-              <a:t>Delay sensitivity matters along with behaviour magnitude.</a:t>
+              <a:t>Delay sensitivity matters along with behaviour post probability.</a:t>
             </a:r>
           </a:p>
           <a:p>
@@ -4782,15 +6442,31 @@
             </a:pPr>
             <a:r>
               <a:rPr lang="en-CA" dirty="0"/>
-              <a:t>No-show magnitude is the stronger driver of class access </a:t>
-            </a:r>
-            <a:r>
-              <a:rPr lang="en-US" altLang="zh-CN" dirty="0"/>
-              <a:t>while</a:t>
-            </a:r>
+              <a:t>Balking increase impact both classes' served rate while no-show only impact its own class’s served rate.</a:t>
+            </a:r>
+          </a:p>
+          <a:p>
+            <a:pPr marL="514350" indent="-514350">
+              <a:buClr>
+                <a:schemeClr val="accent5"/>
+              </a:buClr>
+              <a:buAutoNum type="arabicPeriod"/>
+            </a:pPr>
             <a:r>
               <a:rPr lang="en-CA" dirty="0"/>
-              <a:t> balking becomes more important as demand increases</a:t>
+              <a:t>No-show post probability matters more than threshold gap for served rate.</a:t>
+            </a:r>
+          </a:p>
+          <a:p>
+            <a:pPr marL="514350" indent="-514350">
+              <a:buClr>
+                <a:schemeClr val="accent5"/>
+              </a:buClr>
+              <a:buAutoNum type="arabicPeriod"/>
+            </a:pPr>
+            <a:r>
+              <a:rPr lang="en-CA" dirty="0"/>
+              <a:t>Balking post probability has minimal effects on served rate.</a:t>
             </a:r>
           </a:p>
           <a:p>
@@ -4869,7 +6545,7 @@
 </p:sld>
 </file>
 
-<file path=ppt/slides/slide12.xml><?xml version="1.0" encoding="utf-8"?>
+<file path=ppt/slides/slide15.xml><?xml version="1.0" encoding="utf-8"?>
 <p:sld xmlns:a="http://schemas.openxmlformats.org/drawingml/2006/main" xmlns:r="http://schemas.openxmlformats.org/officeDocument/2006/relationships" xmlns:p="http://schemas.openxmlformats.org/presentationml/2006/main">
   <p:cSld>
     <p:spTree>
@@ -5030,7 +6706,7 @@
 </p:sld>
 </file>
 
-<file path=ppt/slides/slide13.xml><?xml version="1.0" encoding="utf-8"?>
+<file path=ppt/slides/slide16.xml><?xml version="1.0" encoding="utf-8"?>
 <p:sld xmlns:a="http://schemas.openxmlformats.org/drawingml/2006/main" xmlns:r="http://schemas.openxmlformats.org/officeDocument/2006/relationships" xmlns:p="http://schemas.openxmlformats.org/presentationml/2006/main">
   <p:cSld>
     <p:spTree>
@@ -5091,42 +6767,17 @@
             <p:ph idx="1"/>
           </p:nvPr>
         </p:nvSpPr>
-        <p:spPr/>
+        <p:spPr>
+          <a:xfrm>
+            <a:off x="838200" y="1809250"/>
+            <a:ext cx="10515600" cy="4351338"/>
+          </a:xfrm>
+        </p:spPr>
         <p:txBody>
           <a:bodyPr>
             <a:normAutofit/>
           </a:bodyPr>
           <a:lstStyle/>
-          <a:p>
-            <a:pPr marL="514350" indent="-514350">
-              <a:buAutoNum type="arabicPeriod"/>
-            </a:pPr>
-            <a:r>
-              <a:rPr lang="en-CA" sz="3200" dirty="0"/>
-              <a:t>Reservation</a:t>
-            </a:r>
-          </a:p>
-          <a:p>
-            <a:pPr lvl="1"/>
-            <a:r>
-              <a:rPr lang="en-CA" sz="2800" dirty="0"/>
-              <a:t>Allowing one class to have priority for certain appointments.</a:t>
-            </a:r>
-          </a:p>
-          <a:p>
-            <a:pPr lvl="1"/>
-            <a:r>
-              <a:rPr lang="en-CA" sz="2800" dirty="0"/>
-              <a:t>This policy chooses both reserved slots per day and overall number of days that slots are reserved.</a:t>
-            </a:r>
-          </a:p>
-          <a:p>
-            <a:pPr marL="342900" indent="-342900">
-              <a:buFont typeface="+mj-lt"/>
-              <a:buAutoNum type="arabicPeriod"/>
-            </a:pPr>
-            <a:endParaRPr lang="en-CA" sz="1600" dirty="0"/>
-          </a:p>
           <a:p>
             <a:pPr marL="514350" indent="-514350">
               <a:buFont typeface="+mj-lt"/>
@@ -5145,20 +6796,47 @@
             </a:r>
           </a:p>
           <a:p>
-            <a:pPr marL="971550" lvl="1" indent="-514350">
-              <a:buFont typeface="+mj-lt"/>
-              <a:buAutoNum type="arabicPeriod"/>
+            <a:pPr marL="0" indent="0">
+              <a:buNone/>
             </a:pPr>
-            <a:endParaRPr lang="en-CA" sz="2800" dirty="0"/>
-          </a:p>
-          <a:p>
-            <a:pPr marL="514350" indent="-514350">
-              <a:buFont typeface="+mj-lt"/>
-              <a:buAutoNum type="arabicPeriod"/>
+            <a:endParaRPr lang="en-CA" sz="2000" dirty="0"/>
+          </a:p>
+          <a:p>
+            <a:pPr marL="0" indent="0">
+              <a:buNone/>
             </a:pPr>
             <a:r>
               <a:rPr lang="en-CA" sz="3200" dirty="0"/>
-              <a:t>Combination of reservation and booking horizon</a:t>
+              <a:t>2. Reservation</a:t>
+            </a:r>
+          </a:p>
+          <a:p>
+            <a:pPr lvl="1"/>
+            <a:r>
+              <a:rPr lang="en-CA" sz="2800" dirty="0"/>
+              <a:t>Allowing one class to have priority for certain appointments.</a:t>
+            </a:r>
+          </a:p>
+          <a:p>
+            <a:pPr lvl="1"/>
+            <a:r>
+              <a:rPr lang="en-CA" sz="2800" dirty="0"/>
+              <a:t>This policy chooses both reserved slots per day and overall number of days that slots are reserved.</a:t>
+            </a:r>
+          </a:p>
+          <a:p>
+            <a:pPr marL="457200" lvl="1" indent="0">
+              <a:buNone/>
+            </a:pPr>
+            <a:endParaRPr lang="en-CA" sz="2000" dirty="0"/>
+          </a:p>
+          <a:p>
+            <a:pPr marL="0" indent="0">
+              <a:buNone/>
+            </a:pPr>
+            <a:r>
+              <a:rPr lang="en-CA" sz="3200" dirty="0"/>
+              <a:t>3. Combination of reservation and booking horizon</a:t>
             </a:r>
           </a:p>
         </p:txBody>
@@ -5219,274 +6897,6 @@
 </p:sld>
 </file>
 
-<file path=ppt/slides/slide14.xml><?xml version="1.0" encoding="utf-8"?>
-<p:sld xmlns:a="http://schemas.openxmlformats.org/drawingml/2006/main" xmlns:r="http://schemas.openxmlformats.org/officeDocument/2006/relationships" xmlns:p="http://schemas.openxmlformats.org/presentationml/2006/main">
-  <p:cSld>
-    <p:spTree>
-      <p:nvGrpSpPr>
-        <p:cNvPr id="1" name=""/>
-        <p:cNvGrpSpPr/>
-        <p:nvPr/>
-      </p:nvGrpSpPr>
-      <p:grpSpPr>
-        <a:xfrm>
-          <a:off x="0" y="0"/>
-          <a:ext cx="0" cy="0"/>
-          <a:chOff x="0" y="0"/>
-          <a:chExt cx="0" cy="0"/>
-        </a:xfrm>
-      </p:grpSpPr>
-      <p:sp>
-        <p:nvSpPr>
-          <p:cNvPr id="2" name="Title 1">
-            <a:extLst>
-              <a:ext uri="{FF2B5EF4-FFF2-40B4-BE49-F238E27FC236}">
-                <a16:creationId xmlns:a16="http://schemas.microsoft.com/office/drawing/2014/main" id="{67F5C4C4-80CF-4F67-9AFC-77396B476FB2}"/>
-              </a:ext>
-            </a:extLst>
-          </p:cNvPr>
-          <p:cNvSpPr>
-            <a:spLocks noGrp="1"/>
-          </p:cNvSpPr>
-          <p:nvPr>
-            <p:ph type="title"/>
-          </p:nvPr>
-        </p:nvSpPr>
-        <p:spPr/>
-        <p:txBody>
-          <a:bodyPr/>
-          <a:lstStyle/>
-          <a:p>
-            <a:r>
-              <a:rPr lang="en-CA" dirty="0"/>
-              <a:t>Explaining the 3x3 design</a:t>
-            </a:r>
-          </a:p>
-        </p:txBody>
-      </p:sp>
-      <p:pic>
-        <p:nvPicPr>
-          <p:cNvPr id="5" name="Picture 4">
-            <a:extLst>
-              <a:ext uri="{FF2B5EF4-FFF2-40B4-BE49-F238E27FC236}">
-                <a16:creationId xmlns:a16="http://schemas.microsoft.com/office/drawing/2014/main" id="{A9D7B691-E95A-45B5-AF53-DC56DE6D79C3}"/>
-              </a:ext>
-            </a:extLst>
-          </p:cNvPr>
-          <p:cNvPicPr>
-            <a:picLocks noChangeAspect="1"/>
-          </p:cNvPicPr>
-          <p:nvPr/>
-        </p:nvPicPr>
-        <p:blipFill>
-          <a:blip r:embed="rId2"/>
-          <a:stretch>
-            <a:fillRect/>
-          </a:stretch>
-        </p:blipFill>
-        <p:spPr>
-          <a:xfrm>
-            <a:off x="2601117" y="1690688"/>
-            <a:ext cx="6687262" cy="4267980"/>
-          </a:xfrm>
-          <a:prstGeom prst="rect">
-            <a:avLst/>
-          </a:prstGeom>
-        </p:spPr>
-      </p:pic>
-    </p:spTree>
-    <p:extLst>
-      <p:ext uri="{BB962C8B-B14F-4D97-AF65-F5344CB8AC3E}">
-        <p14:creationId xmlns:p14="http://schemas.microsoft.com/office/powerpoint/2010/main" val="2858968893"/>
-      </p:ext>
-    </p:extLst>
-  </p:cSld>
-  <p:clrMapOvr>
-    <a:masterClrMapping/>
-  </p:clrMapOvr>
-</p:sld>
-</file>
-
-<file path=ppt/slides/slide15.xml><?xml version="1.0" encoding="utf-8"?>
-<p:sld xmlns:a="http://schemas.openxmlformats.org/drawingml/2006/main" xmlns:r="http://schemas.openxmlformats.org/officeDocument/2006/relationships" xmlns:p="http://schemas.openxmlformats.org/presentationml/2006/main">
-  <p:cSld>
-    <p:spTree>
-      <p:nvGrpSpPr>
-        <p:cNvPr id="1" name=""/>
-        <p:cNvGrpSpPr/>
-        <p:nvPr/>
-      </p:nvGrpSpPr>
-      <p:grpSpPr>
-        <a:xfrm>
-          <a:off x="0" y="0"/>
-          <a:ext cx="0" cy="0"/>
-          <a:chOff x="0" y="0"/>
-          <a:chExt cx="0" cy="0"/>
-        </a:xfrm>
-      </p:grpSpPr>
-      <p:sp>
-        <p:nvSpPr>
-          <p:cNvPr id="2" name="Title 1">
-            <a:extLst>
-              <a:ext uri="{FF2B5EF4-FFF2-40B4-BE49-F238E27FC236}">
-                <a16:creationId xmlns:a16="http://schemas.microsoft.com/office/drawing/2014/main" id="{EE19DA39-0AD6-4C52-825B-8541719E5064}"/>
-              </a:ext>
-            </a:extLst>
-          </p:cNvPr>
-          <p:cNvSpPr>
-            <a:spLocks noGrp="1"/>
-          </p:cNvSpPr>
-          <p:nvPr>
-            <p:ph type="title"/>
-          </p:nvPr>
-        </p:nvSpPr>
-        <p:spPr>
-          <a:xfrm>
-            <a:off x="419100" y="500062"/>
-            <a:ext cx="11353800" cy="1325563"/>
-          </a:xfrm>
-        </p:spPr>
-        <p:txBody>
-          <a:bodyPr/>
-          <a:lstStyle/>
-          <a:p>
-            <a:r>
-              <a:rPr lang="en-CA" dirty="0"/>
-              <a:t>No-show magnitude determines the effectiveness of policies on utilization</a:t>
-            </a:r>
-          </a:p>
-        </p:txBody>
-      </p:sp>
-      <p:pic>
-        <p:nvPicPr>
-          <p:cNvPr id="5" name="Picture 4">
-            <a:extLst>
-              <a:ext uri="{FF2B5EF4-FFF2-40B4-BE49-F238E27FC236}">
-                <a16:creationId xmlns:a16="http://schemas.microsoft.com/office/drawing/2014/main" id="{9A667C87-7E73-4639-A614-B8EC62549C5D}"/>
-              </a:ext>
-            </a:extLst>
-          </p:cNvPr>
-          <p:cNvPicPr>
-            <a:picLocks noChangeAspect="1"/>
-          </p:cNvPicPr>
-          <p:nvPr/>
-        </p:nvPicPr>
-        <p:blipFill rotWithShape="1">
-          <a:blip r:embed="rId3"/>
-          <a:srcRect t="1035"/>
-          <a:stretch/>
-        </p:blipFill>
-        <p:spPr>
-          <a:xfrm>
-            <a:off x="2374231" y="2122268"/>
-            <a:ext cx="6833937" cy="4235670"/>
-          </a:xfrm>
-          <a:prstGeom prst="rect">
-            <a:avLst/>
-          </a:prstGeom>
-        </p:spPr>
-      </p:pic>
-    </p:spTree>
-    <p:extLst>
-      <p:ext uri="{BB962C8B-B14F-4D97-AF65-F5344CB8AC3E}">
-        <p14:creationId xmlns:p14="http://schemas.microsoft.com/office/powerpoint/2010/main" val="3873336915"/>
-      </p:ext>
-    </p:extLst>
-  </p:cSld>
-  <p:clrMapOvr>
-    <a:masterClrMapping/>
-  </p:clrMapOvr>
-</p:sld>
-</file>
-
-<file path=ppt/slides/slide16.xml><?xml version="1.0" encoding="utf-8"?>
-<p:sld xmlns:a="http://schemas.openxmlformats.org/drawingml/2006/main" xmlns:r="http://schemas.openxmlformats.org/officeDocument/2006/relationships" xmlns:p="http://schemas.openxmlformats.org/presentationml/2006/main">
-  <p:cSld>
-    <p:spTree>
-      <p:nvGrpSpPr>
-        <p:cNvPr id="1" name=""/>
-        <p:cNvGrpSpPr/>
-        <p:nvPr/>
-      </p:nvGrpSpPr>
-      <p:grpSpPr>
-        <a:xfrm>
-          <a:off x="0" y="0"/>
-          <a:ext cx="0" cy="0"/>
-          <a:chOff x="0" y="0"/>
-          <a:chExt cx="0" cy="0"/>
-        </a:xfrm>
-      </p:grpSpPr>
-      <p:sp>
-        <p:nvSpPr>
-          <p:cNvPr id="2" name="Title 1">
-            <a:extLst>
-              <a:ext uri="{FF2B5EF4-FFF2-40B4-BE49-F238E27FC236}">
-                <a16:creationId xmlns:a16="http://schemas.microsoft.com/office/drawing/2014/main" id="{F416DC7E-97AD-43A4-A8F4-9BE488FA1053}"/>
-              </a:ext>
-            </a:extLst>
-          </p:cNvPr>
-          <p:cNvSpPr>
-            <a:spLocks noGrp="1"/>
-          </p:cNvSpPr>
-          <p:nvPr>
-            <p:ph type="title"/>
-          </p:nvPr>
-        </p:nvSpPr>
-        <p:spPr/>
-        <p:txBody>
-          <a:bodyPr/>
-          <a:lstStyle/>
-          <a:p>
-            <a:r>
-              <a:rPr lang="en-CA" dirty="0"/>
-              <a:t>Demand activates the no-show effect on utilization</a:t>
-            </a:r>
-          </a:p>
-        </p:txBody>
-      </p:sp>
-      <p:pic>
-        <p:nvPicPr>
-          <p:cNvPr id="5" name="Picture 4">
-            <a:extLst>
-              <a:ext uri="{FF2B5EF4-FFF2-40B4-BE49-F238E27FC236}">
-                <a16:creationId xmlns:a16="http://schemas.microsoft.com/office/drawing/2014/main" id="{059C0EAC-019C-4963-85BB-2E314EB0E167}"/>
-              </a:ext>
-            </a:extLst>
-          </p:cNvPr>
-          <p:cNvPicPr>
-            <a:picLocks noChangeAspect="1"/>
-          </p:cNvPicPr>
-          <p:nvPr/>
-        </p:nvPicPr>
-        <p:blipFill>
-          <a:blip r:embed="rId3"/>
-          <a:stretch>
-            <a:fillRect/>
-          </a:stretch>
-        </p:blipFill>
-        <p:spPr>
-          <a:xfrm>
-            <a:off x="2128530" y="1690688"/>
-            <a:ext cx="7304227" cy="4629795"/>
-          </a:xfrm>
-          <a:prstGeom prst="rect">
-            <a:avLst/>
-          </a:prstGeom>
-        </p:spPr>
-      </p:pic>
-    </p:spTree>
-    <p:extLst>
-      <p:ext uri="{BB962C8B-B14F-4D97-AF65-F5344CB8AC3E}">
-        <p14:creationId xmlns:p14="http://schemas.microsoft.com/office/powerpoint/2010/main" val="1479030415"/>
-      </p:ext>
-    </p:extLst>
-  </p:cSld>
-  <p:clrMapOvr>
-    <a:masterClrMapping/>
-  </p:clrMapOvr>
-</p:sld>
-</file>
-
 <file path=ppt/slides/slide17.xml><?xml version="1.0" encoding="utf-8"?>
 <p:sld xmlns:a="http://schemas.openxmlformats.org/drawingml/2006/main" xmlns:r="http://schemas.openxmlformats.org/officeDocument/2006/relationships" xmlns:p="http://schemas.openxmlformats.org/presentationml/2006/main">
   <p:cSld>
@@ -5509,7 +6919,7 @@
           <p:cNvPr id="2" name="Title 1">
             <a:extLst>
               <a:ext uri="{FF2B5EF4-FFF2-40B4-BE49-F238E27FC236}">
-                <a16:creationId xmlns:a16="http://schemas.microsoft.com/office/drawing/2014/main" id="{0D045B51-3913-420F-8417-28692C8ED825}"/>
+                <a16:creationId xmlns:a16="http://schemas.microsoft.com/office/drawing/2014/main" id="{67F5C4C4-80CF-4F67-9AFC-77396B476FB2}"/>
               </a:ext>
             </a:extLst>
           </p:cNvPr>
@@ -5520,47 +6930,476 @@
             <p:ph type="title"/>
           </p:nvPr>
         </p:nvSpPr>
-        <p:spPr/>
+        <p:spPr>
+          <a:xfrm>
+            <a:off x="421106" y="365126"/>
+            <a:ext cx="4680283" cy="1223768"/>
+          </a:xfrm>
+        </p:spPr>
         <p:txBody>
           <a:bodyPr/>
           <a:lstStyle/>
           <a:p>
             <a:r>
               <a:rPr lang="en-CA" dirty="0"/>
-              <a:t>When optimizing utilization, horizon is usually cut short to prevent no-shows</a:t>
-            </a:r>
-          </a:p>
-        </p:txBody>
-      </p:sp>
-      <p:sp>
-        <p:nvSpPr>
-          <p:cNvPr id="3" name="Content Placeholder 2">
+              <a:t>The 3x3 design</a:t>
+            </a:r>
+          </a:p>
+        </p:txBody>
+      </p:sp>
+      <p:pic>
+        <p:nvPicPr>
+          <p:cNvPr id="4" name="Picture 3">
             <a:extLst>
               <a:ext uri="{FF2B5EF4-FFF2-40B4-BE49-F238E27FC236}">
-                <a16:creationId xmlns:a16="http://schemas.microsoft.com/office/drawing/2014/main" id="{E2DC23E4-8017-42D1-A28D-879146B6160B}"/>
+                <a16:creationId xmlns:a16="http://schemas.microsoft.com/office/drawing/2014/main" id="{D0ABBBE3-3517-4CBC-9DA5-9971256BE6AF}"/>
               </a:ext>
             </a:extLst>
           </p:cNvPr>
-          <p:cNvSpPr>
-            <a:spLocks noGrp="1"/>
-          </p:cNvSpPr>
-          <p:nvPr>
-            <p:ph idx="1"/>
-          </p:nvPr>
-        </p:nvSpPr>
-        <p:spPr/>
-        <p:txBody>
-          <a:bodyPr/>
-          <a:lstStyle/>
-          <a:p>
-            <a:endParaRPr lang="en-CA"/>
+          <p:cNvPicPr>
+            <a:picLocks noChangeAspect="1"/>
+          </p:cNvPicPr>
+          <p:nvPr/>
+        </p:nvPicPr>
+        <p:blipFill rotWithShape="1">
+          <a:blip r:embed="rId2">
+            <a:extLst>
+              <a:ext uri="{28A0092B-C50C-407E-A947-70E740481C1C}">
+                <a14:useLocalDpi xmlns:a14="http://schemas.microsoft.com/office/drawing/2010/main" val="0"/>
+              </a:ext>
+            </a:extLst>
+          </a:blip>
+          <a:srcRect l="8518" t="8381"/>
+          <a:stretch/>
+        </p:blipFill>
+        <p:spPr>
+          <a:xfrm>
+            <a:off x="1889219" y="1722419"/>
+            <a:ext cx="9588461" cy="4348442"/>
+          </a:xfrm>
+          <a:prstGeom prst="rect">
+            <a:avLst/>
+          </a:prstGeom>
+        </p:spPr>
+      </p:pic>
+      <p:sp>
+        <p:nvSpPr>
+          <p:cNvPr id="6" name="Content Placeholder 11">
+            <a:extLst>
+              <a:ext uri="{FF2B5EF4-FFF2-40B4-BE49-F238E27FC236}">
+                <a16:creationId xmlns:a16="http://schemas.microsoft.com/office/drawing/2014/main" id="{BCE7B2C6-53DB-4D73-9819-0B89121C5B18}"/>
+              </a:ext>
+            </a:extLst>
+          </p:cNvPr>
+          <p:cNvSpPr txBox="1">
+            <a:spLocks/>
+          </p:cNvSpPr>
+          <p:nvPr/>
+        </p:nvSpPr>
+        <p:spPr>
+          <a:xfrm>
+            <a:off x="307984" y="3591240"/>
+            <a:ext cx="1581235" cy="1487180"/>
+          </a:xfrm>
+          <a:prstGeom prst="rect">
+            <a:avLst/>
+          </a:prstGeom>
+        </p:spPr>
+        <p:txBody>
+          <a:bodyPr vert="horz" lIns="91440" tIns="45720" rIns="91440" bIns="45720" rtlCol="0">
+            <a:normAutofit/>
+          </a:bodyPr>
+          <a:lstStyle>
+            <a:lvl1pPr marL="228600" indent="-228600" algn="l" defTabSz="914400" rtl="0" eaLnBrk="1" latinLnBrk="0" hangingPunct="1">
+              <a:lnSpc>
+                <a:spcPct val="90000"/>
+              </a:lnSpc>
+              <a:spcBef>
+                <a:spcPts val="1000"/>
+              </a:spcBef>
+              <a:buFont typeface="Arial" panose="020B0604020202020204" pitchFamily="34" charset="0"/>
+              <a:buChar char="•"/>
+              <a:defRPr sz="2800" kern="1200">
+                <a:solidFill>
+                  <a:schemeClr val="tx1"/>
+                </a:solidFill>
+                <a:latin typeface="+mn-lt"/>
+                <a:ea typeface="+mn-ea"/>
+                <a:cs typeface="+mn-cs"/>
+              </a:defRPr>
+            </a:lvl1pPr>
+            <a:lvl2pPr marL="685800" indent="-228600" algn="l" defTabSz="914400" rtl="0" eaLnBrk="1" latinLnBrk="0" hangingPunct="1">
+              <a:lnSpc>
+                <a:spcPct val="90000"/>
+              </a:lnSpc>
+              <a:spcBef>
+                <a:spcPts val="500"/>
+              </a:spcBef>
+              <a:buFont typeface="Arial" panose="020B0604020202020204" pitchFamily="34" charset="0"/>
+              <a:buChar char="•"/>
+              <a:defRPr sz="2400" kern="1200">
+                <a:solidFill>
+                  <a:schemeClr val="tx1"/>
+                </a:solidFill>
+                <a:latin typeface="+mn-lt"/>
+                <a:ea typeface="+mn-ea"/>
+                <a:cs typeface="+mn-cs"/>
+              </a:defRPr>
+            </a:lvl2pPr>
+            <a:lvl3pPr marL="1143000" indent="-228600" algn="l" defTabSz="914400" rtl="0" eaLnBrk="1" latinLnBrk="0" hangingPunct="1">
+              <a:lnSpc>
+                <a:spcPct val="90000"/>
+              </a:lnSpc>
+              <a:spcBef>
+                <a:spcPts val="500"/>
+              </a:spcBef>
+              <a:buFont typeface="Arial" panose="020B0604020202020204" pitchFamily="34" charset="0"/>
+              <a:buChar char="•"/>
+              <a:defRPr sz="2000" kern="1200">
+                <a:solidFill>
+                  <a:schemeClr val="tx1"/>
+                </a:solidFill>
+                <a:latin typeface="+mn-lt"/>
+                <a:ea typeface="+mn-ea"/>
+                <a:cs typeface="+mn-cs"/>
+              </a:defRPr>
+            </a:lvl3pPr>
+            <a:lvl4pPr marL="1600200" indent="-228600" algn="l" defTabSz="914400" rtl="0" eaLnBrk="1" latinLnBrk="0" hangingPunct="1">
+              <a:lnSpc>
+                <a:spcPct val="90000"/>
+              </a:lnSpc>
+              <a:spcBef>
+                <a:spcPts val="500"/>
+              </a:spcBef>
+              <a:buFont typeface="Arial" panose="020B0604020202020204" pitchFamily="34" charset="0"/>
+              <a:buChar char="•"/>
+              <a:defRPr sz="1800" kern="1200">
+                <a:solidFill>
+                  <a:schemeClr val="tx1"/>
+                </a:solidFill>
+                <a:latin typeface="+mn-lt"/>
+                <a:ea typeface="+mn-ea"/>
+                <a:cs typeface="+mn-cs"/>
+              </a:defRPr>
+            </a:lvl4pPr>
+            <a:lvl5pPr marL="2057400" indent="-228600" algn="l" defTabSz="914400" rtl="0" eaLnBrk="1" latinLnBrk="0" hangingPunct="1">
+              <a:lnSpc>
+                <a:spcPct val="90000"/>
+              </a:lnSpc>
+              <a:spcBef>
+                <a:spcPts val="500"/>
+              </a:spcBef>
+              <a:buFont typeface="Arial" panose="020B0604020202020204" pitchFamily="34" charset="0"/>
+              <a:buChar char="•"/>
+              <a:defRPr sz="1800" kern="1200">
+                <a:solidFill>
+                  <a:schemeClr val="tx1"/>
+                </a:solidFill>
+                <a:latin typeface="+mn-lt"/>
+                <a:ea typeface="+mn-ea"/>
+                <a:cs typeface="+mn-cs"/>
+              </a:defRPr>
+            </a:lvl5pPr>
+            <a:lvl6pPr marL="2514600" indent="-228600" algn="l" defTabSz="914400" rtl="0" eaLnBrk="1" latinLnBrk="0" hangingPunct="1">
+              <a:lnSpc>
+                <a:spcPct val="90000"/>
+              </a:lnSpc>
+              <a:spcBef>
+                <a:spcPts val="500"/>
+              </a:spcBef>
+              <a:buFont typeface="Arial" panose="020B0604020202020204" pitchFamily="34" charset="0"/>
+              <a:buChar char="•"/>
+              <a:defRPr sz="1800" kern="1200">
+                <a:solidFill>
+                  <a:schemeClr val="tx1"/>
+                </a:solidFill>
+                <a:latin typeface="+mn-lt"/>
+                <a:ea typeface="+mn-ea"/>
+                <a:cs typeface="+mn-cs"/>
+              </a:defRPr>
+            </a:lvl6pPr>
+            <a:lvl7pPr marL="2971800" indent="-228600" algn="l" defTabSz="914400" rtl="0" eaLnBrk="1" latinLnBrk="0" hangingPunct="1">
+              <a:lnSpc>
+                <a:spcPct val="90000"/>
+              </a:lnSpc>
+              <a:spcBef>
+                <a:spcPts val="500"/>
+              </a:spcBef>
+              <a:buFont typeface="Arial" panose="020B0604020202020204" pitchFamily="34" charset="0"/>
+              <a:buChar char="•"/>
+              <a:defRPr sz="1800" kern="1200">
+                <a:solidFill>
+                  <a:schemeClr val="tx1"/>
+                </a:solidFill>
+                <a:latin typeface="+mn-lt"/>
+                <a:ea typeface="+mn-ea"/>
+                <a:cs typeface="+mn-cs"/>
+              </a:defRPr>
+            </a:lvl7pPr>
+            <a:lvl8pPr marL="3429000" indent="-228600" algn="l" defTabSz="914400" rtl="0" eaLnBrk="1" latinLnBrk="0" hangingPunct="1">
+              <a:lnSpc>
+                <a:spcPct val="90000"/>
+              </a:lnSpc>
+              <a:spcBef>
+                <a:spcPts val="500"/>
+              </a:spcBef>
+              <a:buFont typeface="Arial" panose="020B0604020202020204" pitchFamily="34" charset="0"/>
+              <a:buChar char="•"/>
+              <a:defRPr sz="1800" kern="1200">
+                <a:solidFill>
+                  <a:schemeClr val="tx1"/>
+                </a:solidFill>
+                <a:latin typeface="+mn-lt"/>
+                <a:ea typeface="+mn-ea"/>
+                <a:cs typeface="+mn-cs"/>
+              </a:defRPr>
+            </a:lvl8pPr>
+            <a:lvl9pPr marL="3886200" indent="-228600" algn="l" defTabSz="914400" rtl="0" eaLnBrk="1" latinLnBrk="0" hangingPunct="1">
+              <a:lnSpc>
+                <a:spcPct val="90000"/>
+              </a:lnSpc>
+              <a:spcBef>
+                <a:spcPts val="500"/>
+              </a:spcBef>
+              <a:buFont typeface="Arial" panose="020B0604020202020204" pitchFamily="34" charset="0"/>
+              <a:buChar char="•"/>
+              <a:defRPr sz="1800" kern="1200">
+                <a:solidFill>
+                  <a:schemeClr val="tx1"/>
+                </a:solidFill>
+                <a:latin typeface="+mn-lt"/>
+                <a:ea typeface="+mn-ea"/>
+                <a:cs typeface="+mn-cs"/>
+              </a:defRPr>
+            </a:lvl9pPr>
+          </a:lstStyle>
+          <a:p>
+            <a:pPr marL="0" indent="0">
+              <a:buNone/>
+            </a:pPr>
+            <a:r>
+              <a:rPr lang="en-CA" sz="2400" dirty="0">
+                <a:solidFill>
+                  <a:srgbClr val="8671B4"/>
+                </a:solidFill>
+              </a:rPr>
+              <a:t>No-show post probability</a:t>
+            </a:r>
+          </a:p>
+        </p:txBody>
+      </p:sp>
+      <p:sp>
+        <p:nvSpPr>
+          <p:cNvPr id="7" name="Content Placeholder 11">
+            <a:extLst>
+              <a:ext uri="{FF2B5EF4-FFF2-40B4-BE49-F238E27FC236}">
+                <a16:creationId xmlns:a16="http://schemas.microsoft.com/office/drawing/2014/main" id="{9933F121-988A-48B2-BCB0-9EC27F13FBF6}"/>
+              </a:ext>
+            </a:extLst>
+          </p:cNvPr>
+          <p:cNvSpPr txBox="1">
+            <a:spLocks/>
+          </p:cNvSpPr>
+          <p:nvPr/>
+        </p:nvSpPr>
+        <p:spPr>
+          <a:xfrm>
+            <a:off x="5692963" y="1162363"/>
+            <a:ext cx="3272590" cy="493294"/>
+          </a:xfrm>
+          <a:prstGeom prst="rect">
+            <a:avLst/>
+          </a:prstGeom>
+        </p:spPr>
+        <p:txBody>
+          <a:bodyPr vert="horz" lIns="91440" tIns="45720" rIns="91440" bIns="45720" rtlCol="0">
+            <a:normAutofit/>
+          </a:bodyPr>
+          <a:lstStyle>
+            <a:lvl1pPr marL="228600" indent="-228600" algn="l" defTabSz="914400" rtl="0" eaLnBrk="1" latinLnBrk="0" hangingPunct="1">
+              <a:lnSpc>
+                <a:spcPct val="90000"/>
+              </a:lnSpc>
+              <a:spcBef>
+                <a:spcPts val="1000"/>
+              </a:spcBef>
+              <a:buFont typeface="Arial" panose="020B0604020202020204" pitchFamily="34" charset="0"/>
+              <a:buChar char="•"/>
+              <a:defRPr sz="2800" kern="1200">
+                <a:solidFill>
+                  <a:schemeClr val="tx1"/>
+                </a:solidFill>
+                <a:latin typeface="+mn-lt"/>
+                <a:ea typeface="+mn-ea"/>
+                <a:cs typeface="+mn-cs"/>
+              </a:defRPr>
+            </a:lvl1pPr>
+            <a:lvl2pPr marL="685800" indent="-228600" algn="l" defTabSz="914400" rtl="0" eaLnBrk="1" latinLnBrk="0" hangingPunct="1">
+              <a:lnSpc>
+                <a:spcPct val="90000"/>
+              </a:lnSpc>
+              <a:spcBef>
+                <a:spcPts val="500"/>
+              </a:spcBef>
+              <a:buFont typeface="Arial" panose="020B0604020202020204" pitchFamily="34" charset="0"/>
+              <a:buChar char="•"/>
+              <a:defRPr sz="2400" kern="1200">
+                <a:solidFill>
+                  <a:schemeClr val="tx1"/>
+                </a:solidFill>
+                <a:latin typeface="+mn-lt"/>
+                <a:ea typeface="+mn-ea"/>
+                <a:cs typeface="+mn-cs"/>
+              </a:defRPr>
+            </a:lvl2pPr>
+            <a:lvl3pPr marL="1143000" indent="-228600" algn="l" defTabSz="914400" rtl="0" eaLnBrk="1" latinLnBrk="0" hangingPunct="1">
+              <a:lnSpc>
+                <a:spcPct val="90000"/>
+              </a:lnSpc>
+              <a:spcBef>
+                <a:spcPts val="500"/>
+              </a:spcBef>
+              <a:buFont typeface="Arial" panose="020B0604020202020204" pitchFamily="34" charset="0"/>
+              <a:buChar char="•"/>
+              <a:defRPr sz="2000" kern="1200">
+                <a:solidFill>
+                  <a:schemeClr val="tx1"/>
+                </a:solidFill>
+                <a:latin typeface="+mn-lt"/>
+                <a:ea typeface="+mn-ea"/>
+                <a:cs typeface="+mn-cs"/>
+              </a:defRPr>
+            </a:lvl3pPr>
+            <a:lvl4pPr marL="1600200" indent="-228600" algn="l" defTabSz="914400" rtl="0" eaLnBrk="1" latinLnBrk="0" hangingPunct="1">
+              <a:lnSpc>
+                <a:spcPct val="90000"/>
+              </a:lnSpc>
+              <a:spcBef>
+                <a:spcPts val="500"/>
+              </a:spcBef>
+              <a:buFont typeface="Arial" panose="020B0604020202020204" pitchFamily="34" charset="0"/>
+              <a:buChar char="•"/>
+              <a:defRPr sz="1800" kern="1200">
+                <a:solidFill>
+                  <a:schemeClr val="tx1"/>
+                </a:solidFill>
+                <a:latin typeface="+mn-lt"/>
+                <a:ea typeface="+mn-ea"/>
+                <a:cs typeface="+mn-cs"/>
+              </a:defRPr>
+            </a:lvl4pPr>
+            <a:lvl5pPr marL="2057400" indent="-228600" algn="l" defTabSz="914400" rtl="0" eaLnBrk="1" latinLnBrk="0" hangingPunct="1">
+              <a:lnSpc>
+                <a:spcPct val="90000"/>
+              </a:lnSpc>
+              <a:spcBef>
+                <a:spcPts val="500"/>
+              </a:spcBef>
+              <a:buFont typeface="Arial" panose="020B0604020202020204" pitchFamily="34" charset="0"/>
+              <a:buChar char="•"/>
+              <a:defRPr sz="1800" kern="1200">
+                <a:solidFill>
+                  <a:schemeClr val="tx1"/>
+                </a:solidFill>
+                <a:latin typeface="+mn-lt"/>
+                <a:ea typeface="+mn-ea"/>
+                <a:cs typeface="+mn-cs"/>
+              </a:defRPr>
+            </a:lvl5pPr>
+            <a:lvl6pPr marL="2514600" indent="-228600" algn="l" defTabSz="914400" rtl="0" eaLnBrk="1" latinLnBrk="0" hangingPunct="1">
+              <a:lnSpc>
+                <a:spcPct val="90000"/>
+              </a:lnSpc>
+              <a:spcBef>
+                <a:spcPts val="500"/>
+              </a:spcBef>
+              <a:buFont typeface="Arial" panose="020B0604020202020204" pitchFamily="34" charset="0"/>
+              <a:buChar char="•"/>
+              <a:defRPr sz="1800" kern="1200">
+                <a:solidFill>
+                  <a:schemeClr val="tx1"/>
+                </a:solidFill>
+                <a:latin typeface="+mn-lt"/>
+                <a:ea typeface="+mn-ea"/>
+                <a:cs typeface="+mn-cs"/>
+              </a:defRPr>
+            </a:lvl6pPr>
+            <a:lvl7pPr marL="2971800" indent="-228600" algn="l" defTabSz="914400" rtl="0" eaLnBrk="1" latinLnBrk="0" hangingPunct="1">
+              <a:lnSpc>
+                <a:spcPct val="90000"/>
+              </a:lnSpc>
+              <a:spcBef>
+                <a:spcPts val="500"/>
+              </a:spcBef>
+              <a:buFont typeface="Arial" panose="020B0604020202020204" pitchFamily="34" charset="0"/>
+              <a:buChar char="•"/>
+              <a:defRPr sz="1800" kern="1200">
+                <a:solidFill>
+                  <a:schemeClr val="tx1"/>
+                </a:solidFill>
+                <a:latin typeface="+mn-lt"/>
+                <a:ea typeface="+mn-ea"/>
+                <a:cs typeface="+mn-cs"/>
+              </a:defRPr>
+            </a:lvl7pPr>
+            <a:lvl8pPr marL="3429000" indent="-228600" algn="l" defTabSz="914400" rtl="0" eaLnBrk="1" latinLnBrk="0" hangingPunct="1">
+              <a:lnSpc>
+                <a:spcPct val="90000"/>
+              </a:lnSpc>
+              <a:spcBef>
+                <a:spcPts val="500"/>
+              </a:spcBef>
+              <a:buFont typeface="Arial" panose="020B0604020202020204" pitchFamily="34" charset="0"/>
+              <a:buChar char="•"/>
+              <a:defRPr sz="1800" kern="1200">
+                <a:solidFill>
+                  <a:schemeClr val="tx1"/>
+                </a:solidFill>
+                <a:latin typeface="+mn-lt"/>
+                <a:ea typeface="+mn-ea"/>
+                <a:cs typeface="+mn-cs"/>
+              </a:defRPr>
+            </a:lvl8pPr>
+            <a:lvl9pPr marL="3886200" indent="-228600" algn="l" defTabSz="914400" rtl="0" eaLnBrk="1" latinLnBrk="0" hangingPunct="1">
+              <a:lnSpc>
+                <a:spcPct val="90000"/>
+              </a:lnSpc>
+              <a:spcBef>
+                <a:spcPts val="500"/>
+              </a:spcBef>
+              <a:buFont typeface="Arial" panose="020B0604020202020204" pitchFamily="34" charset="0"/>
+              <a:buChar char="•"/>
+              <a:defRPr sz="1800" kern="1200">
+                <a:solidFill>
+                  <a:schemeClr val="tx1"/>
+                </a:solidFill>
+                <a:latin typeface="+mn-lt"/>
+                <a:ea typeface="+mn-ea"/>
+                <a:cs typeface="+mn-cs"/>
+              </a:defRPr>
+            </a:lvl9pPr>
+          </a:lstStyle>
+          <a:p>
+            <a:pPr marL="0" indent="0">
+              <a:buNone/>
+            </a:pPr>
+            <a:r>
+              <a:rPr lang="en-CA" sz="2400" dirty="0">
+                <a:solidFill>
+                  <a:schemeClr val="accent2">
+                    <a:lumMod val="75000"/>
+                  </a:schemeClr>
+                </a:solidFill>
+              </a:rPr>
+              <a:t>Balking post probability</a:t>
+            </a:r>
           </a:p>
         </p:txBody>
       </p:sp>
     </p:spTree>
     <p:extLst>
       <p:ext uri="{BB962C8B-B14F-4D97-AF65-F5344CB8AC3E}">
-        <p14:creationId xmlns:p14="http://schemas.microsoft.com/office/powerpoint/2010/main" val="2328307014"/>
+        <p14:creationId xmlns:p14="http://schemas.microsoft.com/office/powerpoint/2010/main" val="2858968893"/>
       </p:ext>
     </p:extLst>
   </p:cSld>
@@ -5592,7 +7431,7 @@
           <p:cNvPr id="2" name="Title 1">
             <a:extLst>
               <a:ext uri="{FF2B5EF4-FFF2-40B4-BE49-F238E27FC236}">
-                <a16:creationId xmlns:a16="http://schemas.microsoft.com/office/drawing/2014/main" id="{1C8EFFAE-FAAC-489E-940F-4BACE00C4D30}"/>
+                <a16:creationId xmlns:a16="http://schemas.microsoft.com/office/drawing/2014/main" id="{EE19DA39-0AD6-4C52-825B-8541719E5064}"/>
               </a:ext>
             </a:extLst>
           </p:cNvPr>
@@ -5603,27 +7442,67 @@
             <p:ph type="title"/>
           </p:nvPr>
         </p:nvSpPr>
-        <p:spPr/>
+        <p:spPr>
+          <a:xfrm>
+            <a:off x="626490" y="487077"/>
+            <a:ext cx="11353800" cy="1325563"/>
+          </a:xfrm>
+        </p:spPr>
         <p:txBody>
           <a:bodyPr/>
           <a:lstStyle/>
           <a:p>
             <a:r>
               <a:rPr lang="en-CA" dirty="0"/>
-              <a:t>When does reservation policy not hurt the other class?</a:t>
-            </a:r>
-          </a:p>
-        </p:txBody>
-      </p:sp>
-      <p:sp>
-        <p:nvSpPr>
-          <p:cNvPr id="3" name="Content Placeholder 2">
+              <a:t>No-show post probability determines the effectiveness of policies on utilization</a:t>
+            </a:r>
+          </a:p>
+        </p:txBody>
+      </p:sp>
+      <p:pic>
+        <p:nvPicPr>
+          <p:cNvPr id="4" name="Picture 3">
             <a:extLst>
               <a:ext uri="{FF2B5EF4-FFF2-40B4-BE49-F238E27FC236}">
-                <a16:creationId xmlns:a16="http://schemas.microsoft.com/office/drawing/2014/main" id="{F9C6B679-2893-47B0-B1C7-B701E0D57F4E}"/>
+                <a16:creationId xmlns:a16="http://schemas.microsoft.com/office/drawing/2014/main" id="{BBBC00A1-DD6A-41E5-BC0B-C344BDF93BED}"/>
               </a:ext>
             </a:extLst>
           </p:cNvPr>
+          <p:cNvPicPr>
+            <a:picLocks noChangeAspect="1"/>
+          </p:cNvPicPr>
+          <p:nvPr/>
+        </p:nvPicPr>
+        <p:blipFill rotWithShape="1">
+          <a:blip r:embed="rId3">
+            <a:extLst>
+              <a:ext uri="{28A0092B-C50C-407E-A947-70E740481C1C}">
+                <a14:useLocalDpi xmlns:a14="http://schemas.microsoft.com/office/drawing/2010/main" val="0"/>
+              </a:ext>
+            </a:extLst>
+          </a:blip>
+          <a:srcRect t="922" r="1310" b="1636"/>
+          <a:stretch/>
+        </p:blipFill>
+        <p:spPr>
+          <a:xfrm>
+            <a:off x="697846" y="2085473"/>
+            <a:ext cx="6823600" cy="4219461"/>
+          </a:xfrm>
+          <a:prstGeom prst="rect">
+            <a:avLst/>
+          </a:prstGeom>
+        </p:spPr>
+      </p:pic>
+      <p:sp>
+        <p:nvSpPr>
+          <p:cNvPr id="6" name="Content Placeholder 2">
+            <a:extLst>
+              <a:ext uri="{FF2B5EF4-FFF2-40B4-BE49-F238E27FC236}">
+                <a16:creationId xmlns:a16="http://schemas.microsoft.com/office/drawing/2014/main" id="{69948886-C3ED-4BDE-80DB-F4830BED6F01}"/>
+              </a:ext>
+            </a:extLst>
+          </p:cNvPr>
           <p:cNvSpPr>
             <a:spLocks noGrp="1"/>
           </p:cNvSpPr>
@@ -5631,9 +7510,16 @@
             <p:ph idx="1"/>
           </p:nvPr>
         </p:nvSpPr>
-        <p:spPr/>
-        <p:txBody>
-          <a:bodyPr/>
+        <p:spPr>
+          <a:xfrm>
+            <a:off x="8223699" y="2361840"/>
+            <a:ext cx="3344196" cy="3520668"/>
+          </a:xfrm>
+        </p:spPr>
+        <p:txBody>
+          <a:bodyPr>
+            <a:normAutofit lnSpcReduction="10000"/>
+          </a:bodyPr>
           <a:lstStyle/>
           <a:p>
             <a:pPr marL="0" indent="0">
@@ -5641,28 +7527,7 @@
             </a:pPr>
             <a:r>
               <a:rPr lang="en-CA" dirty="0"/>
-              <a:t>Let Class 1 be the reservation class</a:t>
-            </a:r>
-          </a:p>
-          <a:p>
-            <a:endParaRPr lang="en-CA" dirty="0"/>
-          </a:p>
-          <a:p>
-            <a:r>
-              <a:rPr lang="en-CA" dirty="0"/>
-              <a:t>When Class 1 is a smaller portion of the queueing population</a:t>
-            </a:r>
-          </a:p>
-          <a:p>
-            <a:r>
-              <a:rPr lang="en-CA" dirty="0"/>
-              <a:t>When demand is lower</a:t>
-            </a:r>
-          </a:p>
-          <a:p>
-            <a:r>
-              <a:rPr lang="en-CA" dirty="0"/>
-              <a:t>When no-show magnitude is not too high</a:t>
+              <a:t>Higher no-show post probability increases the effectiveness of utilization gain from implementing booking horizon policies, reservation policies, and a combination of both.</a:t>
             </a:r>
           </a:p>
         </p:txBody>
@@ -5670,7 +7535,150 @@
     </p:spTree>
     <p:extLst>
       <p:ext uri="{BB962C8B-B14F-4D97-AF65-F5344CB8AC3E}">
-        <p14:creationId xmlns:p14="http://schemas.microsoft.com/office/powerpoint/2010/main" val="543504394"/>
+        <p14:creationId xmlns:p14="http://schemas.microsoft.com/office/powerpoint/2010/main" val="3873336915"/>
+      </p:ext>
+    </p:extLst>
+  </p:cSld>
+  <p:clrMapOvr>
+    <a:masterClrMapping/>
+  </p:clrMapOvr>
+</p:sld>
+</file>
+
+<file path=ppt/slides/slide19.xml><?xml version="1.0" encoding="utf-8"?>
+<p:sld xmlns:a="http://schemas.openxmlformats.org/drawingml/2006/main" xmlns:r="http://schemas.openxmlformats.org/officeDocument/2006/relationships" xmlns:p="http://schemas.openxmlformats.org/presentationml/2006/main">
+  <p:cSld>
+    <p:spTree>
+      <p:nvGrpSpPr>
+        <p:cNvPr id="1" name=""/>
+        <p:cNvGrpSpPr/>
+        <p:nvPr/>
+      </p:nvGrpSpPr>
+      <p:grpSpPr>
+        <a:xfrm>
+          <a:off x="0" y="0"/>
+          <a:ext cx="0" cy="0"/>
+          <a:chOff x="0" y="0"/>
+          <a:chExt cx="0" cy="0"/>
+        </a:xfrm>
+      </p:grpSpPr>
+      <p:sp>
+        <p:nvSpPr>
+          <p:cNvPr id="2" name="Title 1">
+            <a:extLst>
+              <a:ext uri="{FF2B5EF4-FFF2-40B4-BE49-F238E27FC236}">
+                <a16:creationId xmlns:a16="http://schemas.microsoft.com/office/drawing/2014/main" id="{F416DC7E-97AD-43A4-A8F4-9BE488FA1053}"/>
+              </a:ext>
+            </a:extLst>
+          </p:cNvPr>
+          <p:cNvSpPr>
+            <a:spLocks noGrp="1"/>
+          </p:cNvSpPr>
+          <p:nvPr>
+            <p:ph type="title"/>
+          </p:nvPr>
+        </p:nvSpPr>
+        <p:spPr>
+          <a:xfrm>
+            <a:off x="263012" y="188145"/>
+            <a:ext cx="11771671" cy="1325563"/>
+          </a:xfrm>
+        </p:spPr>
+        <p:txBody>
+          <a:bodyPr/>
+          <a:lstStyle/>
+          <a:p>
+            <a:r>
+              <a:rPr lang="en-CA" dirty="0"/>
+              <a:t>Demand activates the no-show effect on utilization</a:t>
+            </a:r>
+          </a:p>
+        </p:txBody>
+      </p:sp>
+      <p:sp>
+        <p:nvSpPr>
+          <p:cNvPr id="4" name="Content Placeholder 2">
+            <a:extLst>
+              <a:ext uri="{FF2B5EF4-FFF2-40B4-BE49-F238E27FC236}">
+                <a16:creationId xmlns:a16="http://schemas.microsoft.com/office/drawing/2014/main" id="{6235FE9C-0B7F-4878-909D-4AE73DEAC92B}"/>
+              </a:ext>
+            </a:extLst>
+          </p:cNvPr>
+          <p:cNvSpPr>
+            <a:spLocks noGrp="1"/>
+          </p:cNvSpPr>
+          <p:nvPr>
+            <p:ph idx="1"/>
+          </p:nvPr>
+        </p:nvSpPr>
+        <p:spPr>
+          <a:xfrm>
+            <a:off x="8148484" y="1614946"/>
+            <a:ext cx="3827207" cy="4800602"/>
+          </a:xfrm>
+        </p:spPr>
+        <p:txBody>
+          <a:bodyPr>
+            <a:normAutofit lnSpcReduction="10000"/>
+          </a:bodyPr>
+          <a:lstStyle/>
+          <a:p>
+            <a:r>
+              <a:rPr lang="en-CA" dirty="0"/>
+              <a:t>Demand is a necessary component to policies’ utilization effectiveness from no-show post probability.</a:t>
+            </a:r>
+          </a:p>
+          <a:p>
+            <a:r>
+              <a:rPr lang="en-CA" dirty="0"/>
+              <a:t>Reservation is comparatively less effective because the horizon inflexibility pushes patients beyond the no-show delay at higher demand.</a:t>
+            </a:r>
+          </a:p>
+          <a:p>
+            <a:endParaRPr lang="en-CA" dirty="0"/>
+          </a:p>
+        </p:txBody>
+      </p:sp>
+      <p:pic>
+        <p:nvPicPr>
+          <p:cNvPr id="6" name="Picture 5">
+            <a:extLst>
+              <a:ext uri="{FF2B5EF4-FFF2-40B4-BE49-F238E27FC236}">
+                <a16:creationId xmlns:a16="http://schemas.microsoft.com/office/drawing/2014/main" id="{43520F4A-BA0F-41BE-A1EC-DE854A2D2220}"/>
+              </a:ext>
+            </a:extLst>
+          </p:cNvPr>
+          <p:cNvPicPr>
+            <a:picLocks noChangeAspect="1"/>
+          </p:cNvPicPr>
+          <p:nvPr/>
+        </p:nvPicPr>
+        <p:blipFill>
+          <a:blip r:embed="rId3">
+            <a:extLst>
+              <a:ext uri="{28A0092B-C50C-407E-A947-70E740481C1C}">
+                <a14:useLocalDpi xmlns:a14="http://schemas.microsoft.com/office/drawing/2010/main" val="0"/>
+              </a:ext>
+            </a:extLst>
+          </a:blip>
+          <a:stretch>
+            <a:fillRect/>
+          </a:stretch>
+        </p:blipFill>
+        <p:spPr>
+          <a:xfrm>
+            <a:off x="514002" y="1614946"/>
+            <a:ext cx="7462151" cy="4541914"/>
+          </a:xfrm>
+          <a:prstGeom prst="rect">
+            <a:avLst/>
+          </a:prstGeom>
+        </p:spPr>
+      </p:pic>
+    </p:spTree>
+    <p:extLst>
+      <p:ext uri="{BB962C8B-B14F-4D97-AF65-F5344CB8AC3E}">
+        <p14:creationId xmlns:p14="http://schemas.microsoft.com/office/powerpoint/2010/main" val="1479030415"/>
       </p:ext>
     </p:extLst>
   </p:cSld>
@@ -6138,6 +8146,745 @@
     <p:extLst>
       <p:ext uri="{BB962C8B-B14F-4D97-AF65-F5344CB8AC3E}">
         <p14:creationId xmlns:p14="http://schemas.microsoft.com/office/powerpoint/2010/main" val="1466462085"/>
+      </p:ext>
+    </p:extLst>
+  </p:cSld>
+  <p:clrMapOvr>
+    <a:masterClrMapping/>
+  </p:clrMapOvr>
+</p:sld>
+</file>
+
+<file path=ppt/slides/slide20.xml><?xml version="1.0" encoding="utf-8"?>
+<p:sld xmlns:a="http://schemas.openxmlformats.org/drawingml/2006/main" xmlns:r="http://schemas.openxmlformats.org/officeDocument/2006/relationships" xmlns:p="http://schemas.openxmlformats.org/presentationml/2006/main">
+  <p:cSld>
+    <p:spTree>
+      <p:nvGrpSpPr>
+        <p:cNvPr id="1" name=""/>
+        <p:cNvGrpSpPr/>
+        <p:nvPr/>
+      </p:nvGrpSpPr>
+      <p:grpSpPr>
+        <a:xfrm>
+          <a:off x="0" y="0"/>
+          <a:ext cx="0" cy="0"/>
+          <a:chOff x="0" y="0"/>
+          <a:chExt cx="0" cy="0"/>
+        </a:xfrm>
+      </p:grpSpPr>
+      <p:sp>
+        <p:nvSpPr>
+          <p:cNvPr id="2" name="Title 1">
+            <a:extLst>
+              <a:ext uri="{FF2B5EF4-FFF2-40B4-BE49-F238E27FC236}">
+                <a16:creationId xmlns:a16="http://schemas.microsoft.com/office/drawing/2014/main" id="{0D045B51-3913-420F-8417-28692C8ED825}"/>
+              </a:ext>
+            </a:extLst>
+          </p:cNvPr>
+          <p:cNvSpPr>
+            <a:spLocks noGrp="1"/>
+          </p:cNvSpPr>
+          <p:nvPr>
+            <p:ph type="title"/>
+          </p:nvPr>
+        </p:nvSpPr>
+        <p:spPr>
+          <a:xfrm>
+            <a:off x="655074" y="284009"/>
+            <a:ext cx="10815747" cy="1087592"/>
+          </a:xfrm>
+        </p:spPr>
+        <p:txBody>
+          <a:bodyPr>
+            <a:normAutofit fontScale="90000"/>
+          </a:bodyPr>
+          <a:lstStyle/>
+          <a:p>
+            <a:r>
+              <a:rPr lang="en-CA" dirty="0"/>
+              <a:t>When optimizing utilization, horizon is usually cut short to prevent no-shows</a:t>
+            </a:r>
+          </a:p>
+        </p:txBody>
+      </p:sp>
+      <p:sp>
+        <p:nvSpPr>
+          <p:cNvPr id="7" name="Content Placeholder 2">
+            <a:extLst>
+              <a:ext uri="{FF2B5EF4-FFF2-40B4-BE49-F238E27FC236}">
+                <a16:creationId xmlns:a16="http://schemas.microsoft.com/office/drawing/2014/main" id="{F7540F8F-C6D0-49E5-B6EF-B98989DF51AE}"/>
+              </a:ext>
+            </a:extLst>
+          </p:cNvPr>
+          <p:cNvSpPr txBox="1">
+            <a:spLocks/>
+          </p:cNvSpPr>
+          <p:nvPr/>
+        </p:nvSpPr>
+        <p:spPr>
+          <a:xfrm>
+            <a:off x="736717" y="5663490"/>
+            <a:ext cx="10954540" cy="1167492"/>
+          </a:xfrm>
+          <a:prstGeom prst="rect">
+            <a:avLst/>
+          </a:prstGeom>
+        </p:spPr>
+        <p:txBody>
+          <a:bodyPr vert="horz" lIns="91440" tIns="45720" rIns="91440" bIns="45720" rtlCol="0">
+            <a:normAutofit fontScale="85000" lnSpcReduction="20000"/>
+          </a:bodyPr>
+          <a:lstStyle>
+            <a:lvl1pPr marL="228600" indent="-228600" algn="l" defTabSz="914400" rtl="0" eaLnBrk="1" latinLnBrk="0" hangingPunct="1">
+              <a:lnSpc>
+                <a:spcPct val="90000"/>
+              </a:lnSpc>
+              <a:spcBef>
+                <a:spcPts val="1000"/>
+              </a:spcBef>
+              <a:buFont typeface="Arial" panose="020B0604020202020204" pitchFamily="34" charset="0"/>
+              <a:buChar char="•"/>
+              <a:defRPr sz="2800" kern="1200">
+                <a:solidFill>
+                  <a:schemeClr val="tx1"/>
+                </a:solidFill>
+                <a:latin typeface="+mn-lt"/>
+                <a:ea typeface="+mn-ea"/>
+                <a:cs typeface="+mn-cs"/>
+              </a:defRPr>
+            </a:lvl1pPr>
+            <a:lvl2pPr marL="685800" indent="-228600" algn="l" defTabSz="914400" rtl="0" eaLnBrk="1" latinLnBrk="0" hangingPunct="1">
+              <a:lnSpc>
+                <a:spcPct val="90000"/>
+              </a:lnSpc>
+              <a:spcBef>
+                <a:spcPts val="500"/>
+              </a:spcBef>
+              <a:buFont typeface="Arial" panose="020B0604020202020204" pitchFamily="34" charset="0"/>
+              <a:buChar char="•"/>
+              <a:defRPr sz="2400" kern="1200">
+                <a:solidFill>
+                  <a:schemeClr val="tx1"/>
+                </a:solidFill>
+                <a:latin typeface="+mn-lt"/>
+                <a:ea typeface="+mn-ea"/>
+                <a:cs typeface="+mn-cs"/>
+              </a:defRPr>
+            </a:lvl2pPr>
+            <a:lvl3pPr marL="1143000" indent="-228600" algn="l" defTabSz="914400" rtl="0" eaLnBrk="1" latinLnBrk="0" hangingPunct="1">
+              <a:lnSpc>
+                <a:spcPct val="90000"/>
+              </a:lnSpc>
+              <a:spcBef>
+                <a:spcPts val="500"/>
+              </a:spcBef>
+              <a:buFont typeface="Arial" panose="020B0604020202020204" pitchFamily="34" charset="0"/>
+              <a:buChar char="•"/>
+              <a:defRPr sz="2000" kern="1200">
+                <a:solidFill>
+                  <a:schemeClr val="tx1"/>
+                </a:solidFill>
+                <a:latin typeface="+mn-lt"/>
+                <a:ea typeface="+mn-ea"/>
+                <a:cs typeface="+mn-cs"/>
+              </a:defRPr>
+            </a:lvl3pPr>
+            <a:lvl4pPr marL="1600200" indent="-228600" algn="l" defTabSz="914400" rtl="0" eaLnBrk="1" latinLnBrk="0" hangingPunct="1">
+              <a:lnSpc>
+                <a:spcPct val="90000"/>
+              </a:lnSpc>
+              <a:spcBef>
+                <a:spcPts val="500"/>
+              </a:spcBef>
+              <a:buFont typeface="Arial" panose="020B0604020202020204" pitchFamily="34" charset="0"/>
+              <a:buChar char="•"/>
+              <a:defRPr sz="1800" kern="1200">
+                <a:solidFill>
+                  <a:schemeClr val="tx1"/>
+                </a:solidFill>
+                <a:latin typeface="+mn-lt"/>
+                <a:ea typeface="+mn-ea"/>
+                <a:cs typeface="+mn-cs"/>
+              </a:defRPr>
+            </a:lvl4pPr>
+            <a:lvl5pPr marL="2057400" indent="-228600" algn="l" defTabSz="914400" rtl="0" eaLnBrk="1" latinLnBrk="0" hangingPunct="1">
+              <a:lnSpc>
+                <a:spcPct val="90000"/>
+              </a:lnSpc>
+              <a:spcBef>
+                <a:spcPts val="500"/>
+              </a:spcBef>
+              <a:buFont typeface="Arial" panose="020B0604020202020204" pitchFamily="34" charset="0"/>
+              <a:buChar char="•"/>
+              <a:defRPr sz="1800" kern="1200">
+                <a:solidFill>
+                  <a:schemeClr val="tx1"/>
+                </a:solidFill>
+                <a:latin typeface="+mn-lt"/>
+                <a:ea typeface="+mn-ea"/>
+                <a:cs typeface="+mn-cs"/>
+              </a:defRPr>
+            </a:lvl5pPr>
+            <a:lvl6pPr marL="2514600" indent="-228600" algn="l" defTabSz="914400" rtl="0" eaLnBrk="1" latinLnBrk="0" hangingPunct="1">
+              <a:lnSpc>
+                <a:spcPct val="90000"/>
+              </a:lnSpc>
+              <a:spcBef>
+                <a:spcPts val="500"/>
+              </a:spcBef>
+              <a:buFont typeface="Arial" panose="020B0604020202020204" pitchFamily="34" charset="0"/>
+              <a:buChar char="•"/>
+              <a:defRPr sz="1800" kern="1200">
+                <a:solidFill>
+                  <a:schemeClr val="tx1"/>
+                </a:solidFill>
+                <a:latin typeface="+mn-lt"/>
+                <a:ea typeface="+mn-ea"/>
+                <a:cs typeface="+mn-cs"/>
+              </a:defRPr>
+            </a:lvl6pPr>
+            <a:lvl7pPr marL="2971800" indent="-228600" algn="l" defTabSz="914400" rtl="0" eaLnBrk="1" latinLnBrk="0" hangingPunct="1">
+              <a:lnSpc>
+                <a:spcPct val="90000"/>
+              </a:lnSpc>
+              <a:spcBef>
+                <a:spcPts val="500"/>
+              </a:spcBef>
+              <a:buFont typeface="Arial" panose="020B0604020202020204" pitchFamily="34" charset="0"/>
+              <a:buChar char="•"/>
+              <a:defRPr sz="1800" kern="1200">
+                <a:solidFill>
+                  <a:schemeClr val="tx1"/>
+                </a:solidFill>
+                <a:latin typeface="+mn-lt"/>
+                <a:ea typeface="+mn-ea"/>
+                <a:cs typeface="+mn-cs"/>
+              </a:defRPr>
+            </a:lvl7pPr>
+            <a:lvl8pPr marL="3429000" indent="-228600" algn="l" defTabSz="914400" rtl="0" eaLnBrk="1" latinLnBrk="0" hangingPunct="1">
+              <a:lnSpc>
+                <a:spcPct val="90000"/>
+              </a:lnSpc>
+              <a:spcBef>
+                <a:spcPts val="500"/>
+              </a:spcBef>
+              <a:buFont typeface="Arial" panose="020B0604020202020204" pitchFamily="34" charset="0"/>
+              <a:buChar char="•"/>
+              <a:defRPr sz="1800" kern="1200">
+                <a:solidFill>
+                  <a:schemeClr val="tx1"/>
+                </a:solidFill>
+                <a:latin typeface="+mn-lt"/>
+                <a:ea typeface="+mn-ea"/>
+                <a:cs typeface="+mn-cs"/>
+              </a:defRPr>
+            </a:lvl8pPr>
+            <a:lvl9pPr marL="3886200" indent="-228600" algn="l" defTabSz="914400" rtl="0" eaLnBrk="1" latinLnBrk="0" hangingPunct="1">
+              <a:lnSpc>
+                <a:spcPct val="90000"/>
+              </a:lnSpc>
+              <a:spcBef>
+                <a:spcPts val="500"/>
+              </a:spcBef>
+              <a:buFont typeface="Arial" panose="020B0604020202020204" pitchFamily="34" charset="0"/>
+              <a:buChar char="•"/>
+              <a:defRPr sz="1800" kern="1200">
+                <a:solidFill>
+                  <a:schemeClr val="tx1"/>
+                </a:solidFill>
+                <a:latin typeface="+mn-lt"/>
+                <a:ea typeface="+mn-ea"/>
+                <a:cs typeface="+mn-cs"/>
+              </a:defRPr>
+            </a:lvl9pPr>
+          </a:lstStyle>
+          <a:p>
+            <a:r>
+              <a:rPr lang="en-CA" dirty="0"/>
+              <a:t>Higher no-show post probability shortens optimized horizon.</a:t>
+            </a:r>
+          </a:p>
+          <a:p>
+            <a:r>
+              <a:rPr lang="en-CA" dirty="0"/>
+              <a:t>Mean horizon selected is higher when reservation is added to the policy.</a:t>
+            </a:r>
+          </a:p>
+          <a:p>
+            <a:r>
+              <a:rPr lang="en-CA" dirty="0"/>
+              <a:t>Horizon flexibility is more effective at regulating no-show risk than only reservation.</a:t>
+            </a:r>
+          </a:p>
+        </p:txBody>
+      </p:sp>
+      <p:pic>
+        <p:nvPicPr>
+          <p:cNvPr id="10" name="Picture 9">
+            <a:extLst>
+              <a:ext uri="{FF2B5EF4-FFF2-40B4-BE49-F238E27FC236}">
+                <a16:creationId xmlns:a16="http://schemas.microsoft.com/office/drawing/2014/main" id="{A71EB843-BCEA-419D-B433-CAF11B37FE93}"/>
+              </a:ext>
+            </a:extLst>
+          </p:cNvPr>
+          <p:cNvPicPr>
+            <a:picLocks noChangeAspect="1"/>
+          </p:cNvPicPr>
+          <p:nvPr/>
+        </p:nvPicPr>
+        <p:blipFill rotWithShape="1">
+          <a:blip r:embed="rId3">
+            <a:extLst>
+              <a:ext uri="{28A0092B-C50C-407E-A947-70E740481C1C}">
+                <a14:useLocalDpi xmlns:a14="http://schemas.microsoft.com/office/drawing/2010/main" val="0"/>
+              </a:ext>
+            </a:extLst>
+          </a:blip>
+          <a:srcRect t="10488" b="5524"/>
+          <a:stretch/>
+        </p:blipFill>
+        <p:spPr>
+          <a:xfrm>
+            <a:off x="1608906" y="1442160"/>
+            <a:ext cx="8908082" cy="4262151"/>
+          </a:xfrm>
+          <a:prstGeom prst="rect">
+            <a:avLst/>
+          </a:prstGeom>
+        </p:spPr>
+      </p:pic>
+      <p:pic>
+        <p:nvPicPr>
+          <p:cNvPr id="12" name="Picture 11">
+            <a:extLst>
+              <a:ext uri="{FF2B5EF4-FFF2-40B4-BE49-F238E27FC236}">
+                <a16:creationId xmlns:a16="http://schemas.microsoft.com/office/drawing/2014/main" id="{650A0E14-0E4E-4709-890D-B63961ED2535}"/>
+              </a:ext>
+            </a:extLst>
+          </p:cNvPr>
+          <p:cNvPicPr>
+            <a:picLocks noChangeAspect="1"/>
+          </p:cNvPicPr>
+          <p:nvPr/>
+        </p:nvPicPr>
+        <p:blipFill rotWithShape="1">
+          <a:blip r:embed="rId3">
+            <a:extLst>
+              <a:ext uri="{28A0092B-C50C-407E-A947-70E740481C1C}">
+                <a14:useLocalDpi xmlns:a14="http://schemas.microsoft.com/office/drawing/2010/main" val="0"/>
+              </a:ext>
+            </a:extLst>
+          </a:blip>
+          <a:srcRect b="94667"/>
+          <a:stretch/>
+        </p:blipFill>
+        <p:spPr>
+          <a:xfrm>
+            <a:off x="1295521" y="1362223"/>
+            <a:ext cx="9600958" cy="291695"/>
+          </a:xfrm>
+          <a:prstGeom prst="rect">
+            <a:avLst/>
+          </a:prstGeom>
+        </p:spPr>
+      </p:pic>
+    </p:spTree>
+    <p:extLst>
+      <p:ext uri="{BB962C8B-B14F-4D97-AF65-F5344CB8AC3E}">
+        <p14:creationId xmlns:p14="http://schemas.microsoft.com/office/powerpoint/2010/main" val="2328307014"/>
+      </p:ext>
+    </p:extLst>
+  </p:cSld>
+  <p:clrMapOvr>
+    <a:masterClrMapping/>
+  </p:clrMapOvr>
+</p:sld>
+</file>
+
+<file path=ppt/slides/slide21.xml><?xml version="1.0" encoding="utf-8"?>
+<p:sld xmlns:a="http://schemas.openxmlformats.org/drawingml/2006/main" xmlns:r="http://schemas.openxmlformats.org/officeDocument/2006/relationships" xmlns:p="http://schemas.openxmlformats.org/presentationml/2006/main">
+  <p:cSld>
+    <p:spTree>
+      <p:nvGrpSpPr>
+        <p:cNvPr id="1" name=""/>
+        <p:cNvGrpSpPr/>
+        <p:nvPr/>
+      </p:nvGrpSpPr>
+      <p:grpSpPr>
+        <a:xfrm>
+          <a:off x="0" y="0"/>
+          <a:ext cx="0" cy="0"/>
+          <a:chOff x="0" y="0"/>
+          <a:chExt cx="0" cy="0"/>
+        </a:xfrm>
+      </p:grpSpPr>
+      <p:sp>
+        <p:nvSpPr>
+          <p:cNvPr id="3" name="Content Placeholder 2">
+            <a:extLst>
+              <a:ext uri="{FF2B5EF4-FFF2-40B4-BE49-F238E27FC236}">
+                <a16:creationId xmlns:a16="http://schemas.microsoft.com/office/drawing/2014/main" id="{1B5A7A4C-F609-4B97-B2A7-B9A2F7AEA792}"/>
+              </a:ext>
+            </a:extLst>
+          </p:cNvPr>
+          <p:cNvSpPr>
+            <a:spLocks noGrp="1"/>
+          </p:cNvSpPr>
+          <p:nvPr>
+            <p:ph idx="1"/>
+          </p:nvPr>
+        </p:nvSpPr>
+        <p:spPr>
+          <a:xfrm>
+            <a:off x="838200" y="1891613"/>
+            <a:ext cx="10515600" cy="4351338"/>
+          </a:xfrm>
+        </p:spPr>
+        <p:txBody>
+          <a:bodyPr/>
+          <a:lstStyle/>
+          <a:p>
+            <a:pPr marL="0" indent="0">
+              <a:buNone/>
+            </a:pPr>
+            <a:r>
+              <a:rPr lang="en-CA" dirty="0"/>
+              <a:t>We are looking for pareto improvements from reservations on </a:t>
+            </a:r>
+            <a:r>
+              <a:rPr lang="en-CA" b="1" dirty="0"/>
+              <a:t>served rate </a:t>
+            </a:r>
+            <a:r>
+              <a:rPr lang="en-CA" dirty="0"/>
+              <a:t>while maximizing utilization.</a:t>
+            </a:r>
+          </a:p>
+          <a:p>
+            <a:pPr marL="0" indent="0">
+              <a:buNone/>
+            </a:pPr>
+            <a:endParaRPr lang="en-CA" sz="1400" dirty="0"/>
+          </a:p>
+          <a:p>
+            <a:pPr marL="0" indent="0">
+              <a:buNone/>
+            </a:pPr>
+            <a:r>
+              <a:rPr lang="en-CA" dirty="0"/>
+              <a:t>A representative example:</a:t>
+            </a:r>
+          </a:p>
+          <a:p>
+            <a:pPr marL="0" indent="0">
+              <a:buNone/>
+            </a:pPr>
+            <a:r>
+              <a:rPr lang="en-CA" dirty="0"/>
+              <a:t>Let Class 1 be the reservation class and the most delay-sensitive class</a:t>
+            </a:r>
+          </a:p>
+          <a:p>
+            <a:endParaRPr lang="en-CA" dirty="0"/>
+          </a:p>
+        </p:txBody>
+      </p:sp>
+      <p:sp>
+        <p:nvSpPr>
+          <p:cNvPr id="4" name="Title 1">
+            <a:extLst>
+              <a:ext uri="{FF2B5EF4-FFF2-40B4-BE49-F238E27FC236}">
+                <a16:creationId xmlns:a16="http://schemas.microsoft.com/office/drawing/2014/main" id="{559C645C-6F01-4A04-930B-BC1EF517223E}"/>
+              </a:ext>
+            </a:extLst>
+          </p:cNvPr>
+          <p:cNvSpPr>
+            <a:spLocks noGrp="1"/>
+          </p:cNvSpPr>
+          <p:nvPr>
+            <p:ph type="title"/>
+          </p:nvPr>
+        </p:nvSpPr>
+        <p:spPr>
+          <a:xfrm>
+            <a:off x="838200" y="299137"/>
+            <a:ext cx="10515600" cy="1325563"/>
+          </a:xfrm>
+        </p:spPr>
+        <p:txBody>
+          <a:bodyPr/>
+          <a:lstStyle/>
+          <a:p>
+            <a:r>
+              <a:rPr lang="en-CA" dirty="0"/>
+              <a:t>When can reservations improve Class 1 access without hurting Class 2?</a:t>
+            </a:r>
+          </a:p>
+        </p:txBody>
+      </p:sp>
+      <p:cxnSp>
+        <p:nvCxnSpPr>
+          <p:cNvPr id="5" name="Straight Connector 4">
+            <a:extLst>
+              <a:ext uri="{FF2B5EF4-FFF2-40B4-BE49-F238E27FC236}">
+                <a16:creationId xmlns:a16="http://schemas.microsoft.com/office/drawing/2014/main" id="{E03CF395-32B6-43C8-863E-A389023B4F14}"/>
+              </a:ext>
+            </a:extLst>
+          </p:cNvPr>
+          <p:cNvCxnSpPr>
+            <a:cxnSpLocks/>
+          </p:cNvCxnSpPr>
+          <p:nvPr/>
+        </p:nvCxnSpPr>
+        <p:spPr>
+          <a:xfrm>
+            <a:off x="905356" y="1624700"/>
+            <a:ext cx="10794242" cy="0"/>
+          </a:xfrm>
+          <a:prstGeom prst="line">
+            <a:avLst/>
+          </a:prstGeom>
+          <a:ln w="28575">
+            <a:solidFill>
+              <a:schemeClr val="accent5"/>
+            </a:solidFill>
+          </a:ln>
+        </p:spPr>
+        <p:style>
+          <a:lnRef idx="1">
+            <a:schemeClr val="accent1"/>
+          </a:lnRef>
+          <a:fillRef idx="0">
+            <a:schemeClr val="accent1"/>
+          </a:fillRef>
+          <a:effectRef idx="0">
+            <a:schemeClr val="accent1"/>
+          </a:effectRef>
+          <a:fontRef idx="minor">
+            <a:schemeClr val="tx1"/>
+          </a:fontRef>
+        </p:style>
+      </p:cxnSp>
+      <p:pic>
+        <p:nvPicPr>
+          <p:cNvPr id="7" name="Picture 6">
+            <a:extLst>
+              <a:ext uri="{FF2B5EF4-FFF2-40B4-BE49-F238E27FC236}">
+                <a16:creationId xmlns:a16="http://schemas.microsoft.com/office/drawing/2014/main" id="{96C0D4AA-AD67-4B88-92BF-F2BBBB9B53A9}"/>
+              </a:ext>
+            </a:extLst>
+          </p:cNvPr>
+          <p:cNvPicPr>
+            <a:picLocks noChangeAspect="1"/>
+          </p:cNvPicPr>
+          <p:nvPr/>
+        </p:nvPicPr>
+        <p:blipFill rotWithShape="1">
+          <a:blip r:embed="rId2">
+            <a:extLst>
+              <a:ext uri="{28A0092B-C50C-407E-A947-70E740481C1C}">
+                <a14:useLocalDpi xmlns:a14="http://schemas.microsoft.com/office/drawing/2010/main" val="0"/>
+              </a:ext>
+            </a:extLst>
+          </a:blip>
+          <a:srcRect t="18434" b="40861"/>
+          <a:stretch/>
+        </p:blipFill>
+        <p:spPr>
+          <a:xfrm>
+            <a:off x="354080" y="4138367"/>
+            <a:ext cx="11649383" cy="2296851"/>
+          </a:xfrm>
+          <a:prstGeom prst="rect">
+            <a:avLst/>
+          </a:prstGeom>
+        </p:spPr>
+      </p:pic>
+    </p:spTree>
+    <p:extLst>
+      <p:ext uri="{BB962C8B-B14F-4D97-AF65-F5344CB8AC3E}">
+        <p14:creationId xmlns:p14="http://schemas.microsoft.com/office/powerpoint/2010/main" val="3877538878"/>
+      </p:ext>
+    </p:extLst>
+  </p:cSld>
+  <p:clrMapOvr>
+    <a:masterClrMapping/>
+  </p:clrMapOvr>
+</p:sld>
+</file>
+
+<file path=ppt/slides/slide22.xml><?xml version="1.0" encoding="utf-8"?>
+<p:sld xmlns:a="http://schemas.openxmlformats.org/drawingml/2006/main" xmlns:r="http://schemas.openxmlformats.org/officeDocument/2006/relationships" xmlns:p="http://schemas.openxmlformats.org/presentationml/2006/main">
+  <p:cSld>
+    <p:spTree>
+      <p:nvGrpSpPr>
+        <p:cNvPr id="1" name=""/>
+        <p:cNvGrpSpPr/>
+        <p:nvPr/>
+      </p:nvGrpSpPr>
+      <p:grpSpPr>
+        <a:xfrm>
+          <a:off x="0" y="0"/>
+          <a:ext cx="0" cy="0"/>
+          <a:chOff x="0" y="0"/>
+          <a:chExt cx="0" cy="0"/>
+        </a:xfrm>
+      </p:grpSpPr>
+      <p:sp>
+        <p:nvSpPr>
+          <p:cNvPr id="2" name="Title 1">
+            <a:extLst>
+              <a:ext uri="{FF2B5EF4-FFF2-40B4-BE49-F238E27FC236}">
+                <a16:creationId xmlns:a16="http://schemas.microsoft.com/office/drawing/2014/main" id="{1C8EFFAE-FAAC-489E-940F-4BACE00C4D30}"/>
+              </a:ext>
+            </a:extLst>
+          </p:cNvPr>
+          <p:cNvSpPr>
+            <a:spLocks noGrp="1"/>
+          </p:cNvSpPr>
+          <p:nvPr>
+            <p:ph type="title"/>
+          </p:nvPr>
+        </p:nvSpPr>
+        <p:spPr>
+          <a:xfrm>
+            <a:off x="838200" y="299137"/>
+            <a:ext cx="10515600" cy="1325563"/>
+          </a:xfrm>
+        </p:spPr>
+        <p:txBody>
+          <a:bodyPr/>
+          <a:lstStyle/>
+          <a:p>
+            <a:r>
+              <a:rPr lang="en-CA" dirty="0"/>
+              <a:t>When can reservations improve Class 1 access without hurting Class 2?</a:t>
+            </a:r>
+          </a:p>
+        </p:txBody>
+      </p:sp>
+      <p:sp>
+        <p:nvSpPr>
+          <p:cNvPr id="3" name="Content Placeholder 2">
+            <a:extLst>
+              <a:ext uri="{FF2B5EF4-FFF2-40B4-BE49-F238E27FC236}">
+                <a16:creationId xmlns:a16="http://schemas.microsoft.com/office/drawing/2014/main" id="{F9C6B679-2893-47B0-B1C7-B701E0D57F4E}"/>
+              </a:ext>
+            </a:extLst>
+          </p:cNvPr>
+          <p:cNvSpPr>
+            <a:spLocks noGrp="1"/>
+          </p:cNvSpPr>
+          <p:nvPr>
+            <p:ph idx="1"/>
+          </p:nvPr>
+        </p:nvSpPr>
+        <p:spPr>
+          <a:xfrm>
+            <a:off x="838200" y="2044798"/>
+            <a:ext cx="10515600" cy="4351338"/>
+          </a:xfrm>
+        </p:spPr>
+        <p:txBody>
+          <a:bodyPr/>
+          <a:lstStyle/>
+          <a:p>
+            <a:pPr marL="0" indent="0">
+              <a:buNone/>
+            </a:pPr>
+            <a:r>
+              <a:rPr lang="en-CA" dirty="0"/>
+              <a:t>While utilization is maximized, when can we improve Class 1’s served rate while Class 2’s served rate does not meaningfully change?</a:t>
+            </a:r>
+          </a:p>
+          <a:p>
+            <a:pPr marL="0" indent="0">
+              <a:buNone/>
+            </a:pPr>
+            <a:endParaRPr lang="en-CA" sz="1400" dirty="0"/>
+          </a:p>
+          <a:p>
+            <a:r>
+              <a:rPr lang="en-CA" dirty="0"/>
+              <a:t>When Class 1 is a smaller portion of the queueing population</a:t>
+            </a:r>
+          </a:p>
+          <a:p>
+            <a:r>
+              <a:rPr lang="en-CA" dirty="0"/>
+              <a:t>When demand is lower</a:t>
+            </a:r>
+          </a:p>
+          <a:p>
+            <a:r>
+              <a:rPr lang="en-CA" dirty="0"/>
+              <a:t>When no-show post probability is low to moderate</a:t>
+            </a:r>
+          </a:p>
+          <a:p>
+            <a:pPr marL="0" indent="0">
+              <a:buNone/>
+            </a:pPr>
+            <a:endParaRPr lang="en-CA" dirty="0"/>
+          </a:p>
+          <a:p>
+            <a:pPr marL="0" indent="0">
+              <a:buNone/>
+            </a:pPr>
+            <a:r>
+              <a:rPr lang="en-CA" dirty="0"/>
+              <a:t>When horizon is also flexible, Class 2 can be hurt more from the booking horizon becoming shorter.</a:t>
+            </a:r>
+          </a:p>
+        </p:txBody>
+      </p:sp>
+      <p:cxnSp>
+        <p:nvCxnSpPr>
+          <p:cNvPr id="5" name="Straight Connector 4">
+            <a:extLst>
+              <a:ext uri="{FF2B5EF4-FFF2-40B4-BE49-F238E27FC236}">
+                <a16:creationId xmlns:a16="http://schemas.microsoft.com/office/drawing/2014/main" id="{104858D7-4852-4244-8D86-E1392E148372}"/>
+              </a:ext>
+            </a:extLst>
+          </p:cNvPr>
+          <p:cNvCxnSpPr>
+            <a:cxnSpLocks/>
+          </p:cNvCxnSpPr>
+          <p:nvPr/>
+        </p:nvCxnSpPr>
+        <p:spPr>
+          <a:xfrm>
+            <a:off x="905356" y="1624700"/>
+            <a:ext cx="10794242" cy="0"/>
+          </a:xfrm>
+          <a:prstGeom prst="line">
+            <a:avLst/>
+          </a:prstGeom>
+          <a:ln w="28575">
+            <a:solidFill>
+              <a:schemeClr val="accent5"/>
+            </a:solidFill>
+          </a:ln>
+        </p:spPr>
+        <p:style>
+          <a:lnRef idx="1">
+            <a:schemeClr val="accent1"/>
+          </a:lnRef>
+          <a:fillRef idx="0">
+            <a:schemeClr val="accent1"/>
+          </a:fillRef>
+          <a:effectRef idx="0">
+            <a:schemeClr val="accent1"/>
+          </a:effectRef>
+          <a:fontRef idx="minor">
+            <a:schemeClr val="tx1"/>
+          </a:fontRef>
+        </p:style>
+      </p:cxnSp>
+    </p:spTree>
+    <p:extLst>
+      <p:ext uri="{BB962C8B-B14F-4D97-AF65-F5344CB8AC3E}">
+        <p14:creationId xmlns:p14="http://schemas.microsoft.com/office/powerpoint/2010/main" val="543504394"/>
       </p:ext>
     </p:extLst>
   </p:cSld>
@@ -6972,8 +9719,8 @@
         </p:nvSpPr>
         <p:spPr>
           <a:xfrm>
-            <a:off x="551442" y="124493"/>
-            <a:ext cx="10515600" cy="1325563"/>
+            <a:off x="551442" y="143347"/>
+            <a:ext cx="11213210" cy="1325563"/>
           </a:xfrm>
         </p:spPr>
         <p:txBody>
@@ -6982,7 +9729,7 @@
           <a:p>
             <a:r>
               <a:rPr lang="en-CA" dirty="0"/>
-              <a:t>Threshold mechanisms: magnitude and delay </a:t>
+              <a:t>Threshold mechanisms: probabilities and delay </a:t>
             </a:r>
           </a:p>
         </p:txBody>
@@ -7022,10 +9769,10 @@
       </p:sp>
       <p:pic>
         <p:nvPicPr>
-          <p:cNvPr id="5" name="Picture 4">
+          <p:cNvPr id="6" name="Picture 5">
             <a:extLst>
               <a:ext uri="{FF2B5EF4-FFF2-40B4-BE49-F238E27FC236}">
-                <a16:creationId xmlns:a16="http://schemas.microsoft.com/office/drawing/2014/main" id="{BD12449E-5E0B-4C76-AA28-4C90FDDE410E}"/>
+                <a16:creationId xmlns:a16="http://schemas.microsoft.com/office/drawing/2014/main" id="{256C956F-E1E0-433E-B511-6DB5B8C1887F}"/>
               </a:ext>
             </a:extLst>
           </p:cNvPr>
@@ -7035,7 +9782,7 @@
           <p:nvPr/>
         </p:nvPicPr>
         <p:blipFill>
-          <a:blip r:embed="rId2">
+          <a:blip r:embed="rId3">
             <a:extLst>
               <a:ext uri="{28A0092B-C50C-407E-A947-70E740481C1C}">
                 <a14:useLocalDpi xmlns:a14="http://schemas.microsoft.com/office/drawing/2010/main" val="0"/>
@@ -7048,8 +9795,8 @@
         </p:blipFill>
         <p:spPr>
           <a:xfrm>
-            <a:off x="1552064" y="1942096"/>
-            <a:ext cx="8514356" cy="4490203"/>
+            <a:off x="2062891" y="1942096"/>
+            <a:ext cx="8322891" cy="4389230"/>
           </a:xfrm>
           <a:prstGeom prst="rect">
             <a:avLst/>
@@ -7137,7 +9884,7 @@
         </p:nvSpPr>
         <p:spPr>
           <a:xfrm>
-            <a:off x="463859" y="5584764"/>
+            <a:off x="463859" y="5400498"/>
             <a:ext cx="11264281" cy="1136061"/>
           </a:xfrm>
           <a:prstGeom prst="rect">
@@ -7321,7 +10068,7 @@
           <a:p>
             <a:r>
               <a:rPr lang="en-CA" dirty="0"/>
-              <a:t>Balking rate has minimal effect while an increase in no-show magnitude further drives down served rate.</a:t>
+              <a:t>Balking rate has minimal effect while an increase in no-show post probability further drives down served rate.</a:t>
             </a:r>
           </a:p>
         </p:txBody>
@@ -7457,7 +10204,7 @@
           <a:p>
             <a:r>
               <a:rPr lang="en-CA" sz="4000" dirty="0"/>
-              <a:t>Under heavy demand, balking magnitude shifts appointments to the more wait-tolerant group</a:t>
+              <a:t>Under heavy demand, balking post probability shifts appointments to the more wait-tolerant group</a:t>
             </a:r>
           </a:p>
         </p:txBody>
@@ -7478,7 +10225,7 @@
         </p:nvSpPr>
         <p:spPr>
           <a:xfrm>
-            <a:off x="975444" y="5578166"/>
+            <a:off x="780883" y="5587592"/>
             <a:ext cx="10832711" cy="922216"/>
           </a:xfrm>
           <a:prstGeom prst="rect">
@@ -7656,7 +10403,7 @@
           <a:p>
             <a:r>
               <a:rPr lang="en-CA" dirty="0"/>
-              <a:t>Overall utilization and served rate is not impacted by balking magnitude.</a:t>
+              <a:t>Overall utilization and served rate is not impacted by balking post probability.</a:t>
             </a:r>
           </a:p>
           <a:p>
@@ -7840,7 +10587,7 @@
             </a:r>
             <a:r>
               <a:rPr lang="en-CA" sz="2400" b="1" dirty="0"/>
-              <a:t>magnitude</a:t>
+              <a:t>post probability</a:t>
             </a:r>
             <a:r>
               <a:rPr lang="en-CA" sz="2400" dirty="0"/>
@@ -7976,7 +10723,7 @@
           <p:cNvPr id="2" name="Title 1">
             <a:extLst>
               <a:ext uri="{FF2B5EF4-FFF2-40B4-BE49-F238E27FC236}">
-                <a16:creationId xmlns:a16="http://schemas.microsoft.com/office/drawing/2014/main" id="{ED0526D7-4325-4EAD-83C4-EFAEFFC15851}"/>
+                <a16:creationId xmlns:a16="http://schemas.microsoft.com/office/drawing/2014/main" id="{43FCB269-FF68-4079-8A14-79E62DA42DDD}"/>
               </a:ext>
             </a:extLst>
           </p:cNvPr>
@@ -7989,8 +10736,8 @@
         </p:nvSpPr>
         <p:spPr>
           <a:xfrm>
-            <a:off x="411078" y="282844"/>
-            <a:ext cx="11369843" cy="1325563"/>
+            <a:off x="498834" y="270858"/>
+            <a:ext cx="11693165" cy="982907"/>
           </a:xfrm>
         </p:spPr>
         <p:txBody>
@@ -8001,62 +10748,8 @@
           <a:p>
             <a:r>
               <a:rPr lang="en-CA" dirty="0"/>
-              <a:t>No-show is the stronger driver of class access, but balking becomes more important as demand increases</a:t>
-            </a:r>
-          </a:p>
-        </p:txBody>
-      </p:sp>
-      <p:sp>
-        <p:nvSpPr>
-          <p:cNvPr id="4" name="Content Placeholder 3">
-            <a:extLst>
-              <a:ext uri="{FF2B5EF4-FFF2-40B4-BE49-F238E27FC236}">
-                <a16:creationId xmlns:a16="http://schemas.microsoft.com/office/drawing/2014/main" id="{10B86772-9FF2-423A-B395-50D12B3A74F0}"/>
-              </a:ext>
-            </a:extLst>
-          </p:cNvPr>
-          <p:cNvSpPr>
-            <a:spLocks noGrp="1"/>
-          </p:cNvSpPr>
-          <p:nvPr>
-            <p:ph idx="1"/>
-          </p:nvPr>
-        </p:nvSpPr>
-        <p:spPr>
-          <a:xfrm>
-            <a:off x="8650705" y="2079523"/>
-            <a:ext cx="3130216" cy="4303094"/>
-          </a:xfrm>
-        </p:spPr>
-        <p:txBody>
-          <a:bodyPr>
-            <a:normAutofit fontScale="92500" lnSpcReduction="20000"/>
-          </a:bodyPr>
-          <a:lstStyle/>
-          <a:p>
-            <a:pPr marL="0" indent="0">
-              <a:buNone/>
-            </a:pPr>
-            <a:r>
-              <a:rPr lang="en-US" sz="2600" dirty="0"/>
-              <a:t>The served rate gap difference from making Class 1 more delay-sensitive shows opposing trends between balking and no-show over demand.</a:t>
-            </a:r>
-          </a:p>
-          <a:p>
-            <a:pPr marL="0" indent="0">
-              <a:buNone/>
-            </a:pPr>
-            <a:endParaRPr lang="en-US" sz="2600" dirty="0"/>
-          </a:p>
-          <a:p>
-            <a:pPr marL="0" indent="0">
-              <a:buNone/>
-            </a:pPr>
-            <a:r>
-              <a:rPr lang="en-US" sz="2600" dirty="0"/>
-              <a:t>The increase in no-show magnitude of class 1 lowers served rate gap more than an identical increase in balking.</a:t>
-            </a:r>
-            <a:endParaRPr lang="en-CA" sz="2600" dirty="0"/>
+              <a:t>No-show vs. balking, how do they affect served rate?</a:t>
+            </a:r>
           </a:p>
         </p:txBody>
       </p:sp>
@@ -8065,7 +10758,7 @@
           <p:cNvPr id="5" name="Picture 4">
             <a:extLst>
               <a:ext uri="{FF2B5EF4-FFF2-40B4-BE49-F238E27FC236}">
-                <a16:creationId xmlns:a16="http://schemas.microsoft.com/office/drawing/2014/main" id="{E0142A85-F7AE-41CA-B119-7E94A6200579}"/>
+                <a16:creationId xmlns:a16="http://schemas.microsoft.com/office/drawing/2014/main" id="{AFFCFDC2-EA91-4801-BBEF-0EB14B75966A}"/>
               </a:ext>
             </a:extLst>
           </p:cNvPr>
@@ -8075,7 +10768,7 @@
           <p:nvPr/>
         </p:nvPicPr>
         <p:blipFill>
-          <a:blip r:embed="rId3">
+          <a:blip r:embed="rId2">
             <a:extLst>
               <a:ext uri="{28A0092B-C50C-407E-A947-70E740481C1C}">
                 <a14:useLocalDpi xmlns:a14="http://schemas.microsoft.com/office/drawing/2010/main" val="0"/>
@@ -8088,18 +10781,53 @@
         </p:blipFill>
         <p:spPr>
           <a:xfrm>
-            <a:off x="246748" y="1743745"/>
-            <a:ext cx="8275620" cy="4638872"/>
+            <a:off x="734991" y="1558476"/>
+            <a:ext cx="10984117" cy="5148805"/>
           </a:xfrm>
           <a:prstGeom prst="rect">
             <a:avLst/>
           </a:prstGeom>
         </p:spPr>
       </p:pic>
+      <p:sp>
+        <p:nvSpPr>
+          <p:cNvPr id="7" name="TextBox 6">
+            <a:extLst>
+              <a:ext uri="{FF2B5EF4-FFF2-40B4-BE49-F238E27FC236}">
+                <a16:creationId xmlns:a16="http://schemas.microsoft.com/office/drawing/2014/main" id="{B46FC68E-1E8D-43D9-8ADA-D8CC1BC28967}"/>
+              </a:ext>
+            </a:extLst>
+          </p:cNvPr>
+          <p:cNvSpPr txBox="1"/>
+          <p:nvPr/>
+        </p:nvSpPr>
+        <p:spPr>
+          <a:xfrm>
+            <a:off x="1158711" y="1146813"/>
+            <a:ext cx="3168192" cy="523220"/>
+          </a:xfrm>
+          <a:prstGeom prst="rect">
+            <a:avLst/>
+          </a:prstGeom>
+          <a:noFill/>
+        </p:spPr>
+        <p:txBody>
+          <a:bodyPr wrap="square">
+            <a:spAutoFit/>
+          </a:bodyPr>
+          <a:lstStyle/>
+          <a:p>
+            <a:r>
+              <a:rPr lang="en-CA" sz="2800" u="sng" dirty="0"/>
+              <a:t>Experiment design</a:t>
+            </a:r>
+          </a:p>
+        </p:txBody>
+      </p:sp>
     </p:spTree>
     <p:extLst>
       <p:ext uri="{BB962C8B-B14F-4D97-AF65-F5344CB8AC3E}">
-        <p14:creationId xmlns:p14="http://schemas.microsoft.com/office/powerpoint/2010/main" val="103113034"/>
+        <p14:creationId xmlns:p14="http://schemas.microsoft.com/office/powerpoint/2010/main" val="1017330831"/>
       </p:ext>
     </p:extLst>
   </p:cSld>

--- a/presentation/FCFS Presentation.pptx
+++ b/presentation/FCFS Presentation.pptx
@@ -5,7 +5,7 @@
     <p:sldMasterId id="2147483826" r:id="rId1"/>
   </p:sldMasterIdLst>
   <p:notesMasterIdLst>
-    <p:notesMasterId r:id="rId24"/>
+    <p:notesMasterId r:id="rId29"/>
   </p:notesMasterIdLst>
   <p:sldIdLst>
     <p:sldId id="256" r:id="rId2"/>
@@ -30,6 +30,11 @@
     <p:sldId id="277" r:id="rId21"/>
     <p:sldId id="281" r:id="rId22"/>
     <p:sldId id="276" r:id="rId23"/>
+    <p:sldId id="282" r:id="rId24"/>
+    <p:sldId id="284" r:id="rId25"/>
+    <p:sldId id="285" r:id="rId26"/>
+    <p:sldId id="286" r:id="rId27"/>
+    <p:sldId id="287" r:id="rId28"/>
   </p:sldIdLst>
   <p:sldSz cx="12192000" cy="6858000"/>
   <p:notesSz cx="6858000" cy="9144000"/>
@@ -218,7 +223,7 @@
           <a:p>
             <a:fld id="{A3F00E0A-26B8-438F-8C49-C4126C0B2F07}" type="datetimeFigureOut">
               <a:rPr lang="en-CA" smtClean="0"/>
-              <a:t>2026-09-23</a:t>
+              <a:t>2026-10-03</a:t>
             </a:fld>
             <a:endParaRPr lang="en-CA"/>
           </a:p>
@@ -956,28 +961,10 @@
           <a:bodyPr/>
           <a:lstStyle/>
           <a:p>
-            <a:r>
-              <a:rPr lang="en-CA" dirty="0"/>
-              <a:t>Y-axis?</a:t>
-            </a:r>
-          </a:p>
-          <a:p>
             <a:endParaRPr lang="en-CA" dirty="0"/>
           </a:p>
           <a:p>
-            <a:r>
-              <a:rPr lang="en-CA" dirty="0"/>
-              <a:t>Add figure explaining tau or delay</a:t>
-            </a:r>
-          </a:p>
-          <a:p>
             <a:endParaRPr lang="en-CA" dirty="0"/>
-          </a:p>
-          <a:p>
-            <a:r>
-              <a:rPr lang="en-CA" dirty="0"/>
-              <a:t>Add utilization performance, then compare – refer to picture</a:t>
-            </a:r>
           </a:p>
         </p:txBody>
       </p:sp>
@@ -1151,6 +1138,105 @@
 </p:notes>
 </file>
 
+<file path=ppt/notesSlides/notesSlide16.xml><?xml version="1.0" encoding="utf-8"?>
+<p:notes xmlns:a="http://schemas.openxmlformats.org/drawingml/2006/main" xmlns:r="http://schemas.openxmlformats.org/officeDocument/2006/relationships" xmlns:p="http://schemas.openxmlformats.org/presentationml/2006/main">
+  <p:cSld>
+    <p:spTree>
+      <p:nvGrpSpPr>
+        <p:cNvPr id="1" name=""/>
+        <p:cNvGrpSpPr/>
+        <p:nvPr/>
+      </p:nvGrpSpPr>
+      <p:grpSpPr>
+        <a:xfrm>
+          <a:off x="0" y="0"/>
+          <a:ext cx="0" cy="0"/>
+          <a:chOff x="0" y="0"/>
+          <a:chExt cx="0" cy="0"/>
+        </a:xfrm>
+      </p:grpSpPr>
+      <p:sp>
+        <p:nvSpPr>
+          <p:cNvPr id="2" name="Slide Image Placeholder 1"/>
+          <p:cNvSpPr>
+            <a:spLocks noGrp="1" noRot="1" noChangeAspect="1"/>
+          </p:cNvSpPr>
+          <p:nvPr>
+            <p:ph type="sldImg"/>
+          </p:nvPr>
+        </p:nvSpPr>
+        <p:spPr/>
+      </p:sp>
+      <p:sp>
+        <p:nvSpPr>
+          <p:cNvPr id="3" name="Notes Placeholder 2"/>
+          <p:cNvSpPr>
+            <a:spLocks noGrp="1"/>
+          </p:cNvSpPr>
+          <p:nvPr>
+            <p:ph type="body" idx="1"/>
+          </p:nvPr>
+        </p:nvSpPr>
+        <p:spPr/>
+        <p:txBody>
+          <a:bodyPr/>
+          <a:lstStyle/>
+          <a:p>
+            <a:r>
+              <a:rPr lang="en-CA" dirty="0"/>
+              <a:t>Horizon</a:t>
+            </a:r>
+          </a:p>
+          <a:p>
+            <a:r>
+              <a:rPr lang="en-CA" dirty="0"/>
+              <a:t>Reservation slots per day and length</a:t>
+            </a:r>
+          </a:p>
+          <a:p>
+            <a:r>
+              <a:rPr lang="en-CA" dirty="0"/>
+              <a:t>- What are the policies chosen, how reasonable are they</a:t>
+            </a:r>
+          </a:p>
+        </p:txBody>
+      </p:sp>
+      <p:sp>
+        <p:nvSpPr>
+          <p:cNvPr id="4" name="Slide Number Placeholder 3"/>
+          <p:cNvSpPr>
+            <a:spLocks noGrp="1"/>
+          </p:cNvSpPr>
+          <p:nvPr>
+            <p:ph type="sldNum" sz="quarter" idx="5"/>
+          </p:nvPr>
+        </p:nvSpPr>
+        <p:spPr/>
+        <p:txBody>
+          <a:bodyPr/>
+          <a:lstStyle/>
+          <a:p>
+            <a:fld id="{6C0CC533-38F2-4480-88E0-3DE04AB45AF2}" type="slidenum">
+              <a:rPr lang="en-CA" smtClean="0"/>
+              <a:t>23</a:t>
+            </a:fld>
+            <a:endParaRPr lang="en-CA"/>
+          </a:p>
+        </p:txBody>
+      </p:sp>
+    </p:spTree>
+    <p:extLst>
+      <p:ext uri="{BB962C8B-B14F-4D97-AF65-F5344CB8AC3E}">
+        <p14:creationId xmlns:p14="http://schemas.microsoft.com/office/powerpoint/2010/main" val="1874061987"/>
+      </p:ext>
+    </p:extLst>
+  </p:cSld>
+  <p:clrMapOvr>
+    <a:masterClrMapping/>
+  </p:clrMapOvr>
+</p:notes>
+</file>
+
 <file path=ppt/notesSlides/notesSlide2.xml><?xml version="1.0" encoding="utf-8"?>
 <p:notes xmlns:a="http://schemas.openxmlformats.org/drawingml/2006/main" xmlns:r="http://schemas.openxmlformats.org/officeDocument/2006/relationships" xmlns:p="http://schemas.openxmlformats.org/presentationml/2006/main">
   <p:cSld>
@@ -1531,10 +1617,7 @@
           <a:bodyPr/>
           <a:lstStyle/>
           <a:p>
-            <a:r>
-              <a:rPr lang="en-CA" dirty="0"/>
-              <a:t>Make sure formatting corresponds with the previous slide, put explanation top left</a:t>
-            </a:r>
+            <a:endParaRPr lang="en-CA" dirty="0"/>
           </a:p>
         </p:txBody>
       </p:sp>
@@ -1618,37 +1701,7 @@
           <a:bodyPr/>
           <a:lstStyle/>
           <a:p>
-            <a:r>
-              <a:rPr lang="en-CA" dirty="0"/>
-              <a:t>Slide 1 is three no-show figures</a:t>
-            </a:r>
-          </a:p>
-          <a:p>
             <a:endParaRPr lang="en-CA" dirty="0"/>
-          </a:p>
-          <a:p>
-            <a:r>
-              <a:rPr lang="en-CA" dirty="0"/>
-              <a:t>Can use red circles </a:t>
-            </a:r>
-          </a:p>
-          <a:p>
-            <a:endParaRPr lang="en-CA" dirty="0"/>
-          </a:p>
-          <a:p>
-            <a:r>
-              <a:rPr lang="en-CA" dirty="0"/>
-              <a:t>Change axis labels</a:t>
-            </a:r>
-          </a:p>
-          <a:p>
-            <a:endParaRPr lang="en-CA" dirty="0"/>
-          </a:p>
-          <a:p>
-            <a:r>
-              <a:rPr lang="en-CA" dirty="0"/>
-              <a:t>Take off specific numbers</a:t>
-            </a:r>
           </a:p>
         </p:txBody>
       </p:sp>
@@ -1987,7 +2040,7 @@
           <a:p>
             <a:fld id="{7559F276-CA16-4B7F-AC4C-2EDD18BC89A1}" type="datetimeFigureOut">
               <a:rPr lang="en-CA" smtClean="0"/>
-              <a:t>2026-09-23</a:t>
+              <a:t>2026-10-03</a:t>
             </a:fld>
             <a:endParaRPr lang="en-CA"/>
           </a:p>
@@ -2157,7 +2210,7 @@
           <a:p>
             <a:fld id="{7559F276-CA16-4B7F-AC4C-2EDD18BC89A1}" type="datetimeFigureOut">
               <a:rPr lang="en-CA" smtClean="0"/>
-              <a:t>2026-09-23</a:t>
+              <a:t>2026-10-03</a:t>
             </a:fld>
             <a:endParaRPr lang="en-CA"/>
           </a:p>
@@ -2337,7 +2390,7 @@
           <a:p>
             <a:fld id="{7559F276-CA16-4B7F-AC4C-2EDD18BC89A1}" type="datetimeFigureOut">
               <a:rPr lang="en-CA" smtClean="0"/>
-              <a:t>2026-09-23</a:t>
+              <a:t>2026-10-03</a:t>
             </a:fld>
             <a:endParaRPr lang="en-CA"/>
           </a:p>
@@ -2507,7 +2560,7 @@
           <a:p>
             <a:fld id="{7559F276-CA16-4B7F-AC4C-2EDD18BC89A1}" type="datetimeFigureOut">
               <a:rPr lang="en-CA" smtClean="0"/>
-              <a:t>2026-09-23</a:t>
+              <a:t>2026-10-03</a:t>
             </a:fld>
             <a:endParaRPr lang="en-CA"/>
           </a:p>
@@ -2753,7 +2806,7 @@
           <a:p>
             <a:fld id="{7559F276-CA16-4B7F-AC4C-2EDD18BC89A1}" type="datetimeFigureOut">
               <a:rPr lang="en-CA" smtClean="0"/>
-              <a:t>2026-09-23</a:t>
+              <a:t>2026-10-03</a:t>
             </a:fld>
             <a:endParaRPr lang="en-CA"/>
           </a:p>
@@ -2985,7 +3038,7 @@
           <a:p>
             <a:fld id="{7559F276-CA16-4B7F-AC4C-2EDD18BC89A1}" type="datetimeFigureOut">
               <a:rPr lang="en-CA" smtClean="0"/>
-              <a:t>2026-09-23</a:t>
+              <a:t>2026-10-03</a:t>
             </a:fld>
             <a:endParaRPr lang="en-CA"/>
           </a:p>
@@ -3352,7 +3405,7 @@
           <a:p>
             <a:fld id="{7559F276-CA16-4B7F-AC4C-2EDD18BC89A1}" type="datetimeFigureOut">
               <a:rPr lang="en-CA" smtClean="0"/>
-              <a:t>2026-09-23</a:t>
+              <a:t>2026-10-03</a:t>
             </a:fld>
             <a:endParaRPr lang="en-CA"/>
           </a:p>
@@ -3470,7 +3523,7 @@
           <a:p>
             <a:fld id="{7559F276-CA16-4B7F-AC4C-2EDD18BC89A1}" type="datetimeFigureOut">
               <a:rPr lang="en-CA" smtClean="0"/>
-              <a:t>2026-09-23</a:t>
+              <a:t>2026-10-03</a:t>
             </a:fld>
             <a:endParaRPr lang="en-CA"/>
           </a:p>
@@ -3565,7 +3618,7 @@
           <a:p>
             <a:fld id="{7559F276-CA16-4B7F-AC4C-2EDD18BC89A1}" type="datetimeFigureOut">
               <a:rPr lang="en-CA" smtClean="0"/>
-              <a:t>2026-09-23</a:t>
+              <a:t>2026-10-03</a:t>
             </a:fld>
             <a:endParaRPr lang="en-CA"/>
           </a:p>
@@ -3842,7 +3895,7 @@
           <a:p>
             <a:fld id="{7559F276-CA16-4B7F-AC4C-2EDD18BC89A1}" type="datetimeFigureOut">
               <a:rPr lang="en-CA" smtClean="0"/>
-              <a:t>2026-09-23</a:t>
+              <a:t>2026-10-03</a:t>
             </a:fld>
             <a:endParaRPr lang="en-CA"/>
           </a:p>
@@ -4099,7 +4152,7 @@
           <a:p>
             <a:fld id="{7559F276-CA16-4B7F-AC4C-2EDD18BC89A1}" type="datetimeFigureOut">
               <a:rPr lang="en-CA" smtClean="0"/>
-              <a:t>2026-09-23</a:t>
+              <a:t>2026-10-03</a:t>
             </a:fld>
             <a:endParaRPr lang="en-CA"/>
           </a:p>
@@ -4312,7 +4365,7 @@
           <a:p>
             <a:fld id="{7559F276-CA16-4B7F-AC4C-2EDD18BC89A1}" type="datetimeFigureOut">
               <a:rPr lang="en-CA" smtClean="0"/>
-              <a:t>2026-09-23</a:t>
+              <a:t>2026-10-03</a:t>
             </a:fld>
             <a:endParaRPr lang="en-CA"/>
           </a:p>
@@ -4866,7 +4919,7 @@
         </p:nvSpPr>
         <p:spPr>
           <a:xfrm>
-            <a:off x="519651" y="21072"/>
+            <a:off x="496066" y="439691"/>
             <a:ext cx="10879554" cy="995271"/>
           </a:xfrm>
         </p:spPr>
@@ -4897,7 +4950,7 @@
           </p:cNvPicPr>
           <p:nvPr/>
         </p:nvPicPr>
-        <p:blipFill>
+        <p:blipFill rotWithShape="1">
           <a:blip r:embed="rId3">
             <a:extLst>
               <a:ext uri="{28A0092B-C50C-407E-A947-70E740481C1C}">
@@ -4905,14 +4958,13 @@
               </a:ext>
             </a:extLst>
           </a:blip>
-          <a:stretch>
-            <a:fillRect/>
-          </a:stretch>
+          <a:srcRect t="5916" b="9124"/>
+          <a:stretch/>
         </p:blipFill>
         <p:spPr>
           <a:xfrm>
-            <a:off x="519651" y="857751"/>
-            <a:ext cx="4735428" cy="2984448"/>
+            <a:off x="0" y="4033620"/>
+            <a:ext cx="4114798" cy="2203248"/>
           </a:xfrm>
           <a:prstGeom prst="rect">
             <a:avLst/>
@@ -4933,7 +4985,7 @@
           </p:cNvPicPr>
           <p:nvPr/>
         </p:nvPicPr>
-        <p:blipFill>
+        <p:blipFill rotWithShape="1">
           <a:blip r:embed="rId4">
             <a:extLst>
               <a:ext uri="{28A0092B-C50C-407E-A947-70E740481C1C}">
@@ -4941,14 +4993,13 @@
               </a:ext>
             </a:extLst>
           </a:blip>
-          <a:stretch>
-            <a:fillRect/>
-          </a:stretch>
+          <a:srcRect l="4167" t="6119" r="900" b="9744"/>
+          <a:stretch/>
         </p:blipFill>
         <p:spPr>
           <a:xfrm>
-            <a:off x="519651" y="3778579"/>
-            <a:ext cx="4735429" cy="2984449"/>
+            <a:off x="8172450" y="3991686"/>
+            <a:ext cx="4019550" cy="2245182"/>
           </a:xfrm>
           <a:prstGeom prst="rect">
             <a:avLst/>
@@ -4971,7 +5022,7 @@
             <p:ph idx="1"/>
           </p:nvPr>
         </p:nvPicPr>
-        <p:blipFill>
+        <p:blipFill rotWithShape="1">
           <a:blip r:embed="rId5">
             <a:extLst>
               <a:ext uri="{28A0092B-C50C-407E-A947-70E740481C1C}">
@@ -4979,14 +5030,13 @@
               </a:ext>
             </a:extLst>
           </a:blip>
-          <a:stretch>
-            <a:fillRect/>
-          </a:stretch>
+          <a:srcRect l="4167" t="6119" b="9744"/>
+          <a:stretch/>
         </p:blipFill>
         <p:spPr>
           <a:xfrm>
-            <a:off x="5758787" y="952721"/>
-            <a:ext cx="4434049" cy="2794508"/>
+            <a:off x="4114800" y="3991687"/>
+            <a:ext cx="4057650" cy="2245182"/>
           </a:xfrm>
         </p:spPr>
       </p:pic>
@@ -5006,8 +5056,8 @@
         </p:nvSpPr>
         <p:spPr>
           <a:xfrm>
-            <a:off x="5758785" y="3968521"/>
-            <a:ext cx="6060524" cy="2794507"/>
+            <a:off x="438010" y="1560380"/>
+            <a:ext cx="10879553" cy="1433454"/>
           </a:xfrm>
           <a:prstGeom prst="rect">
             <a:avLst/>
@@ -5015,7 +5065,7 @@
         </p:spPr>
         <p:txBody>
           <a:bodyPr vert="horz" lIns="91440" tIns="45720" rIns="91440" bIns="45720" rtlCol="0">
-            <a:normAutofit lnSpcReduction="10000"/>
+            <a:normAutofit fontScale="92500" lnSpcReduction="20000"/>
           </a:bodyPr>
           <a:lstStyle>
             <a:lvl1pPr marL="228600" indent="-228600" algn="l" defTabSz="914400" rtl="0" eaLnBrk="1" latinLnBrk="0" hangingPunct="1">
@@ -5183,30 +5233,361 @@
           </a:lstStyle>
           <a:p>
             <a:r>
-              <a:rPr lang="en-CA" sz="2400" dirty="0"/>
-              <a:t>No-show’s served rate impacts come from the change in each class’s post probability. </a:t>
-            </a:r>
-          </a:p>
-          <a:p>
-            <a:endParaRPr lang="en-CA" sz="1100" dirty="0"/>
-          </a:p>
-          <a:p>
-            <a:r>
-              <a:rPr lang="en-CA" sz="2400" dirty="0"/>
-              <a:t>This impact is most severe from pre probability with low demand.</a:t>
-            </a:r>
-          </a:p>
-          <a:p>
-            <a:endParaRPr lang="en-CA" sz="1600" dirty="0"/>
-          </a:p>
-          <a:p>
-            <a:r>
-              <a:rPr lang="en-CA" sz="2400" dirty="0"/>
-              <a:t>No-shows do not impact the other class’s served rate.</a:t>
-            </a:r>
-          </a:p>
-        </p:txBody>
-      </p:sp>
+              <a:rPr lang="en-CA" dirty="0"/>
+              <a:t>No-show’s served rate impacts come from the change in each class’s post probability. The other class’s served rate is not impacted.</a:t>
+            </a:r>
+          </a:p>
+          <a:p>
+            <a:r>
+              <a:rPr lang="en-CA" dirty="0"/>
+              <a:t>No-show’s biggest served rate effects comes from pre-probability increases during low demand.</a:t>
+            </a:r>
+          </a:p>
+        </p:txBody>
+      </p:sp>
+      <p:pic>
+        <p:nvPicPr>
+          <p:cNvPr id="7" name="Picture 6">
+            <a:extLst>
+              <a:ext uri="{FF2B5EF4-FFF2-40B4-BE49-F238E27FC236}">
+                <a16:creationId xmlns:a16="http://schemas.microsoft.com/office/drawing/2014/main" id="{F3F03D47-D8CB-4534-B002-19B07CD4F4AB}"/>
+              </a:ext>
+            </a:extLst>
+          </p:cNvPr>
+          <p:cNvPicPr>
+            <a:picLocks noChangeAspect="1"/>
+          </p:cNvPicPr>
+          <p:nvPr/>
+        </p:nvPicPr>
+        <p:blipFill rotWithShape="1">
+          <a:blip r:embed="rId6">
+            <a:extLst>
+              <a:ext uri="{28A0092B-C50C-407E-A947-70E740481C1C}">
+                <a14:useLocalDpi xmlns:a14="http://schemas.microsoft.com/office/drawing/2010/main" val="0"/>
+              </a:ext>
+            </a:extLst>
+          </a:blip>
+          <a:srcRect l="2275" t="19635" r="2784" b="70055"/>
+          <a:stretch/>
+        </p:blipFill>
+        <p:spPr>
+          <a:xfrm>
+            <a:off x="2721" y="3162299"/>
+            <a:ext cx="12189279" cy="620486"/>
+          </a:xfrm>
+          <a:prstGeom prst="rect">
+            <a:avLst/>
+          </a:prstGeom>
+        </p:spPr>
+      </p:pic>
+      <p:sp>
+        <p:nvSpPr>
+          <p:cNvPr id="9" name="Content Placeholder 2">
+            <a:extLst>
+              <a:ext uri="{FF2B5EF4-FFF2-40B4-BE49-F238E27FC236}">
+                <a16:creationId xmlns:a16="http://schemas.microsoft.com/office/drawing/2014/main" id="{67817D10-47AB-4363-8ECD-85096A2647C7}"/>
+              </a:ext>
+            </a:extLst>
+          </p:cNvPr>
+          <p:cNvSpPr txBox="1">
+            <a:spLocks/>
+          </p:cNvSpPr>
+          <p:nvPr/>
+        </p:nvSpPr>
+        <p:spPr>
+          <a:xfrm>
+            <a:off x="5706789" y="6400765"/>
+            <a:ext cx="1067709" cy="323670"/>
+          </a:xfrm>
+          <a:prstGeom prst="rect">
+            <a:avLst/>
+          </a:prstGeom>
+        </p:spPr>
+        <p:txBody>
+          <a:bodyPr vert="horz" lIns="91440" tIns="45720" rIns="91440" bIns="45720" rtlCol="0">
+            <a:normAutofit/>
+          </a:bodyPr>
+          <a:lstStyle>
+            <a:lvl1pPr marL="228600" indent="-228600" algn="l" defTabSz="914400" rtl="0" eaLnBrk="1" latinLnBrk="0" hangingPunct="1">
+              <a:lnSpc>
+                <a:spcPct val="90000"/>
+              </a:lnSpc>
+              <a:spcBef>
+                <a:spcPts val="1000"/>
+              </a:spcBef>
+              <a:buFont typeface="Arial" panose="020B0604020202020204" pitchFamily="34" charset="0"/>
+              <a:buChar char="•"/>
+              <a:defRPr sz="2800" kern="1200">
+                <a:solidFill>
+                  <a:schemeClr val="tx1"/>
+                </a:solidFill>
+                <a:latin typeface="+mn-lt"/>
+                <a:ea typeface="+mn-ea"/>
+                <a:cs typeface="+mn-cs"/>
+              </a:defRPr>
+            </a:lvl1pPr>
+            <a:lvl2pPr marL="685800" indent="-228600" algn="l" defTabSz="914400" rtl="0" eaLnBrk="1" latinLnBrk="0" hangingPunct="1">
+              <a:lnSpc>
+                <a:spcPct val="90000"/>
+              </a:lnSpc>
+              <a:spcBef>
+                <a:spcPts val="500"/>
+              </a:spcBef>
+              <a:buFont typeface="Arial" panose="020B0604020202020204" pitchFamily="34" charset="0"/>
+              <a:buChar char="•"/>
+              <a:defRPr sz="2400" kern="1200">
+                <a:solidFill>
+                  <a:schemeClr val="tx1"/>
+                </a:solidFill>
+                <a:latin typeface="+mn-lt"/>
+                <a:ea typeface="+mn-ea"/>
+                <a:cs typeface="+mn-cs"/>
+              </a:defRPr>
+            </a:lvl2pPr>
+            <a:lvl3pPr marL="1143000" indent="-228600" algn="l" defTabSz="914400" rtl="0" eaLnBrk="1" latinLnBrk="0" hangingPunct="1">
+              <a:lnSpc>
+                <a:spcPct val="90000"/>
+              </a:lnSpc>
+              <a:spcBef>
+                <a:spcPts val="500"/>
+              </a:spcBef>
+              <a:buFont typeface="Arial" panose="020B0604020202020204" pitchFamily="34" charset="0"/>
+              <a:buChar char="•"/>
+              <a:defRPr sz="2000" kern="1200">
+                <a:solidFill>
+                  <a:schemeClr val="tx1"/>
+                </a:solidFill>
+                <a:latin typeface="+mn-lt"/>
+                <a:ea typeface="+mn-ea"/>
+                <a:cs typeface="+mn-cs"/>
+              </a:defRPr>
+            </a:lvl3pPr>
+            <a:lvl4pPr marL="1600200" indent="-228600" algn="l" defTabSz="914400" rtl="0" eaLnBrk="1" latinLnBrk="0" hangingPunct="1">
+              <a:lnSpc>
+                <a:spcPct val="90000"/>
+              </a:lnSpc>
+              <a:spcBef>
+                <a:spcPts val="500"/>
+              </a:spcBef>
+              <a:buFont typeface="Arial" panose="020B0604020202020204" pitchFamily="34" charset="0"/>
+              <a:buChar char="•"/>
+              <a:defRPr sz="1800" kern="1200">
+                <a:solidFill>
+                  <a:schemeClr val="tx1"/>
+                </a:solidFill>
+                <a:latin typeface="+mn-lt"/>
+                <a:ea typeface="+mn-ea"/>
+                <a:cs typeface="+mn-cs"/>
+              </a:defRPr>
+            </a:lvl4pPr>
+            <a:lvl5pPr marL="2057400" indent="-228600" algn="l" defTabSz="914400" rtl="0" eaLnBrk="1" latinLnBrk="0" hangingPunct="1">
+              <a:lnSpc>
+                <a:spcPct val="90000"/>
+              </a:lnSpc>
+              <a:spcBef>
+                <a:spcPts val="500"/>
+              </a:spcBef>
+              <a:buFont typeface="Arial" panose="020B0604020202020204" pitchFamily="34" charset="0"/>
+              <a:buChar char="•"/>
+              <a:defRPr sz="1800" kern="1200">
+                <a:solidFill>
+                  <a:schemeClr val="tx1"/>
+                </a:solidFill>
+                <a:latin typeface="+mn-lt"/>
+                <a:ea typeface="+mn-ea"/>
+                <a:cs typeface="+mn-cs"/>
+              </a:defRPr>
+            </a:lvl5pPr>
+            <a:lvl6pPr marL="2514600" indent="-228600" algn="l" defTabSz="914400" rtl="0" eaLnBrk="1" latinLnBrk="0" hangingPunct="1">
+              <a:lnSpc>
+                <a:spcPct val="90000"/>
+              </a:lnSpc>
+              <a:spcBef>
+                <a:spcPts val="500"/>
+              </a:spcBef>
+              <a:buFont typeface="Arial" panose="020B0604020202020204" pitchFamily="34" charset="0"/>
+              <a:buChar char="•"/>
+              <a:defRPr sz="1800" kern="1200">
+                <a:solidFill>
+                  <a:schemeClr val="tx1"/>
+                </a:solidFill>
+                <a:latin typeface="+mn-lt"/>
+                <a:ea typeface="+mn-ea"/>
+                <a:cs typeface="+mn-cs"/>
+              </a:defRPr>
+            </a:lvl6pPr>
+            <a:lvl7pPr marL="2971800" indent="-228600" algn="l" defTabSz="914400" rtl="0" eaLnBrk="1" latinLnBrk="0" hangingPunct="1">
+              <a:lnSpc>
+                <a:spcPct val="90000"/>
+              </a:lnSpc>
+              <a:spcBef>
+                <a:spcPts val="500"/>
+              </a:spcBef>
+              <a:buFont typeface="Arial" panose="020B0604020202020204" pitchFamily="34" charset="0"/>
+              <a:buChar char="•"/>
+              <a:defRPr sz="1800" kern="1200">
+                <a:solidFill>
+                  <a:schemeClr val="tx1"/>
+                </a:solidFill>
+                <a:latin typeface="+mn-lt"/>
+                <a:ea typeface="+mn-ea"/>
+                <a:cs typeface="+mn-cs"/>
+              </a:defRPr>
+            </a:lvl7pPr>
+            <a:lvl8pPr marL="3429000" indent="-228600" algn="l" defTabSz="914400" rtl="0" eaLnBrk="1" latinLnBrk="0" hangingPunct="1">
+              <a:lnSpc>
+                <a:spcPct val="90000"/>
+              </a:lnSpc>
+              <a:spcBef>
+                <a:spcPts val="500"/>
+              </a:spcBef>
+              <a:buFont typeface="Arial" panose="020B0604020202020204" pitchFamily="34" charset="0"/>
+              <a:buChar char="•"/>
+              <a:defRPr sz="1800" kern="1200">
+                <a:solidFill>
+                  <a:schemeClr val="tx1"/>
+                </a:solidFill>
+                <a:latin typeface="+mn-lt"/>
+                <a:ea typeface="+mn-ea"/>
+                <a:cs typeface="+mn-cs"/>
+              </a:defRPr>
+            </a:lvl8pPr>
+            <a:lvl9pPr marL="3886200" indent="-228600" algn="l" defTabSz="914400" rtl="0" eaLnBrk="1" latinLnBrk="0" hangingPunct="1">
+              <a:lnSpc>
+                <a:spcPct val="90000"/>
+              </a:lnSpc>
+              <a:spcBef>
+                <a:spcPts val="500"/>
+              </a:spcBef>
+              <a:buFont typeface="Arial" panose="020B0604020202020204" pitchFamily="34" charset="0"/>
+              <a:buChar char="•"/>
+              <a:defRPr sz="1800" kern="1200">
+                <a:solidFill>
+                  <a:schemeClr val="tx1"/>
+                </a:solidFill>
+                <a:latin typeface="+mn-lt"/>
+                <a:ea typeface="+mn-ea"/>
+                <a:cs typeface="+mn-cs"/>
+              </a:defRPr>
+            </a:lvl9pPr>
+          </a:lstStyle>
+          <a:p>
+            <a:pPr marL="0" indent="0">
+              <a:buFont typeface="Arial" panose="020B0604020202020204" pitchFamily="34" charset="0"/>
+              <a:buNone/>
+            </a:pPr>
+            <a:r>
+              <a:rPr lang="en-CA" sz="1600" dirty="0"/>
+              <a:t>Demand</a:t>
+            </a:r>
+          </a:p>
+        </p:txBody>
+      </p:sp>
+      <p:pic>
+        <p:nvPicPr>
+          <p:cNvPr id="10" name="Picture 9">
+            <a:extLst>
+              <a:ext uri="{FF2B5EF4-FFF2-40B4-BE49-F238E27FC236}">
+                <a16:creationId xmlns:a16="http://schemas.microsoft.com/office/drawing/2014/main" id="{2C1BCA71-A66F-4E26-84E1-CDC5A1FE6105}"/>
+              </a:ext>
+            </a:extLst>
+          </p:cNvPr>
+          <p:cNvPicPr>
+            <a:picLocks noChangeAspect="1"/>
+          </p:cNvPicPr>
+          <p:nvPr/>
+        </p:nvPicPr>
+        <p:blipFill rotWithShape="1">
+          <a:blip r:embed="rId7">
+            <a:extLst>
+              <a:ext uri="{28A0092B-C50C-407E-A947-70E740481C1C}">
+                <a14:useLocalDpi xmlns:a14="http://schemas.microsoft.com/office/drawing/2010/main" val="0"/>
+              </a:ext>
+            </a:extLst>
+          </a:blip>
+          <a:srcRect l="8379" t="88961" r="2359" b="5676"/>
+          <a:stretch/>
+        </p:blipFill>
+        <p:spPr>
+          <a:xfrm>
+            <a:off x="341086" y="6202349"/>
+            <a:ext cx="3730171" cy="140360"/>
+          </a:xfrm>
+          <a:prstGeom prst="rect">
+            <a:avLst/>
+          </a:prstGeom>
+        </p:spPr>
+      </p:pic>
+      <p:pic>
+        <p:nvPicPr>
+          <p:cNvPr id="11" name="Picture 10">
+            <a:extLst>
+              <a:ext uri="{FF2B5EF4-FFF2-40B4-BE49-F238E27FC236}">
+                <a16:creationId xmlns:a16="http://schemas.microsoft.com/office/drawing/2014/main" id="{85ED54C8-7A76-43EF-8510-8AD7B55FE70D}"/>
+              </a:ext>
+            </a:extLst>
+          </p:cNvPr>
+          <p:cNvPicPr>
+            <a:picLocks noChangeAspect="1"/>
+          </p:cNvPicPr>
+          <p:nvPr/>
+        </p:nvPicPr>
+        <p:blipFill rotWithShape="1">
+          <a:blip r:embed="rId7">
+            <a:extLst>
+              <a:ext uri="{28A0092B-C50C-407E-A947-70E740481C1C}">
+                <a14:useLocalDpi xmlns:a14="http://schemas.microsoft.com/office/drawing/2010/main" val="0"/>
+              </a:ext>
+            </a:extLst>
+          </a:blip>
+          <a:srcRect l="8379" t="88961" r="2359" b="5676"/>
+          <a:stretch/>
+        </p:blipFill>
+        <p:spPr>
+          <a:xfrm>
+            <a:off x="4278539" y="6222354"/>
+            <a:ext cx="3730171" cy="140360"/>
+          </a:xfrm>
+          <a:prstGeom prst="rect">
+            <a:avLst/>
+          </a:prstGeom>
+        </p:spPr>
+      </p:pic>
+      <p:pic>
+        <p:nvPicPr>
+          <p:cNvPr id="12" name="Picture 11">
+            <a:extLst>
+              <a:ext uri="{FF2B5EF4-FFF2-40B4-BE49-F238E27FC236}">
+                <a16:creationId xmlns:a16="http://schemas.microsoft.com/office/drawing/2014/main" id="{DCA20CB3-F48D-4548-9727-5AD63EA0B692}"/>
+              </a:ext>
+            </a:extLst>
+          </p:cNvPr>
+          <p:cNvPicPr>
+            <a:picLocks noChangeAspect="1"/>
+          </p:cNvPicPr>
+          <p:nvPr/>
+        </p:nvPicPr>
+        <p:blipFill rotWithShape="1">
+          <a:blip r:embed="rId7">
+            <a:extLst>
+              <a:ext uri="{28A0092B-C50C-407E-A947-70E740481C1C}">
+                <a14:useLocalDpi xmlns:a14="http://schemas.microsoft.com/office/drawing/2010/main" val="0"/>
+              </a:ext>
+            </a:extLst>
+          </a:blip>
+          <a:srcRect l="8379" t="88961" r="2359" b="5676"/>
+          <a:stretch/>
+        </p:blipFill>
+        <p:spPr>
+          <a:xfrm>
+            <a:off x="8379732" y="6202349"/>
+            <a:ext cx="3730171" cy="140360"/>
+          </a:xfrm>
+          <a:prstGeom prst="rect">
+            <a:avLst/>
+          </a:prstGeom>
+        </p:spPr>
+      </p:pic>
     </p:spTree>
     <p:extLst>
       <p:ext uri="{BB962C8B-B14F-4D97-AF65-F5344CB8AC3E}">
@@ -5255,7 +5636,7 @@
         </p:nvSpPr>
         <p:spPr>
           <a:xfrm>
-            <a:off x="672335" y="0"/>
+            <a:off x="701364" y="495588"/>
             <a:ext cx="11369843" cy="900538"/>
           </a:xfrm>
         </p:spPr>
@@ -5288,8 +5669,8 @@
         </p:nvSpPr>
         <p:spPr>
           <a:xfrm>
-            <a:off x="5997659" y="3993944"/>
-            <a:ext cx="5209057" cy="2567277"/>
+            <a:off x="701364" y="1631190"/>
+            <a:ext cx="10675257" cy="1126286"/>
           </a:xfrm>
           <a:prstGeom prst="rect">
             <a:avLst/>
@@ -5297,7 +5678,7 @@
         </p:spPr>
         <p:txBody>
           <a:bodyPr vert="horz" lIns="91440" tIns="45720" rIns="91440" bIns="45720" rtlCol="0">
-            <a:normAutofit lnSpcReduction="10000"/>
+            <a:normAutofit/>
           </a:bodyPr>
           <a:lstStyle>
             <a:lvl1pPr marL="228600" indent="-228600" algn="l" defTabSz="914400" rtl="0" eaLnBrk="1" latinLnBrk="0" hangingPunct="1">
@@ -5465,11 +5846,11 @@
           </a:lstStyle>
           <a:p>
             <a:r>
-              <a:rPr lang="en-CA" dirty="0"/>
+              <a:rPr lang="en-CA" sz="2600" dirty="0"/>
               <a:t>Class 1 balking </a:t>
             </a:r>
             <a:r>
-              <a:rPr lang="en-CA" dirty="0">
+              <a:rPr lang="en-CA" sz="2600" dirty="0">
                 <a:solidFill>
                   <a:srgbClr val="C00000"/>
                 </a:solidFill>
@@ -5477,17 +5858,18 @@
               <a:t>positively impacts</a:t>
             </a:r>
             <a:r>
+              <a:rPr lang="en-CA" sz="2600" dirty="0"/>
+              <a:t> Class 2’s served rate.  </a:t>
+            </a:r>
+          </a:p>
+          <a:p>
+            <a:r>
+              <a:rPr lang="en-CA" sz="2600" dirty="0"/>
+              <a:t>This impact peaks with pre-threshold balking at low to moderate </a:t>
+            </a:r>
+            <a:r>
               <a:rPr lang="en-CA" dirty="0"/>
-              <a:t> Class 2’s served rate.  </a:t>
-            </a:r>
-          </a:p>
-          <a:p>
-            <a:endParaRPr lang="en-CA" dirty="0"/>
-          </a:p>
-          <a:p>
-            <a:r>
-              <a:rPr lang="en-CA" dirty="0"/>
-              <a:t>This impact peaks with pre-threshold balking at low to moderate demand.</a:t>
+              <a:t>demand.</a:t>
             </a:r>
           </a:p>
           <a:p>
@@ -5520,7 +5902,7 @@
           </p:cNvPicPr>
           <p:nvPr/>
         </p:nvPicPr>
-        <p:blipFill>
+        <p:blipFill rotWithShape="1">
           <a:blip r:embed="rId3">
             <a:extLst>
               <a:ext uri="{28A0092B-C50C-407E-A947-70E740481C1C}">
@@ -5528,14 +5910,13 @@
               </a:ext>
             </a:extLst>
           </a:blip>
-          <a:stretch>
-            <a:fillRect/>
-          </a:stretch>
+          <a:srcRect l="4089" t="5884" b="10155"/>
+          <a:stretch/>
         </p:blipFill>
         <p:spPr>
           <a:xfrm>
-            <a:off x="786635" y="3936793"/>
-            <a:ext cx="4544401" cy="2864056"/>
+            <a:off x="8184575" y="4007209"/>
+            <a:ext cx="4007425" cy="2210938"/>
           </a:xfrm>
           <a:prstGeom prst="rect">
             <a:avLst/>
@@ -5556,7 +5937,7 @@
           </p:cNvPicPr>
           <p:nvPr/>
         </p:nvPicPr>
-        <p:blipFill>
+        <p:blipFill rotWithShape="1">
           <a:blip r:embed="rId4">
             <a:extLst>
               <a:ext uri="{28A0092B-C50C-407E-A947-70E740481C1C}">
@@ -5564,14 +5945,13 @@
               </a:ext>
             </a:extLst>
           </a:blip>
-          <a:stretch>
-            <a:fillRect/>
-          </a:stretch>
+          <a:srcRect l="4074" t="6054" b="10018"/>
+          <a:stretch/>
         </p:blipFill>
         <p:spPr>
           <a:xfrm>
-            <a:off x="5997660" y="900538"/>
-            <a:ext cx="4417839" cy="2784291"/>
+            <a:off x="4160542" y="3998684"/>
+            <a:ext cx="4044816" cy="2230365"/>
           </a:xfrm>
           <a:prstGeom prst="rect">
             <a:avLst/>
@@ -5592,7 +5972,7 @@
           </p:cNvPicPr>
           <p:nvPr/>
         </p:nvPicPr>
-        <p:blipFill>
+        <p:blipFill rotWithShape="1">
           <a:blip r:embed="rId5">
             <a:extLst>
               <a:ext uri="{28A0092B-C50C-407E-A947-70E740481C1C}">
@@ -5600,14 +5980,13 @@
               </a:ext>
             </a:extLst>
           </a:blip>
-          <a:stretch>
-            <a:fillRect/>
-          </a:stretch>
+          <a:srcRect t="5503" b="9358"/>
+          <a:stretch/>
         </p:blipFill>
         <p:spPr>
           <a:xfrm>
-            <a:off x="786635" y="860657"/>
-            <a:ext cx="4544401" cy="2864055"/>
+            <a:off x="0" y="4007209"/>
+            <a:ext cx="4140801" cy="2221840"/>
           </a:xfrm>
           <a:prstGeom prst="rect">
             <a:avLst/>
@@ -5628,7 +6007,7 @@
         </p:nvSpPr>
         <p:spPr>
           <a:xfrm>
-            <a:off x="1241832" y="944880"/>
+            <a:off x="421775" y="3942079"/>
             <a:ext cx="1447002" cy="1466465"/>
           </a:xfrm>
           <a:prstGeom prst="ellipse">
@@ -5663,6 +6042,349 @@
           <a:p>
             <a:pPr algn="ctr"/>
             <a:endParaRPr lang="en-CA"/>
+          </a:p>
+        </p:txBody>
+      </p:sp>
+      <p:pic>
+        <p:nvPicPr>
+          <p:cNvPr id="9" name="Picture 8">
+            <a:extLst>
+              <a:ext uri="{FF2B5EF4-FFF2-40B4-BE49-F238E27FC236}">
+                <a16:creationId xmlns:a16="http://schemas.microsoft.com/office/drawing/2014/main" id="{A6364DF6-F668-4ABC-8F7E-227CFCCB0F79}"/>
+              </a:ext>
+            </a:extLst>
+          </p:cNvPr>
+          <p:cNvPicPr>
+            <a:picLocks noChangeAspect="1"/>
+          </p:cNvPicPr>
+          <p:nvPr/>
+        </p:nvPicPr>
+        <p:blipFill rotWithShape="1">
+          <a:blip r:embed="rId6">
+            <a:extLst>
+              <a:ext uri="{28A0092B-C50C-407E-A947-70E740481C1C}">
+                <a14:useLocalDpi xmlns:a14="http://schemas.microsoft.com/office/drawing/2010/main" val="0"/>
+              </a:ext>
+            </a:extLst>
+          </a:blip>
+          <a:srcRect l="2275" t="19635" r="2784" b="70055"/>
+          <a:stretch/>
+        </p:blipFill>
+        <p:spPr>
+          <a:xfrm>
+            <a:off x="2721" y="3162299"/>
+            <a:ext cx="12189279" cy="620486"/>
+          </a:xfrm>
+          <a:prstGeom prst="rect">
+            <a:avLst/>
+          </a:prstGeom>
+        </p:spPr>
+      </p:pic>
+      <p:pic>
+        <p:nvPicPr>
+          <p:cNvPr id="12" name="Picture 11">
+            <a:extLst>
+              <a:ext uri="{FF2B5EF4-FFF2-40B4-BE49-F238E27FC236}">
+                <a16:creationId xmlns:a16="http://schemas.microsoft.com/office/drawing/2014/main" id="{8C04CC41-26A3-40DE-9CDD-04D0C5B64FB1}"/>
+              </a:ext>
+            </a:extLst>
+          </p:cNvPr>
+          <p:cNvPicPr>
+            <a:picLocks noChangeAspect="1"/>
+          </p:cNvPicPr>
+          <p:nvPr/>
+        </p:nvPicPr>
+        <p:blipFill rotWithShape="1">
+          <a:blip r:embed="rId7">
+            <a:extLst>
+              <a:ext uri="{28A0092B-C50C-407E-A947-70E740481C1C}">
+                <a14:useLocalDpi xmlns:a14="http://schemas.microsoft.com/office/drawing/2010/main" val="0"/>
+              </a:ext>
+            </a:extLst>
+          </a:blip>
+          <a:srcRect l="8379" t="88961" r="2359" b="5676"/>
+          <a:stretch/>
+        </p:blipFill>
+        <p:spPr>
+          <a:xfrm>
+            <a:off x="333829" y="6203633"/>
+            <a:ext cx="3730171" cy="140360"/>
+          </a:xfrm>
+          <a:prstGeom prst="rect">
+            <a:avLst/>
+          </a:prstGeom>
+        </p:spPr>
+      </p:pic>
+      <p:pic>
+        <p:nvPicPr>
+          <p:cNvPr id="13" name="Picture 12">
+            <a:extLst>
+              <a:ext uri="{FF2B5EF4-FFF2-40B4-BE49-F238E27FC236}">
+                <a16:creationId xmlns:a16="http://schemas.microsoft.com/office/drawing/2014/main" id="{5886852C-F4C3-453A-9D76-534C560B3839}"/>
+              </a:ext>
+            </a:extLst>
+          </p:cNvPr>
+          <p:cNvPicPr>
+            <a:picLocks noChangeAspect="1"/>
+          </p:cNvPicPr>
+          <p:nvPr/>
+        </p:nvPicPr>
+        <p:blipFill rotWithShape="1">
+          <a:blip r:embed="rId7">
+            <a:extLst>
+              <a:ext uri="{28A0092B-C50C-407E-A947-70E740481C1C}">
+                <a14:useLocalDpi xmlns:a14="http://schemas.microsoft.com/office/drawing/2010/main" val="0"/>
+              </a:ext>
+            </a:extLst>
+          </a:blip>
+          <a:srcRect l="8379" t="88961" r="2359" b="5676"/>
+          <a:stretch/>
+        </p:blipFill>
+        <p:spPr>
+          <a:xfrm>
+            <a:off x="4357862" y="6202349"/>
+            <a:ext cx="3730171" cy="140360"/>
+          </a:xfrm>
+          <a:prstGeom prst="rect">
+            <a:avLst/>
+          </a:prstGeom>
+        </p:spPr>
+      </p:pic>
+      <p:pic>
+        <p:nvPicPr>
+          <p:cNvPr id="14" name="Picture 13">
+            <a:extLst>
+              <a:ext uri="{FF2B5EF4-FFF2-40B4-BE49-F238E27FC236}">
+                <a16:creationId xmlns:a16="http://schemas.microsoft.com/office/drawing/2014/main" id="{26E68BC1-B774-455B-AA42-E429343FD732}"/>
+              </a:ext>
+            </a:extLst>
+          </p:cNvPr>
+          <p:cNvPicPr>
+            <a:picLocks noChangeAspect="1"/>
+          </p:cNvPicPr>
+          <p:nvPr/>
+        </p:nvPicPr>
+        <p:blipFill rotWithShape="1">
+          <a:blip r:embed="rId7">
+            <a:extLst>
+              <a:ext uri="{28A0092B-C50C-407E-A947-70E740481C1C}">
+                <a14:useLocalDpi xmlns:a14="http://schemas.microsoft.com/office/drawing/2010/main" val="0"/>
+              </a:ext>
+            </a:extLst>
+          </a:blip>
+          <a:srcRect l="8379" t="88961" r="2359" b="5676"/>
+          <a:stretch/>
+        </p:blipFill>
+        <p:spPr>
+          <a:xfrm>
+            <a:off x="8441164" y="6212026"/>
+            <a:ext cx="3730171" cy="140360"/>
+          </a:xfrm>
+          <a:prstGeom prst="rect">
+            <a:avLst/>
+          </a:prstGeom>
+        </p:spPr>
+      </p:pic>
+      <p:sp>
+        <p:nvSpPr>
+          <p:cNvPr id="15" name="Content Placeholder 2">
+            <a:extLst>
+              <a:ext uri="{FF2B5EF4-FFF2-40B4-BE49-F238E27FC236}">
+                <a16:creationId xmlns:a16="http://schemas.microsoft.com/office/drawing/2014/main" id="{0E51F9C5-C291-4005-AA24-0BFB97E03E4F}"/>
+              </a:ext>
+            </a:extLst>
+          </p:cNvPr>
+          <p:cNvSpPr txBox="1">
+            <a:spLocks/>
+          </p:cNvSpPr>
+          <p:nvPr/>
+        </p:nvSpPr>
+        <p:spPr>
+          <a:xfrm>
+            <a:off x="5706789" y="6400765"/>
+            <a:ext cx="1067709" cy="323670"/>
+          </a:xfrm>
+          <a:prstGeom prst="rect">
+            <a:avLst/>
+          </a:prstGeom>
+        </p:spPr>
+        <p:txBody>
+          <a:bodyPr vert="horz" lIns="91440" tIns="45720" rIns="91440" bIns="45720" rtlCol="0">
+            <a:normAutofit/>
+          </a:bodyPr>
+          <a:lstStyle>
+            <a:lvl1pPr marL="228600" indent="-228600" algn="l" defTabSz="914400" rtl="0" eaLnBrk="1" latinLnBrk="0" hangingPunct="1">
+              <a:lnSpc>
+                <a:spcPct val="90000"/>
+              </a:lnSpc>
+              <a:spcBef>
+                <a:spcPts val="1000"/>
+              </a:spcBef>
+              <a:buFont typeface="Arial" panose="020B0604020202020204" pitchFamily="34" charset="0"/>
+              <a:buChar char="•"/>
+              <a:defRPr sz="2800" kern="1200">
+                <a:solidFill>
+                  <a:schemeClr val="tx1"/>
+                </a:solidFill>
+                <a:latin typeface="+mn-lt"/>
+                <a:ea typeface="+mn-ea"/>
+                <a:cs typeface="+mn-cs"/>
+              </a:defRPr>
+            </a:lvl1pPr>
+            <a:lvl2pPr marL="685800" indent="-228600" algn="l" defTabSz="914400" rtl="0" eaLnBrk="1" latinLnBrk="0" hangingPunct="1">
+              <a:lnSpc>
+                <a:spcPct val="90000"/>
+              </a:lnSpc>
+              <a:spcBef>
+                <a:spcPts val="500"/>
+              </a:spcBef>
+              <a:buFont typeface="Arial" panose="020B0604020202020204" pitchFamily="34" charset="0"/>
+              <a:buChar char="•"/>
+              <a:defRPr sz="2400" kern="1200">
+                <a:solidFill>
+                  <a:schemeClr val="tx1"/>
+                </a:solidFill>
+                <a:latin typeface="+mn-lt"/>
+                <a:ea typeface="+mn-ea"/>
+                <a:cs typeface="+mn-cs"/>
+              </a:defRPr>
+            </a:lvl2pPr>
+            <a:lvl3pPr marL="1143000" indent="-228600" algn="l" defTabSz="914400" rtl="0" eaLnBrk="1" latinLnBrk="0" hangingPunct="1">
+              <a:lnSpc>
+                <a:spcPct val="90000"/>
+              </a:lnSpc>
+              <a:spcBef>
+                <a:spcPts val="500"/>
+              </a:spcBef>
+              <a:buFont typeface="Arial" panose="020B0604020202020204" pitchFamily="34" charset="0"/>
+              <a:buChar char="•"/>
+              <a:defRPr sz="2000" kern="1200">
+                <a:solidFill>
+                  <a:schemeClr val="tx1"/>
+                </a:solidFill>
+                <a:latin typeface="+mn-lt"/>
+                <a:ea typeface="+mn-ea"/>
+                <a:cs typeface="+mn-cs"/>
+              </a:defRPr>
+            </a:lvl3pPr>
+            <a:lvl4pPr marL="1600200" indent="-228600" algn="l" defTabSz="914400" rtl="0" eaLnBrk="1" latinLnBrk="0" hangingPunct="1">
+              <a:lnSpc>
+                <a:spcPct val="90000"/>
+              </a:lnSpc>
+              <a:spcBef>
+                <a:spcPts val="500"/>
+              </a:spcBef>
+              <a:buFont typeface="Arial" panose="020B0604020202020204" pitchFamily="34" charset="0"/>
+              <a:buChar char="•"/>
+              <a:defRPr sz="1800" kern="1200">
+                <a:solidFill>
+                  <a:schemeClr val="tx1"/>
+                </a:solidFill>
+                <a:latin typeface="+mn-lt"/>
+                <a:ea typeface="+mn-ea"/>
+                <a:cs typeface="+mn-cs"/>
+              </a:defRPr>
+            </a:lvl4pPr>
+            <a:lvl5pPr marL="2057400" indent="-228600" algn="l" defTabSz="914400" rtl="0" eaLnBrk="1" latinLnBrk="0" hangingPunct="1">
+              <a:lnSpc>
+                <a:spcPct val="90000"/>
+              </a:lnSpc>
+              <a:spcBef>
+                <a:spcPts val="500"/>
+              </a:spcBef>
+              <a:buFont typeface="Arial" panose="020B0604020202020204" pitchFamily="34" charset="0"/>
+              <a:buChar char="•"/>
+              <a:defRPr sz="1800" kern="1200">
+                <a:solidFill>
+                  <a:schemeClr val="tx1"/>
+                </a:solidFill>
+                <a:latin typeface="+mn-lt"/>
+                <a:ea typeface="+mn-ea"/>
+                <a:cs typeface="+mn-cs"/>
+              </a:defRPr>
+            </a:lvl5pPr>
+            <a:lvl6pPr marL="2514600" indent="-228600" algn="l" defTabSz="914400" rtl="0" eaLnBrk="1" latinLnBrk="0" hangingPunct="1">
+              <a:lnSpc>
+                <a:spcPct val="90000"/>
+              </a:lnSpc>
+              <a:spcBef>
+                <a:spcPts val="500"/>
+              </a:spcBef>
+              <a:buFont typeface="Arial" panose="020B0604020202020204" pitchFamily="34" charset="0"/>
+              <a:buChar char="•"/>
+              <a:defRPr sz="1800" kern="1200">
+                <a:solidFill>
+                  <a:schemeClr val="tx1"/>
+                </a:solidFill>
+                <a:latin typeface="+mn-lt"/>
+                <a:ea typeface="+mn-ea"/>
+                <a:cs typeface="+mn-cs"/>
+              </a:defRPr>
+            </a:lvl6pPr>
+            <a:lvl7pPr marL="2971800" indent="-228600" algn="l" defTabSz="914400" rtl="0" eaLnBrk="1" latinLnBrk="0" hangingPunct="1">
+              <a:lnSpc>
+                <a:spcPct val="90000"/>
+              </a:lnSpc>
+              <a:spcBef>
+                <a:spcPts val="500"/>
+              </a:spcBef>
+              <a:buFont typeface="Arial" panose="020B0604020202020204" pitchFamily="34" charset="0"/>
+              <a:buChar char="•"/>
+              <a:defRPr sz="1800" kern="1200">
+                <a:solidFill>
+                  <a:schemeClr val="tx1"/>
+                </a:solidFill>
+                <a:latin typeface="+mn-lt"/>
+                <a:ea typeface="+mn-ea"/>
+                <a:cs typeface="+mn-cs"/>
+              </a:defRPr>
+            </a:lvl7pPr>
+            <a:lvl8pPr marL="3429000" indent="-228600" algn="l" defTabSz="914400" rtl="0" eaLnBrk="1" latinLnBrk="0" hangingPunct="1">
+              <a:lnSpc>
+                <a:spcPct val="90000"/>
+              </a:lnSpc>
+              <a:spcBef>
+                <a:spcPts val="500"/>
+              </a:spcBef>
+              <a:buFont typeface="Arial" panose="020B0604020202020204" pitchFamily="34" charset="0"/>
+              <a:buChar char="•"/>
+              <a:defRPr sz="1800" kern="1200">
+                <a:solidFill>
+                  <a:schemeClr val="tx1"/>
+                </a:solidFill>
+                <a:latin typeface="+mn-lt"/>
+                <a:ea typeface="+mn-ea"/>
+                <a:cs typeface="+mn-cs"/>
+              </a:defRPr>
+            </a:lvl8pPr>
+            <a:lvl9pPr marL="3886200" indent="-228600" algn="l" defTabSz="914400" rtl="0" eaLnBrk="1" latinLnBrk="0" hangingPunct="1">
+              <a:lnSpc>
+                <a:spcPct val="90000"/>
+              </a:lnSpc>
+              <a:spcBef>
+                <a:spcPts val="500"/>
+              </a:spcBef>
+              <a:buFont typeface="Arial" panose="020B0604020202020204" pitchFamily="34" charset="0"/>
+              <a:buChar char="•"/>
+              <a:defRPr sz="1800" kern="1200">
+                <a:solidFill>
+                  <a:schemeClr val="tx1"/>
+                </a:solidFill>
+                <a:latin typeface="+mn-lt"/>
+                <a:ea typeface="+mn-ea"/>
+                <a:cs typeface="+mn-cs"/>
+              </a:defRPr>
+            </a:lvl9pPr>
+          </a:lstStyle>
+          <a:p>
+            <a:pPr marL="0" indent="0">
+              <a:buFont typeface="Arial" panose="020B0604020202020204" pitchFamily="34" charset="0"/>
+              <a:buNone/>
+            </a:pPr>
+            <a:r>
+              <a:rPr lang="en-CA" sz="1600" dirty="0"/>
+              <a:t>Demand</a:t>
+            </a:r>
           </a:p>
         </p:txBody>
       </p:sp>
@@ -5714,7 +6436,7 @@
         </p:nvSpPr>
         <p:spPr>
           <a:xfrm>
-            <a:off x="838200" y="178847"/>
+            <a:off x="700314" y="382046"/>
             <a:ext cx="10515600" cy="1088118"/>
           </a:xfrm>
         </p:spPr>
@@ -5726,7 +6448,7 @@
           <a:p>
             <a:r>
               <a:rPr lang="en-CA" dirty="0"/>
-              <a:t>Summary on no-show vs. balking</a:t>
+              <a:t>Summary - no-show vs. balking on served rate</a:t>
             </a:r>
           </a:p>
         </p:txBody>
@@ -5747,8 +6469,8 @@
         </p:nvSpPr>
         <p:spPr>
           <a:xfrm>
-            <a:off x="550683" y="5056863"/>
-            <a:ext cx="11544357" cy="1727334"/>
+            <a:off x="700314" y="2854505"/>
+            <a:ext cx="5064759" cy="3309391"/>
           </a:xfrm>
           <a:prstGeom prst="rect">
             <a:avLst/>
@@ -5924,28 +6646,477 @@
           </a:lstStyle>
           <a:p>
             <a:r>
-              <a:rPr lang="en-CA" sz="2400" dirty="0"/>
-              <a:t>No-show’s served rate impacts come from the change in each class’s post-probability.</a:t>
-            </a:r>
-          </a:p>
-          <a:p>
-            <a:pPr lvl="1"/>
-            <a:r>
               <a:rPr lang="en-CA" dirty="0"/>
+              <a:t>Served rate impacts come from the change in each class’s post-probability.</a:t>
+            </a:r>
+          </a:p>
+          <a:p>
+            <a:r>
+              <a:rPr lang="en-CA" sz="2800" dirty="0"/>
               <a:t>Minimally impacts the other class’s served rate.</a:t>
             </a:r>
           </a:p>
           <a:p>
             <a:r>
-              <a:rPr lang="en-CA" sz="2400" dirty="0"/>
-              <a:t>Served rates show consistent minimal changes from post probability balking changes.</a:t>
-            </a:r>
-          </a:p>
-          <a:p>
-            <a:pPr lvl="1"/>
-            <a:r>
               <a:rPr lang="en-CA" dirty="0"/>
-              <a:t>Balking served rate effects impact the other class.</a:t>
+              <a:t>Biggest impact is at low demand with pre probability</a:t>
+            </a:r>
+            <a:endParaRPr lang="en-CA" sz="2800" dirty="0"/>
+          </a:p>
+        </p:txBody>
+      </p:sp>
+      <p:sp>
+        <p:nvSpPr>
+          <p:cNvPr id="6" name="Content Placeholder 11">
+            <a:extLst>
+              <a:ext uri="{FF2B5EF4-FFF2-40B4-BE49-F238E27FC236}">
+                <a16:creationId xmlns:a16="http://schemas.microsoft.com/office/drawing/2014/main" id="{6BBC9C67-0C33-41DE-84BA-0092601AAA87}"/>
+              </a:ext>
+            </a:extLst>
+          </p:cNvPr>
+          <p:cNvSpPr txBox="1">
+            <a:spLocks/>
+          </p:cNvSpPr>
+          <p:nvPr/>
+        </p:nvSpPr>
+        <p:spPr>
+          <a:xfrm>
+            <a:off x="6277429" y="2854504"/>
+            <a:ext cx="5064759" cy="3205209"/>
+          </a:xfrm>
+          <a:prstGeom prst="rect">
+            <a:avLst/>
+          </a:prstGeom>
+        </p:spPr>
+        <p:txBody>
+          <a:bodyPr vert="horz" lIns="91440" tIns="45720" rIns="91440" bIns="45720" rtlCol="0">
+            <a:normAutofit/>
+          </a:bodyPr>
+          <a:lstStyle>
+            <a:lvl1pPr marL="228600" indent="-228600" algn="l" defTabSz="914400" rtl="0" eaLnBrk="1" latinLnBrk="0" hangingPunct="1">
+              <a:lnSpc>
+                <a:spcPct val="90000"/>
+              </a:lnSpc>
+              <a:spcBef>
+                <a:spcPts val="1000"/>
+              </a:spcBef>
+              <a:buFont typeface="Arial" panose="020B0604020202020204" pitchFamily="34" charset="0"/>
+              <a:buChar char="•"/>
+              <a:defRPr sz="2800" kern="1200">
+                <a:solidFill>
+                  <a:schemeClr val="tx1"/>
+                </a:solidFill>
+                <a:latin typeface="+mn-lt"/>
+                <a:ea typeface="+mn-ea"/>
+                <a:cs typeface="+mn-cs"/>
+              </a:defRPr>
+            </a:lvl1pPr>
+            <a:lvl2pPr marL="685800" indent="-228600" algn="l" defTabSz="914400" rtl="0" eaLnBrk="1" latinLnBrk="0" hangingPunct="1">
+              <a:lnSpc>
+                <a:spcPct val="90000"/>
+              </a:lnSpc>
+              <a:spcBef>
+                <a:spcPts val="500"/>
+              </a:spcBef>
+              <a:buFont typeface="Arial" panose="020B0604020202020204" pitchFamily="34" charset="0"/>
+              <a:buChar char="•"/>
+              <a:defRPr sz="2400" kern="1200">
+                <a:solidFill>
+                  <a:schemeClr val="tx1"/>
+                </a:solidFill>
+                <a:latin typeface="+mn-lt"/>
+                <a:ea typeface="+mn-ea"/>
+                <a:cs typeface="+mn-cs"/>
+              </a:defRPr>
+            </a:lvl2pPr>
+            <a:lvl3pPr marL="1143000" indent="-228600" algn="l" defTabSz="914400" rtl="0" eaLnBrk="1" latinLnBrk="0" hangingPunct="1">
+              <a:lnSpc>
+                <a:spcPct val="90000"/>
+              </a:lnSpc>
+              <a:spcBef>
+                <a:spcPts val="500"/>
+              </a:spcBef>
+              <a:buFont typeface="Arial" panose="020B0604020202020204" pitchFamily="34" charset="0"/>
+              <a:buChar char="•"/>
+              <a:defRPr sz="2000" kern="1200">
+                <a:solidFill>
+                  <a:schemeClr val="tx1"/>
+                </a:solidFill>
+                <a:latin typeface="+mn-lt"/>
+                <a:ea typeface="+mn-ea"/>
+                <a:cs typeface="+mn-cs"/>
+              </a:defRPr>
+            </a:lvl3pPr>
+            <a:lvl4pPr marL="1600200" indent="-228600" algn="l" defTabSz="914400" rtl="0" eaLnBrk="1" latinLnBrk="0" hangingPunct="1">
+              <a:lnSpc>
+                <a:spcPct val="90000"/>
+              </a:lnSpc>
+              <a:spcBef>
+                <a:spcPts val="500"/>
+              </a:spcBef>
+              <a:buFont typeface="Arial" panose="020B0604020202020204" pitchFamily="34" charset="0"/>
+              <a:buChar char="•"/>
+              <a:defRPr sz="1800" kern="1200">
+                <a:solidFill>
+                  <a:schemeClr val="tx1"/>
+                </a:solidFill>
+                <a:latin typeface="+mn-lt"/>
+                <a:ea typeface="+mn-ea"/>
+                <a:cs typeface="+mn-cs"/>
+              </a:defRPr>
+            </a:lvl4pPr>
+            <a:lvl5pPr marL="2057400" indent="-228600" algn="l" defTabSz="914400" rtl="0" eaLnBrk="1" latinLnBrk="0" hangingPunct="1">
+              <a:lnSpc>
+                <a:spcPct val="90000"/>
+              </a:lnSpc>
+              <a:spcBef>
+                <a:spcPts val="500"/>
+              </a:spcBef>
+              <a:buFont typeface="Arial" panose="020B0604020202020204" pitchFamily="34" charset="0"/>
+              <a:buChar char="•"/>
+              <a:defRPr sz="1800" kern="1200">
+                <a:solidFill>
+                  <a:schemeClr val="tx1"/>
+                </a:solidFill>
+                <a:latin typeface="+mn-lt"/>
+                <a:ea typeface="+mn-ea"/>
+                <a:cs typeface="+mn-cs"/>
+              </a:defRPr>
+            </a:lvl5pPr>
+            <a:lvl6pPr marL="2514600" indent="-228600" algn="l" defTabSz="914400" rtl="0" eaLnBrk="1" latinLnBrk="0" hangingPunct="1">
+              <a:lnSpc>
+                <a:spcPct val="90000"/>
+              </a:lnSpc>
+              <a:spcBef>
+                <a:spcPts val="500"/>
+              </a:spcBef>
+              <a:buFont typeface="Arial" panose="020B0604020202020204" pitchFamily="34" charset="0"/>
+              <a:buChar char="•"/>
+              <a:defRPr sz="1800" kern="1200">
+                <a:solidFill>
+                  <a:schemeClr val="tx1"/>
+                </a:solidFill>
+                <a:latin typeface="+mn-lt"/>
+                <a:ea typeface="+mn-ea"/>
+                <a:cs typeface="+mn-cs"/>
+              </a:defRPr>
+            </a:lvl6pPr>
+            <a:lvl7pPr marL="2971800" indent="-228600" algn="l" defTabSz="914400" rtl="0" eaLnBrk="1" latinLnBrk="0" hangingPunct="1">
+              <a:lnSpc>
+                <a:spcPct val="90000"/>
+              </a:lnSpc>
+              <a:spcBef>
+                <a:spcPts val="500"/>
+              </a:spcBef>
+              <a:buFont typeface="Arial" panose="020B0604020202020204" pitchFamily="34" charset="0"/>
+              <a:buChar char="•"/>
+              <a:defRPr sz="1800" kern="1200">
+                <a:solidFill>
+                  <a:schemeClr val="tx1"/>
+                </a:solidFill>
+                <a:latin typeface="+mn-lt"/>
+                <a:ea typeface="+mn-ea"/>
+                <a:cs typeface="+mn-cs"/>
+              </a:defRPr>
+            </a:lvl7pPr>
+            <a:lvl8pPr marL="3429000" indent="-228600" algn="l" defTabSz="914400" rtl="0" eaLnBrk="1" latinLnBrk="0" hangingPunct="1">
+              <a:lnSpc>
+                <a:spcPct val="90000"/>
+              </a:lnSpc>
+              <a:spcBef>
+                <a:spcPts val="500"/>
+              </a:spcBef>
+              <a:buFont typeface="Arial" panose="020B0604020202020204" pitchFamily="34" charset="0"/>
+              <a:buChar char="•"/>
+              <a:defRPr sz="1800" kern="1200">
+                <a:solidFill>
+                  <a:schemeClr val="tx1"/>
+                </a:solidFill>
+                <a:latin typeface="+mn-lt"/>
+                <a:ea typeface="+mn-ea"/>
+                <a:cs typeface="+mn-cs"/>
+              </a:defRPr>
+            </a:lvl8pPr>
+            <a:lvl9pPr marL="3886200" indent="-228600" algn="l" defTabSz="914400" rtl="0" eaLnBrk="1" latinLnBrk="0" hangingPunct="1">
+              <a:lnSpc>
+                <a:spcPct val="90000"/>
+              </a:lnSpc>
+              <a:spcBef>
+                <a:spcPts val="500"/>
+              </a:spcBef>
+              <a:buFont typeface="Arial" panose="020B0604020202020204" pitchFamily="34" charset="0"/>
+              <a:buChar char="•"/>
+              <a:defRPr sz="1800" kern="1200">
+                <a:solidFill>
+                  <a:schemeClr val="tx1"/>
+                </a:solidFill>
+                <a:latin typeface="+mn-lt"/>
+                <a:ea typeface="+mn-ea"/>
+                <a:cs typeface="+mn-cs"/>
+              </a:defRPr>
+            </a:lvl9pPr>
+          </a:lstStyle>
+          <a:p>
+            <a:r>
+              <a:rPr lang="en-CA" dirty="0"/>
+              <a:t>Consistent minimal changes from post probability balking on served rate.</a:t>
+            </a:r>
+          </a:p>
+          <a:p>
+            <a:r>
+              <a:rPr lang="en-CA" sz="2800" dirty="0"/>
+              <a:t>Served rate effects positively impact the other class.</a:t>
+            </a:r>
+          </a:p>
+          <a:p>
+            <a:r>
+              <a:rPr lang="en-CA" dirty="0"/>
+              <a:t>Biggest impact is at low demand with pre probability</a:t>
+            </a:r>
+            <a:endParaRPr lang="en-CA" sz="4000" dirty="0"/>
+          </a:p>
+          <a:p>
+            <a:endParaRPr lang="en-CA" sz="2800" dirty="0"/>
+          </a:p>
+        </p:txBody>
+      </p:sp>
+      <p:sp>
+        <p:nvSpPr>
+          <p:cNvPr id="7" name="Content Placeholder 2">
+            <a:extLst>
+              <a:ext uri="{FF2B5EF4-FFF2-40B4-BE49-F238E27FC236}">
+                <a16:creationId xmlns:a16="http://schemas.microsoft.com/office/drawing/2014/main" id="{3E7F9DAC-AC61-432B-BB03-0B306FAC49D9}"/>
+              </a:ext>
+            </a:extLst>
+          </p:cNvPr>
+          <p:cNvSpPr>
+            <a:spLocks noGrp="1"/>
+          </p:cNvSpPr>
+          <p:nvPr>
+            <p:ph idx="1"/>
+          </p:nvPr>
+        </p:nvSpPr>
+        <p:spPr>
+          <a:xfrm>
+            <a:off x="2231572" y="1964778"/>
+            <a:ext cx="2202542" cy="889727"/>
+          </a:xfrm>
+        </p:spPr>
+        <p:txBody>
+          <a:bodyPr>
+            <a:normAutofit/>
+          </a:bodyPr>
+          <a:lstStyle/>
+          <a:p>
+            <a:pPr marL="0" indent="0">
+              <a:buNone/>
+            </a:pPr>
+            <a:r>
+              <a:rPr lang="en-CA" sz="3200" u="sng" dirty="0"/>
+              <a:t>No-show</a:t>
+            </a:r>
+          </a:p>
+        </p:txBody>
+      </p:sp>
+      <p:sp>
+        <p:nvSpPr>
+          <p:cNvPr id="8" name="Content Placeholder 2">
+            <a:extLst>
+              <a:ext uri="{FF2B5EF4-FFF2-40B4-BE49-F238E27FC236}">
+                <a16:creationId xmlns:a16="http://schemas.microsoft.com/office/drawing/2014/main" id="{868418D4-0F18-4330-912C-CF2681DDED48}"/>
+              </a:ext>
+            </a:extLst>
+          </p:cNvPr>
+          <p:cNvSpPr txBox="1">
+            <a:spLocks/>
+          </p:cNvSpPr>
+          <p:nvPr/>
+        </p:nvSpPr>
+        <p:spPr>
+          <a:xfrm>
+            <a:off x="7757888" y="1964777"/>
+            <a:ext cx="2202542" cy="889727"/>
+          </a:xfrm>
+          <a:prstGeom prst="rect">
+            <a:avLst/>
+          </a:prstGeom>
+        </p:spPr>
+        <p:txBody>
+          <a:bodyPr vert="horz" lIns="91440" tIns="45720" rIns="91440" bIns="45720" rtlCol="0">
+            <a:normAutofit/>
+          </a:bodyPr>
+          <a:lstStyle>
+            <a:lvl1pPr marL="228600" indent="-228600" algn="l" defTabSz="914400" rtl="0" eaLnBrk="1" latinLnBrk="0" hangingPunct="1">
+              <a:lnSpc>
+                <a:spcPct val="90000"/>
+              </a:lnSpc>
+              <a:spcBef>
+                <a:spcPts val="1000"/>
+              </a:spcBef>
+              <a:buFont typeface="Arial" panose="020B0604020202020204" pitchFamily="34" charset="0"/>
+              <a:buChar char="•"/>
+              <a:defRPr sz="2800" kern="1200">
+                <a:solidFill>
+                  <a:schemeClr val="tx1"/>
+                </a:solidFill>
+                <a:latin typeface="+mn-lt"/>
+                <a:ea typeface="+mn-ea"/>
+                <a:cs typeface="+mn-cs"/>
+              </a:defRPr>
+            </a:lvl1pPr>
+            <a:lvl2pPr marL="685800" indent="-228600" algn="l" defTabSz="914400" rtl="0" eaLnBrk="1" latinLnBrk="0" hangingPunct="1">
+              <a:lnSpc>
+                <a:spcPct val="90000"/>
+              </a:lnSpc>
+              <a:spcBef>
+                <a:spcPts val="500"/>
+              </a:spcBef>
+              <a:buFont typeface="Arial" panose="020B0604020202020204" pitchFamily="34" charset="0"/>
+              <a:buChar char="•"/>
+              <a:defRPr sz="2400" kern="1200">
+                <a:solidFill>
+                  <a:schemeClr val="tx1"/>
+                </a:solidFill>
+                <a:latin typeface="+mn-lt"/>
+                <a:ea typeface="+mn-ea"/>
+                <a:cs typeface="+mn-cs"/>
+              </a:defRPr>
+            </a:lvl2pPr>
+            <a:lvl3pPr marL="1143000" indent="-228600" algn="l" defTabSz="914400" rtl="0" eaLnBrk="1" latinLnBrk="0" hangingPunct="1">
+              <a:lnSpc>
+                <a:spcPct val="90000"/>
+              </a:lnSpc>
+              <a:spcBef>
+                <a:spcPts val="500"/>
+              </a:spcBef>
+              <a:buFont typeface="Arial" panose="020B0604020202020204" pitchFamily="34" charset="0"/>
+              <a:buChar char="•"/>
+              <a:defRPr sz="2000" kern="1200">
+                <a:solidFill>
+                  <a:schemeClr val="tx1"/>
+                </a:solidFill>
+                <a:latin typeface="+mn-lt"/>
+                <a:ea typeface="+mn-ea"/>
+                <a:cs typeface="+mn-cs"/>
+              </a:defRPr>
+            </a:lvl3pPr>
+            <a:lvl4pPr marL="1600200" indent="-228600" algn="l" defTabSz="914400" rtl="0" eaLnBrk="1" latinLnBrk="0" hangingPunct="1">
+              <a:lnSpc>
+                <a:spcPct val="90000"/>
+              </a:lnSpc>
+              <a:spcBef>
+                <a:spcPts val="500"/>
+              </a:spcBef>
+              <a:buFont typeface="Arial" panose="020B0604020202020204" pitchFamily="34" charset="0"/>
+              <a:buChar char="•"/>
+              <a:defRPr sz="1800" kern="1200">
+                <a:solidFill>
+                  <a:schemeClr val="tx1"/>
+                </a:solidFill>
+                <a:latin typeface="+mn-lt"/>
+                <a:ea typeface="+mn-ea"/>
+                <a:cs typeface="+mn-cs"/>
+              </a:defRPr>
+            </a:lvl4pPr>
+            <a:lvl5pPr marL="2057400" indent="-228600" algn="l" defTabSz="914400" rtl="0" eaLnBrk="1" latinLnBrk="0" hangingPunct="1">
+              <a:lnSpc>
+                <a:spcPct val="90000"/>
+              </a:lnSpc>
+              <a:spcBef>
+                <a:spcPts val="500"/>
+              </a:spcBef>
+              <a:buFont typeface="Arial" panose="020B0604020202020204" pitchFamily="34" charset="0"/>
+              <a:buChar char="•"/>
+              <a:defRPr sz="1800" kern="1200">
+                <a:solidFill>
+                  <a:schemeClr val="tx1"/>
+                </a:solidFill>
+                <a:latin typeface="+mn-lt"/>
+                <a:ea typeface="+mn-ea"/>
+                <a:cs typeface="+mn-cs"/>
+              </a:defRPr>
+            </a:lvl5pPr>
+            <a:lvl6pPr marL="2514600" indent="-228600" algn="l" defTabSz="914400" rtl="0" eaLnBrk="1" latinLnBrk="0" hangingPunct="1">
+              <a:lnSpc>
+                <a:spcPct val="90000"/>
+              </a:lnSpc>
+              <a:spcBef>
+                <a:spcPts val="500"/>
+              </a:spcBef>
+              <a:buFont typeface="Arial" panose="020B0604020202020204" pitchFamily="34" charset="0"/>
+              <a:buChar char="•"/>
+              <a:defRPr sz="1800" kern="1200">
+                <a:solidFill>
+                  <a:schemeClr val="tx1"/>
+                </a:solidFill>
+                <a:latin typeface="+mn-lt"/>
+                <a:ea typeface="+mn-ea"/>
+                <a:cs typeface="+mn-cs"/>
+              </a:defRPr>
+            </a:lvl6pPr>
+            <a:lvl7pPr marL="2971800" indent="-228600" algn="l" defTabSz="914400" rtl="0" eaLnBrk="1" latinLnBrk="0" hangingPunct="1">
+              <a:lnSpc>
+                <a:spcPct val="90000"/>
+              </a:lnSpc>
+              <a:spcBef>
+                <a:spcPts val="500"/>
+              </a:spcBef>
+              <a:buFont typeface="Arial" panose="020B0604020202020204" pitchFamily="34" charset="0"/>
+              <a:buChar char="•"/>
+              <a:defRPr sz="1800" kern="1200">
+                <a:solidFill>
+                  <a:schemeClr val="tx1"/>
+                </a:solidFill>
+                <a:latin typeface="+mn-lt"/>
+                <a:ea typeface="+mn-ea"/>
+                <a:cs typeface="+mn-cs"/>
+              </a:defRPr>
+            </a:lvl7pPr>
+            <a:lvl8pPr marL="3429000" indent="-228600" algn="l" defTabSz="914400" rtl="0" eaLnBrk="1" latinLnBrk="0" hangingPunct="1">
+              <a:lnSpc>
+                <a:spcPct val="90000"/>
+              </a:lnSpc>
+              <a:spcBef>
+                <a:spcPts val="500"/>
+              </a:spcBef>
+              <a:buFont typeface="Arial" panose="020B0604020202020204" pitchFamily="34" charset="0"/>
+              <a:buChar char="•"/>
+              <a:defRPr sz="1800" kern="1200">
+                <a:solidFill>
+                  <a:schemeClr val="tx1"/>
+                </a:solidFill>
+                <a:latin typeface="+mn-lt"/>
+                <a:ea typeface="+mn-ea"/>
+                <a:cs typeface="+mn-cs"/>
+              </a:defRPr>
+            </a:lvl8pPr>
+            <a:lvl9pPr marL="3886200" indent="-228600" algn="l" defTabSz="914400" rtl="0" eaLnBrk="1" latinLnBrk="0" hangingPunct="1">
+              <a:lnSpc>
+                <a:spcPct val="90000"/>
+              </a:lnSpc>
+              <a:spcBef>
+                <a:spcPts val="500"/>
+              </a:spcBef>
+              <a:buFont typeface="Arial" panose="020B0604020202020204" pitchFamily="34" charset="0"/>
+              <a:buChar char="•"/>
+              <a:defRPr sz="1800" kern="1200">
+                <a:solidFill>
+                  <a:schemeClr val="tx1"/>
+                </a:solidFill>
+                <a:latin typeface="+mn-lt"/>
+                <a:ea typeface="+mn-ea"/>
+                <a:cs typeface="+mn-cs"/>
+              </a:defRPr>
+            </a:lvl9pPr>
+          </a:lstStyle>
+          <a:p>
+            <a:pPr marL="0" indent="0">
+              <a:buFont typeface="Arial" panose="020B0604020202020204" pitchFamily="34" charset="0"/>
+              <a:buNone/>
+            </a:pPr>
+            <a:r>
+              <a:rPr lang="en-CA" sz="3200" u="sng" dirty="0"/>
+              <a:t>Balking</a:t>
             </a:r>
           </a:p>
         </p:txBody>
@@ -8190,7 +9361,7 @@
         </p:nvSpPr>
         <p:spPr>
           <a:xfrm>
-            <a:off x="655074" y="284009"/>
+            <a:off x="655074" y="276752"/>
             <a:ext cx="10815747" cy="1087592"/>
           </a:xfrm>
         </p:spPr>
@@ -8223,7 +9394,7 @@
         </p:nvSpPr>
         <p:spPr>
           <a:xfrm>
-            <a:off x="736717" y="5663490"/>
+            <a:off x="736717" y="5634497"/>
             <a:ext cx="10954540" cy="1167492"/>
           </a:xfrm>
           <a:prstGeom prst="rect">
@@ -8440,13 +9611,13 @@
               </a:ext>
             </a:extLst>
           </a:blip>
-          <a:srcRect t="10488" b="5524"/>
+          <a:srcRect t="10488" b="7530"/>
           <a:stretch/>
         </p:blipFill>
         <p:spPr>
           <a:xfrm>
-            <a:off x="1608906" y="1442160"/>
-            <a:ext cx="8908082" cy="4262151"/>
+            <a:off x="1751510" y="1503064"/>
+            <a:ext cx="8688980" cy="4058026"/>
           </a:xfrm>
           <a:prstGeom prst="rect">
             <a:avLst/>
@@ -8480,7 +9651,7 @@
         </p:blipFill>
         <p:spPr>
           <a:xfrm>
-            <a:off x="1295521" y="1362223"/>
+            <a:off x="1295521" y="1391251"/>
             <a:ext cx="9600958" cy="291695"/>
           </a:xfrm>
           <a:prstGeom prst="rect">
@@ -8794,7 +9965,15 @@
             </a:pPr>
             <a:r>
               <a:rPr lang="en-CA" dirty="0"/>
-              <a:t>While utilization is maximized, when can we improve Class 1’s served rate while Class 2’s served rate does not meaningfully change?</a:t>
+              <a:t>While </a:t>
+            </a:r>
+            <a:r>
+              <a:rPr lang="en-CA" b="1" dirty="0"/>
+              <a:t>utilization</a:t>
+            </a:r>
+            <a:r>
+              <a:rPr lang="en-CA" dirty="0"/>
+              <a:t> is maximized, when can we improve Class 1’s served rate while Class 2’s served rate does not meaningfully change?</a:t>
             </a:r>
           </a:p>
           <a:p>
@@ -8885,6 +10064,1186 @@
     <p:extLst>
       <p:ext uri="{BB962C8B-B14F-4D97-AF65-F5344CB8AC3E}">
         <p14:creationId xmlns:p14="http://schemas.microsoft.com/office/powerpoint/2010/main" val="543504394"/>
+      </p:ext>
+    </p:extLst>
+  </p:cSld>
+  <p:clrMapOvr>
+    <a:masterClrMapping/>
+  </p:clrMapOvr>
+</p:sld>
+</file>
+
+<file path=ppt/slides/slide23.xml><?xml version="1.0" encoding="utf-8"?>
+<p:sld xmlns:a="http://schemas.openxmlformats.org/drawingml/2006/main" xmlns:r="http://schemas.openxmlformats.org/officeDocument/2006/relationships" xmlns:p="http://schemas.openxmlformats.org/presentationml/2006/main">
+  <p:cSld>
+    <p:spTree>
+      <p:nvGrpSpPr>
+        <p:cNvPr id="1" name=""/>
+        <p:cNvGrpSpPr/>
+        <p:nvPr/>
+      </p:nvGrpSpPr>
+      <p:grpSpPr>
+        <a:xfrm>
+          <a:off x="0" y="0"/>
+          <a:ext cx="0" cy="0"/>
+          <a:chOff x="0" y="0"/>
+          <a:chExt cx="0" cy="0"/>
+        </a:xfrm>
+      </p:grpSpPr>
+      <p:sp>
+        <p:nvSpPr>
+          <p:cNvPr id="2" name="Title 1">
+            <a:extLst>
+              <a:ext uri="{FF2B5EF4-FFF2-40B4-BE49-F238E27FC236}">
+                <a16:creationId xmlns:a16="http://schemas.microsoft.com/office/drawing/2014/main" id="{9DF946CF-7314-497E-9E6A-3811CD82022A}"/>
+              </a:ext>
+            </a:extLst>
+          </p:cNvPr>
+          <p:cNvSpPr>
+            <a:spLocks noGrp="1"/>
+          </p:cNvSpPr>
+          <p:nvPr>
+            <p:ph type="title"/>
+          </p:nvPr>
+        </p:nvSpPr>
+        <p:spPr>
+          <a:xfrm>
+            <a:off x="609600" y="166233"/>
+            <a:ext cx="10972800" cy="1325563"/>
+          </a:xfrm>
+        </p:spPr>
+        <p:txBody>
+          <a:bodyPr/>
+          <a:lstStyle/>
+          <a:p>
+            <a:r>
+              <a:rPr lang="en-CA" dirty="0"/>
+              <a:t>Class access Pareto improvements – served rate</a:t>
+            </a:r>
+          </a:p>
+        </p:txBody>
+      </p:sp>
+      <p:sp>
+        <p:nvSpPr>
+          <p:cNvPr id="3" name="Content Placeholder 2">
+            <a:extLst>
+              <a:ext uri="{FF2B5EF4-FFF2-40B4-BE49-F238E27FC236}">
+                <a16:creationId xmlns:a16="http://schemas.microsoft.com/office/drawing/2014/main" id="{D4ED39CB-00E4-4784-AF61-61D694A46C4A}"/>
+              </a:ext>
+            </a:extLst>
+          </p:cNvPr>
+          <p:cNvSpPr>
+            <a:spLocks noGrp="1"/>
+          </p:cNvSpPr>
+          <p:nvPr>
+            <p:ph idx="1"/>
+          </p:nvPr>
+        </p:nvSpPr>
+        <p:spPr>
+          <a:xfrm>
+            <a:off x="838200" y="1306286"/>
+            <a:ext cx="10515600" cy="5348513"/>
+          </a:xfrm>
+        </p:spPr>
+        <p:txBody>
+          <a:bodyPr>
+            <a:normAutofit fontScale="85000" lnSpcReduction="20000"/>
+          </a:bodyPr>
+          <a:lstStyle/>
+          <a:p>
+            <a:r>
+              <a:rPr lang="en-CA" dirty="0"/>
+              <a:t>When ignoring utilization, what patterns can we draw from pareto improvements backgrounds and policy cells?</a:t>
+            </a:r>
+          </a:p>
+          <a:p>
+            <a:endParaRPr lang="en-CA" dirty="0"/>
+          </a:p>
+          <a:p>
+            <a:endParaRPr lang="en-CA" dirty="0"/>
+          </a:p>
+          <a:p>
+            <a:endParaRPr lang="en-CA" dirty="0"/>
+          </a:p>
+          <a:p>
+            <a:endParaRPr lang="en-CA" dirty="0"/>
+          </a:p>
+          <a:p>
+            <a:endParaRPr lang="en-CA" dirty="0"/>
+          </a:p>
+          <a:p>
+            <a:endParaRPr lang="en-CA" dirty="0"/>
+          </a:p>
+          <a:p>
+            <a:endParaRPr lang="en-CA" dirty="0"/>
+          </a:p>
+          <a:p>
+            <a:endParaRPr lang="en-CA" dirty="0"/>
+          </a:p>
+          <a:p>
+            <a:endParaRPr lang="en-CA" dirty="0"/>
+          </a:p>
+          <a:p>
+            <a:pPr marL="0" indent="0">
+              <a:buNone/>
+            </a:pPr>
+            <a:endParaRPr lang="en-CA" dirty="0"/>
+          </a:p>
+          <a:p>
+            <a:endParaRPr lang="en-CA" dirty="0"/>
+          </a:p>
+          <a:p>
+            <a:r>
+              <a:rPr lang="en-CA" dirty="0"/>
+              <a:t>There are no validated reservation-only scenarios</a:t>
+            </a:r>
+          </a:p>
+        </p:txBody>
+      </p:sp>
+      <p:pic>
+        <p:nvPicPr>
+          <p:cNvPr id="4" name="Content Placeholder 4">
+            <a:extLst>
+              <a:ext uri="{FF2B5EF4-FFF2-40B4-BE49-F238E27FC236}">
+                <a16:creationId xmlns:a16="http://schemas.microsoft.com/office/drawing/2014/main" id="{90D65F67-0DF6-4B49-A915-4B9E95A71322}"/>
+              </a:ext>
+            </a:extLst>
+          </p:cNvPr>
+          <p:cNvPicPr>
+            <a:picLocks noChangeAspect="1"/>
+          </p:cNvPicPr>
+          <p:nvPr/>
+        </p:nvPicPr>
+        <p:blipFill>
+          <a:blip r:embed="rId3">
+            <a:extLst>
+              <a:ext uri="{28A0092B-C50C-407E-A947-70E740481C1C}">
+                <a14:useLocalDpi xmlns:a14="http://schemas.microsoft.com/office/drawing/2010/main" val="0"/>
+              </a:ext>
+            </a:extLst>
+          </a:blip>
+          <a:stretch>
+            <a:fillRect/>
+          </a:stretch>
+        </p:blipFill>
+        <p:spPr>
+          <a:xfrm>
+            <a:off x="2309240" y="1988458"/>
+            <a:ext cx="7385686" cy="4123190"/>
+          </a:xfrm>
+          <a:prstGeom prst="rect">
+            <a:avLst/>
+          </a:prstGeom>
+        </p:spPr>
+      </p:pic>
+    </p:spTree>
+    <p:extLst>
+      <p:ext uri="{BB962C8B-B14F-4D97-AF65-F5344CB8AC3E}">
+        <p14:creationId xmlns:p14="http://schemas.microsoft.com/office/powerpoint/2010/main" val="469314733"/>
+      </p:ext>
+    </p:extLst>
+  </p:cSld>
+  <p:clrMapOvr>
+    <a:masterClrMapping/>
+  </p:clrMapOvr>
+</p:sld>
+</file>
+
+<file path=ppt/slides/slide24.xml><?xml version="1.0" encoding="utf-8"?>
+<p:sld xmlns:a="http://schemas.openxmlformats.org/drawingml/2006/main" xmlns:r="http://schemas.openxmlformats.org/officeDocument/2006/relationships" xmlns:p="http://schemas.openxmlformats.org/presentationml/2006/main">
+  <p:cSld>
+    <p:spTree>
+      <p:nvGrpSpPr>
+        <p:cNvPr id="1" name=""/>
+        <p:cNvGrpSpPr/>
+        <p:nvPr/>
+      </p:nvGrpSpPr>
+      <p:grpSpPr>
+        <a:xfrm>
+          <a:off x="0" y="0"/>
+          <a:ext cx="0" cy="0"/>
+          <a:chOff x="0" y="0"/>
+          <a:chExt cx="0" cy="0"/>
+        </a:xfrm>
+      </p:grpSpPr>
+      <p:sp>
+        <p:nvSpPr>
+          <p:cNvPr id="2" name="Title 1">
+            <a:extLst>
+              <a:ext uri="{FF2B5EF4-FFF2-40B4-BE49-F238E27FC236}">
+                <a16:creationId xmlns:a16="http://schemas.microsoft.com/office/drawing/2014/main" id="{6DFF629C-4736-4004-A98A-EBAC63FBF07E}"/>
+              </a:ext>
+            </a:extLst>
+          </p:cNvPr>
+          <p:cNvSpPr>
+            <a:spLocks noGrp="1"/>
+          </p:cNvSpPr>
+          <p:nvPr>
+            <p:ph type="title"/>
+          </p:nvPr>
+        </p:nvSpPr>
+        <p:spPr>
+          <a:xfrm>
+            <a:off x="838200" y="321583"/>
+            <a:ext cx="10515600" cy="1325563"/>
+          </a:xfrm>
+        </p:spPr>
+        <p:txBody>
+          <a:bodyPr/>
+          <a:lstStyle/>
+          <a:p>
+            <a:r>
+              <a:rPr lang="en-CA" dirty="0"/>
+              <a:t>Demand and Pareto opportunities</a:t>
+            </a:r>
+          </a:p>
+        </p:txBody>
+      </p:sp>
+      <p:pic>
+        <p:nvPicPr>
+          <p:cNvPr id="9" name="Content Placeholder 8">
+            <a:extLst>
+              <a:ext uri="{FF2B5EF4-FFF2-40B4-BE49-F238E27FC236}">
+                <a16:creationId xmlns:a16="http://schemas.microsoft.com/office/drawing/2014/main" id="{3DEA57CC-89AA-4BA0-BF2D-11A48E2F421C}"/>
+              </a:ext>
+            </a:extLst>
+          </p:cNvPr>
+          <p:cNvPicPr>
+            <a:picLocks noGrp="1" noChangeAspect="1"/>
+          </p:cNvPicPr>
+          <p:nvPr>
+            <p:ph idx="1"/>
+          </p:nvPr>
+        </p:nvPicPr>
+        <p:blipFill>
+          <a:blip r:embed="rId2">
+            <a:extLst>
+              <a:ext uri="{28A0092B-C50C-407E-A947-70E740481C1C}">
+                <a14:useLocalDpi xmlns:a14="http://schemas.microsoft.com/office/drawing/2010/main" val="0"/>
+              </a:ext>
+            </a:extLst>
+          </a:blip>
+          <a:stretch>
+            <a:fillRect/>
+          </a:stretch>
+        </p:blipFill>
+        <p:spPr>
+          <a:xfrm>
+            <a:off x="2009423" y="1494164"/>
+            <a:ext cx="7592583" cy="4288545"/>
+          </a:xfrm>
+        </p:spPr>
+      </p:pic>
+      <p:sp>
+        <p:nvSpPr>
+          <p:cNvPr id="10" name="Content Placeholder 2">
+            <a:extLst>
+              <a:ext uri="{FF2B5EF4-FFF2-40B4-BE49-F238E27FC236}">
+                <a16:creationId xmlns:a16="http://schemas.microsoft.com/office/drawing/2014/main" id="{FA5E2319-151B-48AD-855E-BFA5432B06AB}"/>
+              </a:ext>
+            </a:extLst>
+          </p:cNvPr>
+          <p:cNvSpPr txBox="1">
+            <a:spLocks/>
+          </p:cNvSpPr>
+          <p:nvPr/>
+        </p:nvSpPr>
+        <p:spPr>
+          <a:xfrm>
+            <a:off x="1224643" y="5875818"/>
+            <a:ext cx="9612086" cy="828549"/>
+          </a:xfrm>
+          <a:prstGeom prst="rect">
+            <a:avLst/>
+          </a:prstGeom>
+        </p:spPr>
+        <p:txBody>
+          <a:bodyPr vert="horz" lIns="91440" tIns="45720" rIns="91440" bIns="45720" rtlCol="0">
+            <a:normAutofit/>
+          </a:bodyPr>
+          <a:lstStyle>
+            <a:lvl1pPr marL="228600" indent="-228600" algn="l" defTabSz="914400" rtl="0" eaLnBrk="1" latinLnBrk="0" hangingPunct="1">
+              <a:lnSpc>
+                <a:spcPct val="90000"/>
+              </a:lnSpc>
+              <a:spcBef>
+                <a:spcPts val="1000"/>
+              </a:spcBef>
+              <a:buFont typeface="Arial" panose="020B0604020202020204" pitchFamily="34" charset="0"/>
+              <a:buChar char="•"/>
+              <a:defRPr sz="2800" kern="1200">
+                <a:solidFill>
+                  <a:schemeClr val="tx1"/>
+                </a:solidFill>
+                <a:latin typeface="+mn-lt"/>
+                <a:ea typeface="+mn-ea"/>
+                <a:cs typeface="+mn-cs"/>
+              </a:defRPr>
+            </a:lvl1pPr>
+            <a:lvl2pPr marL="685800" indent="-228600" algn="l" defTabSz="914400" rtl="0" eaLnBrk="1" latinLnBrk="0" hangingPunct="1">
+              <a:lnSpc>
+                <a:spcPct val="90000"/>
+              </a:lnSpc>
+              <a:spcBef>
+                <a:spcPts val="500"/>
+              </a:spcBef>
+              <a:buFont typeface="Arial" panose="020B0604020202020204" pitchFamily="34" charset="0"/>
+              <a:buChar char="•"/>
+              <a:defRPr sz="2400" kern="1200">
+                <a:solidFill>
+                  <a:schemeClr val="tx1"/>
+                </a:solidFill>
+                <a:latin typeface="+mn-lt"/>
+                <a:ea typeface="+mn-ea"/>
+                <a:cs typeface="+mn-cs"/>
+              </a:defRPr>
+            </a:lvl2pPr>
+            <a:lvl3pPr marL="1143000" indent="-228600" algn="l" defTabSz="914400" rtl="0" eaLnBrk="1" latinLnBrk="0" hangingPunct="1">
+              <a:lnSpc>
+                <a:spcPct val="90000"/>
+              </a:lnSpc>
+              <a:spcBef>
+                <a:spcPts val="500"/>
+              </a:spcBef>
+              <a:buFont typeface="Arial" panose="020B0604020202020204" pitchFamily="34" charset="0"/>
+              <a:buChar char="•"/>
+              <a:defRPr sz="2000" kern="1200">
+                <a:solidFill>
+                  <a:schemeClr val="tx1"/>
+                </a:solidFill>
+                <a:latin typeface="+mn-lt"/>
+                <a:ea typeface="+mn-ea"/>
+                <a:cs typeface="+mn-cs"/>
+              </a:defRPr>
+            </a:lvl3pPr>
+            <a:lvl4pPr marL="1600200" indent="-228600" algn="l" defTabSz="914400" rtl="0" eaLnBrk="1" latinLnBrk="0" hangingPunct="1">
+              <a:lnSpc>
+                <a:spcPct val="90000"/>
+              </a:lnSpc>
+              <a:spcBef>
+                <a:spcPts val="500"/>
+              </a:spcBef>
+              <a:buFont typeface="Arial" panose="020B0604020202020204" pitchFamily="34" charset="0"/>
+              <a:buChar char="•"/>
+              <a:defRPr sz="1800" kern="1200">
+                <a:solidFill>
+                  <a:schemeClr val="tx1"/>
+                </a:solidFill>
+                <a:latin typeface="+mn-lt"/>
+                <a:ea typeface="+mn-ea"/>
+                <a:cs typeface="+mn-cs"/>
+              </a:defRPr>
+            </a:lvl4pPr>
+            <a:lvl5pPr marL="2057400" indent="-228600" algn="l" defTabSz="914400" rtl="0" eaLnBrk="1" latinLnBrk="0" hangingPunct="1">
+              <a:lnSpc>
+                <a:spcPct val="90000"/>
+              </a:lnSpc>
+              <a:spcBef>
+                <a:spcPts val="500"/>
+              </a:spcBef>
+              <a:buFont typeface="Arial" panose="020B0604020202020204" pitchFamily="34" charset="0"/>
+              <a:buChar char="•"/>
+              <a:defRPr sz="1800" kern="1200">
+                <a:solidFill>
+                  <a:schemeClr val="tx1"/>
+                </a:solidFill>
+                <a:latin typeface="+mn-lt"/>
+                <a:ea typeface="+mn-ea"/>
+                <a:cs typeface="+mn-cs"/>
+              </a:defRPr>
+            </a:lvl5pPr>
+            <a:lvl6pPr marL="2514600" indent="-228600" algn="l" defTabSz="914400" rtl="0" eaLnBrk="1" latinLnBrk="0" hangingPunct="1">
+              <a:lnSpc>
+                <a:spcPct val="90000"/>
+              </a:lnSpc>
+              <a:spcBef>
+                <a:spcPts val="500"/>
+              </a:spcBef>
+              <a:buFont typeface="Arial" panose="020B0604020202020204" pitchFamily="34" charset="0"/>
+              <a:buChar char="•"/>
+              <a:defRPr sz="1800" kern="1200">
+                <a:solidFill>
+                  <a:schemeClr val="tx1"/>
+                </a:solidFill>
+                <a:latin typeface="+mn-lt"/>
+                <a:ea typeface="+mn-ea"/>
+                <a:cs typeface="+mn-cs"/>
+              </a:defRPr>
+            </a:lvl6pPr>
+            <a:lvl7pPr marL="2971800" indent="-228600" algn="l" defTabSz="914400" rtl="0" eaLnBrk="1" latinLnBrk="0" hangingPunct="1">
+              <a:lnSpc>
+                <a:spcPct val="90000"/>
+              </a:lnSpc>
+              <a:spcBef>
+                <a:spcPts val="500"/>
+              </a:spcBef>
+              <a:buFont typeface="Arial" panose="020B0604020202020204" pitchFamily="34" charset="0"/>
+              <a:buChar char="•"/>
+              <a:defRPr sz="1800" kern="1200">
+                <a:solidFill>
+                  <a:schemeClr val="tx1"/>
+                </a:solidFill>
+                <a:latin typeface="+mn-lt"/>
+                <a:ea typeface="+mn-ea"/>
+                <a:cs typeface="+mn-cs"/>
+              </a:defRPr>
+            </a:lvl7pPr>
+            <a:lvl8pPr marL="3429000" indent="-228600" algn="l" defTabSz="914400" rtl="0" eaLnBrk="1" latinLnBrk="0" hangingPunct="1">
+              <a:lnSpc>
+                <a:spcPct val="90000"/>
+              </a:lnSpc>
+              <a:spcBef>
+                <a:spcPts val="500"/>
+              </a:spcBef>
+              <a:buFont typeface="Arial" panose="020B0604020202020204" pitchFamily="34" charset="0"/>
+              <a:buChar char="•"/>
+              <a:defRPr sz="1800" kern="1200">
+                <a:solidFill>
+                  <a:schemeClr val="tx1"/>
+                </a:solidFill>
+                <a:latin typeface="+mn-lt"/>
+                <a:ea typeface="+mn-ea"/>
+                <a:cs typeface="+mn-cs"/>
+              </a:defRPr>
+            </a:lvl8pPr>
+            <a:lvl9pPr marL="3886200" indent="-228600" algn="l" defTabSz="914400" rtl="0" eaLnBrk="1" latinLnBrk="0" hangingPunct="1">
+              <a:lnSpc>
+                <a:spcPct val="90000"/>
+              </a:lnSpc>
+              <a:spcBef>
+                <a:spcPts val="500"/>
+              </a:spcBef>
+              <a:buFont typeface="Arial" panose="020B0604020202020204" pitchFamily="34" charset="0"/>
+              <a:buChar char="•"/>
+              <a:defRPr sz="1800" kern="1200">
+                <a:solidFill>
+                  <a:schemeClr val="tx1"/>
+                </a:solidFill>
+                <a:latin typeface="+mn-lt"/>
+                <a:ea typeface="+mn-ea"/>
+                <a:cs typeface="+mn-cs"/>
+              </a:defRPr>
+            </a:lvl9pPr>
+          </a:lstStyle>
+          <a:p>
+            <a:pPr marL="0" indent="0">
+              <a:buFont typeface="Arial" panose="020B0604020202020204" pitchFamily="34" charset="0"/>
+              <a:buNone/>
+            </a:pPr>
+            <a:r>
+              <a:rPr lang="en-CA" dirty="0"/>
+              <a:t>There are more pareto opportunities for specific demand ratios. </a:t>
+            </a:r>
+          </a:p>
+        </p:txBody>
+      </p:sp>
+    </p:spTree>
+    <p:extLst>
+      <p:ext uri="{BB962C8B-B14F-4D97-AF65-F5344CB8AC3E}">
+        <p14:creationId xmlns:p14="http://schemas.microsoft.com/office/powerpoint/2010/main" val="3108429264"/>
+      </p:ext>
+    </p:extLst>
+  </p:cSld>
+  <p:clrMapOvr>
+    <a:masterClrMapping/>
+  </p:clrMapOvr>
+</p:sld>
+</file>
+
+<file path=ppt/slides/slide25.xml><?xml version="1.0" encoding="utf-8"?>
+<p:sld xmlns:a="http://schemas.openxmlformats.org/drawingml/2006/main" xmlns:r="http://schemas.openxmlformats.org/officeDocument/2006/relationships" xmlns:p="http://schemas.openxmlformats.org/presentationml/2006/main">
+  <p:cSld>
+    <p:spTree>
+      <p:nvGrpSpPr>
+        <p:cNvPr id="1" name=""/>
+        <p:cNvGrpSpPr/>
+        <p:nvPr/>
+      </p:nvGrpSpPr>
+      <p:grpSpPr>
+        <a:xfrm>
+          <a:off x="0" y="0"/>
+          <a:ext cx="0" cy="0"/>
+          <a:chOff x="0" y="0"/>
+          <a:chExt cx="0" cy="0"/>
+        </a:xfrm>
+      </p:grpSpPr>
+      <p:sp>
+        <p:nvSpPr>
+          <p:cNvPr id="2" name="Title 1">
+            <a:extLst>
+              <a:ext uri="{FF2B5EF4-FFF2-40B4-BE49-F238E27FC236}">
+                <a16:creationId xmlns:a16="http://schemas.microsoft.com/office/drawing/2014/main" id="{58CE9B9B-1AF9-409B-B6DF-3EEEAE2F4A35}"/>
+              </a:ext>
+            </a:extLst>
+          </p:cNvPr>
+          <p:cNvSpPr>
+            <a:spLocks noGrp="1"/>
+          </p:cNvSpPr>
+          <p:nvPr>
+            <p:ph type="title"/>
+          </p:nvPr>
+        </p:nvSpPr>
+        <p:spPr>
+          <a:xfrm>
+            <a:off x="838200" y="299811"/>
+            <a:ext cx="10515600" cy="1325563"/>
+          </a:xfrm>
+        </p:spPr>
+        <p:txBody>
+          <a:bodyPr/>
+          <a:lstStyle/>
+          <a:p>
+            <a:r>
+              <a:rPr lang="en-CA" dirty="0"/>
+              <a:t>No-show matters more than balking in Pareto</a:t>
+            </a:r>
+          </a:p>
+        </p:txBody>
+      </p:sp>
+      <p:pic>
+        <p:nvPicPr>
+          <p:cNvPr id="5" name="Content Placeholder 4">
+            <a:extLst>
+              <a:ext uri="{FF2B5EF4-FFF2-40B4-BE49-F238E27FC236}">
+                <a16:creationId xmlns:a16="http://schemas.microsoft.com/office/drawing/2014/main" id="{98EC4D3B-FF14-43EF-A726-3F2DBC2082A5}"/>
+              </a:ext>
+            </a:extLst>
+          </p:cNvPr>
+          <p:cNvPicPr>
+            <a:picLocks noGrp="1" noChangeAspect="1"/>
+          </p:cNvPicPr>
+          <p:nvPr>
+            <p:ph idx="1"/>
+          </p:nvPr>
+        </p:nvPicPr>
+        <p:blipFill>
+          <a:blip r:embed="rId2">
+            <a:extLst>
+              <a:ext uri="{28A0092B-C50C-407E-A947-70E740481C1C}">
+                <a14:useLocalDpi xmlns:a14="http://schemas.microsoft.com/office/drawing/2010/main" val="0"/>
+              </a:ext>
+            </a:extLst>
+          </a:blip>
+          <a:stretch>
+            <a:fillRect/>
+          </a:stretch>
+        </p:blipFill>
+        <p:spPr>
+          <a:xfrm>
+            <a:off x="2135479" y="1395612"/>
+            <a:ext cx="7601727" cy="4282449"/>
+          </a:xfrm>
+        </p:spPr>
+      </p:pic>
+      <p:sp>
+        <p:nvSpPr>
+          <p:cNvPr id="6" name="Content Placeholder 2">
+            <a:extLst>
+              <a:ext uri="{FF2B5EF4-FFF2-40B4-BE49-F238E27FC236}">
+                <a16:creationId xmlns:a16="http://schemas.microsoft.com/office/drawing/2014/main" id="{1EF793BB-9975-43F0-8E0B-8FB23F56FCCA}"/>
+              </a:ext>
+            </a:extLst>
+          </p:cNvPr>
+          <p:cNvSpPr txBox="1">
+            <a:spLocks/>
+          </p:cNvSpPr>
+          <p:nvPr/>
+        </p:nvSpPr>
+        <p:spPr>
+          <a:xfrm>
+            <a:off x="838200" y="5794175"/>
+            <a:ext cx="10515600" cy="873450"/>
+          </a:xfrm>
+          <a:prstGeom prst="rect">
+            <a:avLst/>
+          </a:prstGeom>
+        </p:spPr>
+        <p:txBody>
+          <a:bodyPr vert="horz" lIns="91440" tIns="45720" rIns="91440" bIns="45720" rtlCol="0">
+            <a:normAutofit/>
+          </a:bodyPr>
+          <a:lstStyle>
+            <a:lvl1pPr marL="228600" indent="-228600" algn="l" defTabSz="914400" rtl="0" eaLnBrk="1" latinLnBrk="0" hangingPunct="1">
+              <a:lnSpc>
+                <a:spcPct val="90000"/>
+              </a:lnSpc>
+              <a:spcBef>
+                <a:spcPts val="1000"/>
+              </a:spcBef>
+              <a:buFont typeface="Arial" panose="020B0604020202020204" pitchFamily="34" charset="0"/>
+              <a:buChar char="•"/>
+              <a:defRPr sz="2800" kern="1200">
+                <a:solidFill>
+                  <a:schemeClr val="tx1"/>
+                </a:solidFill>
+                <a:latin typeface="+mn-lt"/>
+                <a:ea typeface="+mn-ea"/>
+                <a:cs typeface="+mn-cs"/>
+              </a:defRPr>
+            </a:lvl1pPr>
+            <a:lvl2pPr marL="685800" indent="-228600" algn="l" defTabSz="914400" rtl="0" eaLnBrk="1" latinLnBrk="0" hangingPunct="1">
+              <a:lnSpc>
+                <a:spcPct val="90000"/>
+              </a:lnSpc>
+              <a:spcBef>
+                <a:spcPts val="500"/>
+              </a:spcBef>
+              <a:buFont typeface="Arial" panose="020B0604020202020204" pitchFamily="34" charset="0"/>
+              <a:buChar char="•"/>
+              <a:defRPr sz="2400" kern="1200">
+                <a:solidFill>
+                  <a:schemeClr val="tx1"/>
+                </a:solidFill>
+                <a:latin typeface="+mn-lt"/>
+                <a:ea typeface="+mn-ea"/>
+                <a:cs typeface="+mn-cs"/>
+              </a:defRPr>
+            </a:lvl2pPr>
+            <a:lvl3pPr marL="1143000" indent="-228600" algn="l" defTabSz="914400" rtl="0" eaLnBrk="1" latinLnBrk="0" hangingPunct="1">
+              <a:lnSpc>
+                <a:spcPct val="90000"/>
+              </a:lnSpc>
+              <a:spcBef>
+                <a:spcPts val="500"/>
+              </a:spcBef>
+              <a:buFont typeface="Arial" panose="020B0604020202020204" pitchFamily="34" charset="0"/>
+              <a:buChar char="•"/>
+              <a:defRPr sz="2000" kern="1200">
+                <a:solidFill>
+                  <a:schemeClr val="tx1"/>
+                </a:solidFill>
+                <a:latin typeface="+mn-lt"/>
+                <a:ea typeface="+mn-ea"/>
+                <a:cs typeface="+mn-cs"/>
+              </a:defRPr>
+            </a:lvl3pPr>
+            <a:lvl4pPr marL="1600200" indent="-228600" algn="l" defTabSz="914400" rtl="0" eaLnBrk="1" latinLnBrk="0" hangingPunct="1">
+              <a:lnSpc>
+                <a:spcPct val="90000"/>
+              </a:lnSpc>
+              <a:spcBef>
+                <a:spcPts val="500"/>
+              </a:spcBef>
+              <a:buFont typeface="Arial" panose="020B0604020202020204" pitchFamily="34" charset="0"/>
+              <a:buChar char="•"/>
+              <a:defRPr sz="1800" kern="1200">
+                <a:solidFill>
+                  <a:schemeClr val="tx1"/>
+                </a:solidFill>
+                <a:latin typeface="+mn-lt"/>
+                <a:ea typeface="+mn-ea"/>
+                <a:cs typeface="+mn-cs"/>
+              </a:defRPr>
+            </a:lvl4pPr>
+            <a:lvl5pPr marL="2057400" indent="-228600" algn="l" defTabSz="914400" rtl="0" eaLnBrk="1" latinLnBrk="0" hangingPunct="1">
+              <a:lnSpc>
+                <a:spcPct val="90000"/>
+              </a:lnSpc>
+              <a:spcBef>
+                <a:spcPts val="500"/>
+              </a:spcBef>
+              <a:buFont typeface="Arial" panose="020B0604020202020204" pitchFamily="34" charset="0"/>
+              <a:buChar char="•"/>
+              <a:defRPr sz="1800" kern="1200">
+                <a:solidFill>
+                  <a:schemeClr val="tx1"/>
+                </a:solidFill>
+                <a:latin typeface="+mn-lt"/>
+                <a:ea typeface="+mn-ea"/>
+                <a:cs typeface="+mn-cs"/>
+              </a:defRPr>
+            </a:lvl5pPr>
+            <a:lvl6pPr marL="2514600" indent="-228600" algn="l" defTabSz="914400" rtl="0" eaLnBrk="1" latinLnBrk="0" hangingPunct="1">
+              <a:lnSpc>
+                <a:spcPct val="90000"/>
+              </a:lnSpc>
+              <a:spcBef>
+                <a:spcPts val="500"/>
+              </a:spcBef>
+              <a:buFont typeface="Arial" panose="020B0604020202020204" pitchFamily="34" charset="0"/>
+              <a:buChar char="•"/>
+              <a:defRPr sz="1800" kern="1200">
+                <a:solidFill>
+                  <a:schemeClr val="tx1"/>
+                </a:solidFill>
+                <a:latin typeface="+mn-lt"/>
+                <a:ea typeface="+mn-ea"/>
+                <a:cs typeface="+mn-cs"/>
+              </a:defRPr>
+            </a:lvl6pPr>
+            <a:lvl7pPr marL="2971800" indent="-228600" algn="l" defTabSz="914400" rtl="0" eaLnBrk="1" latinLnBrk="0" hangingPunct="1">
+              <a:lnSpc>
+                <a:spcPct val="90000"/>
+              </a:lnSpc>
+              <a:spcBef>
+                <a:spcPts val="500"/>
+              </a:spcBef>
+              <a:buFont typeface="Arial" panose="020B0604020202020204" pitchFamily="34" charset="0"/>
+              <a:buChar char="•"/>
+              <a:defRPr sz="1800" kern="1200">
+                <a:solidFill>
+                  <a:schemeClr val="tx1"/>
+                </a:solidFill>
+                <a:latin typeface="+mn-lt"/>
+                <a:ea typeface="+mn-ea"/>
+                <a:cs typeface="+mn-cs"/>
+              </a:defRPr>
+            </a:lvl7pPr>
+            <a:lvl8pPr marL="3429000" indent="-228600" algn="l" defTabSz="914400" rtl="0" eaLnBrk="1" latinLnBrk="0" hangingPunct="1">
+              <a:lnSpc>
+                <a:spcPct val="90000"/>
+              </a:lnSpc>
+              <a:spcBef>
+                <a:spcPts val="500"/>
+              </a:spcBef>
+              <a:buFont typeface="Arial" panose="020B0604020202020204" pitchFamily="34" charset="0"/>
+              <a:buChar char="•"/>
+              <a:defRPr sz="1800" kern="1200">
+                <a:solidFill>
+                  <a:schemeClr val="tx1"/>
+                </a:solidFill>
+                <a:latin typeface="+mn-lt"/>
+                <a:ea typeface="+mn-ea"/>
+                <a:cs typeface="+mn-cs"/>
+              </a:defRPr>
+            </a:lvl8pPr>
+            <a:lvl9pPr marL="3886200" indent="-228600" algn="l" defTabSz="914400" rtl="0" eaLnBrk="1" latinLnBrk="0" hangingPunct="1">
+              <a:lnSpc>
+                <a:spcPct val="90000"/>
+              </a:lnSpc>
+              <a:spcBef>
+                <a:spcPts val="500"/>
+              </a:spcBef>
+              <a:buFont typeface="Arial" panose="020B0604020202020204" pitchFamily="34" charset="0"/>
+              <a:buChar char="•"/>
+              <a:defRPr sz="1800" kern="1200">
+                <a:solidFill>
+                  <a:schemeClr val="tx1"/>
+                </a:solidFill>
+                <a:latin typeface="+mn-lt"/>
+                <a:ea typeface="+mn-ea"/>
+                <a:cs typeface="+mn-cs"/>
+              </a:defRPr>
+            </a:lvl9pPr>
+          </a:lstStyle>
+          <a:p>
+            <a:pPr marL="0" indent="0">
+              <a:buFont typeface="Arial" panose="020B0604020202020204" pitchFamily="34" charset="0"/>
+              <a:buNone/>
+            </a:pPr>
+            <a:r>
+              <a:rPr lang="en-CA" dirty="0"/>
+              <a:t>There is a clear trend that higher no-shows lead to more Pareto opportunities.</a:t>
+            </a:r>
+          </a:p>
+        </p:txBody>
+      </p:sp>
+    </p:spTree>
+    <p:extLst>
+      <p:ext uri="{BB962C8B-B14F-4D97-AF65-F5344CB8AC3E}">
+        <p14:creationId xmlns:p14="http://schemas.microsoft.com/office/powerpoint/2010/main" val="2139693207"/>
+      </p:ext>
+    </p:extLst>
+  </p:cSld>
+  <p:clrMapOvr>
+    <a:masterClrMapping/>
+  </p:clrMapOvr>
+</p:sld>
+</file>
+
+<file path=ppt/slides/slide26.xml><?xml version="1.0" encoding="utf-8"?>
+<p:sld xmlns:a="http://schemas.openxmlformats.org/drawingml/2006/main" xmlns:r="http://schemas.openxmlformats.org/officeDocument/2006/relationships" xmlns:p="http://schemas.openxmlformats.org/presentationml/2006/main">
+  <p:cSld>
+    <p:spTree>
+      <p:nvGrpSpPr>
+        <p:cNvPr id="1" name=""/>
+        <p:cNvGrpSpPr/>
+        <p:nvPr/>
+      </p:nvGrpSpPr>
+      <p:grpSpPr>
+        <a:xfrm>
+          <a:off x="0" y="0"/>
+          <a:ext cx="0" cy="0"/>
+          <a:chOff x="0" y="0"/>
+          <a:chExt cx="0" cy="0"/>
+        </a:xfrm>
+      </p:grpSpPr>
+      <p:sp>
+        <p:nvSpPr>
+          <p:cNvPr id="2" name="Title 1">
+            <a:extLst>
+              <a:ext uri="{FF2B5EF4-FFF2-40B4-BE49-F238E27FC236}">
+                <a16:creationId xmlns:a16="http://schemas.microsoft.com/office/drawing/2014/main" id="{E6256253-99D5-4B4E-923C-ABDAE947B17A}"/>
+              </a:ext>
+            </a:extLst>
+          </p:cNvPr>
+          <p:cNvSpPr>
+            <a:spLocks noGrp="1"/>
+          </p:cNvSpPr>
+          <p:nvPr>
+            <p:ph type="title"/>
+          </p:nvPr>
+        </p:nvSpPr>
+        <p:spPr/>
+        <p:txBody>
+          <a:bodyPr/>
+          <a:lstStyle/>
+          <a:p>
+            <a:r>
+              <a:rPr lang="en-CA" dirty="0"/>
+              <a:t>Higher daily capacity helps protect class 2?</a:t>
+            </a:r>
+          </a:p>
+        </p:txBody>
+      </p:sp>
+      <p:sp>
+        <p:nvSpPr>
+          <p:cNvPr id="3" name="Content Placeholder 2">
+            <a:extLst>
+              <a:ext uri="{FF2B5EF4-FFF2-40B4-BE49-F238E27FC236}">
+                <a16:creationId xmlns:a16="http://schemas.microsoft.com/office/drawing/2014/main" id="{D7462A83-1134-46ED-BD9C-69E7E5AE65A7}"/>
+              </a:ext>
+            </a:extLst>
+          </p:cNvPr>
+          <p:cNvSpPr>
+            <a:spLocks noGrp="1"/>
+          </p:cNvSpPr>
+          <p:nvPr>
+            <p:ph idx="1"/>
+          </p:nvPr>
+        </p:nvSpPr>
+        <p:spPr/>
+        <p:txBody>
+          <a:bodyPr/>
+          <a:lstStyle/>
+          <a:p>
+            <a:r>
+              <a:rPr lang="en-CA" dirty="0"/>
+              <a:t>At high Class 1 patient share, Pareto happens more at lower daily capacities</a:t>
+            </a:r>
+          </a:p>
+          <a:p>
+            <a:r>
+              <a:rPr lang="en-CA" dirty="0"/>
+              <a:t>At low Class 1 patient share, Pareto happens more at higher daily capacities</a:t>
+            </a:r>
+          </a:p>
+        </p:txBody>
+      </p:sp>
+    </p:spTree>
+    <p:extLst>
+      <p:ext uri="{BB962C8B-B14F-4D97-AF65-F5344CB8AC3E}">
+        <p14:creationId xmlns:p14="http://schemas.microsoft.com/office/powerpoint/2010/main" val="3862232480"/>
+      </p:ext>
+    </p:extLst>
+  </p:cSld>
+  <p:clrMapOvr>
+    <a:masterClrMapping/>
+  </p:clrMapOvr>
+</p:sld>
+</file>
+
+<file path=ppt/slides/slide27.xml><?xml version="1.0" encoding="utf-8"?>
+<p:sld xmlns:a="http://schemas.openxmlformats.org/drawingml/2006/main" xmlns:r="http://schemas.openxmlformats.org/officeDocument/2006/relationships" xmlns:p="http://schemas.openxmlformats.org/presentationml/2006/main">
+  <p:cSld>
+    <p:spTree>
+      <p:nvGrpSpPr>
+        <p:cNvPr id="1" name=""/>
+        <p:cNvGrpSpPr/>
+        <p:nvPr/>
+      </p:nvGrpSpPr>
+      <p:grpSpPr>
+        <a:xfrm>
+          <a:off x="0" y="0"/>
+          <a:ext cx="0" cy="0"/>
+          <a:chOff x="0" y="0"/>
+          <a:chExt cx="0" cy="0"/>
+        </a:xfrm>
+      </p:grpSpPr>
+      <p:sp>
+        <p:nvSpPr>
+          <p:cNvPr id="2" name="Title 1">
+            <a:extLst>
+              <a:ext uri="{FF2B5EF4-FFF2-40B4-BE49-F238E27FC236}">
+                <a16:creationId xmlns:a16="http://schemas.microsoft.com/office/drawing/2014/main" id="{EA1ACCC1-2424-4278-A146-004387706168}"/>
+              </a:ext>
+            </a:extLst>
+          </p:cNvPr>
+          <p:cNvSpPr>
+            <a:spLocks noGrp="1"/>
+          </p:cNvSpPr>
+          <p:nvPr>
+            <p:ph type="title"/>
+          </p:nvPr>
+        </p:nvSpPr>
+        <p:spPr>
+          <a:xfrm>
+            <a:off x="533400" y="336097"/>
+            <a:ext cx="10983686" cy="1325563"/>
+          </a:xfrm>
+        </p:spPr>
+        <p:txBody>
+          <a:bodyPr>
+            <a:normAutofit/>
+          </a:bodyPr>
+          <a:lstStyle/>
+          <a:p>
+            <a:r>
+              <a:rPr lang="en-CA" sz="4000" dirty="0"/>
+              <a:t>In the served rate pareto improvements, utilization is still higher than no policy</a:t>
+            </a:r>
+          </a:p>
+        </p:txBody>
+      </p:sp>
+      <p:pic>
+        <p:nvPicPr>
+          <p:cNvPr id="5" name="Content Placeholder 4">
+            <a:extLst>
+              <a:ext uri="{FF2B5EF4-FFF2-40B4-BE49-F238E27FC236}">
+                <a16:creationId xmlns:a16="http://schemas.microsoft.com/office/drawing/2014/main" id="{29B797BD-36E6-4B03-9681-A65AC3014686}"/>
+              </a:ext>
+            </a:extLst>
+          </p:cNvPr>
+          <p:cNvPicPr>
+            <a:picLocks noGrp="1" noChangeAspect="1"/>
+          </p:cNvPicPr>
+          <p:nvPr>
+            <p:ph idx="1"/>
+          </p:nvPr>
+        </p:nvPicPr>
+        <p:blipFill>
+          <a:blip r:embed="rId2">
+            <a:extLst>
+              <a:ext uri="{28A0092B-C50C-407E-A947-70E740481C1C}">
+                <a14:useLocalDpi xmlns:a14="http://schemas.microsoft.com/office/drawing/2010/main" val="0"/>
+              </a:ext>
+            </a:extLst>
+          </a:blip>
+          <a:stretch>
+            <a:fillRect/>
+          </a:stretch>
+        </p:blipFill>
+        <p:spPr>
+          <a:xfrm>
+            <a:off x="2636368" y="1661660"/>
+            <a:ext cx="6498349" cy="4014224"/>
+          </a:xfrm>
+        </p:spPr>
+      </p:pic>
+      <p:sp>
+        <p:nvSpPr>
+          <p:cNvPr id="6" name="Content Placeholder 2">
+            <a:extLst>
+              <a:ext uri="{FF2B5EF4-FFF2-40B4-BE49-F238E27FC236}">
+                <a16:creationId xmlns:a16="http://schemas.microsoft.com/office/drawing/2014/main" id="{26F05B63-AA7B-4086-8F04-FB76C2BE4ABF}"/>
+              </a:ext>
+            </a:extLst>
+          </p:cNvPr>
+          <p:cNvSpPr txBox="1">
+            <a:spLocks/>
+          </p:cNvSpPr>
+          <p:nvPr/>
+        </p:nvSpPr>
+        <p:spPr>
+          <a:xfrm>
+            <a:off x="932543" y="5761663"/>
+            <a:ext cx="10515600" cy="900393"/>
+          </a:xfrm>
+          <a:prstGeom prst="rect">
+            <a:avLst/>
+          </a:prstGeom>
+        </p:spPr>
+        <p:txBody>
+          <a:bodyPr vert="horz" lIns="91440" tIns="45720" rIns="91440" bIns="45720" rtlCol="0">
+            <a:normAutofit/>
+          </a:bodyPr>
+          <a:lstStyle>
+            <a:lvl1pPr marL="228600" indent="-228600" algn="l" defTabSz="914400" rtl="0" eaLnBrk="1" latinLnBrk="0" hangingPunct="1">
+              <a:lnSpc>
+                <a:spcPct val="90000"/>
+              </a:lnSpc>
+              <a:spcBef>
+                <a:spcPts val="1000"/>
+              </a:spcBef>
+              <a:buFont typeface="Arial" panose="020B0604020202020204" pitchFamily="34" charset="0"/>
+              <a:buChar char="•"/>
+              <a:defRPr sz="2800" kern="1200">
+                <a:solidFill>
+                  <a:schemeClr val="tx1"/>
+                </a:solidFill>
+                <a:latin typeface="+mn-lt"/>
+                <a:ea typeface="+mn-ea"/>
+                <a:cs typeface="+mn-cs"/>
+              </a:defRPr>
+            </a:lvl1pPr>
+            <a:lvl2pPr marL="685800" indent="-228600" algn="l" defTabSz="914400" rtl="0" eaLnBrk="1" latinLnBrk="0" hangingPunct="1">
+              <a:lnSpc>
+                <a:spcPct val="90000"/>
+              </a:lnSpc>
+              <a:spcBef>
+                <a:spcPts val="500"/>
+              </a:spcBef>
+              <a:buFont typeface="Arial" panose="020B0604020202020204" pitchFamily="34" charset="0"/>
+              <a:buChar char="•"/>
+              <a:defRPr sz="2400" kern="1200">
+                <a:solidFill>
+                  <a:schemeClr val="tx1"/>
+                </a:solidFill>
+                <a:latin typeface="+mn-lt"/>
+                <a:ea typeface="+mn-ea"/>
+                <a:cs typeface="+mn-cs"/>
+              </a:defRPr>
+            </a:lvl2pPr>
+            <a:lvl3pPr marL="1143000" indent="-228600" algn="l" defTabSz="914400" rtl="0" eaLnBrk="1" latinLnBrk="0" hangingPunct="1">
+              <a:lnSpc>
+                <a:spcPct val="90000"/>
+              </a:lnSpc>
+              <a:spcBef>
+                <a:spcPts val="500"/>
+              </a:spcBef>
+              <a:buFont typeface="Arial" panose="020B0604020202020204" pitchFamily="34" charset="0"/>
+              <a:buChar char="•"/>
+              <a:defRPr sz="2000" kern="1200">
+                <a:solidFill>
+                  <a:schemeClr val="tx1"/>
+                </a:solidFill>
+                <a:latin typeface="+mn-lt"/>
+                <a:ea typeface="+mn-ea"/>
+                <a:cs typeface="+mn-cs"/>
+              </a:defRPr>
+            </a:lvl3pPr>
+            <a:lvl4pPr marL="1600200" indent="-228600" algn="l" defTabSz="914400" rtl="0" eaLnBrk="1" latinLnBrk="0" hangingPunct="1">
+              <a:lnSpc>
+                <a:spcPct val="90000"/>
+              </a:lnSpc>
+              <a:spcBef>
+                <a:spcPts val="500"/>
+              </a:spcBef>
+              <a:buFont typeface="Arial" panose="020B0604020202020204" pitchFamily="34" charset="0"/>
+              <a:buChar char="•"/>
+              <a:defRPr sz="1800" kern="1200">
+                <a:solidFill>
+                  <a:schemeClr val="tx1"/>
+                </a:solidFill>
+                <a:latin typeface="+mn-lt"/>
+                <a:ea typeface="+mn-ea"/>
+                <a:cs typeface="+mn-cs"/>
+              </a:defRPr>
+            </a:lvl4pPr>
+            <a:lvl5pPr marL="2057400" indent="-228600" algn="l" defTabSz="914400" rtl="0" eaLnBrk="1" latinLnBrk="0" hangingPunct="1">
+              <a:lnSpc>
+                <a:spcPct val="90000"/>
+              </a:lnSpc>
+              <a:spcBef>
+                <a:spcPts val="500"/>
+              </a:spcBef>
+              <a:buFont typeface="Arial" panose="020B0604020202020204" pitchFamily="34" charset="0"/>
+              <a:buChar char="•"/>
+              <a:defRPr sz="1800" kern="1200">
+                <a:solidFill>
+                  <a:schemeClr val="tx1"/>
+                </a:solidFill>
+                <a:latin typeface="+mn-lt"/>
+                <a:ea typeface="+mn-ea"/>
+                <a:cs typeface="+mn-cs"/>
+              </a:defRPr>
+            </a:lvl5pPr>
+            <a:lvl6pPr marL="2514600" indent="-228600" algn="l" defTabSz="914400" rtl="0" eaLnBrk="1" latinLnBrk="0" hangingPunct="1">
+              <a:lnSpc>
+                <a:spcPct val="90000"/>
+              </a:lnSpc>
+              <a:spcBef>
+                <a:spcPts val="500"/>
+              </a:spcBef>
+              <a:buFont typeface="Arial" panose="020B0604020202020204" pitchFamily="34" charset="0"/>
+              <a:buChar char="•"/>
+              <a:defRPr sz="1800" kern="1200">
+                <a:solidFill>
+                  <a:schemeClr val="tx1"/>
+                </a:solidFill>
+                <a:latin typeface="+mn-lt"/>
+                <a:ea typeface="+mn-ea"/>
+                <a:cs typeface="+mn-cs"/>
+              </a:defRPr>
+            </a:lvl6pPr>
+            <a:lvl7pPr marL="2971800" indent="-228600" algn="l" defTabSz="914400" rtl="0" eaLnBrk="1" latinLnBrk="0" hangingPunct="1">
+              <a:lnSpc>
+                <a:spcPct val="90000"/>
+              </a:lnSpc>
+              <a:spcBef>
+                <a:spcPts val="500"/>
+              </a:spcBef>
+              <a:buFont typeface="Arial" panose="020B0604020202020204" pitchFamily="34" charset="0"/>
+              <a:buChar char="•"/>
+              <a:defRPr sz="1800" kern="1200">
+                <a:solidFill>
+                  <a:schemeClr val="tx1"/>
+                </a:solidFill>
+                <a:latin typeface="+mn-lt"/>
+                <a:ea typeface="+mn-ea"/>
+                <a:cs typeface="+mn-cs"/>
+              </a:defRPr>
+            </a:lvl7pPr>
+            <a:lvl8pPr marL="3429000" indent="-228600" algn="l" defTabSz="914400" rtl="0" eaLnBrk="1" latinLnBrk="0" hangingPunct="1">
+              <a:lnSpc>
+                <a:spcPct val="90000"/>
+              </a:lnSpc>
+              <a:spcBef>
+                <a:spcPts val="500"/>
+              </a:spcBef>
+              <a:buFont typeface="Arial" panose="020B0604020202020204" pitchFamily="34" charset="0"/>
+              <a:buChar char="•"/>
+              <a:defRPr sz="1800" kern="1200">
+                <a:solidFill>
+                  <a:schemeClr val="tx1"/>
+                </a:solidFill>
+                <a:latin typeface="+mn-lt"/>
+                <a:ea typeface="+mn-ea"/>
+                <a:cs typeface="+mn-cs"/>
+              </a:defRPr>
+            </a:lvl8pPr>
+            <a:lvl9pPr marL="3886200" indent="-228600" algn="l" defTabSz="914400" rtl="0" eaLnBrk="1" latinLnBrk="0" hangingPunct="1">
+              <a:lnSpc>
+                <a:spcPct val="90000"/>
+              </a:lnSpc>
+              <a:spcBef>
+                <a:spcPts val="500"/>
+              </a:spcBef>
+              <a:buFont typeface="Arial" panose="020B0604020202020204" pitchFamily="34" charset="0"/>
+              <a:buChar char="•"/>
+              <a:defRPr sz="1800" kern="1200">
+                <a:solidFill>
+                  <a:schemeClr val="tx1"/>
+                </a:solidFill>
+                <a:latin typeface="+mn-lt"/>
+                <a:ea typeface="+mn-ea"/>
+                <a:cs typeface="+mn-cs"/>
+              </a:defRPr>
+            </a:lvl9pPr>
+          </a:lstStyle>
+          <a:p>
+            <a:pPr marL="0" indent="0">
+              <a:buFont typeface="Arial" panose="020B0604020202020204" pitchFamily="34" charset="0"/>
+              <a:buNone/>
+            </a:pPr>
+            <a:r>
+              <a:rPr lang="en-CA" dirty="0"/>
+              <a:t>Both flexible policy has a higher median positive change than horizon only in the Pareto improvement scenarios.</a:t>
+            </a:r>
+          </a:p>
+          <a:p>
+            <a:pPr marL="0" indent="0">
+              <a:buFont typeface="Arial" panose="020B0604020202020204" pitchFamily="34" charset="0"/>
+              <a:buNone/>
+            </a:pPr>
+            <a:endParaRPr lang="en-CA" dirty="0"/>
+          </a:p>
+        </p:txBody>
+      </p:sp>
+    </p:spTree>
+    <p:extLst>
+      <p:ext uri="{BB962C8B-B14F-4D97-AF65-F5344CB8AC3E}">
+        <p14:creationId xmlns:p14="http://schemas.microsoft.com/office/powerpoint/2010/main" val="2864209830"/>
       </p:ext>
     </p:extLst>
   </p:cSld>
@@ -10736,7 +13095,7 @@
         </p:nvSpPr>
         <p:spPr>
           <a:xfrm>
-            <a:off x="498834" y="270858"/>
+            <a:off x="364035" y="393305"/>
             <a:ext cx="11693165" cy="982907"/>
           </a:xfrm>
         </p:spPr>
@@ -10767,7 +13126,7 @@
           </p:cNvPicPr>
           <p:nvPr/>
         </p:nvPicPr>
-        <p:blipFill>
+        <p:blipFill rotWithShape="1">
           <a:blip r:embed="rId2">
             <a:extLst>
               <a:ext uri="{28A0092B-C50C-407E-A947-70E740481C1C}">
@@ -10775,14 +13134,13 @@
               </a:ext>
             </a:extLst>
           </a:blip>
-          <a:stretch>
-            <a:fillRect/>
-          </a:stretch>
+          <a:srcRect l="2275" t="3139" r="2784" b="26111"/>
+          <a:stretch/>
         </p:blipFill>
         <p:spPr>
           <a:xfrm>
-            <a:off x="734991" y="1558476"/>
-            <a:ext cx="10984117" cy="5148805"/>
+            <a:off x="0" y="2172305"/>
+            <a:ext cx="12189279" cy="4257913"/>
           </a:xfrm>
           <a:prstGeom prst="rect">
             <a:avLst/>
@@ -10803,7 +13161,7 @@
         </p:nvSpPr>
         <p:spPr>
           <a:xfrm>
-            <a:off x="1158711" y="1146813"/>
+            <a:off x="364035" y="1439764"/>
             <a:ext cx="3168192" cy="523220"/>
           </a:xfrm>
           <a:prstGeom prst="rect">
@@ -10824,6 +13182,41 @@
           </a:p>
         </p:txBody>
       </p:sp>
+      <p:pic>
+        <p:nvPicPr>
+          <p:cNvPr id="6" name="Picture 5">
+            <a:extLst>
+              <a:ext uri="{FF2B5EF4-FFF2-40B4-BE49-F238E27FC236}">
+                <a16:creationId xmlns:a16="http://schemas.microsoft.com/office/drawing/2014/main" id="{BAA43F9F-8A19-4C74-94A2-F82D4CD6AFAE}"/>
+              </a:ext>
+            </a:extLst>
+          </p:cNvPr>
+          <p:cNvPicPr>
+            <a:picLocks noChangeAspect="1"/>
+          </p:cNvPicPr>
+          <p:nvPr/>
+        </p:nvPicPr>
+        <p:blipFill rotWithShape="1">
+          <a:blip r:embed="rId2">
+            <a:extLst>
+              <a:ext uri="{28A0092B-C50C-407E-A947-70E740481C1C}">
+                <a14:useLocalDpi xmlns:a14="http://schemas.microsoft.com/office/drawing/2010/main" val="0"/>
+              </a:ext>
+            </a:extLst>
+          </a:blip>
+          <a:srcRect l="2275" t="80979" r="2784" b="12944"/>
+          <a:stretch/>
+        </p:blipFill>
+        <p:spPr>
+          <a:xfrm>
+            <a:off x="2721" y="6492240"/>
+            <a:ext cx="12189279" cy="365760"/>
+          </a:xfrm>
+          <a:prstGeom prst="rect">
+            <a:avLst/>
+          </a:prstGeom>
+        </p:spPr>
+      </p:pic>
     </p:spTree>
     <p:extLst>
       <p:ext uri="{BB962C8B-B14F-4D97-AF65-F5344CB8AC3E}">
